--- a/output/wordlabs-inform-3day.pptx
+++ b/output/wordlabs-inform-3day.pptx
@@ -4240,7 +4240,7 @@
                 <a:ea typeface="Calibri" pitchFamily="34" charset="-122"/>
                 <a:cs typeface="Calibri" pitchFamily="34" charset="-120"/>
               </a:rPr>
-              <a:t>"to give shape or knowledge"</a:t>
+              <a:t>"to give knowledge or shape"</a:t>
             </a:r>
             <a:endParaRPr lang="en-US" sz="2200" dirty="0"/>
           </a:p>
@@ -5288,7 +5288,7 @@
                 <a:ea typeface="Calibri" pitchFamily="34" charset="-122"/>
                 <a:cs typeface="Calibri" pitchFamily="34" charset="-120"/>
               </a:rPr>
-              <a:t>Word Labs  •  wordlabs.app  •  Root: 'inform' = to give shape or knowledge</a:t>
+              <a:t>Word Labs  •  wordlabs.app  •  Root: 'inform' = to give knowledge or shape</a:t>
             </a:r>
             <a:endParaRPr lang="en-US" sz="800" dirty="0"/>
           </a:p>
@@ -5622,7 +5622,7 @@
                 <a:ea typeface="Trebuchet MS" pitchFamily="34" charset="-122"/>
                 <a:cs typeface="Trebuchet MS" pitchFamily="34" charset="-120"/>
               </a:rPr>
-              <a:t>2</a:t>
+              <a:t>1</a:t>
             </a:r>
             <a:pPr algn="ctr" indent="0" marL="0">
               <a:buNone/>
@@ -5636,7 +5636,7 @@
                 <a:ea typeface="Trebuchet MS" pitchFamily="34" charset="-122"/>
                 <a:cs typeface="Trebuchet MS" pitchFamily="34" charset="-120"/>
               </a:rPr>
-              <a:t>  punctuation marks</a:t>
+              <a:t>  punctuation mark</a:t>
             </a:r>
             <a:endParaRPr lang="en-US" sz="2800" dirty="0"/>
           </a:p>
@@ -5928,7 +5928,7 @@
                 <a:ea typeface="Calibri" pitchFamily="34" charset="-122"/>
                 <a:cs typeface="Calibri" pitchFamily="34" charset="-120"/>
               </a:rPr>
-              <a:t>Word Labs  •  wordlabs.app  •  Root: 'inform' = to give shape or knowledge</a:t>
+              <a:t>Word Labs  •  wordlabs.app  •  Root: 'inform' = to give knowledge or shape</a:t>
             </a:r>
             <a:endParaRPr lang="en-US" sz="800" dirty="0"/>
           </a:p>
@@ -6040,7 +6040,7 @@
                 <a:ea typeface="Calibri" pitchFamily="34" charset="-122"/>
                 <a:cs typeface="Calibri" pitchFamily="34" charset="-120"/>
               </a:rPr>
-              <a:t>Can you </a:t>
+              <a:t>The </a:t>
             </a:r>
             <a:pPr algn="l" indent="0" marL="0">
               <a:buNone/>
@@ -6057,7 +6057,7 @@
                 <a:ea typeface="Calibri" pitchFamily="34" charset="-122"/>
                 <a:cs typeface="Calibri" pitchFamily="34" charset="-120"/>
               </a:rPr>
-              <a:t>inform</a:t>
+              <a:t>informative</a:t>
             </a:r>
             <a:pPr algn="l" indent="0" marL="0">
               <a:buNone/>
@@ -6071,7 +6071,7 @@
                 <a:ea typeface="Calibri" pitchFamily="34" charset="-122"/>
                 <a:cs typeface="Calibri" pitchFamily="34" charset="-120"/>
               </a:rPr>
-              <a:t> the class about your research, because your report is very </a:t>
+              <a:t> brochure helped tourists, who were </a:t>
             </a:r>
             <a:pPr algn="l" indent="0" marL="0">
               <a:buNone/>
@@ -6088,7 +6088,7 @@
                 <a:ea typeface="Calibri" pitchFamily="34" charset="-122"/>
                 <a:cs typeface="Calibri" pitchFamily="34" charset="-120"/>
               </a:rPr>
-              <a:t>informative</a:t>
+              <a:t>uninformed</a:t>
             </a:r>
             <a:pPr algn="l" indent="0" marL="0">
               <a:buNone/>
@@ -6102,7 +6102,7 @@
                 <a:ea typeface="Calibri" pitchFamily="34" charset="-122"/>
                 <a:cs typeface="Calibri" pitchFamily="34" charset="-120"/>
               </a:rPr>
-              <a:t>?</a:t>
+              <a:t> about the local wildlife.</a:t>
             </a:r>
             <a:endParaRPr lang="en-US" sz="1800" dirty="0"/>
           </a:p>
@@ -6257,7 +6257,7 @@
                 <a:ea typeface="Trebuchet MS" pitchFamily="34" charset="-122"/>
                 <a:cs typeface="Trebuchet MS" pitchFamily="34" charset="-120"/>
               </a:rPr>
-              <a:t>inform</a:t>
+              <a:t>informative</a:t>
             </a:r>
             <a:endParaRPr lang="en-US" sz="1400" dirty="0"/>
           </a:p>
@@ -6385,7 +6385,7 @@
                 <a:ea typeface="Trebuchet MS" pitchFamily="34" charset="-122"/>
                 <a:cs typeface="Trebuchet MS" pitchFamily="34" charset="-120"/>
               </a:rPr>
-              <a:t>informative</a:t>
+              <a:t>uninformed</a:t>
             </a:r>
             <a:endParaRPr lang="en-US" sz="1400" dirty="0"/>
           </a:p>
@@ -6716,7 +6716,7 @@
                 <a:ea typeface="Calibri" pitchFamily="34" charset="-122"/>
                 <a:cs typeface="Calibri" pitchFamily="34" charset="-120"/>
               </a:rPr>
-              <a:t>Word Labs  •  wordlabs.app  •  Root: 'inform' = to give shape or knowledge</a:t>
+              <a:t>Word Labs  •  wordlabs.app  •  Root: 'inform' = to give knowledge or shape</a:t>
             </a:r>
             <a:endParaRPr lang="en-US" sz="800" dirty="0"/>
           </a:p>
@@ -6855,7 +6855,7 @@
                 <a:ea typeface="Trebuchet MS" pitchFamily="34" charset="-122"/>
                 <a:cs typeface="Trebuchet MS" pitchFamily="34" charset="-120"/>
               </a:rPr>
-              <a:t>inform</a:t>
+              <a:t>informative</a:t>
             </a:r>
             <a:endParaRPr lang="en-US" sz="2800" dirty="0"/>
           </a:p>
@@ -7543,7 +7543,7 @@
                 <a:ea typeface="Calibri" pitchFamily="34" charset="-122"/>
                 <a:cs typeface="Calibri" pitchFamily="34" charset="-120"/>
               </a:rPr>
-              <a:t>Word Labs  •  wordlabs.app  •  Root: 'inform' = to give shape or knowledge</a:t>
+              <a:t>Word Labs  •  wordlabs.app  •  Root: 'inform' = to give knowledge or shape</a:t>
             </a:r>
             <a:endParaRPr lang="en-US" sz="800" dirty="0"/>
           </a:p>
@@ -7682,7 +7682,7 @@
                 <a:ea typeface="Trebuchet MS" pitchFamily="34" charset="-122"/>
                 <a:cs typeface="Trebuchet MS" pitchFamily="34" charset="-120"/>
               </a:rPr>
-              <a:t>inform</a:t>
+              <a:t>informative</a:t>
             </a:r>
             <a:endParaRPr lang="en-US" sz="2800" dirty="0"/>
           </a:p>
@@ -7762,7 +7762,7 @@
         </p:nvSpPr>
         <p:spPr>
           <a:xfrm>
-            <a:off x="4370832" y="2258568"/>
+            <a:off x="2938272" y="2258568"/>
             <a:ext cx="1828800" cy="292608"/>
           </a:xfrm>
           <a:prstGeom prst="rect">
@@ -7796,7 +7796,7 @@
         </p:nvSpPr>
         <p:spPr>
           <a:xfrm>
-            <a:off x="4370832" y="2258568"/>
+            <a:off x="2938272" y="2258568"/>
             <a:ext cx="1828800" cy="292608"/>
           </a:xfrm>
           <a:prstGeom prst="rect">
@@ -7835,7 +7835,7 @@
         </p:nvSpPr>
         <p:spPr>
           <a:xfrm>
-            <a:off x="4370832" y="2569464"/>
+            <a:off x="2938272" y="2569464"/>
             <a:ext cx="1828800" cy="201168"/>
           </a:xfrm>
           <a:prstGeom prst="rect">
@@ -7860,7 +7860,7 @@
                 <a:ea typeface="Calibri" pitchFamily="34" charset="-122"/>
                 <a:cs typeface="Calibri" pitchFamily="34" charset="-120"/>
               </a:rPr>
-              <a:t>to give knowledge or shape</a:t>
+              <a:t>to give knowledge</a:t>
             </a:r>
             <a:endParaRPr lang="en-US" sz="850" dirty="0"/>
           </a:p>
@@ -7869,6 +7869,118 @@
       <p:sp>
         <p:nvSpPr>
           <p:cNvPr id="19" name="Shape 17"/>
+          <p:cNvSpPr/>
+          <p:nvPr/>
+        </p:nvSpPr>
+        <p:spPr>
+          <a:xfrm>
+            <a:off x="5803392" y="2258568"/>
+            <a:ext cx="1828800" cy="292608"/>
+          </a:xfrm>
+          <a:prstGeom prst="rect">
+            <a:avLst>
+              <a:gd name="adj" fmla="val 25000"/>
+            </a:avLst>
+          </a:prstGeom>
+          <a:solidFill>
+            <a:srgbClr val="FCE7F3"/>
+          </a:solidFill>
+          <a:ln w="19050">
+            <a:solidFill>
+              <a:srgbClr val="DB2777"/>
+            </a:solidFill>
+            <a:prstDash val="solid"/>
+          </a:ln>
+          <a:effectLst>
+            <a:outerShdw sx="100000" sy="100000" kx="0" ky="0" algn="bl" rotWithShape="0" blurRad="101600" dist="38100" dir="8100000">
+              <a:srgbClr val="000000">
+                <a:alpha val="12000"/>
+              </a:srgbClr>
+            </a:outerShdw>
+          </a:effectLst>
+        </p:spPr>
+      </p:sp>
+      <p:sp>
+        <p:nvSpPr>
+          <p:cNvPr id="20" name="Text 18"/>
+          <p:cNvSpPr/>
+          <p:nvPr/>
+        </p:nvSpPr>
+        <p:spPr>
+          <a:xfrm>
+            <a:off x="5803392" y="2258568"/>
+            <a:ext cx="1828800" cy="292608"/>
+          </a:xfrm>
+          <a:prstGeom prst="rect">
+            <a:avLst/>
+          </a:prstGeom>
+          <a:noFill/>
+          <a:ln/>
+        </p:spPr>
+        <p:txBody>
+          <a:bodyPr wrap="square" lIns="0" tIns="0" rIns="0" bIns="0" rtlCol="0" anchor="ctr"/>
+          <a:lstStyle/>
+          <a:p>
+            <a:pPr algn="ctr" indent="0" marL="0">
+              <a:buNone/>
+            </a:pPr>
+            <a:r>
+              <a:rPr lang="en-US" sz="1300" b="1" dirty="0">
+                <a:solidFill>
+                  <a:srgbClr val="9D174D"/>
+                </a:solidFill>
+                <a:latin typeface="Trebuchet MS" pitchFamily="34" charset="0"/>
+                <a:ea typeface="Trebuchet MS" pitchFamily="34" charset="-122"/>
+                <a:cs typeface="Trebuchet MS" pitchFamily="34" charset="-120"/>
+              </a:rPr>
+              <a:t>ative</a:t>
+            </a:r>
+            <a:endParaRPr lang="en-US" sz="1300" dirty="0"/>
+          </a:p>
+        </p:txBody>
+      </p:sp>
+      <p:sp>
+        <p:nvSpPr>
+          <p:cNvPr id="21" name="Text 19"/>
+          <p:cNvSpPr/>
+          <p:nvPr/>
+        </p:nvSpPr>
+        <p:spPr>
+          <a:xfrm>
+            <a:off x="5803392" y="2569464"/>
+            <a:ext cx="1828800" cy="201168"/>
+          </a:xfrm>
+          <a:prstGeom prst="rect">
+            <a:avLst/>
+          </a:prstGeom>
+          <a:noFill/>
+          <a:ln/>
+        </p:spPr>
+        <p:txBody>
+          <a:bodyPr wrap="square" lIns="0" tIns="0" rIns="0" bIns="0" rtlCol="0" anchor="t"/>
+          <a:lstStyle/>
+          <a:p>
+            <a:pPr algn="ctr" indent="0" marL="0">
+              <a:buNone/>
+            </a:pPr>
+            <a:r>
+              <a:rPr lang="en-US" sz="850" dirty="0">
+                <a:solidFill>
+                  <a:srgbClr val="475569"/>
+                </a:solidFill>
+                <a:latin typeface="Calibri" pitchFamily="34" charset="0"/>
+                <a:ea typeface="Calibri" pitchFamily="34" charset="-122"/>
+                <a:cs typeface="Calibri" pitchFamily="34" charset="-120"/>
+              </a:rPr>
+              <a:t>having the quality of</a:t>
+            </a:r>
+            <a:endParaRPr lang="en-US" sz="850" dirty="0"/>
+          </a:p>
+        </p:txBody>
+      </p:sp>
+      <p:sp>
+        <p:nvSpPr>
+          <p:cNvPr id="22" name="Shape 20"/>
           <p:cNvSpPr/>
           <p:nvPr/>
         </p:nvSpPr>
@@ -7895,7 +8007,7 @@
       </p:sp>
       <p:sp>
         <p:nvSpPr>
-          <p:cNvPr id="20" name="Text 18"/>
+          <p:cNvPr id="23" name="Text 21"/>
           <p:cNvSpPr/>
           <p:nvPr/>
         </p:nvSpPr>
@@ -7934,7 +8046,7 @@
       </p:sp>
       <p:sp>
         <p:nvSpPr>
-          <p:cNvPr id="21" name="Shape 19"/>
+          <p:cNvPr id="24" name="Shape 22"/>
           <p:cNvSpPr/>
           <p:nvPr/>
         </p:nvSpPr>
@@ -7961,7 +8073,7 @@
       </p:sp>
       <p:sp>
         <p:nvSpPr>
-          <p:cNvPr id="22" name="Text 20"/>
+          <p:cNvPr id="25" name="Text 23"/>
           <p:cNvSpPr/>
           <p:nvPr/>
         </p:nvSpPr>
@@ -8000,7 +8112,7 @@
       </p:sp>
       <p:sp>
         <p:nvSpPr>
-          <p:cNvPr id="23" name="Shape 21"/>
+          <p:cNvPr id="26" name="Shape 24"/>
           <p:cNvSpPr/>
           <p:nvPr/>
         </p:nvSpPr>
@@ -8027,7 +8139,7 @@
       </p:sp>
       <p:sp>
         <p:nvSpPr>
-          <p:cNvPr id="24" name="Text 22"/>
+          <p:cNvPr id="27" name="Text 25"/>
           <p:cNvSpPr/>
           <p:nvPr/>
         </p:nvSpPr>
@@ -8066,7 +8178,7 @@
       </p:sp>
       <p:sp>
         <p:nvSpPr>
-          <p:cNvPr id="25" name="Shape 23"/>
+          <p:cNvPr id="28" name="Shape 26"/>
           <p:cNvSpPr/>
           <p:nvPr/>
         </p:nvSpPr>
@@ -8093,7 +8205,7 @@
       </p:sp>
       <p:sp>
         <p:nvSpPr>
-          <p:cNvPr id="26" name="Text 24"/>
+          <p:cNvPr id="29" name="Text 27"/>
           <p:cNvSpPr/>
           <p:nvPr/>
         </p:nvSpPr>
@@ -8416,7 +8528,7 @@
                 <a:ea typeface="Calibri" pitchFamily="34" charset="-122"/>
                 <a:cs typeface="Calibri" pitchFamily="34" charset="-120"/>
               </a:rPr>
-              <a:t>Word Labs  •  wordlabs.app  •  Root: 'inform' = to give shape or knowledge</a:t>
+              <a:t>Word Labs  •  wordlabs.app  •  Root: 'inform' = to give knowledge or shape</a:t>
             </a:r>
             <a:endParaRPr lang="en-US" sz="800" dirty="0"/>
           </a:p>
@@ -8555,7 +8667,7 @@
                 <a:ea typeface="Trebuchet MS" pitchFamily="34" charset="-122"/>
                 <a:cs typeface="Trebuchet MS" pitchFamily="34" charset="-120"/>
               </a:rPr>
-              <a:t>inform</a:t>
+              <a:t>informative</a:t>
             </a:r>
             <a:endParaRPr lang="en-US" sz="2800" dirty="0"/>
           </a:p>
@@ -8635,7 +8747,7 @@
         </p:nvSpPr>
         <p:spPr>
           <a:xfrm>
-            <a:off x="4370832" y="2258568"/>
+            <a:off x="2938272" y="2258568"/>
             <a:ext cx="1828800" cy="292608"/>
           </a:xfrm>
           <a:prstGeom prst="rect">
@@ -8669,7 +8781,7 @@
         </p:nvSpPr>
         <p:spPr>
           <a:xfrm>
-            <a:off x="4370832" y="2258568"/>
+            <a:off x="2938272" y="2258568"/>
             <a:ext cx="1828800" cy="292608"/>
           </a:xfrm>
           <a:prstGeom prst="rect">
@@ -8708,7 +8820,7 @@
         </p:nvSpPr>
         <p:spPr>
           <a:xfrm>
-            <a:off x="4370832" y="2569464"/>
+            <a:off x="2938272" y="2569464"/>
             <a:ext cx="1828800" cy="201168"/>
           </a:xfrm>
           <a:prstGeom prst="rect">
@@ -8733,7 +8845,7 @@
                 <a:ea typeface="Calibri" pitchFamily="34" charset="-122"/>
                 <a:cs typeface="Calibri" pitchFamily="34" charset="-120"/>
               </a:rPr>
-              <a:t>to give knowledge or shape</a:t>
+              <a:t>to give knowledge</a:t>
             </a:r>
             <a:endParaRPr lang="en-US" sz="850" dirty="0"/>
           </a:p>
@@ -8742,6 +8854,118 @@
       <p:sp>
         <p:nvSpPr>
           <p:cNvPr id="19" name="Shape 17"/>
+          <p:cNvSpPr/>
+          <p:nvPr/>
+        </p:nvSpPr>
+        <p:spPr>
+          <a:xfrm>
+            <a:off x="5803392" y="2258568"/>
+            <a:ext cx="1828800" cy="292608"/>
+          </a:xfrm>
+          <a:prstGeom prst="rect">
+            <a:avLst>
+              <a:gd name="adj" fmla="val 25000"/>
+            </a:avLst>
+          </a:prstGeom>
+          <a:solidFill>
+            <a:srgbClr val="FCE7F3"/>
+          </a:solidFill>
+          <a:ln w="19050">
+            <a:solidFill>
+              <a:srgbClr val="DB2777"/>
+            </a:solidFill>
+            <a:prstDash val="solid"/>
+          </a:ln>
+          <a:effectLst>
+            <a:outerShdw sx="100000" sy="100000" kx="0" ky="0" algn="bl" rotWithShape="0" blurRad="101600" dist="38100" dir="8100000">
+              <a:srgbClr val="000000">
+                <a:alpha val="12000"/>
+              </a:srgbClr>
+            </a:outerShdw>
+          </a:effectLst>
+        </p:spPr>
+      </p:sp>
+      <p:sp>
+        <p:nvSpPr>
+          <p:cNvPr id="20" name="Text 18"/>
+          <p:cNvSpPr/>
+          <p:nvPr/>
+        </p:nvSpPr>
+        <p:spPr>
+          <a:xfrm>
+            <a:off x="5803392" y="2258568"/>
+            <a:ext cx="1828800" cy="292608"/>
+          </a:xfrm>
+          <a:prstGeom prst="rect">
+            <a:avLst/>
+          </a:prstGeom>
+          <a:noFill/>
+          <a:ln/>
+        </p:spPr>
+        <p:txBody>
+          <a:bodyPr wrap="square" lIns="0" tIns="0" rIns="0" bIns="0" rtlCol="0" anchor="ctr"/>
+          <a:lstStyle/>
+          <a:p>
+            <a:pPr algn="ctr" indent="0" marL="0">
+              <a:buNone/>
+            </a:pPr>
+            <a:r>
+              <a:rPr lang="en-US" sz="1300" b="1" dirty="0">
+                <a:solidFill>
+                  <a:srgbClr val="9D174D"/>
+                </a:solidFill>
+                <a:latin typeface="Trebuchet MS" pitchFamily="34" charset="0"/>
+                <a:ea typeface="Trebuchet MS" pitchFamily="34" charset="-122"/>
+                <a:cs typeface="Trebuchet MS" pitchFamily="34" charset="-120"/>
+              </a:rPr>
+              <a:t>ative</a:t>
+            </a:r>
+            <a:endParaRPr lang="en-US" sz="1300" dirty="0"/>
+          </a:p>
+        </p:txBody>
+      </p:sp>
+      <p:sp>
+        <p:nvSpPr>
+          <p:cNvPr id="21" name="Text 19"/>
+          <p:cNvSpPr/>
+          <p:nvPr/>
+        </p:nvSpPr>
+        <p:spPr>
+          <a:xfrm>
+            <a:off x="5803392" y="2569464"/>
+            <a:ext cx="1828800" cy="201168"/>
+          </a:xfrm>
+          <a:prstGeom prst="rect">
+            <a:avLst/>
+          </a:prstGeom>
+          <a:noFill/>
+          <a:ln/>
+        </p:spPr>
+        <p:txBody>
+          <a:bodyPr wrap="square" lIns="0" tIns="0" rIns="0" bIns="0" rtlCol="0" anchor="t"/>
+          <a:lstStyle/>
+          <a:p>
+            <a:pPr algn="ctr" indent="0" marL="0">
+              <a:buNone/>
+            </a:pPr>
+            <a:r>
+              <a:rPr lang="en-US" sz="850" dirty="0">
+                <a:solidFill>
+                  <a:srgbClr val="475569"/>
+                </a:solidFill>
+                <a:latin typeface="Calibri" pitchFamily="34" charset="0"/>
+                <a:ea typeface="Calibri" pitchFamily="34" charset="-122"/>
+                <a:cs typeface="Calibri" pitchFamily="34" charset="-120"/>
+              </a:rPr>
+              <a:t>having the quality of</a:t>
+            </a:r>
+            <a:endParaRPr lang="en-US" sz="850" dirty="0"/>
+          </a:p>
+        </p:txBody>
+      </p:sp>
+      <p:sp>
+        <p:nvSpPr>
+          <p:cNvPr id="22" name="Shape 20"/>
           <p:cNvSpPr/>
           <p:nvPr/>
         </p:nvSpPr>
@@ -8768,7 +8992,7 @@
       </p:sp>
       <p:sp>
         <p:nvSpPr>
-          <p:cNvPr id="20" name="Text 18"/>
+          <p:cNvPr id="23" name="Text 21"/>
           <p:cNvSpPr/>
           <p:nvPr/>
         </p:nvSpPr>
@@ -8807,7 +9031,7 @@
       </p:sp>
       <p:sp>
         <p:nvSpPr>
-          <p:cNvPr id="21" name="Shape 19"/>
+          <p:cNvPr id="24" name="Shape 22"/>
           <p:cNvSpPr/>
           <p:nvPr/>
         </p:nvSpPr>
@@ -8834,14 +9058,14 @@
       </p:sp>
       <p:sp>
         <p:nvSpPr>
-          <p:cNvPr id="22" name="Shape 20"/>
-          <p:cNvSpPr/>
-          <p:nvPr/>
-        </p:nvSpPr>
-        <p:spPr>
-          <a:xfrm>
-            <a:off x="2999232" y="3364992"/>
-            <a:ext cx="1645920" cy="475488"/>
+          <p:cNvPr id="25" name="Shape 23"/>
+          <p:cNvSpPr/>
+          <p:nvPr/>
+        </p:nvSpPr>
+        <p:spPr>
+          <a:xfrm>
+            <a:off x="1975104" y="3364992"/>
+            <a:ext cx="1554480" cy="475488"/>
           </a:xfrm>
           <a:prstGeom prst="rect">
             <a:avLst>
@@ -8861,14 +9085,14 @@
       </p:sp>
       <p:sp>
         <p:nvSpPr>
-          <p:cNvPr id="23" name="Text 21"/>
-          <p:cNvSpPr/>
-          <p:nvPr/>
-        </p:nvSpPr>
-        <p:spPr>
-          <a:xfrm>
-            <a:off x="2999232" y="3364992"/>
-            <a:ext cx="1645920" cy="475488"/>
+          <p:cNvPr id="26" name="Text 24"/>
+          <p:cNvSpPr/>
+          <p:nvPr/>
+        </p:nvSpPr>
+        <p:spPr>
+          <a:xfrm>
+            <a:off x="1975104" y="3364992"/>
+            <a:ext cx="1554480" cy="475488"/>
           </a:xfrm>
           <a:prstGeom prst="rect">
             <a:avLst/>
@@ -8900,14 +9124,14 @@
       </p:sp>
       <p:sp>
         <p:nvSpPr>
-          <p:cNvPr id="24" name="Text 22"/>
-          <p:cNvSpPr/>
-          <p:nvPr/>
-        </p:nvSpPr>
-        <p:spPr>
-          <a:xfrm>
-            <a:off x="4645152" y="3364992"/>
-            <a:ext cx="1097280" cy="475488"/>
+          <p:cNvPr id="27" name="Text 25"/>
+          <p:cNvSpPr/>
+          <p:nvPr/>
+        </p:nvSpPr>
+        <p:spPr>
+          <a:xfrm>
+            <a:off x="3529584" y="3364992"/>
+            <a:ext cx="73152" cy="475488"/>
           </a:xfrm>
           <a:prstGeom prst="rect">
             <a:avLst/>
@@ -8939,14 +9163,14 @@
       </p:sp>
       <p:sp>
         <p:nvSpPr>
-          <p:cNvPr id="25" name="Shape 23"/>
-          <p:cNvSpPr/>
-          <p:nvPr/>
-        </p:nvSpPr>
-        <p:spPr>
-          <a:xfrm>
-            <a:off x="5742432" y="3364992"/>
-            <a:ext cx="1645920" cy="475488"/>
+          <p:cNvPr id="28" name="Shape 26"/>
+          <p:cNvSpPr/>
+          <p:nvPr/>
+        </p:nvSpPr>
+        <p:spPr>
+          <a:xfrm>
+            <a:off x="3602736" y="3364992"/>
+            <a:ext cx="1554480" cy="475488"/>
           </a:xfrm>
           <a:prstGeom prst="rect">
             <a:avLst>
@@ -8966,14 +9190,14 @@
       </p:sp>
       <p:sp>
         <p:nvSpPr>
-          <p:cNvPr id="26" name="Text 24"/>
-          <p:cNvSpPr/>
-          <p:nvPr/>
-        </p:nvSpPr>
-        <p:spPr>
-          <a:xfrm>
-            <a:off x="5742432" y="3364992"/>
-            <a:ext cx="1645920" cy="475488"/>
+          <p:cNvPr id="29" name="Text 27"/>
+          <p:cNvSpPr/>
+          <p:nvPr/>
+        </p:nvSpPr>
+        <p:spPr>
+          <a:xfrm>
+            <a:off x="3602736" y="3364992"/>
+            <a:ext cx="1554480" cy="475488"/>
           </a:xfrm>
           <a:prstGeom prst="rect">
             <a:avLst/>
@@ -9005,7 +9229,217 @@
       </p:sp>
       <p:sp>
         <p:nvSpPr>
-          <p:cNvPr id="27" name="Shape 25"/>
+          <p:cNvPr id="30" name="Text 28"/>
+          <p:cNvSpPr/>
+          <p:nvPr/>
+        </p:nvSpPr>
+        <p:spPr>
+          <a:xfrm>
+            <a:off x="5157216" y="3364992"/>
+            <a:ext cx="73152" cy="475488"/>
+          </a:xfrm>
+          <a:prstGeom prst="rect">
+            <a:avLst/>
+          </a:prstGeom>
+          <a:noFill/>
+          <a:ln/>
+        </p:spPr>
+        <p:txBody>
+          <a:bodyPr wrap="square" lIns="0" tIns="0" rIns="0" bIns="0" rtlCol="0" anchor="ctr"/>
+          <a:lstStyle/>
+          <a:p>
+            <a:pPr algn="ctr" indent="0" marL="0">
+              <a:buNone/>
+            </a:pPr>
+            <a:r>
+              <a:rPr lang="en-US" sz="1600" b="1" dirty="0">
+                <a:solidFill>
+                  <a:srgbClr val="0D9488"/>
+                </a:solidFill>
+                <a:latin typeface="Trebuchet MS" pitchFamily="34" charset="0"/>
+                <a:ea typeface="Trebuchet MS" pitchFamily="34" charset="-122"/>
+                <a:cs typeface="Trebuchet MS" pitchFamily="34" charset="-120"/>
+              </a:rPr>
+              <a:t>·</a:t>
+            </a:r>
+            <a:endParaRPr lang="en-US" sz="1600" dirty="0"/>
+          </a:p>
+        </p:txBody>
+      </p:sp>
+      <p:sp>
+        <p:nvSpPr>
+          <p:cNvPr id="31" name="Shape 29"/>
+          <p:cNvSpPr/>
+          <p:nvPr/>
+        </p:nvSpPr>
+        <p:spPr>
+          <a:xfrm>
+            <a:off x="5230368" y="3364992"/>
+            <a:ext cx="1554480" cy="475488"/>
+          </a:xfrm>
+          <a:prstGeom prst="rect">
+            <a:avLst>
+              <a:gd name="adj" fmla="val 9615"/>
+            </a:avLst>
+          </a:prstGeom>
+          <a:solidFill>
+            <a:srgbClr val="FFFFFF"/>
+          </a:solidFill>
+          <a:ln w="12700">
+            <a:solidFill>
+              <a:srgbClr val="0D9488"/>
+            </a:solidFill>
+            <a:prstDash val="solid"/>
+          </a:ln>
+        </p:spPr>
+      </p:sp>
+      <p:sp>
+        <p:nvSpPr>
+          <p:cNvPr id="32" name="Text 30"/>
+          <p:cNvSpPr/>
+          <p:nvPr/>
+        </p:nvSpPr>
+        <p:spPr>
+          <a:xfrm>
+            <a:off x="5230368" y="3364992"/>
+            <a:ext cx="1554480" cy="475488"/>
+          </a:xfrm>
+          <a:prstGeom prst="rect">
+            <a:avLst/>
+          </a:prstGeom>
+          <a:noFill/>
+          <a:ln/>
+        </p:spPr>
+        <p:txBody>
+          <a:bodyPr wrap="square" lIns="0" tIns="0" rIns="0" bIns="0" rtlCol="0" anchor="ctr"/>
+          <a:lstStyle/>
+          <a:p>
+            <a:pPr algn="ctr" indent="0" marL="0">
+              <a:buNone/>
+            </a:pPr>
+            <a:r>
+              <a:rPr lang="en-US" sz="1400" b="1" dirty="0">
+                <a:solidFill>
+                  <a:srgbClr val="0D9488"/>
+                </a:solidFill>
+                <a:latin typeface="Trebuchet MS" pitchFamily="34" charset="0"/>
+                <a:ea typeface="Trebuchet MS" pitchFamily="34" charset="-122"/>
+                <a:cs typeface="Trebuchet MS" pitchFamily="34" charset="-120"/>
+              </a:rPr>
+              <a:t>a</a:t>
+            </a:r>
+            <a:endParaRPr lang="en-US" sz="1400" dirty="0"/>
+          </a:p>
+        </p:txBody>
+      </p:sp>
+      <p:sp>
+        <p:nvSpPr>
+          <p:cNvPr id="33" name="Text 31"/>
+          <p:cNvSpPr/>
+          <p:nvPr/>
+        </p:nvSpPr>
+        <p:spPr>
+          <a:xfrm>
+            <a:off x="6784848" y="3364992"/>
+            <a:ext cx="73152" cy="475488"/>
+          </a:xfrm>
+          <a:prstGeom prst="rect">
+            <a:avLst/>
+          </a:prstGeom>
+          <a:noFill/>
+          <a:ln/>
+        </p:spPr>
+        <p:txBody>
+          <a:bodyPr wrap="square" lIns="0" tIns="0" rIns="0" bIns="0" rtlCol="0" anchor="ctr"/>
+          <a:lstStyle/>
+          <a:p>
+            <a:pPr algn="ctr" indent="0" marL="0">
+              <a:buNone/>
+            </a:pPr>
+            <a:r>
+              <a:rPr lang="en-US" sz="1600" b="1" dirty="0">
+                <a:solidFill>
+                  <a:srgbClr val="0D9488"/>
+                </a:solidFill>
+                <a:latin typeface="Trebuchet MS" pitchFamily="34" charset="0"/>
+                <a:ea typeface="Trebuchet MS" pitchFamily="34" charset="-122"/>
+                <a:cs typeface="Trebuchet MS" pitchFamily="34" charset="-120"/>
+              </a:rPr>
+              <a:t>·</a:t>
+            </a:r>
+            <a:endParaRPr lang="en-US" sz="1600" dirty="0"/>
+          </a:p>
+        </p:txBody>
+      </p:sp>
+      <p:sp>
+        <p:nvSpPr>
+          <p:cNvPr id="34" name="Shape 32"/>
+          <p:cNvSpPr/>
+          <p:nvPr/>
+        </p:nvSpPr>
+        <p:spPr>
+          <a:xfrm>
+            <a:off x="6858000" y="3364992"/>
+            <a:ext cx="1554480" cy="475488"/>
+          </a:xfrm>
+          <a:prstGeom prst="rect">
+            <a:avLst>
+              <a:gd name="adj" fmla="val 9615"/>
+            </a:avLst>
+          </a:prstGeom>
+          <a:solidFill>
+            <a:srgbClr val="FFFFFF"/>
+          </a:solidFill>
+          <a:ln w="12700">
+            <a:solidFill>
+              <a:srgbClr val="0D9488"/>
+            </a:solidFill>
+            <a:prstDash val="solid"/>
+          </a:ln>
+        </p:spPr>
+      </p:sp>
+      <p:sp>
+        <p:nvSpPr>
+          <p:cNvPr id="35" name="Text 33"/>
+          <p:cNvSpPr/>
+          <p:nvPr/>
+        </p:nvSpPr>
+        <p:spPr>
+          <a:xfrm>
+            <a:off x="6858000" y="3364992"/>
+            <a:ext cx="1554480" cy="475488"/>
+          </a:xfrm>
+          <a:prstGeom prst="rect">
+            <a:avLst/>
+          </a:prstGeom>
+          <a:noFill/>
+          <a:ln/>
+        </p:spPr>
+        <p:txBody>
+          <a:bodyPr wrap="square" lIns="0" tIns="0" rIns="0" bIns="0" rtlCol="0" anchor="ctr"/>
+          <a:lstStyle/>
+          <a:p>
+            <a:pPr algn="ctr" indent="0" marL="0">
+              <a:buNone/>
+            </a:pPr>
+            <a:r>
+              <a:rPr lang="en-US" sz="1400" b="1" dirty="0">
+                <a:solidFill>
+                  <a:srgbClr val="0D9488"/>
+                </a:solidFill>
+                <a:latin typeface="Trebuchet MS" pitchFamily="34" charset="0"/>
+                <a:ea typeface="Trebuchet MS" pitchFamily="34" charset="-122"/>
+                <a:cs typeface="Trebuchet MS" pitchFamily="34" charset="-120"/>
+              </a:rPr>
+              <a:t>tive</a:t>
+            </a:r>
+            <a:endParaRPr lang="en-US" sz="1400" dirty="0"/>
+          </a:p>
+        </p:txBody>
+      </p:sp>
+      <p:sp>
+        <p:nvSpPr>
+          <p:cNvPr id="36" name="Shape 34"/>
           <p:cNvSpPr/>
           <p:nvPr/>
         </p:nvSpPr>
@@ -9032,7 +9466,7 @@
       </p:sp>
       <p:sp>
         <p:nvSpPr>
-          <p:cNvPr id="28" name="Text 26"/>
+          <p:cNvPr id="37" name="Text 35"/>
           <p:cNvSpPr/>
           <p:nvPr/>
         </p:nvSpPr>
@@ -9071,7 +9505,7 @@
       </p:sp>
       <p:sp>
         <p:nvSpPr>
-          <p:cNvPr id="29" name="Shape 27"/>
+          <p:cNvPr id="38" name="Shape 36"/>
           <p:cNvSpPr/>
           <p:nvPr/>
         </p:nvSpPr>
@@ -9098,7 +9532,7 @@
       </p:sp>
       <p:sp>
         <p:nvSpPr>
-          <p:cNvPr id="30" name="Text 28"/>
+          <p:cNvPr id="39" name="Text 37"/>
           <p:cNvSpPr/>
           <p:nvPr/>
         </p:nvSpPr>
@@ -9421,7 +9855,7 @@
                 <a:ea typeface="Calibri" pitchFamily="34" charset="-122"/>
                 <a:cs typeface="Calibri" pitchFamily="34" charset="-120"/>
               </a:rPr>
-              <a:t>Word Labs  •  wordlabs.app  •  Root: 'inform' = to give shape or knowledge</a:t>
+              <a:t>Word Labs  •  wordlabs.app  •  Root: 'inform' = to give knowledge or shape</a:t>
             </a:r>
             <a:endParaRPr lang="en-US" sz="800" dirty="0"/>
           </a:p>
@@ -9560,7 +9994,7 @@
                 <a:ea typeface="Trebuchet MS" pitchFamily="34" charset="-122"/>
                 <a:cs typeface="Trebuchet MS" pitchFamily="34" charset="-120"/>
               </a:rPr>
-              <a:t>inform</a:t>
+              <a:t>informative</a:t>
             </a:r>
             <a:endParaRPr lang="en-US" sz="2800" dirty="0"/>
           </a:p>
@@ -9640,7 +10074,7 @@
         </p:nvSpPr>
         <p:spPr>
           <a:xfrm>
-            <a:off x="4370832" y="2258568"/>
+            <a:off x="2938272" y="2258568"/>
             <a:ext cx="1828800" cy="292608"/>
           </a:xfrm>
           <a:prstGeom prst="rect">
@@ -9674,7 +10108,7 @@
         </p:nvSpPr>
         <p:spPr>
           <a:xfrm>
-            <a:off x="4370832" y="2258568"/>
+            <a:off x="2938272" y="2258568"/>
             <a:ext cx="1828800" cy="292608"/>
           </a:xfrm>
           <a:prstGeom prst="rect">
@@ -9713,7 +10147,7 @@
         </p:nvSpPr>
         <p:spPr>
           <a:xfrm>
-            <a:off x="4370832" y="2569464"/>
+            <a:off x="2938272" y="2569464"/>
             <a:ext cx="1828800" cy="201168"/>
           </a:xfrm>
           <a:prstGeom prst="rect">
@@ -9738,7 +10172,7 @@
                 <a:ea typeface="Calibri" pitchFamily="34" charset="-122"/>
                 <a:cs typeface="Calibri" pitchFamily="34" charset="-120"/>
               </a:rPr>
-              <a:t>to give knowledge or shape</a:t>
+              <a:t>to give knowledge</a:t>
             </a:r>
             <a:endParaRPr lang="en-US" sz="850" dirty="0"/>
           </a:p>
@@ -9747,6 +10181,118 @@
       <p:sp>
         <p:nvSpPr>
           <p:cNvPr id="19" name="Shape 17"/>
+          <p:cNvSpPr/>
+          <p:nvPr/>
+        </p:nvSpPr>
+        <p:spPr>
+          <a:xfrm>
+            <a:off x="5803392" y="2258568"/>
+            <a:ext cx="1828800" cy="292608"/>
+          </a:xfrm>
+          <a:prstGeom prst="rect">
+            <a:avLst>
+              <a:gd name="adj" fmla="val 25000"/>
+            </a:avLst>
+          </a:prstGeom>
+          <a:solidFill>
+            <a:srgbClr val="FCE7F3"/>
+          </a:solidFill>
+          <a:ln w="19050">
+            <a:solidFill>
+              <a:srgbClr val="DB2777"/>
+            </a:solidFill>
+            <a:prstDash val="solid"/>
+          </a:ln>
+          <a:effectLst>
+            <a:outerShdw sx="100000" sy="100000" kx="0" ky="0" algn="bl" rotWithShape="0" blurRad="101600" dist="38100" dir="8100000">
+              <a:srgbClr val="000000">
+                <a:alpha val="12000"/>
+              </a:srgbClr>
+            </a:outerShdw>
+          </a:effectLst>
+        </p:spPr>
+      </p:sp>
+      <p:sp>
+        <p:nvSpPr>
+          <p:cNvPr id="20" name="Text 18"/>
+          <p:cNvSpPr/>
+          <p:nvPr/>
+        </p:nvSpPr>
+        <p:spPr>
+          <a:xfrm>
+            <a:off x="5803392" y="2258568"/>
+            <a:ext cx="1828800" cy="292608"/>
+          </a:xfrm>
+          <a:prstGeom prst="rect">
+            <a:avLst/>
+          </a:prstGeom>
+          <a:noFill/>
+          <a:ln/>
+        </p:spPr>
+        <p:txBody>
+          <a:bodyPr wrap="square" lIns="0" tIns="0" rIns="0" bIns="0" rtlCol="0" anchor="ctr"/>
+          <a:lstStyle/>
+          <a:p>
+            <a:pPr algn="ctr" indent="0" marL="0">
+              <a:buNone/>
+            </a:pPr>
+            <a:r>
+              <a:rPr lang="en-US" sz="1300" b="1" dirty="0">
+                <a:solidFill>
+                  <a:srgbClr val="9D174D"/>
+                </a:solidFill>
+                <a:latin typeface="Trebuchet MS" pitchFamily="34" charset="0"/>
+                <a:ea typeface="Trebuchet MS" pitchFamily="34" charset="-122"/>
+                <a:cs typeface="Trebuchet MS" pitchFamily="34" charset="-120"/>
+              </a:rPr>
+              <a:t>ative</a:t>
+            </a:r>
+            <a:endParaRPr lang="en-US" sz="1300" dirty="0"/>
+          </a:p>
+        </p:txBody>
+      </p:sp>
+      <p:sp>
+        <p:nvSpPr>
+          <p:cNvPr id="21" name="Text 19"/>
+          <p:cNvSpPr/>
+          <p:nvPr/>
+        </p:nvSpPr>
+        <p:spPr>
+          <a:xfrm>
+            <a:off x="5803392" y="2569464"/>
+            <a:ext cx="1828800" cy="201168"/>
+          </a:xfrm>
+          <a:prstGeom prst="rect">
+            <a:avLst/>
+          </a:prstGeom>
+          <a:noFill/>
+          <a:ln/>
+        </p:spPr>
+        <p:txBody>
+          <a:bodyPr wrap="square" lIns="0" tIns="0" rIns="0" bIns="0" rtlCol="0" anchor="t"/>
+          <a:lstStyle/>
+          <a:p>
+            <a:pPr algn="ctr" indent="0" marL="0">
+              <a:buNone/>
+            </a:pPr>
+            <a:r>
+              <a:rPr lang="en-US" sz="850" dirty="0">
+                <a:solidFill>
+                  <a:srgbClr val="475569"/>
+                </a:solidFill>
+                <a:latin typeface="Calibri" pitchFamily="34" charset="0"/>
+                <a:ea typeface="Calibri" pitchFamily="34" charset="-122"/>
+                <a:cs typeface="Calibri" pitchFamily="34" charset="-120"/>
+              </a:rPr>
+              <a:t>having the quality of</a:t>
+            </a:r>
+            <a:endParaRPr lang="en-US" sz="850" dirty="0"/>
+          </a:p>
+        </p:txBody>
+      </p:sp>
+      <p:sp>
+        <p:nvSpPr>
+          <p:cNvPr id="22" name="Shape 20"/>
           <p:cNvSpPr/>
           <p:nvPr/>
         </p:nvSpPr>
@@ -9773,7 +10319,7 @@
       </p:sp>
       <p:sp>
         <p:nvSpPr>
-          <p:cNvPr id="20" name="Text 18"/>
+          <p:cNvPr id="23" name="Text 21"/>
           <p:cNvSpPr/>
           <p:nvPr/>
         </p:nvSpPr>
@@ -9812,7 +10358,7 @@
       </p:sp>
       <p:sp>
         <p:nvSpPr>
-          <p:cNvPr id="21" name="Shape 19"/>
+          <p:cNvPr id="24" name="Shape 22"/>
           <p:cNvSpPr/>
           <p:nvPr/>
         </p:nvSpPr>
@@ -9839,14 +10385,14 @@
       </p:sp>
       <p:sp>
         <p:nvSpPr>
-          <p:cNvPr id="22" name="Shape 20"/>
-          <p:cNvSpPr/>
-          <p:nvPr/>
-        </p:nvSpPr>
-        <p:spPr>
-          <a:xfrm>
-            <a:off x="2999232" y="3364992"/>
-            <a:ext cx="1645920" cy="475488"/>
+          <p:cNvPr id="25" name="Shape 23"/>
+          <p:cNvSpPr/>
+          <p:nvPr/>
+        </p:nvSpPr>
+        <p:spPr>
+          <a:xfrm>
+            <a:off x="1975104" y="3364992"/>
+            <a:ext cx="1554480" cy="475488"/>
           </a:xfrm>
           <a:prstGeom prst="rect">
             <a:avLst>
@@ -9866,14 +10412,14 @@
       </p:sp>
       <p:sp>
         <p:nvSpPr>
-          <p:cNvPr id="23" name="Text 21"/>
-          <p:cNvSpPr/>
-          <p:nvPr/>
-        </p:nvSpPr>
-        <p:spPr>
-          <a:xfrm>
-            <a:off x="2999232" y="3364992"/>
-            <a:ext cx="1645920" cy="475488"/>
+          <p:cNvPr id="26" name="Text 24"/>
+          <p:cNvSpPr/>
+          <p:nvPr/>
+        </p:nvSpPr>
+        <p:spPr>
+          <a:xfrm>
+            <a:off x="1975104" y="3364992"/>
+            <a:ext cx="1554480" cy="475488"/>
           </a:xfrm>
           <a:prstGeom prst="rect">
             <a:avLst/>
@@ -9905,14 +10451,14 @@
       </p:sp>
       <p:sp>
         <p:nvSpPr>
-          <p:cNvPr id="24" name="Text 22"/>
-          <p:cNvSpPr/>
-          <p:nvPr/>
-        </p:nvSpPr>
-        <p:spPr>
-          <a:xfrm>
-            <a:off x="4645152" y="3364992"/>
-            <a:ext cx="1097280" cy="475488"/>
+          <p:cNvPr id="27" name="Text 25"/>
+          <p:cNvSpPr/>
+          <p:nvPr/>
+        </p:nvSpPr>
+        <p:spPr>
+          <a:xfrm>
+            <a:off x="3529584" y="3364992"/>
+            <a:ext cx="73152" cy="475488"/>
           </a:xfrm>
           <a:prstGeom prst="rect">
             <a:avLst/>
@@ -9944,14 +10490,14 @@
       </p:sp>
       <p:sp>
         <p:nvSpPr>
-          <p:cNvPr id="25" name="Shape 23"/>
-          <p:cNvSpPr/>
-          <p:nvPr/>
-        </p:nvSpPr>
-        <p:spPr>
-          <a:xfrm>
-            <a:off x="5742432" y="3364992"/>
-            <a:ext cx="1645920" cy="475488"/>
+          <p:cNvPr id="28" name="Shape 26"/>
+          <p:cNvSpPr/>
+          <p:nvPr/>
+        </p:nvSpPr>
+        <p:spPr>
+          <a:xfrm>
+            <a:off x="3602736" y="3364992"/>
+            <a:ext cx="1554480" cy="475488"/>
           </a:xfrm>
           <a:prstGeom prst="rect">
             <a:avLst>
@@ -9971,14 +10517,14 @@
       </p:sp>
       <p:sp>
         <p:nvSpPr>
-          <p:cNvPr id="26" name="Text 24"/>
-          <p:cNvSpPr/>
-          <p:nvPr/>
-        </p:nvSpPr>
-        <p:spPr>
-          <a:xfrm>
-            <a:off x="5742432" y="3364992"/>
-            <a:ext cx="1645920" cy="475488"/>
+          <p:cNvPr id="29" name="Text 27"/>
+          <p:cNvSpPr/>
+          <p:nvPr/>
+        </p:nvSpPr>
+        <p:spPr>
+          <a:xfrm>
+            <a:off x="3602736" y="3364992"/>
+            <a:ext cx="1554480" cy="475488"/>
           </a:xfrm>
           <a:prstGeom prst="rect">
             <a:avLst/>
@@ -10010,7 +10556,217 @@
       </p:sp>
       <p:sp>
         <p:nvSpPr>
-          <p:cNvPr id="27" name="Shape 25"/>
+          <p:cNvPr id="30" name="Text 28"/>
+          <p:cNvSpPr/>
+          <p:nvPr/>
+        </p:nvSpPr>
+        <p:spPr>
+          <a:xfrm>
+            <a:off x="5157216" y="3364992"/>
+            <a:ext cx="73152" cy="475488"/>
+          </a:xfrm>
+          <a:prstGeom prst="rect">
+            <a:avLst/>
+          </a:prstGeom>
+          <a:noFill/>
+          <a:ln/>
+        </p:spPr>
+        <p:txBody>
+          <a:bodyPr wrap="square" lIns="0" tIns="0" rIns="0" bIns="0" rtlCol="0" anchor="ctr"/>
+          <a:lstStyle/>
+          <a:p>
+            <a:pPr algn="ctr" indent="0" marL="0">
+              <a:buNone/>
+            </a:pPr>
+            <a:r>
+              <a:rPr lang="en-US" sz="1600" b="1" dirty="0">
+                <a:solidFill>
+                  <a:srgbClr val="0D9488"/>
+                </a:solidFill>
+                <a:latin typeface="Trebuchet MS" pitchFamily="34" charset="0"/>
+                <a:ea typeface="Trebuchet MS" pitchFamily="34" charset="-122"/>
+                <a:cs typeface="Trebuchet MS" pitchFamily="34" charset="-120"/>
+              </a:rPr>
+              <a:t>·</a:t>
+            </a:r>
+            <a:endParaRPr lang="en-US" sz="1600" dirty="0"/>
+          </a:p>
+        </p:txBody>
+      </p:sp>
+      <p:sp>
+        <p:nvSpPr>
+          <p:cNvPr id="31" name="Shape 29"/>
+          <p:cNvSpPr/>
+          <p:nvPr/>
+        </p:nvSpPr>
+        <p:spPr>
+          <a:xfrm>
+            <a:off x="5230368" y="3364992"/>
+            <a:ext cx="1554480" cy="475488"/>
+          </a:xfrm>
+          <a:prstGeom prst="rect">
+            <a:avLst>
+              <a:gd name="adj" fmla="val 9615"/>
+            </a:avLst>
+          </a:prstGeom>
+          <a:solidFill>
+            <a:srgbClr val="FFFFFF"/>
+          </a:solidFill>
+          <a:ln w="12700">
+            <a:solidFill>
+              <a:srgbClr val="0D9488"/>
+            </a:solidFill>
+            <a:prstDash val="solid"/>
+          </a:ln>
+        </p:spPr>
+      </p:sp>
+      <p:sp>
+        <p:nvSpPr>
+          <p:cNvPr id="32" name="Text 30"/>
+          <p:cNvSpPr/>
+          <p:nvPr/>
+        </p:nvSpPr>
+        <p:spPr>
+          <a:xfrm>
+            <a:off x="5230368" y="3364992"/>
+            <a:ext cx="1554480" cy="475488"/>
+          </a:xfrm>
+          <a:prstGeom prst="rect">
+            <a:avLst/>
+          </a:prstGeom>
+          <a:noFill/>
+          <a:ln/>
+        </p:spPr>
+        <p:txBody>
+          <a:bodyPr wrap="square" lIns="0" tIns="0" rIns="0" bIns="0" rtlCol="0" anchor="ctr"/>
+          <a:lstStyle/>
+          <a:p>
+            <a:pPr algn="ctr" indent="0" marL="0">
+              <a:buNone/>
+            </a:pPr>
+            <a:r>
+              <a:rPr lang="en-US" sz="1400" b="1" dirty="0">
+                <a:solidFill>
+                  <a:srgbClr val="0D9488"/>
+                </a:solidFill>
+                <a:latin typeface="Trebuchet MS" pitchFamily="34" charset="0"/>
+                <a:ea typeface="Trebuchet MS" pitchFamily="34" charset="-122"/>
+                <a:cs typeface="Trebuchet MS" pitchFamily="34" charset="-120"/>
+              </a:rPr>
+              <a:t>a</a:t>
+            </a:r>
+            <a:endParaRPr lang="en-US" sz="1400" dirty="0"/>
+          </a:p>
+        </p:txBody>
+      </p:sp>
+      <p:sp>
+        <p:nvSpPr>
+          <p:cNvPr id="33" name="Text 31"/>
+          <p:cNvSpPr/>
+          <p:nvPr/>
+        </p:nvSpPr>
+        <p:spPr>
+          <a:xfrm>
+            <a:off x="6784848" y="3364992"/>
+            <a:ext cx="73152" cy="475488"/>
+          </a:xfrm>
+          <a:prstGeom prst="rect">
+            <a:avLst/>
+          </a:prstGeom>
+          <a:noFill/>
+          <a:ln/>
+        </p:spPr>
+        <p:txBody>
+          <a:bodyPr wrap="square" lIns="0" tIns="0" rIns="0" bIns="0" rtlCol="0" anchor="ctr"/>
+          <a:lstStyle/>
+          <a:p>
+            <a:pPr algn="ctr" indent="0" marL="0">
+              <a:buNone/>
+            </a:pPr>
+            <a:r>
+              <a:rPr lang="en-US" sz="1600" b="1" dirty="0">
+                <a:solidFill>
+                  <a:srgbClr val="0D9488"/>
+                </a:solidFill>
+                <a:latin typeface="Trebuchet MS" pitchFamily="34" charset="0"/>
+                <a:ea typeface="Trebuchet MS" pitchFamily="34" charset="-122"/>
+                <a:cs typeface="Trebuchet MS" pitchFamily="34" charset="-120"/>
+              </a:rPr>
+              <a:t>·</a:t>
+            </a:r>
+            <a:endParaRPr lang="en-US" sz="1600" dirty="0"/>
+          </a:p>
+        </p:txBody>
+      </p:sp>
+      <p:sp>
+        <p:nvSpPr>
+          <p:cNvPr id="34" name="Shape 32"/>
+          <p:cNvSpPr/>
+          <p:nvPr/>
+        </p:nvSpPr>
+        <p:spPr>
+          <a:xfrm>
+            <a:off x="6858000" y="3364992"/>
+            <a:ext cx="1554480" cy="475488"/>
+          </a:xfrm>
+          <a:prstGeom prst="rect">
+            <a:avLst>
+              <a:gd name="adj" fmla="val 9615"/>
+            </a:avLst>
+          </a:prstGeom>
+          <a:solidFill>
+            <a:srgbClr val="FFFFFF"/>
+          </a:solidFill>
+          <a:ln w="12700">
+            <a:solidFill>
+              <a:srgbClr val="0D9488"/>
+            </a:solidFill>
+            <a:prstDash val="solid"/>
+          </a:ln>
+        </p:spPr>
+      </p:sp>
+      <p:sp>
+        <p:nvSpPr>
+          <p:cNvPr id="35" name="Text 33"/>
+          <p:cNvSpPr/>
+          <p:nvPr/>
+        </p:nvSpPr>
+        <p:spPr>
+          <a:xfrm>
+            <a:off x="6858000" y="3364992"/>
+            <a:ext cx="1554480" cy="475488"/>
+          </a:xfrm>
+          <a:prstGeom prst="rect">
+            <a:avLst/>
+          </a:prstGeom>
+          <a:noFill/>
+          <a:ln/>
+        </p:spPr>
+        <p:txBody>
+          <a:bodyPr wrap="square" lIns="0" tIns="0" rIns="0" bIns="0" rtlCol="0" anchor="ctr"/>
+          <a:lstStyle/>
+          <a:p>
+            <a:pPr algn="ctr" indent="0" marL="0">
+              <a:buNone/>
+            </a:pPr>
+            <a:r>
+              <a:rPr lang="en-US" sz="1400" b="1" dirty="0">
+                <a:solidFill>
+                  <a:srgbClr val="0D9488"/>
+                </a:solidFill>
+                <a:latin typeface="Trebuchet MS" pitchFamily="34" charset="0"/>
+                <a:ea typeface="Trebuchet MS" pitchFamily="34" charset="-122"/>
+                <a:cs typeface="Trebuchet MS" pitchFamily="34" charset="-120"/>
+              </a:rPr>
+              <a:t>tive</a:t>
+            </a:r>
+            <a:endParaRPr lang="en-US" sz="1400" dirty="0"/>
+          </a:p>
+        </p:txBody>
+      </p:sp>
+      <p:sp>
+        <p:nvSpPr>
+          <p:cNvPr id="36" name="Shape 34"/>
           <p:cNvSpPr/>
           <p:nvPr/>
         </p:nvSpPr>
@@ -10037,7 +10793,7 @@
       </p:sp>
       <p:sp>
         <p:nvSpPr>
-          <p:cNvPr id="28" name="Text 26"/>
+          <p:cNvPr id="37" name="Text 35"/>
           <p:cNvSpPr/>
           <p:nvPr/>
         </p:nvSpPr>
@@ -10076,7 +10832,7 @@
       </p:sp>
       <p:sp>
         <p:nvSpPr>
-          <p:cNvPr id="29" name="Shape 27"/>
+          <p:cNvPr id="38" name="Shape 36"/>
           <p:cNvSpPr/>
           <p:nvPr/>
         </p:nvSpPr>
@@ -10103,14 +10859,14 @@
       </p:sp>
       <p:sp>
         <p:nvSpPr>
-          <p:cNvPr id="30" name="Shape 28"/>
-          <p:cNvSpPr/>
-          <p:nvPr/>
-        </p:nvSpPr>
-        <p:spPr>
-          <a:xfrm>
-            <a:off x="2427732" y="4169664"/>
-            <a:ext cx="685800" cy="475488"/>
+          <p:cNvPr id="39" name="Shape 37"/>
+          <p:cNvSpPr/>
+          <p:nvPr/>
+        </p:nvSpPr>
+        <p:spPr>
+          <a:xfrm>
+            <a:off x="1951828" y="4169664"/>
+            <a:ext cx="603504" cy="475488"/>
           </a:xfrm>
           <a:prstGeom prst="rect">
             <a:avLst>
@@ -10130,14 +10886,14 @@
       </p:sp>
       <p:sp>
         <p:nvSpPr>
-          <p:cNvPr id="31" name="Text 29"/>
-          <p:cNvSpPr/>
-          <p:nvPr/>
-        </p:nvSpPr>
-        <p:spPr>
-          <a:xfrm>
-            <a:off x="2427732" y="4169664"/>
-            <a:ext cx="685800" cy="475488"/>
+          <p:cNvPr id="40" name="Text 38"/>
+          <p:cNvSpPr/>
+          <p:nvPr/>
+        </p:nvSpPr>
+        <p:spPr>
+          <a:xfrm>
+            <a:off x="1951828" y="4169664"/>
+            <a:ext cx="603504" cy="475488"/>
           </a:xfrm>
           <a:prstGeom prst="rect">
             <a:avLst/>
@@ -10169,14 +10925,14 @@
       </p:sp>
       <p:sp>
         <p:nvSpPr>
-          <p:cNvPr id="32" name="Shape 30"/>
-          <p:cNvSpPr/>
-          <p:nvPr/>
-        </p:nvSpPr>
-        <p:spPr>
-          <a:xfrm>
-            <a:off x="3639312" y="4169664"/>
-            <a:ext cx="685800" cy="475488"/>
+          <p:cNvPr id="41" name="Shape 39"/>
+          <p:cNvSpPr/>
+          <p:nvPr/>
+        </p:nvSpPr>
+        <p:spPr>
+          <a:xfrm>
+            <a:off x="2605209" y="4169664"/>
+            <a:ext cx="603504" cy="475488"/>
           </a:xfrm>
           <a:prstGeom prst="rect">
             <a:avLst>
@@ -10196,14 +10952,14 @@
       </p:sp>
       <p:sp>
         <p:nvSpPr>
-          <p:cNvPr id="33" name="Text 31"/>
-          <p:cNvSpPr/>
-          <p:nvPr/>
-        </p:nvSpPr>
-        <p:spPr>
-          <a:xfrm>
-            <a:off x="3639312" y="4169664"/>
-            <a:ext cx="685800" cy="475488"/>
+          <p:cNvPr id="42" name="Text 40"/>
+          <p:cNvSpPr/>
+          <p:nvPr/>
+        </p:nvSpPr>
+        <p:spPr>
+          <a:xfrm>
+            <a:off x="2605209" y="4169664"/>
+            <a:ext cx="603504" cy="475488"/>
           </a:xfrm>
           <a:prstGeom prst="rect">
             <a:avLst/>
@@ -10235,14 +10991,14 @@
       </p:sp>
       <p:sp>
         <p:nvSpPr>
-          <p:cNvPr id="34" name="Shape 32"/>
-          <p:cNvSpPr/>
-          <p:nvPr/>
-        </p:nvSpPr>
-        <p:spPr>
-          <a:xfrm>
-            <a:off x="4850892" y="4169664"/>
-            <a:ext cx="685800" cy="475488"/>
+          <p:cNvPr id="43" name="Shape 41"/>
+          <p:cNvSpPr/>
+          <p:nvPr/>
+        </p:nvSpPr>
+        <p:spPr>
+          <a:xfrm>
+            <a:off x="3258589" y="4169664"/>
+            <a:ext cx="603504" cy="475488"/>
           </a:xfrm>
           <a:prstGeom prst="rect">
             <a:avLst>
@@ -10262,14 +11018,14 @@
       </p:sp>
       <p:sp>
         <p:nvSpPr>
-          <p:cNvPr id="35" name="Text 33"/>
-          <p:cNvSpPr/>
-          <p:nvPr/>
-        </p:nvSpPr>
-        <p:spPr>
-          <a:xfrm>
-            <a:off x="4850892" y="4169664"/>
-            <a:ext cx="685800" cy="475488"/>
+          <p:cNvPr id="44" name="Text 42"/>
+          <p:cNvSpPr/>
+          <p:nvPr/>
+        </p:nvSpPr>
+        <p:spPr>
+          <a:xfrm>
+            <a:off x="3258589" y="4169664"/>
+            <a:ext cx="603504" cy="475488"/>
           </a:xfrm>
           <a:prstGeom prst="rect">
             <a:avLst/>
@@ -10301,14 +11057,14 @@
       </p:sp>
       <p:sp>
         <p:nvSpPr>
-          <p:cNvPr id="36" name="Shape 34"/>
-          <p:cNvSpPr/>
-          <p:nvPr/>
-        </p:nvSpPr>
-        <p:spPr>
-          <a:xfrm>
-            <a:off x="6062472" y="4169664"/>
-            <a:ext cx="685800" cy="475488"/>
+          <p:cNvPr id="45" name="Shape 43"/>
+          <p:cNvSpPr/>
+          <p:nvPr/>
+        </p:nvSpPr>
+        <p:spPr>
+          <a:xfrm>
+            <a:off x="3911969" y="4169664"/>
+            <a:ext cx="603504" cy="475488"/>
           </a:xfrm>
           <a:prstGeom prst="rect">
             <a:avLst>
@@ -10328,14 +11084,14 @@
       </p:sp>
       <p:sp>
         <p:nvSpPr>
-          <p:cNvPr id="37" name="Text 35"/>
-          <p:cNvSpPr/>
-          <p:nvPr/>
-        </p:nvSpPr>
-        <p:spPr>
-          <a:xfrm>
-            <a:off x="6062472" y="4169664"/>
-            <a:ext cx="685800" cy="475488"/>
+          <p:cNvPr id="46" name="Text 44"/>
+          <p:cNvSpPr/>
+          <p:nvPr/>
+        </p:nvSpPr>
+        <p:spPr>
+          <a:xfrm>
+            <a:off x="3911969" y="4169664"/>
+            <a:ext cx="603504" cy="475488"/>
           </a:xfrm>
           <a:prstGeom prst="rect">
             <a:avLst/>
@@ -10367,14 +11123,14 @@
       </p:sp>
       <p:sp>
         <p:nvSpPr>
-          <p:cNvPr id="38" name="Shape 36"/>
-          <p:cNvSpPr/>
-          <p:nvPr/>
-        </p:nvSpPr>
-        <p:spPr>
-          <a:xfrm>
-            <a:off x="7274052" y="4169664"/>
-            <a:ext cx="685800" cy="475488"/>
+          <p:cNvPr id="47" name="Shape 45"/>
+          <p:cNvSpPr/>
+          <p:nvPr/>
+        </p:nvSpPr>
+        <p:spPr>
+          <a:xfrm>
+            <a:off x="4565350" y="4169664"/>
+            <a:ext cx="603504" cy="475488"/>
           </a:xfrm>
           <a:prstGeom prst="rect">
             <a:avLst>
@@ -10394,14 +11150,14 @@
       </p:sp>
       <p:sp>
         <p:nvSpPr>
-          <p:cNvPr id="39" name="Text 37"/>
-          <p:cNvSpPr/>
-          <p:nvPr/>
-        </p:nvSpPr>
-        <p:spPr>
-          <a:xfrm>
-            <a:off x="7274052" y="4169664"/>
-            <a:ext cx="685800" cy="475488"/>
+          <p:cNvPr id="48" name="Text 46"/>
+          <p:cNvSpPr/>
+          <p:nvPr/>
+        </p:nvSpPr>
+        <p:spPr>
+          <a:xfrm>
+            <a:off x="4565350" y="4169664"/>
+            <a:ext cx="603504" cy="475488"/>
           </a:xfrm>
           <a:prstGeom prst="rect">
             <a:avLst/>
@@ -10426,6 +11182,336 @@
                 <a:cs typeface="Trebuchet MS" pitchFamily="34" charset="-120"/>
               </a:rPr>
               <a:t>m</a:t>
+            </a:r>
+            <a:endParaRPr lang="en-US" sz="900" dirty="0"/>
+          </a:p>
+        </p:txBody>
+      </p:sp>
+      <p:sp>
+        <p:nvSpPr>
+          <p:cNvPr id="49" name="Shape 47"/>
+          <p:cNvSpPr/>
+          <p:nvPr/>
+        </p:nvSpPr>
+        <p:spPr>
+          <a:xfrm>
+            <a:off x="5218730" y="4169664"/>
+            <a:ext cx="603504" cy="475488"/>
+          </a:xfrm>
+          <a:prstGeom prst="rect">
+            <a:avLst>
+              <a:gd name="adj" fmla="val 7692"/>
+            </a:avLst>
+          </a:prstGeom>
+          <a:solidFill>
+            <a:srgbClr val="FFFFFF"/>
+          </a:solidFill>
+          <a:ln w="12700">
+            <a:solidFill>
+              <a:srgbClr val="DB2777"/>
+            </a:solidFill>
+            <a:prstDash val="solid"/>
+          </a:ln>
+        </p:spPr>
+      </p:sp>
+      <p:sp>
+        <p:nvSpPr>
+          <p:cNvPr id="50" name="Text 48"/>
+          <p:cNvSpPr/>
+          <p:nvPr/>
+        </p:nvSpPr>
+        <p:spPr>
+          <a:xfrm>
+            <a:off x="5218730" y="4169664"/>
+            <a:ext cx="603504" cy="475488"/>
+          </a:xfrm>
+          <a:prstGeom prst="rect">
+            <a:avLst/>
+          </a:prstGeom>
+          <a:noFill/>
+          <a:ln/>
+        </p:spPr>
+        <p:txBody>
+          <a:bodyPr wrap="square" lIns="0" tIns="0" rIns="0" bIns="0" rtlCol="0" anchor="ctr"/>
+          <a:lstStyle/>
+          <a:p>
+            <a:pPr algn="ctr" indent="0" marL="0">
+              <a:buNone/>
+            </a:pPr>
+            <a:r>
+              <a:rPr lang="en-US" sz="900" b="1" dirty="0">
+                <a:solidFill>
+                  <a:srgbClr val="9D174D"/>
+                </a:solidFill>
+                <a:latin typeface="Trebuchet MS" pitchFamily="34" charset="0"/>
+                <a:ea typeface="Trebuchet MS" pitchFamily="34" charset="-122"/>
+                <a:cs typeface="Trebuchet MS" pitchFamily="34" charset="-120"/>
+              </a:rPr>
+              <a:t>a</a:t>
+            </a:r>
+            <a:endParaRPr lang="en-US" sz="900" dirty="0"/>
+          </a:p>
+        </p:txBody>
+      </p:sp>
+      <p:sp>
+        <p:nvSpPr>
+          <p:cNvPr id="51" name="Shape 49"/>
+          <p:cNvSpPr/>
+          <p:nvPr/>
+        </p:nvSpPr>
+        <p:spPr>
+          <a:xfrm>
+            <a:off x="5872111" y="4169664"/>
+            <a:ext cx="603504" cy="475488"/>
+          </a:xfrm>
+          <a:prstGeom prst="rect">
+            <a:avLst>
+              <a:gd name="adj" fmla="val 7692"/>
+            </a:avLst>
+          </a:prstGeom>
+          <a:solidFill>
+            <a:srgbClr val="FFFFFF"/>
+          </a:solidFill>
+          <a:ln w="12700">
+            <a:solidFill>
+              <a:srgbClr val="DB2777"/>
+            </a:solidFill>
+            <a:prstDash val="solid"/>
+          </a:ln>
+        </p:spPr>
+      </p:sp>
+      <p:sp>
+        <p:nvSpPr>
+          <p:cNvPr id="52" name="Text 50"/>
+          <p:cNvSpPr/>
+          <p:nvPr/>
+        </p:nvSpPr>
+        <p:spPr>
+          <a:xfrm>
+            <a:off x="5872111" y="4169664"/>
+            <a:ext cx="603504" cy="475488"/>
+          </a:xfrm>
+          <a:prstGeom prst="rect">
+            <a:avLst/>
+          </a:prstGeom>
+          <a:noFill/>
+          <a:ln/>
+        </p:spPr>
+        <p:txBody>
+          <a:bodyPr wrap="square" lIns="0" tIns="0" rIns="0" bIns="0" rtlCol="0" anchor="ctr"/>
+          <a:lstStyle/>
+          <a:p>
+            <a:pPr algn="ctr" indent="0" marL="0">
+              <a:buNone/>
+            </a:pPr>
+            <a:r>
+              <a:rPr lang="en-US" sz="900" b="1" dirty="0">
+                <a:solidFill>
+                  <a:srgbClr val="9D174D"/>
+                </a:solidFill>
+                <a:latin typeface="Trebuchet MS" pitchFamily="34" charset="0"/>
+                <a:ea typeface="Trebuchet MS" pitchFamily="34" charset="-122"/>
+                <a:cs typeface="Trebuchet MS" pitchFamily="34" charset="-120"/>
+              </a:rPr>
+              <a:t>t</a:t>
+            </a:r>
+            <a:endParaRPr lang="en-US" sz="900" dirty="0"/>
+          </a:p>
+        </p:txBody>
+      </p:sp>
+      <p:sp>
+        <p:nvSpPr>
+          <p:cNvPr id="53" name="Shape 51"/>
+          <p:cNvSpPr/>
+          <p:nvPr/>
+        </p:nvSpPr>
+        <p:spPr>
+          <a:xfrm>
+            <a:off x="6525491" y="4169664"/>
+            <a:ext cx="603504" cy="475488"/>
+          </a:xfrm>
+          <a:prstGeom prst="rect">
+            <a:avLst>
+              <a:gd name="adj" fmla="val 7692"/>
+            </a:avLst>
+          </a:prstGeom>
+          <a:solidFill>
+            <a:srgbClr val="FFFFFF"/>
+          </a:solidFill>
+          <a:ln w="12700">
+            <a:solidFill>
+              <a:srgbClr val="DB2777"/>
+            </a:solidFill>
+            <a:prstDash val="solid"/>
+          </a:ln>
+        </p:spPr>
+      </p:sp>
+      <p:sp>
+        <p:nvSpPr>
+          <p:cNvPr id="54" name="Text 52"/>
+          <p:cNvSpPr/>
+          <p:nvPr/>
+        </p:nvSpPr>
+        <p:spPr>
+          <a:xfrm>
+            <a:off x="6525491" y="4169664"/>
+            <a:ext cx="603504" cy="475488"/>
+          </a:xfrm>
+          <a:prstGeom prst="rect">
+            <a:avLst/>
+          </a:prstGeom>
+          <a:noFill/>
+          <a:ln/>
+        </p:spPr>
+        <p:txBody>
+          <a:bodyPr wrap="square" lIns="0" tIns="0" rIns="0" bIns="0" rtlCol="0" anchor="ctr"/>
+          <a:lstStyle/>
+          <a:p>
+            <a:pPr algn="ctr" indent="0" marL="0">
+              <a:buNone/>
+            </a:pPr>
+            <a:r>
+              <a:rPr lang="en-US" sz="900" b="1" dirty="0">
+                <a:solidFill>
+                  <a:srgbClr val="9D174D"/>
+                </a:solidFill>
+                <a:latin typeface="Trebuchet MS" pitchFamily="34" charset="0"/>
+                <a:ea typeface="Trebuchet MS" pitchFamily="34" charset="-122"/>
+                <a:cs typeface="Trebuchet MS" pitchFamily="34" charset="-120"/>
+              </a:rPr>
+              <a:t>i</a:t>
+            </a:r>
+            <a:endParaRPr lang="en-US" sz="900" dirty="0"/>
+          </a:p>
+        </p:txBody>
+      </p:sp>
+      <p:sp>
+        <p:nvSpPr>
+          <p:cNvPr id="55" name="Shape 53"/>
+          <p:cNvSpPr/>
+          <p:nvPr/>
+        </p:nvSpPr>
+        <p:spPr>
+          <a:xfrm>
+            <a:off x="7178871" y="4169664"/>
+            <a:ext cx="603504" cy="475488"/>
+          </a:xfrm>
+          <a:prstGeom prst="rect">
+            <a:avLst>
+              <a:gd name="adj" fmla="val 7692"/>
+            </a:avLst>
+          </a:prstGeom>
+          <a:solidFill>
+            <a:srgbClr val="FFFFFF"/>
+          </a:solidFill>
+          <a:ln w="12700">
+            <a:solidFill>
+              <a:srgbClr val="DB2777"/>
+            </a:solidFill>
+            <a:prstDash val="solid"/>
+          </a:ln>
+        </p:spPr>
+      </p:sp>
+      <p:sp>
+        <p:nvSpPr>
+          <p:cNvPr id="56" name="Text 54"/>
+          <p:cNvSpPr/>
+          <p:nvPr/>
+        </p:nvSpPr>
+        <p:spPr>
+          <a:xfrm>
+            <a:off x="7178871" y="4169664"/>
+            <a:ext cx="603504" cy="475488"/>
+          </a:xfrm>
+          <a:prstGeom prst="rect">
+            <a:avLst/>
+          </a:prstGeom>
+          <a:noFill/>
+          <a:ln/>
+        </p:spPr>
+        <p:txBody>
+          <a:bodyPr wrap="square" lIns="0" tIns="0" rIns="0" bIns="0" rtlCol="0" anchor="ctr"/>
+          <a:lstStyle/>
+          <a:p>
+            <a:pPr algn="ctr" indent="0" marL="0">
+              <a:buNone/>
+            </a:pPr>
+            <a:r>
+              <a:rPr lang="en-US" sz="900" b="1" dirty="0">
+                <a:solidFill>
+                  <a:srgbClr val="9D174D"/>
+                </a:solidFill>
+                <a:latin typeface="Trebuchet MS" pitchFamily="34" charset="0"/>
+                <a:ea typeface="Trebuchet MS" pitchFamily="34" charset="-122"/>
+                <a:cs typeface="Trebuchet MS" pitchFamily="34" charset="-120"/>
+              </a:rPr>
+              <a:t>v</a:t>
+            </a:r>
+            <a:endParaRPr lang="en-US" sz="900" dirty="0"/>
+          </a:p>
+        </p:txBody>
+      </p:sp>
+      <p:sp>
+        <p:nvSpPr>
+          <p:cNvPr id="57" name="Shape 55"/>
+          <p:cNvSpPr/>
+          <p:nvPr/>
+        </p:nvSpPr>
+        <p:spPr>
+          <a:xfrm>
+            <a:off x="7832252" y="4169664"/>
+            <a:ext cx="603504" cy="475488"/>
+          </a:xfrm>
+          <a:prstGeom prst="rect">
+            <a:avLst>
+              <a:gd name="adj" fmla="val 7692"/>
+            </a:avLst>
+          </a:prstGeom>
+          <a:solidFill>
+            <a:srgbClr val="FFFFFF"/>
+          </a:solidFill>
+          <a:ln w="12700">
+            <a:solidFill>
+              <a:srgbClr val="DB2777"/>
+            </a:solidFill>
+            <a:prstDash val="solid"/>
+          </a:ln>
+        </p:spPr>
+      </p:sp>
+      <p:sp>
+        <p:nvSpPr>
+          <p:cNvPr id="58" name="Text 56"/>
+          <p:cNvSpPr/>
+          <p:nvPr/>
+        </p:nvSpPr>
+        <p:spPr>
+          <a:xfrm>
+            <a:off x="7832252" y="4169664"/>
+            <a:ext cx="603504" cy="475488"/>
+          </a:xfrm>
+          <a:prstGeom prst="rect">
+            <a:avLst/>
+          </a:prstGeom>
+          <a:noFill/>
+          <a:ln/>
+        </p:spPr>
+        <p:txBody>
+          <a:bodyPr wrap="square" lIns="0" tIns="0" rIns="0" bIns="0" rtlCol="0" anchor="ctr"/>
+          <a:lstStyle/>
+          <a:p>
+            <a:pPr algn="ctr" indent="0" marL="0">
+              <a:buNone/>
+            </a:pPr>
+            <a:r>
+              <a:rPr lang="en-US" sz="900" b="1" dirty="0">
+                <a:solidFill>
+                  <a:srgbClr val="9D174D"/>
+                </a:solidFill>
+                <a:latin typeface="Trebuchet MS" pitchFamily="34" charset="0"/>
+                <a:ea typeface="Trebuchet MS" pitchFamily="34" charset="-122"/>
+                <a:cs typeface="Trebuchet MS" pitchFamily="34" charset="-120"/>
+              </a:rPr>
+              <a:t>e</a:t>
             </a:r>
             <a:endParaRPr lang="en-US" sz="900" dirty="0"/>
           </a:p>
@@ -10717,7 +11803,7 @@
                 <a:ea typeface="Calibri" pitchFamily="34" charset="-122"/>
                 <a:cs typeface="Calibri" pitchFamily="34" charset="-120"/>
               </a:rPr>
-              <a:t>Word Labs  •  wordlabs.app  •  Root: 'inform' = to give shape or knowledge</a:t>
+              <a:t>Word Labs  •  wordlabs.app  •  Root: 'inform' = to give knowledge or shape</a:t>
             </a:r>
             <a:endParaRPr lang="en-US" sz="800" dirty="0"/>
           </a:p>
@@ -10856,7 +11942,7 @@
                 <a:ea typeface="Trebuchet MS" pitchFamily="34" charset="-122"/>
                 <a:cs typeface="Trebuchet MS" pitchFamily="34" charset="-120"/>
               </a:rPr>
-              <a:t>informative</a:t>
+              <a:t>uninformed</a:t>
             </a:r>
             <a:endParaRPr lang="en-US" sz="2800" dirty="0"/>
           </a:p>
@@ -11544,7 +12630,7 @@
                 <a:ea typeface="Calibri" pitchFamily="34" charset="-122"/>
                 <a:cs typeface="Calibri" pitchFamily="34" charset="-120"/>
               </a:rPr>
-              <a:t>Word Labs  •  wordlabs.app  •  Root: 'inform' = to give shape or knowledge</a:t>
+              <a:t>Word Labs  •  wordlabs.app  •  Root: 'inform' = to give knowledge or shape</a:t>
             </a:r>
             <a:endParaRPr lang="en-US" sz="800" dirty="0"/>
           </a:p>
@@ -11683,7 +12769,7 @@
                 <a:ea typeface="Trebuchet MS" pitchFamily="34" charset="-122"/>
                 <a:cs typeface="Trebuchet MS" pitchFamily="34" charset="-120"/>
               </a:rPr>
-              <a:t>informative</a:t>
+              <a:t>uninformed</a:t>
             </a:r>
             <a:endParaRPr lang="en-US" sz="2800" dirty="0"/>
           </a:p>
@@ -11763,7 +12849,7 @@
         </p:nvSpPr>
         <p:spPr>
           <a:xfrm>
-            <a:off x="2938272" y="2258568"/>
+            <a:off x="2221992" y="2258568"/>
             <a:ext cx="1828800" cy="292608"/>
           </a:xfrm>
           <a:prstGeom prst="rect">
@@ -11772,11 +12858,11 @@
             </a:avLst>
           </a:prstGeom>
           <a:solidFill>
-            <a:srgbClr val="CCFBF1"/>
+            <a:srgbClr val="DDD6FE"/>
           </a:solidFill>
           <a:ln w="19050">
             <a:solidFill>
-              <a:srgbClr val="0D9488"/>
+              <a:srgbClr val="7C3AED"/>
             </a:solidFill>
             <a:prstDash val="solid"/>
           </a:ln>
@@ -11797,7 +12883,7 @@
         </p:nvSpPr>
         <p:spPr>
           <a:xfrm>
-            <a:off x="2938272" y="2258568"/>
+            <a:off x="2221992" y="2258568"/>
             <a:ext cx="1828800" cy="292608"/>
           </a:xfrm>
           <a:prstGeom prst="rect">
@@ -11816,13 +12902,13 @@
             <a:r>
               <a:rPr lang="en-US" sz="1300" b="1" dirty="0">
                 <a:solidFill>
-                  <a:srgbClr val="0F766E"/>
+                  <a:srgbClr val="4C1D95"/>
                 </a:solidFill>
                 <a:latin typeface="Trebuchet MS" pitchFamily="34" charset="0"/>
                 <a:ea typeface="Trebuchet MS" pitchFamily="34" charset="-122"/>
                 <a:cs typeface="Trebuchet MS" pitchFamily="34" charset="-120"/>
               </a:rPr>
-              <a:t>inform</a:t>
+              <a:t>un</a:t>
             </a:r>
             <a:endParaRPr lang="en-US" sz="1300" dirty="0"/>
           </a:p>
@@ -11836,7 +12922,7 @@
         </p:nvSpPr>
         <p:spPr>
           <a:xfrm>
-            <a:off x="2938272" y="2569464"/>
+            <a:off x="2221992" y="2569464"/>
             <a:ext cx="1828800" cy="201168"/>
           </a:xfrm>
           <a:prstGeom prst="rect">
@@ -11861,7 +12947,7 @@
                 <a:ea typeface="Calibri" pitchFamily="34" charset="-122"/>
                 <a:cs typeface="Calibri" pitchFamily="34" charset="-120"/>
               </a:rPr>
-              <a:t>to give knowledge or shape</a:t>
+              <a:t>not</a:t>
             </a:r>
             <a:endParaRPr lang="en-US" sz="850" dirty="0"/>
           </a:p>
@@ -11875,7 +12961,7 @@
         </p:nvSpPr>
         <p:spPr>
           <a:xfrm>
-            <a:off x="5803392" y="2258568"/>
+            <a:off x="4370832" y="2258568"/>
             <a:ext cx="1828800" cy="292608"/>
           </a:xfrm>
           <a:prstGeom prst="rect">
@@ -11884,11 +12970,11 @@
             </a:avLst>
           </a:prstGeom>
           <a:solidFill>
-            <a:srgbClr val="FCE7F3"/>
+            <a:srgbClr val="CCFBF1"/>
           </a:solidFill>
           <a:ln w="19050">
             <a:solidFill>
-              <a:srgbClr val="DB2777"/>
+              <a:srgbClr val="0D9488"/>
             </a:solidFill>
             <a:prstDash val="solid"/>
           </a:ln>
@@ -11909,7 +12995,7 @@
         </p:nvSpPr>
         <p:spPr>
           <a:xfrm>
-            <a:off x="5803392" y="2258568"/>
+            <a:off x="4370832" y="2258568"/>
             <a:ext cx="1828800" cy="292608"/>
           </a:xfrm>
           <a:prstGeom prst="rect">
@@ -11928,13 +13014,13 @@
             <a:r>
               <a:rPr lang="en-US" sz="1300" b="1" dirty="0">
                 <a:solidFill>
-                  <a:srgbClr val="9D174D"/>
+                  <a:srgbClr val="0F766E"/>
                 </a:solidFill>
                 <a:latin typeface="Trebuchet MS" pitchFamily="34" charset="0"/>
                 <a:ea typeface="Trebuchet MS" pitchFamily="34" charset="-122"/>
                 <a:cs typeface="Trebuchet MS" pitchFamily="34" charset="-120"/>
               </a:rPr>
-              <a:t>ative</a:t>
+              <a:t>inform</a:t>
             </a:r>
             <a:endParaRPr lang="en-US" sz="1300" dirty="0"/>
           </a:p>
@@ -11948,7 +13034,7 @@
         </p:nvSpPr>
         <p:spPr>
           <a:xfrm>
-            <a:off x="5803392" y="2569464"/>
+            <a:off x="4370832" y="2569464"/>
             <a:ext cx="1828800" cy="201168"/>
           </a:xfrm>
           <a:prstGeom prst="rect">
@@ -11973,7 +13059,7 @@
                 <a:ea typeface="Calibri" pitchFamily="34" charset="-122"/>
                 <a:cs typeface="Calibri" pitchFamily="34" charset="-120"/>
               </a:rPr>
-              <a:t>having the quality of</a:t>
+              <a:t>to give knowledge</a:t>
             </a:r>
             <a:endParaRPr lang="en-US" sz="850" dirty="0"/>
           </a:p>
@@ -11982,6 +13068,118 @@
       <p:sp>
         <p:nvSpPr>
           <p:cNvPr id="22" name="Shape 20"/>
+          <p:cNvSpPr/>
+          <p:nvPr/>
+        </p:nvSpPr>
+        <p:spPr>
+          <a:xfrm>
+            <a:off x="6519672" y="2258568"/>
+            <a:ext cx="1828800" cy="292608"/>
+          </a:xfrm>
+          <a:prstGeom prst="rect">
+            <a:avLst>
+              <a:gd name="adj" fmla="val 25000"/>
+            </a:avLst>
+          </a:prstGeom>
+          <a:solidFill>
+            <a:srgbClr val="FCE7F3"/>
+          </a:solidFill>
+          <a:ln w="19050">
+            <a:solidFill>
+              <a:srgbClr val="DB2777"/>
+            </a:solidFill>
+            <a:prstDash val="solid"/>
+          </a:ln>
+          <a:effectLst>
+            <a:outerShdw sx="100000" sy="100000" kx="0" ky="0" algn="bl" rotWithShape="0" blurRad="101600" dist="38100" dir="8100000">
+              <a:srgbClr val="000000">
+                <a:alpha val="12000"/>
+              </a:srgbClr>
+            </a:outerShdw>
+          </a:effectLst>
+        </p:spPr>
+      </p:sp>
+      <p:sp>
+        <p:nvSpPr>
+          <p:cNvPr id="23" name="Text 21"/>
+          <p:cNvSpPr/>
+          <p:nvPr/>
+        </p:nvSpPr>
+        <p:spPr>
+          <a:xfrm>
+            <a:off x="6519672" y="2258568"/>
+            <a:ext cx="1828800" cy="292608"/>
+          </a:xfrm>
+          <a:prstGeom prst="rect">
+            <a:avLst/>
+          </a:prstGeom>
+          <a:noFill/>
+          <a:ln/>
+        </p:spPr>
+        <p:txBody>
+          <a:bodyPr wrap="square" lIns="0" tIns="0" rIns="0" bIns="0" rtlCol="0" anchor="ctr"/>
+          <a:lstStyle/>
+          <a:p>
+            <a:pPr algn="ctr" indent="0" marL="0">
+              <a:buNone/>
+            </a:pPr>
+            <a:r>
+              <a:rPr lang="en-US" sz="1300" b="1" dirty="0">
+                <a:solidFill>
+                  <a:srgbClr val="9D174D"/>
+                </a:solidFill>
+                <a:latin typeface="Trebuchet MS" pitchFamily="34" charset="0"/>
+                <a:ea typeface="Trebuchet MS" pitchFamily="34" charset="-122"/>
+                <a:cs typeface="Trebuchet MS" pitchFamily="34" charset="-120"/>
+              </a:rPr>
+              <a:t>ed</a:t>
+            </a:r>
+            <a:endParaRPr lang="en-US" sz="1300" dirty="0"/>
+          </a:p>
+        </p:txBody>
+      </p:sp>
+      <p:sp>
+        <p:nvSpPr>
+          <p:cNvPr id="24" name="Text 22"/>
+          <p:cNvSpPr/>
+          <p:nvPr/>
+        </p:nvSpPr>
+        <p:spPr>
+          <a:xfrm>
+            <a:off x="6519672" y="2569464"/>
+            <a:ext cx="1828800" cy="201168"/>
+          </a:xfrm>
+          <a:prstGeom prst="rect">
+            <a:avLst/>
+          </a:prstGeom>
+          <a:noFill/>
+          <a:ln/>
+        </p:spPr>
+        <p:txBody>
+          <a:bodyPr wrap="square" lIns="0" tIns="0" rIns="0" bIns="0" rtlCol="0" anchor="t"/>
+          <a:lstStyle/>
+          <a:p>
+            <a:pPr algn="ctr" indent="0" marL="0">
+              <a:buNone/>
+            </a:pPr>
+            <a:r>
+              <a:rPr lang="en-US" sz="850" dirty="0">
+                <a:solidFill>
+                  <a:srgbClr val="475569"/>
+                </a:solidFill>
+                <a:latin typeface="Calibri" pitchFamily="34" charset="0"/>
+                <a:ea typeface="Calibri" pitchFamily="34" charset="-122"/>
+                <a:cs typeface="Calibri" pitchFamily="34" charset="-120"/>
+              </a:rPr>
+              <a:t>past tense or having been done</a:t>
+            </a:r>
+            <a:endParaRPr lang="en-US" sz="850" dirty="0"/>
+          </a:p>
+        </p:txBody>
+      </p:sp>
+      <p:sp>
+        <p:nvSpPr>
+          <p:cNvPr id="25" name="Shape 23"/>
           <p:cNvSpPr/>
           <p:nvPr/>
         </p:nvSpPr>
@@ -12008,7 +13206,7 @@
       </p:sp>
       <p:sp>
         <p:nvSpPr>
-          <p:cNvPr id="23" name="Text 21"/>
+          <p:cNvPr id="26" name="Text 24"/>
           <p:cNvSpPr/>
           <p:nvPr/>
         </p:nvSpPr>
@@ -12047,7 +13245,7 @@
       </p:sp>
       <p:sp>
         <p:nvSpPr>
-          <p:cNvPr id="24" name="Shape 22"/>
+          <p:cNvPr id="27" name="Shape 25"/>
           <p:cNvSpPr/>
           <p:nvPr/>
         </p:nvSpPr>
@@ -12074,7 +13272,7 @@
       </p:sp>
       <p:sp>
         <p:nvSpPr>
-          <p:cNvPr id="25" name="Text 23"/>
+          <p:cNvPr id="28" name="Text 26"/>
           <p:cNvSpPr/>
           <p:nvPr/>
         </p:nvSpPr>
@@ -12113,7 +13311,7 @@
       </p:sp>
       <p:sp>
         <p:nvSpPr>
-          <p:cNvPr id="26" name="Shape 24"/>
+          <p:cNvPr id="29" name="Shape 27"/>
           <p:cNvSpPr/>
           <p:nvPr/>
         </p:nvSpPr>
@@ -12140,7 +13338,7 @@
       </p:sp>
       <p:sp>
         <p:nvSpPr>
-          <p:cNvPr id="27" name="Text 25"/>
+          <p:cNvPr id="30" name="Text 28"/>
           <p:cNvSpPr/>
           <p:nvPr/>
         </p:nvSpPr>
@@ -12179,7 +13377,7 @@
       </p:sp>
       <p:sp>
         <p:nvSpPr>
-          <p:cNvPr id="28" name="Shape 26"/>
+          <p:cNvPr id="31" name="Shape 29"/>
           <p:cNvSpPr/>
           <p:nvPr/>
         </p:nvSpPr>
@@ -12206,7 +13404,7 @@
       </p:sp>
       <p:sp>
         <p:nvSpPr>
-          <p:cNvPr id="29" name="Text 27"/>
+          <p:cNvPr id="32" name="Text 30"/>
           <p:cNvSpPr/>
           <p:nvPr/>
         </p:nvSpPr>
@@ -12529,7 +13727,7 @@
                 <a:ea typeface="Calibri" pitchFamily="34" charset="-122"/>
                 <a:cs typeface="Calibri" pitchFamily="34" charset="-120"/>
               </a:rPr>
-              <a:t>Word Labs  •  wordlabs.app  •  Root: 'inform' = to give shape or knowledge</a:t>
+              <a:t>Word Labs  •  wordlabs.app  •  Root: 'inform' = to give knowledge or shape</a:t>
             </a:r>
             <a:endParaRPr lang="en-US" sz="800" dirty="0"/>
           </a:p>
@@ -12668,7 +13866,7 @@
                 <a:ea typeface="Trebuchet MS" pitchFamily="34" charset="-122"/>
                 <a:cs typeface="Trebuchet MS" pitchFamily="34" charset="-120"/>
               </a:rPr>
-              <a:t>informative</a:t>
+              <a:t>uninformed</a:t>
             </a:r>
             <a:endParaRPr lang="en-US" sz="2800" dirty="0"/>
           </a:p>
@@ -12748,7 +13946,7 @@
         </p:nvSpPr>
         <p:spPr>
           <a:xfrm>
-            <a:off x="2938272" y="2258568"/>
+            <a:off x="2221992" y="2258568"/>
             <a:ext cx="1828800" cy="292608"/>
           </a:xfrm>
           <a:prstGeom prst="rect">
@@ -12757,11 +13955,11 @@
             </a:avLst>
           </a:prstGeom>
           <a:solidFill>
-            <a:srgbClr val="CCFBF1"/>
+            <a:srgbClr val="DDD6FE"/>
           </a:solidFill>
           <a:ln w="19050">
             <a:solidFill>
-              <a:srgbClr val="0D9488"/>
+              <a:srgbClr val="7C3AED"/>
             </a:solidFill>
             <a:prstDash val="solid"/>
           </a:ln>
@@ -12782,7 +13980,7 @@
         </p:nvSpPr>
         <p:spPr>
           <a:xfrm>
-            <a:off x="2938272" y="2258568"/>
+            <a:off x="2221992" y="2258568"/>
             <a:ext cx="1828800" cy="292608"/>
           </a:xfrm>
           <a:prstGeom prst="rect">
@@ -12801,13 +13999,13 @@
             <a:r>
               <a:rPr lang="en-US" sz="1300" b="1" dirty="0">
                 <a:solidFill>
-                  <a:srgbClr val="0F766E"/>
+                  <a:srgbClr val="4C1D95"/>
                 </a:solidFill>
                 <a:latin typeface="Trebuchet MS" pitchFamily="34" charset="0"/>
                 <a:ea typeface="Trebuchet MS" pitchFamily="34" charset="-122"/>
                 <a:cs typeface="Trebuchet MS" pitchFamily="34" charset="-120"/>
               </a:rPr>
-              <a:t>inform</a:t>
+              <a:t>un</a:t>
             </a:r>
             <a:endParaRPr lang="en-US" sz="1300" dirty="0"/>
           </a:p>
@@ -12821,7 +14019,7 @@
         </p:nvSpPr>
         <p:spPr>
           <a:xfrm>
-            <a:off x="2938272" y="2569464"/>
+            <a:off x="2221992" y="2569464"/>
             <a:ext cx="1828800" cy="201168"/>
           </a:xfrm>
           <a:prstGeom prst="rect">
@@ -12846,7 +14044,7 @@
                 <a:ea typeface="Calibri" pitchFamily="34" charset="-122"/>
                 <a:cs typeface="Calibri" pitchFamily="34" charset="-120"/>
               </a:rPr>
-              <a:t>to give knowledge or shape</a:t>
+              <a:t>not</a:t>
             </a:r>
             <a:endParaRPr lang="en-US" sz="850" dirty="0"/>
           </a:p>
@@ -12860,7 +14058,7 @@
         </p:nvSpPr>
         <p:spPr>
           <a:xfrm>
-            <a:off x="5803392" y="2258568"/>
+            <a:off x="4370832" y="2258568"/>
             <a:ext cx="1828800" cy="292608"/>
           </a:xfrm>
           <a:prstGeom prst="rect">
@@ -12869,11 +14067,11 @@
             </a:avLst>
           </a:prstGeom>
           <a:solidFill>
-            <a:srgbClr val="FCE7F3"/>
+            <a:srgbClr val="CCFBF1"/>
           </a:solidFill>
           <a:ln w="19050">
             <a:solidFill>
-              <a:srgbClr val="DB2777"/>
+              <a:srgbClr val="0D9488"/>
             </a:solidFill>
             <a:prstDash val="solid"/>
           </a:ln>
@@ -12894,7 +14092,7 @@
         </p:nvSpPr>
         <p:spPr>
           <a:xfrm>
-            <a:off x="5803392" y="2258568"/>
+            <a:off x="4370832" y="2258568"/>
             <a:ext cx="1828800" cy="292608"/>
           </a:xfrm>
           <a:prstGeom prst="rect">
@@ -12913,13 +14111,13 @@
             <a:r>
               <a:rPr lang="en-US" sz="1300" b="1" dirty="0">
                 <a:solidFill>
-                  <a:srgbClr val="9D174D"/>
+                  <a:srgbClr val="0F766E"/>
                 </a:solidFill>
                 <a:latin typeface="Trebuchet MS" pitchFamily="34" charset="0"/>
                 <a:ea typeface="Trebuchet MS" pitchFamily="34" charset="-122"/>
                 <a:cs typeface="Trebuchet MS" pitchFamily="34" charset="-120"/>
               </a:rPr>
-              <a:t>ative</a:t>
+              <a:t>inform</a:t>
             </a:r>
             <a:endParaRPr lang="en-US" sz="1300" dirty="0"/>
           </a:p>
@@ -12933,7 +14131,7 @@
         </p:nvSpPr>
         <p:spPr>
           <a:xfrm>
-            <a:off x="5803392" y="2569464"/>
+            <a:off x="4370832" y="2569464"/>
             <a:ext cx="1828800" cy="201168"/>
           </a:xfrm>
           <a:prstGeom prst="rect">
@@ -12958,7 +14156,7 @@
                 <a:ea typeface="Calibri" pitchFamily="34" charset="-122"/>
                 <a:cs typeface="Calibri" pitchFamily="34" charset="-120"/>
               </a:rPr>
-              <a:t>having the quality of</a:t>
+              <a:t>to give knowledge</a:t>
             </a:r>
             <a:endParaRPr lang="en-US" sz="850" dirty="0"/>
           </a:p>
@@ -12967,6 +14165,118 @@
       <p:sp>
         <p:nvSpPr>
           <p:cNvPr id="22" name="Shape 20"/>
+          <p:cNvSpPr/>
+          <p:nvPr/>
+        </p:nvSpPr>
+        <p:spPr>
+          <a:xfrm>
+            <a:off x="6519672" y="2258568"/>
+            <a:ext cx="1828800" cy="292608"/>
+          </a:xfrm>
+          <a:prstGeom prst="rect">
+            <a:avLst>
+              <a:gd name="adj" fmla="val 25000"/>
+            </a:avLst>
+          </a:prstGeom>
+          <a:solidFill>
+            <a:srgbClr val="FCE7F3"/>
+          </a:solidFill>
+          <a:ln w="19050">
+            <a:solidFill>
+              <a:srgbClr val="DB2777"/>
+            </a:solidFill>
+            <a:prstDash val="solid"/>
+          </a:ln>
+          <a:effectLst>
+            <a:outerShdw sx="100000" sy="100000" kx="0" ky="0" algn="bl" rotWithShape="0" blurRad="101600" dist="38100" dir="8100000">
+              <a:srgbClr val="000000">
+                <a:alpha val="12000"/>
+              </a:srgbClr>
+            </a:outerShdw>
+          </a:effectLst>
+        </p:spPr>
+      </p:sp>
+      <p:sp>
+        <p:nvSpPr>
+          <p:cNvPr id="23" name="Text 21"/>
+          <p:cNvSpPr/>
+          <p:nvPr/>
+        </p:nvSpPr>
+        <p:spPr>
+          <a:xfrm>
+            <a:off x="6519672" y="2258568"/>
+            <a:ext cx="1828800" cy="292608"/>
+          </a:xfrm>
+          <a:prstGeom prst="rect">
+            <a:avLst/>
+          </a:prstGeom>
+          <a:noFill/>
+          <a:ln/>
+        </p:spPr>
+        <p:txBody>
+          <a:bodyPr wrap="square" lIns="0" tIns="0" rIns="0" bIns="0" rtlCol="0" anchor="ctr"/>
+          <a:lstStyle/>
+          <a:p>
+            <a:pPr algn="ctr" indent="0" marL="0">
+              <a:buNone/>
+            </a:pPr>
+            <a:r>
+              <a:rPr lang="en-US" sz="1300" b="1" dirty="0">
+                <a:solidFill>
+                  <a:srgbClr val="9D174D"/>
+                </a:solidFill>
+                <a:latin typeface="Trebuchet MS" pitchFamily="34" charset="0"/>
+                <a:ea typeface="Trebuchet MS" pitchFamily="34" charset="-122"/>
+                <a:cs typeface="Trebuchet MS" pitchFamily="34" charset="-120"/>
+              </a:rPr>
+              <a:t>ed</a:t>
+            </a:r>
+            <a:endParaRPr lang="en-US" sz="1300" dirty="0"/>
+          </a:p>
+        </p:txBody>
+      </p:sp>
+      <p:sp>
+        <p:nvSpPr>
+          <p:cNvPr id="24" name="Text 22"/>
+          <p:cNvSpPr/>
+          <p:nvPr/>
+        </p:nvSpPr>
+        <p:spPr>
+          <a:xfrm>
+            <a:off x="6519672" y="2569464"/>
+            <a:ext cx="1828800" cy="201168"/>
+          </a:xfrm>
+          <a:prstGeom prst="rect">
+            <a:avLst/>
+          </a:prstGeom>
+          <a:noFill/>
+          <a:ln/>
+        </p:spPr>
+        <p:txBody>
+          <a:bodyPr wrap="square" lIns="0" tIns="0" rIns="0" bIns="0" rtlCol="0" anchor="t"/>
+          <a:lstStyle/>
+          <a:p>
+            <a:pPr algn="ctr" indent="0" marL="0">
+              <a:buNone/>
+            </a:pPr>
+            <a:r>
+              <a:rPr lang="en-US" sz="850" dirty="0">
+                <a:solidFill>
+                  <a:srgbClr val="475569"/>
+                </a:solidFill>
+                <a:latin typeface="Calibri" pitchFamily="34" charset="0"/>
+                <a:ea typeface="Calibri" pitchFamily="34" charset="-122"/>
+                <a:cs typeface="Calibri" pitchFamily="34" charset="-120"/>
+              </a:rPr>
+              <a:t>past tense or having been done</a:t>
+            </a:r>
+            <a:endParaRPr lang="en-US" sz="850" dirty="0"/>
+          </a:p>
+        </p:txBody>
+      </p:sp>
+      <p:sp>
+        <p:nvSpPr>
+          <p:cNvPr id="25" name="Shape 23"/>
           <p:cNvSpPr/>
           <p:nvPr/>
         </p:nvSpPr>
@@ -12993,7 +14303,7 @@
       </p:sp>
       <p:sp>
         <p:nvSpPr>
-          <p:cNvPr id="23" name="Text 21"/>
+          <p:cNvPr id="26" name="Text 24"/>
           <p:cNvSpPr/>
           <p:nvPr/>
         </p:nvSpPr>
@@ -13032,7 +14342,7 @@
       </p:sp>
       <p:sp>
         <p:nvSpPr>
-          <p:cNvPr id="24" name="Shape 22"/>
+          <p:cNvPr id="27" name="Shape 25"/>
           <p:cNvSpPr/>
           <p:nvPr/>
         </p:nvSpPr>
@@ -13059,14 +14369,14 @@
       </p:sp>
       <p:sp>
         <p:nvSpPr>
-          <p:cNvPr id="25" name="Shape 23"/>
-          <p:cNvSpPr/>
-          <p:nvPr/>
-        </p:nvSpPr>
-        <p:spPr>
-          <a:xfrm>
-            <a:off x="1975104" y="3364992"/>
-            <a:ext cx="1554480" cy="475488"/>
+          <p:cNvPr id="28" name="Shape 26"/>
+          <p:cNvSpPr/>
+          <p:nvPr/>
+        </p:nvSpPr>
+        <p:spPr>
+          <a:xfrm>
+            <a:off x="2313432" y="3364992"/>
+            <a:ext cx="1645920" cy="475488"/>
           </a:xfrm>
           <a:prstGeom prst="rect">
             <a:avLst>
@@ -13086,14 +14396,14 @@
       </p:sp>
       <p:sp>
         <p:nvSpPr>
-          <p:cNvPr id="26" name="Text 24"/>
-          <p:cNvSpPr/>
-          <p:nvPr/>
-        </p:nvSpPr>
-        <p:spPr>
-          <a:xfrm>
-            <a:off x="1975104" y="3364992"/>
-            <a:ext cx="1554480" cy="475488"/>
+          <p:cNvPr id="29" name="Text 27"/>
+          <p:cNvSpPr/>
+          <p:nvPr/>
+        </p:nvSpPr>
+        <p:spPr>
+          <a:xfrm>
+            <a:off x="2313432" y="3364992"/>
+            <a:ext cx="1645920" cy="475488"/>
           </a:xfrm>
           <a:prstGeom prst="rect">
             <a:avLst/>
@@ -13117,7 +14427,7 @@
                 <a:ea typeface="Trebuchet MS" pitchFamily="34" charset="-122"/>
                 <a:cs typeface="Trebuchet MS" pitchFamily="34" charset="-120"/>
               </a:rPr>
-              <a:t>in</a:t>
+              <a:t>un</a:t>
             </a:r>
             <a:endParaRPr lang="en-US" sz="1400" dirty="0"/>
           </a:p>
@@ -13125,14 +14435,14 @@
       </p:sp>
       <p:sp>
         <p:nvSpPr>
-          <p:cNvPr id="27" name="Text 25"/>
-          <p:cNvSpPr/>
-          <p:nvPr/>
-        </p:nvSpPr>
-        <p:spPr>
-          <a:xfrm>
-            <a:off x="3529584" y="3364992"/>
-            <a:ext cx="73152" cy="475488"/>
+          <p:cNvPr id="30" name="Text 28"/>
+          <p:cNvSpPr/>
+          <p:nvPr/>
+        </p:nvSpPr>
+        <p:spPr>
+          <a:xfrm>
+            <a:off x="3959352" y="3364992"/>
+            <a:ext cx="411480" cy="475488"/>
           </a:xfrm>
           <a:prstGeom prst="rect">
             <a:avLst/>
@@ -13164,14 +14474,14 @@
       </p:sp>
       <p:sp>
         <p:nvSpPr>
-          <p:cNvPr id="28" name="Shape 26"/>
-          <p:cNvSpPr/>
-          <p:nvPr/>
-        </p:nvSpPr>
-        <p:spPr>
-          <a:xfrm>
-            <a:off x="3602736" y="3364992"/>
-            <a:ext cx="1554480" cy="475488"/>
+          <p:cNvPr id="31" name="Shape 29"/>
+          <p:cNvSpPr/>
+          <p:nvPr/>
+        </p:nvSpPr>
+        <p:spPr>
+          <a:xfrm>
+            <a:off x="4370832" y="3364992"/>
+            <a:ext cx="1645920" cy="475488"/>
           </a:xfrm>
           <a:prstGeom prst="rect">
             <a:avLst>
@@ -13191,14 +14501,14 @@
       </p:sp>
       <p:sp>
         <p:nvSpPr>
-          <p:cNvPr id="29" name="Text 27"/>
-          <p:cNvSpPr/>
-          <p:nvPr/>
-        </p:nvSpPr>
-        <p:spPr>
-          <a:xfrm>
-            <a:off x="3602736" y="3364992"/>
-            <a:ext cx="1554480" cy="475488"/>
+          <p:cNvPr id="32" name="Text 30"/>
+          <p:cNvSpPr/>
+          <p:nvPr/>
+        </p:nvSpPr>
+        <p:spPr>
+          <a:xfrm>
+            <a:off x="4370832" y="3364992"/>
+            <a:ext cx="1645920" cy="475488"/>
           </a:xfrm>
           <a:prstGeom prst="rect">
             <a:avLst/>
@@ -13222,7 +14532,7 @@
                 <a:ea typeface="Trebuchet MS" pitchFamily="34" charset="-122"/>
                 <a:cs typeface="Trebuchet MS" pitchFamily="34" charset="-120"/>
               </a:rPr>
-              <a:t>form</a:t>
+              <a:t>in</a:t>
             </a:r>
             <a:endParaRPr lang="en-US" sz="1400" dirty="0"/>
           </a:p>
@@ -13230,14 +14540,14 @@
       </p:sp>
       <p:sp>
         <p:nvSpPr>
-          <p:cNvPr id="30" name="Text 28"/>
-          <p:cNvSpPr/>
-          <p:nvPr/>
-        </p:nvSpPr>
-        <p:spPr>
-          <a:xfrm>
-            <a:off x="5157216" y="3364992"/>
-            <a:ext cx="73152" cy="475488"/>
+          <p:cNvPr id="33" name="Text 31"/>
+          <p:cNvSpPr/>
+          <p:nvPr/>
+        </p:nvSpPr>
+        <p:spPr>
+          <a:xfrm>
+            <a:off x="6016752" y="3364992"/>
+            <a:ext cx="411480" cy="475488"/>
           </a:xfrm>
           <a:prstGeom prst="rect">
             <a:avLst/>
@@ -13269,14 +14579,14 @@
       </p:sp>
       <p:sp>
         <p:nvSpPr>
-          <p:cNvPr id="31" name="Shape 29"/>
-          <p:cNvSpPr/>
-          <p:nvPr/>
-        </p:nvSpPr>
-        <p:spPr>
-          <a:xfrm>
-            <a:off x="5230368" y="3364992"/>
-            <a:ext cx="1554480" cy="475488"/>
+          <p:cNvPr id="34" name="Shape 32"/>
+          <p:cNvSpPr/>
+          <p:nvPr/>
+        </p:nvSpPr>
+        <p:spPr>
+          <a:xfrm>
+            <a:off x="6428232" y="3364992"/>
+            <a:ext cx="1645920" cy="475488"/>
           </a:xfrm>
           <a:prstGeom prst="rect">
             <a:avLst>
@@ -13296,14 +14606,14 @@
       </p:sp>
       <p:sp>
         <p:nvSpPr>
-          <p:cNvPr id="32" name="Text 30"/>
-          <p:cNvSpPr/>
-          <p:nvPr/>
-        </p:nvSpPr>
-        <p:spPr>
-          <a:xfrm>
-            <a:off x="5230368" y="3364992"/>
-            <a:ext cx="1554480" cy="475488"/>
+          <p:cNvPr id="35" name="Text 33"/>
+          <p:cNvSpPr/>
+          <p:nvPr/>
+        </p:nvSpPr>
+        <p:spPr>
+          <a:xfrm>
+            <a:off x="6428232" y="3364992"/>
+            <a:ext cx="1645920" cy="475488"/>
           </a:xfrm>
           <a:prstGeom prst="rect">
             <a:avLst/>
@@ -13327,112 +14637,7 @@
                 <a:ea typeface="Trebuchet MS" pitchFamily="34" charset="-122"/>
                 <a:cs typeface="Trebuchet MS" pitchFamily="34" charset="-120"/>
               </a:rPr>
-              <a:t>a</a:t>
-            </a:r>
-            <a:endParaRPr lang="en-US" sz="1400" dirty="0"/>
-          </a:p>
-        </p:txBody>
-      </p:sp>
-      <p:sp>
-        <p:nvSpPr>
-          <p:cNvPr id="33" name="Text 31"/>
-          <p:cNvSpPr/>
-          <p:nvPr/>
-        </p:nvSpPr>
-        <p:spPr>
-          <a:xfrm>
-            <a:off x="6784848" y="3364992"/>
-            <a:ext cx="73152" cy="475488"/>
-          </a:xfrm>
-          <a:prstGeom prst="rect">
-            <a:avLst/>
-          </a:prstGeom>
-          <a:noFill/>
-          <a:ln/>
-        </p:spPr>
-        <p:txBody>
-          <a:bodyPr wrap="square" lIns="0" tIns="0" rIns="0" bIns="0" rtlCol="0" anchor="ctr"/>
-          <a:lstStyle/>
-          <a:p>
-            <a:pPr algn="ctr" indent="0" marL="0">
-              <a:buNone/>
-            </a:pPr>
-            <a:r>
-              <a:rPr lang="en-US" sz="1600" b="1" dirty="0">
-                <a:solidFill>
-                  <a:srgbClr val="0D9488"/>
-                </a:solidFill>
-                <a:latin typeface="Trebuchet MS" pitchFamily="34" charset="0"/>
-                <a:ea typeface="Trebuchet MS" pitchFamily="34" charset="-122"/>
-                <a:cs typeface="Trebuchet MS" pitchFamily="34" charset="-120"/>
-              </a:rPr>
-              <a:t>·</a:t>
-            </a:r>
-            <a:endParaRPr lang="en-US" sz="1600" dirty="0"/>
-          </a:p>
-        </p:txBody>
-      </p:sp>
-      <p:sp>
-        <p:nvSpPr>
-          <p:cNvPr id="34" name="Shape 32"/>
-          <p:cNvSpPr/>
-          <p:nvPr/>
-        </p:nvSpPr>
-        <p:spPr>
-          <a:xfrm>
-            <a:off x="6858000" y="3364992"/>
-            <a:ext cx="1554480" cy="475488"/>
-          </a:xfrm>
-          <a:prstGeom prst="rect">
-            <a:avLst>
-              <a:gd name="adj" fmla="val 9615"/>
-            </a:avLst>
-          </a:prstGeom>
-          <a:solidFill>
-            <a:srgbClr val="FFFFFF"/>
-          </a:solidFill>
-          <a:ln w="12700">
-            <a:solidFill>
-              <a:srgbClr val="0D9488"/>
-            </a:solidFill>
-            <a:prstDash val="solid"/>
-          </a:ln>
-        </p:spPr>
-      </p:sp>
-      <p:sp>
-        <p:nvSpPr>
-          <p:cNvPr id="35" name="Text 33"/>
-          <p:cNvSpPr/>
-          <p:nvPr/>
-        </p:nvSpPr>
-        <p:spPr>
-          <a:xfrm>
-            <a:off x="6858000" y="3364992"/>
-            <a:ext cx="1554480" cy="475488"/>
-          </a:xfrm>
-          <a:prstGeom prst="rect">
-            <a:avLst/>
-          </a:prstGeom>
-          <a:noFill/>
-          <a:ln/>
-        </p:spPr>
-        <p:txBody>
-          <a:bodyPr wrap="square" lIns="0" tIns="0" rIns="0" bIns="0" rtlCol="0" anchor="ctr"/>
-          <a:lstStyle/>
-          <a:p>
-            <a:pPr algn="ctr" indent="0" marL="0">
-              <a:buNone/>
-            </a:pPr>
-            <a:r>
-              <a:rPr lang="en-US" sz="1400" b="1" dirty="0">
-                <a:solidFill>
-                  <a:srgbClr val="0D9488"/>
-                </a:solidFill>
-                <a:latin typeface="Trebuchet MS" pitchFamily="34" charset="0"/>
-                <a:ea typeface="Trebuchet MS" pitchFamily="34" charset="-122"/>
-                <a:cs typeface="Trebuchet MS" pitchFamily="34" charset="-120"/>
-              </a:rPr>
-              <a:t>tive</a:t>
+              <a:t>formed</a:t>
             </a:r>
             <a:endParaRPr lang="en-US" sz="1400" dirty="0"/>
           </a:p>
@@ -13765,7 +14970,7 @@
                 <a:ea typeface="Calibri" pitchFamily="34" charset="-122"/>
                 <a:cs typeface="Calibri" pitchFamily="34" charset="-120"/>
               </a:rPr>
-              <a:t>Root 'inform' — to give shape or knowledge</a:t>
+              <a:t>Root 'inform' — to give knowledge or shape</a:t>
             </a:r>
             <a:endParaRPr lang="en-US" sz="1600" dirty="0"/>
           </a:p>
@@ -14121,7 +15326,7 @@
                 <a:ea typeface="Calibri" pitchFamily="34" charset="-122"/>
                 <a:cs typeface="Calibri" pitchFamily="34" charset="-120"/>
               </a:rPr>
-              <a:t>Word Labs  •  wordlabs.app  •  Root: 'inform' = to give shape or knowledge</a:t>
+              <a:t>Word Labs  •  wordlabs.app  •  Root: 'inform' = to give knowledge or shape</a:t>
             </a:r>
             <a:endParaRPr lang="en-US" sz="800" dirty="0"/>
           </a:p>
@@ -14260,7 +15465,7 @@
                 <a:ea typeface="Trebuchet MS" pitchFamily="34" charset="-122"/>
                 <a:cs typeface="Trebuchet MS" pitchFamily="34" charset="-120"/>
               </a:rPr>
-              <a:t>informative</a:t>
+              <a:t>uninformed</a:t>
             </a:r>
             <a:endParaRPr lang="en-US" sz="2800" dirty="0"/>
           </a:p>
@@ -14340,7 +15545,7 @@
         </p:nvSpPr>
         <p:spPr>
           <a:xfrm>
-            <a:off x="2938272" y="2258568"/>
+            <a:off x="2221992" y="2258568"/>
             <a:ext cx="1828800" cy="292608"/>
           </a:xfrm>
           <a:prstGeom prst="rect">
@@ -14349,11 +15554,11 @@
             </a:avLst>
           </a:prstGeom>
           <a:solidFill>
-            <a:srgbClr val="CCFBF1"/>
+            <a:srgbClr val="DDD6FE"/>
           </a:solidFill>
           <a:ln w="19050">
             <a:solidFill>
-              <a:srgbClr val="0D9488"/>
+              <a:srgbClr val="7C3AED"/>
             </a:solidFill>
             <a:prstDash val="solid"/>
           </a:ln>
@@ -14374,7 +15579,7 @@
         </p:nvSpPr>
         <p:spPr>
           <a:xfrm>
-            <a:off x="2938272" y="2258568"/>
+            <a:off x="2221992" y="2258568"/>
             <a:ext cx="1828800" cy="292608"/>
           </a:xfrm>
           <a:prstGeom prst="rect">
@@ -14393,13 +15598,13 @@
             <a:r>
               <a:rPr lang="en-US" sz="1300" b="1" dirty="0">
                 <a:solidFill>
-                  <a:srgbClr val="0F766E"/>
+                  <a:srgbClr val="4C1D95"/>
                 </a:solidFill>
                 <a:latin typeface="Trebuchet MS" pitchFamily="34" charset="0"/>
                 <a:ea typeface="Trebuchet MS" pitchFamily="34" charset="-122"/>
                 <a:cs typeface="Trebuchet MS" pitchFamily="34" charset="-120"/>
               </a:rPr>
-              <a:t>inform</a:t>
+              <a:t>un</a:t>
             </a:r>
             <a:endParaRPr lang="en-US" sz="1300" dirty="0"/>
           </a:p>
@@ -14413,7 +15618,7 @@
         </p:nvSpPr>
         <p:spPr>
           <a:xfrm>
-            <a:off x="2938272" y="2569464"/>
+            <a:off x="2221992" y="2569464"/>
             <a:ext cx="1828800" cy="201168"/>
           </a:xfrm>
           <a:prstGeom prst="rect">
@@ -14438,7 +15643,7 @@
                 <a:ea typeface="Calibri" pitchFamily="34" charset="-122"/>
                 <a:cs typeface="Calibri" pitchFamily="34" charset="-120"/>
               </a:rPr>
-              <a:t>to give knowledge or shape</a:t>
+              <a:t>not</a:t>
             </a:r>
             <a:endParaRPr lang="en-US" sz="850" dirty="0"/>
           </a:p>
@@ -14452,7 +15657,7 @@
         </p:nvSpPr>
         <p:spPr>
           <a:xfrm>
-            <a:off x="5803392" y="2258568"/>
+            <a:off x="4370832" y="2258568"/>
             <a:ext cx="1828800" cy="292608"/>
           </a:xfrm>
           <a:prstGeom prst="rect">
@@ -14461,11 +15666,11 @@
             </a:avLst>
           </a:prstGeom>
           <a:solidFill>
-            <a:srgbClr val="FCE7F3"/>
+            <a:srgbClr val="CCFBF1"/>
           </a:solidFill>
           <a:ln w="19050">
             <a:solidFill>
-              <a:srgbClr val="DB2777"/>
+              <a:srgbClr val="0D9488"/>
             </a:solidFill>
             <a:prstDash val="solid"/>
           </a:ln>
@@ -14486,7 +15691,7 @@
         </p:nvSpPr>
         <p:spPr>
           <a:xfrm>
-            <a:off x="5803392" y="2258568"/>
+            <a:off x="4370832" y="2258568"/>
             <a:ext cx="1828800" cy="292608"/>
           </a:xfrm>
           <a:prstGeom prst="rect">
@@ -14505,13 +15710,13 @@
             <a:r>
               <a:rPr lang="en-US" sz="1300" b="1" dirty="0">
                 <a:solidFill>
-                  <a:srgbClr val="9D174D"/>
+                  <a:srgbClr val="0F766E"/>
                 </a:solidFill>
                 <a:latin typeface="Trebuchet MS" pitchFamily="34" charset="0"/>
                 <a:ea typeface="Trebuchet MS" pitchFamily="34" charset="-122"/>
                 <a:cs typeface="Trebuchet MS" pitchFamily="34" charset="-120"/>
               </a:rPr>
-              <a:t>ative</a:t>
+              <a:t>inform</a:t>
             </a:r>
             <a:endParaRPr lang="en-US" sz="1300" dirty="0"/>
           </a:p>
@@ -14525,7 +15730,7 @@
         </p:nvSpPr>
         <p:spPr>
           <a:xfrm>
-            <a:off x="5803392" y="2569464"/>
+            <a:off x="4370832" y="2569464"/>
             <a:ext cx="1828800" cy="201168"/>
           </a:xfrm>
           <a:prstGeom prst="rect">
@@ -14550,7 +15755,7 @@
                 <a:ea typeface="Calibri" pitchFamily="34" charset="-122"/>
                 <a:cs typeface="Calibri" pitchFamily="34" charset="-120"/>
               </a:rPr>
-              <a:t>having the quality of</a:t>
+              <a:t>to give knowledge</a:t>
             </a:r>
             <a:endParaRPr lang="en-US" sz="850" dirty="0"/>
           </a:p>
@@ -14559,6 +15764,118 @@
       <p:sp>
         <p:nvSpPr>
           <p:cNvPr id="22" name="Shape 20"/>
+          <p:cNvSpPr/>
+          <p:nvPr/>
+        </p:nvSpPr>
+        <p:spPr>
+          <a:xfrm>
+            <a:off x="6519672" y="2258568"/>
+            <a:ext cx="1828800" cy="292608"/>
+          </a:xfrm>
+          <a:prstGeom prst="rect">
+            <a:avLst>
+              <a:gd name="adj" fmla="val 25000"/>
+            </a:avLst>
+          </a:prstGeom>
+          <a:solidFill>
+            <a:srgbClr val="FCE7F3"/>
+          </a:solidFill>
+          <a:ln w="19050">
+            <a:solidFill>
+              <a:srgbClr val="DB2777"/>
+            </a:solidFill>
+            <a:prstDash val="solid"/>
+          </a:ln>
+          <a:effectLst>
+            <a:outerShdw sx="100000" sy="100000" kx="0" ky="0" algn="bl" rotWithShape="0" blurRad="101600" dist="38100" dir="8100000">
+              <a:srgbClr val="000000">
+                <a:alpha val="12000"/>
+              </a:srgbClr>
+            </a:outerShdw>
+          </a:effectLst>
+        </p:spPr>
+      </p:sp>
+      <p:sp>
+        <p:nvSpPr>
+          <p:cNvPr id="23" name="Text 21"/>
+          <p:cNvSpPr/>
+          <p:nvPr/>
+        </p:nvSpPr>
+        <p:spPr>
+          <a:xfrm>
+            <a:off x="6519672" y="2258568"/>
+            <a:ext cx="1828800" cy="292608"/>
+          </a:xfrm>
+          <a:prstGeom prst="rect">
+            <a:avLst/>
+          </a:prstGeom>
+          <a:noFill/>
+          <a:ln/>
+        </p:spPr>
+        <p:txBody>
+          <a:bodyPr wrap="square" lIns="0" tIns="0" rIns="0" bIns="0" rtlCol="0" anchor="ctr"/>
+          <a:lstStyle/>
+          <a:p>
+            <a:pPr algn="ctr" indent="0" marL="0">
+              <a:buNone/>
+            </a:pPr>
+            <a:r>
+              <a:rPr lang="en-US" sz="1300" b="1" dirty="0">
+                <a:solidFill>
+                  <a:srgbClr val="9D174D"/>
+                </a:solidFill>
+                <a:latin typeface="Trebuchet MS" pitchFamily="34" charset="0"/>
+                <a:ea typeface="Trebuchet MS" pitchFamily="34" charset="-122"/>
+                <a:cs typeface="Trebuchet MS" pitchFamily="34" charset="-120"/>
+              </a:rPr>
+              <a:t>ed</a:t>
+            </a:r>
+            <a:endParaRPr lang="en-US" sz="1300" dirty="0"/>
+          </a:p>
+        </p:txBody>
+      </p:sp>
+      <p:sp>
+        <p:nvSpPr>
+          <p:cNvPr id="24" name="Text 22"/>
+          <p:cNvSpPr/>
+          <p:nvPr/>
+        </p:nvSpPr>
+        <p:spPr>
+          <a:xfrm>
+            <a:off x="6519672" y="2569464"/>
+            <a:ext cx="1828800" cy="201168"/>
+          </a:xfrm>
+          <a:prstGeom prst="rect">
+            <a:avLst/>
+          </a:prstGeom>
+          <a:noFill/>
+          <a:ln/>
+        </p:spPr>
+        <p:txBody>
+          <a:bodyPr wrap="square" lIns="0" tIns="0" rIns="0" bIns="0" rtlCol="0" anchor="t"/>
+          <a:lstStyle/>
+          <a:p>
+            <a:pPr algn="ctr" indent="0" marL="0">
+              <a:buNone/>
+            </a:pPr>
+            <a:r>
+              <a:rPr lang="en-US" sz="850" dirty="0">
+                <a:solidFill>
+                  <a:srgbClr val="475569"/>
+                </a:solidFill>
+                <a:latin typeface="Calibri" pitchFamily="34" charset="0"/>
+                <a:ea typeface="Calibri" pitchFamily="34" charset="-122"/>
+                <a:cs typeface="Calibri" pitchFamily="34" charset="-120"/>
+              </a:rPr>
+              <a:t>past tense or having been done</a:t>
+            </a:r>
+            <a:endParaRPr lang="en-US" sz="850" dirty="0"/>
+          </a:p>
+        </p:txBody>
+      </p:sp>
+      <p:sp>
+        <p:nvSpPr>
+          <p:cNvPr id="25" name="Shape 23"/>
           <p:cNvSpPr/>
           <p:nvPr/>
         </p:nvSpPr>
@@ -14585,7 +15902,7 @@
       </p:sp>
       <p:sp>
         <p:nvSpPr>
-          <p:cNvPr id="23" name="Text 21"/>
+          <p:cNvPr id="26" name="Text 24"/>
           <p:cNvSpPr/>
           <p:nvPr/>
         </p:nvSpPr>
@@ -14624,7 +15941,7 @@
       </p:sp>
       <p:sp>
         <p:nvSpPr>
-          <p:cNvPr id="24" name="Shape 22"/>
+          <p:cNvPr id="27" name="Shape 25"/>
           <p:cNvSpPr/>
           <p:nvPr/>
         </p:nvSpPr>
@@ -14651,14 +15968,14 @@
       </p:sp>
       <p:sp>
         <p:nvSpPr>
-          <p:cNvPr id="25" name="Shape 23"/>
-          <p:cNvSpPr/>
-          <p:nvPr/>
-        </p:nvSpPr>
-        <p:spPr>
-          <a:xfrm>
-            <a:off x="1975104" y="3364992"/>
-            <a:ext cx="1554480" cy="475488"/>
+          <p:cNvPr id="28" name="Shape 26"/>
+          <p:cNvSpPr/>
+          <p:nvPr/>
+        </p:nvSpPr>
+        <p:spPr>
+          <a:xfrm>
+            <a:off x="2313432" y="3364992"/>
+            <a:ext cx="1645920" cy="475488"/>
           </a:xfrm>
           <a:prstGeom prst="rect">
             <a:avLst>
@@ -14678,14 +15995,14 @@
       </p:sp>
       <p:sp>
         <p:nvSpPr>
-          <p:cNvPr id="26" name="Text 24"/>
-          <p:cNvSpPr/>
-          <p:nvPr/>
-        </p:nvSpPr>
-        <p:spPr>
-          <a:xfrm>
-            <a:off x="1975104" y="3364992"/>
-            <a:ext cx="1554480" cy="475488"/>
+          <p:cNvPr id="29" name="Text 27"/>
+          <p:cNvSpPr/>
+          <p:nvPr/>
+        </p:nvSpPr>
+        <p:spPr>
+          <a:xfrm>
+            <a:off x="2313432" y="3364992"/>
+            <a:ext cx="1645920" cy="475488"/>
           </a:xfrm>
           <a:prstGeom prst="rect">
             <a:avLst/>
@@ -14709,7 +16026,7 @@
                 <a:ea typeface="Trebuchet MS" pitchFamily="34" charset="-122"/>
                 <a:cs typeface="Trebuchet MS" pitchFamily="34" charset="-120"/>
               </a:rPr>
-              <a:t>in</a:t>
+              <a:t>un</a:t>
             </a:r>
             <a:endParaRPr lang="en-US" sz="1400" dirty="0"/>
           </a:p>
@@ -14717,14 +16034,14 @@
       </p:sp>
       <p:sp>
         <p:nvSpPr>
-          <p:cNvPr id="27" name="Text 25"/>
-          <p:cNvSpPr/>
-          <p:nvPr/>
-        </p:nvSpPr>
-        <p:spPr>
-          <a:xfrm>
-            <a:off x="3529584" y="3364992"/>
-            <a:ext cx="73152" cy="475488"/>
+          <p:cNvPr id="30" name="Text 28"/>
+          <p:cNvSpPr/>
+          <p:nvPr/>
+        </p:nvSpPr>
+        <p:spPr>
+          <a:xfrm>
+            <a:off x="3959352" y="3364992"/>
+            <a:ext cx="411480" cy="475488"/>
           </a:xfrm>
           <a:prstGeom prst="rect">
             <a:avLst/>
@@ -14756,14 +16073,14 @@
       </p:sp>
       <p:sp>
         <p:nvSpPr>
-          <p:cNvPr id="28" name="Shape 26"/>
-          <p:cNvSpPr/>
-          <p:nvPr/>
-        </p:nvSpPr>
-        <p:spPr>
-          <a:xfrm>
-            <a:off x="3602736" y="3364992"/>
-            <a:ext cx="1554480" cy="475488"/>
+          <p:cNvPr id="31" name="Shape 29"/>
+          <p:cNvSpPr/>
+          <p:nvPr/>
+        </p:nvSpPr>
+        <p:spPr>
+          <a:xfrm>
+            <a:off x="4370832" y="3364992"/>
+            <a:ext cx="1645920" cy="475488"/>
           </a:xfrm>
           <a:prstGeom prst="rect">
             <a:avLst>
@@ -14783,14 +16100,14 @@
       </p:sp>
       <p:sp>
         <p:nvSpPr>
-          <p:cNvPr id="29" name="Text 27"/>
-          <p:cNvSpPr/>
-          <p:nvPr/>
-        </p:nvSpPr>
-        <p:spPr>
-          <a:xfrm>
-            <a:off x="3602736" y="3364992"/>
-            <a:ext cx="1554480" cy="475488"/>
+          <p:cNvPr id="32" name="Text 30"/>
+          <p:cNvSpPr/>
+          <p:nvPr/>
+        </p:nvSpPr>
+        <p:spPr>
+          <a:xfrm>
+            <a:off x="4370832" y="3364992"/>
+            <a:ext cx="1645920" cy="475488"/>
           </a:xfrm>
           <a:prstGeom prst="rect">
             <a:avLst/>
@@ -14814,7 +16131,7 @@
                 <a:ea typeface="Trebuchet MS" pitchFamily="34" charset="-122"/>
                 <a:cs typeface="Trebuchet MS" pitchFamily="34" charset="-120"/>
               </a:rPr>
-              <a:t>form</a:t>
+              <a:t>in</a:t>
             </a:r>
             <a:endParaRPr lang="en-US" sz="1400" dirty="0"/>
           </a:p>
@@ -14822,14 +16139,14 @@
       </p:sp>
       <p:sp>
         <p:nvSpPr>
-          <p:cNvPr id="30" name="Text 28"/>
-          <p:cNvSpPr/>
-          <p:nvPr/>
-        </p:nvSpPr>
-        <p:spPr>
-          <a:xfrm>
-            <a:off x="5157216" y="3364992"/>
-            <a:ext cx="73152" cy="475488"/>
+          <p:cNvPr id="33" name="Text 31"/>
+          <p:cNvSpPr/>
+          <p:nvPr/>
+        </p:nvSpPr>
+        <p:spPr>
+          <a:xfrm>
+            <a:off x="6016752" y="3364992"/>
+            <a:ext cx="411480" cy="475488"/>
           </a:xfrm>
           <a:prstGeom prst="rect">
             <a:avLst/>
@@ -14861,14 +16178,14 @@
       </p:sp>
       <p:sp>
         <p:nvSpPr>
-          <p:cNvPr id="31" name="Shape 29"/>
-          <p:cNvSpPr/>
-          <p:nvPr/>
-        </p:nvSpPr>
-        <p:spPr>
-          <a:xfrm>
-            <a:off x="5230368" y="3364992"/>
-            <a:ext cx="1554480" cy="475488"/>
+          <p:cNvPr id="34" name="Shape 32"/>
+          <p:cNvSpPr/>
+          <p:nvPr/>
+        </p:nvSpPr>
+        <p:spPr>
+          <a:xfrm>
+            <a:off x="6428232" y="3364992"/>
+            <a:ext cx="1645920" cy="475488"/>
           </a:xfrm>
           <a:prstGeom prst="rect">
             <a:avLst>
@@ -14888,14 +16205,14 @@
       </p:sp>
       <p:sp>
         <p:nvSpPr>
-          <p:cNvPr id="32" name="Text 30"/>
-          <p:cNvSpPr/>
-          <p:nvPr/>
-        </p:nvSpPr>
-        <p:spPr>
-          <a:xfrm>
-            <a:off x="5230368" y="3364992"/>
-            <a:ext cx="1554480" cy="475488"/>
+          <p:cNvPr id="35" name="Text 33"/>
+          <p:cNvSpPr/>
+          <p:nvPr/>
+        </p:nvSpPr>
+        <p:spPr>
+          <a:xfrm>
+            <a:off x="6428232" y="3364992"/>
+            <a:ext cx="1645920" cy="475488"/>
           </a:xfrm>
           <a:prstGeom prst="rect">
             <a:avLst/>
@@ -14919,7 +16236,7 @@
                 <a:ea typeface="Trebuchet MS" pitchFamily="34" charset="-122"/>
                 <a:cs typeface="Trebuchet MS" pitchFamily="34" charset="-120"/>
               </a:rPr>
-              <a:t>a</a:t>
+              <a:t>formed</a:t>
             </a:r>
             <a:endParaRPr lang="en-US" sz="1400" dirty="0"/>
           </a:p>
@@ -14927,212 +16244,239 @@
       </p:sp>
       <p:sp>
         <p:nvSpPr>
-          <p:cNvPr id="33" name="Text 31"/>
-          <p:cNvSpPr/>
-          <p:nvPr/>
-        </p:nvSpPr>
-        <p:spPr>
-          <a:xfrm>
-            <a:off x="6784848" y="3364992"/>
-            <a:ext cx="73152" cy="475488"/>
-          </a:xfrm>
-          <a:prstGeom prst="rect">
-            <a:avLst/>
-          </a:prstGeom>
-          <a:noFill/>
-          <a:ln/>
-        </p:spPr>
-        <p:txBody>
-          <a:bodyPr wrap="square" lIns="0" tIns="0" rIns="0" bIns="0" rtlCol="0" anchor="ctr"/>
-          <a:lstStyle/>
-          <a:p>
-            <a:pPr algn="ctr" indent="0" marL="0">
-              <a:buNone/>
-            </a:pPr>
-            <a:r>
-              <a:rPr lang="en-US" sz="1600" b="1" dirty="0">
-                <a:solidFill>
-                  <a:srgbClr val="0D9488"/>
+          <p:cNvPr id="36" name="Shape 34"/>
+          <p:cNvSpPr/>
+          <p:nvPr/>
+        </p:nvSpPr>
+        <p:spPr>
+          <a:xfrm>
+            <a:off x="365760" y="4096512"/>
+            <a:ext cx="1371600" cy="804672"/>
+          </a:xfrm>
+          <a:prstGeom prst="rect">
+            <a:avLst>
+              <a:gd name="adj" fmla="val 6818"/>
+            </a:avLst>
+          </a:prstGeom>
+          <a:solidFill>
+            <a:srgbClr val="E2E8F0"/>
+          </a:solidFill>
+          <a:ln w="12700">
+            <a:solidFill>
+              <a:srgbClr val="E2E8F0"/>
+            </a:solidFill>
+            <a:prstDash val="solid"/>
+          </a:ln>
+        </p:spPr>
+      </p:sp>
+      <p:sp>
+        <p:nvSpPr>
+          <p:cNvPr id="37" name="Text 35"/>
+          <p:cNvSpPr/>
+          <p:nvPr/>
+        </p:nvSpPr>
+        <p:spPr>
+          <a:xfrm>
+            <a:off x="365760" y="4096512"/>
+            <a:ext cx="1371600" cy="804672"/>
+          </a:xfrm>
+          <a:prstGeom prst="rect">
+            <a:avLst/>
+          </a:prstGeom>
+          <a:noFill/>
+          <a:ln/>
+        </p:spPr>
+        <p:txBody>
+          <a:bodyPr wrap="square" lIns="0" tIns="0" rIns="0" bIns="0" rtlCol="0" anchor="ctr"/>
+          <a:lstStyle/>
+          <a:p>
+            <a:pPr algn="ctr" indent="0" marL="0">
+              <a:buNone/>
+            </a:pPr>
+            <a:r>
+              <a:rPr lang="en-US" sz="1100" b="1" dirty="0">
+                <a:solidFill>
+                  <a:srgbClr val="475569"/>
                 </a:solidFill>
                 <a:latin typeface="Trebuchet MS" pitchFamily="34" charset="0"/>
                 <a:ea typeface="Trebuchet MS" pitchFamily="34" charset="-122"/>
                 <a:cs typeface="Trebuchet MS" pitchFamily="34" charset="-120"/>
               </a:rPr>
-              <a:t>·</a:t>
-            </a:r>
-            <a:endParaRPr lang="en-US" sz="1600" dirty="0"/>
-          </a:p>
-        </p:txBody>
-      </p:sp>
-      <p:sp>
-        <p:nvSpPr>
-          <p:cNvPr id="34" name="Shape 32"/>
-          <p:cNvSpPr/>
-          <p:nvPr/>
-        </p:nvSpPr>
-        <p:spPr>
-          <a:xfrm>
-            <a:off x="6858000" y="3364992"/>
-            <a:ext cx="1554480" cy="475488"/>
+              <a:t>Phonemes</a:t>
+            </a:r>
+            <a:endParaRPr lang="en-US" sz="1100" dirty="0"/>
+          </a:p>
+        </p:txBody>
+      </p:sp>
+      <p:sp>
+        <p:nvSpPr>
+          <p:cNvPr id="38" name="Shape 36"/>
+          <p:cNvSpPr/>
+          <p:nvPr/>
+        </p:nvSpPr>
+        <p:spPr>
+          <a:xfrm>
+            <a:off x="1874520" y="4096512"/>
+            <a:ext cx="6903720" cy="658368"/>
           </a:xfrm>
           <a:prstGeom prst="rect">
             <a:avLst>
-              <a:gd name="adj" fmla="val 9615"/>
+              <a:gd name="adj" fmla="val 8333"/>
             </a:avLst>
           </a:prstGeom>
           <a:solidFill>
+            <a:srgbClr val="FCE7F3"/>
+          </a:solidFill>
+          <a:ln w="12700">
+            <a:solidFill>
+              <a:srgbClr val="DB2777"/>
+            </a:solidFill>
+            <a:prstDash val="solid"/>
+          </a:ln>
+        </p:spPr>
+      </p:sp>
+      <p:sp>
+        <p:nvSpPr>
+          <p:cNvPr id="39" name="Shape 37"/>
+          <p:cNvSpPr/>
+          <p:nvPr/>
+        </p:nvSpPr>
+        <p:spPr>
+          <a:xfrm>
+            <a:off x="2023872" y="4169664"/>
+            <a:ext cx="685800" cy="475488"/>
+          </a:xfrm>
+          <a:prstGeom prst="rect">
+            <a:avLst>
+              <a:gd name="adj" fmla="val 7692"/>
+            </a:avLst>
+          </a:prstGeom>
+          <a:solidFill>
             <a:srgbClr val="FFFFFF"/>
           </a:solidFill>
           <a:ln w="12700">
             <a:solidFill>
-              <a:srgbClr val="0D9488"/>
-            </a:solidFill>
-            <a:prstDash val="solid"/>
-          </a:ln>
-        </p:spPr>
-      </p:sp>
-      <p:sp>
-        <p:nvSpPr>
-          <p:cNvPr id="35" name="Text 33"/>
-          <p:cNvSpPr/>
-          <p:nvPr/>
-        </p:nvSpPr>
-        <p:spPr>
-          <a:xfrm>
-            <a:off x="6858000" y="3364992"/>
-            <a:ext cx="1554480" cy="475488"/>
-          </a:xfrm>
-          <a:prstGeom prst="rect">
-            <a:avLst/>
-          </a:prstGeom>
-          <a:noFill/>
-          <a:ln/>
-        </p:spPr>
-        <p:txBody>
-          <a:bodyPr wrap="square" lIns="0" tIns="0" rIns="0" bIns="0" rtlCol="0" anchor="ctr"/>
-          <a:lstStyle/>
-          <a:p>
-            <a:pPr algn="ctr" indent="0" marL="0">
-              <a:buNone/>
-            </a:pPr>
-            <a:r>
-              <a:rPr lang="en-US" sz="1400" b="1" dirty="0">
-                <a:solidFill>
-                  <a:srgbClr val="0D9488"/>
+              <a:srgbClr val="DB2777"/>
+            </a:solidFill>
+            <a:prstDash val="solid"/>
+          </a:ln>
+        </p:spPr>
+      </p:sp>
+      <p:sp>
+        <p:nvSpPr>
+          <p:cNvPr id="40" name="Text 38"/>
+          <p:cNvSpPr/>
+          <p:nvPr/>
+        </p:nvSpPr>
+        <p:spPr>
+          <a:xfrm>
+            <a:off x="2023872" y="4169664"/>
+            <a:ext cx="685800" cy="475488"/>
+          </a:xfrm>
+          <a:prstGeom prst="rect">
+            <a:avLst/>
+          </a:prstGeom>
+          <a:noFill/>
+          <a:ln/>
+        </p:spPr>
+        <p:txBody>
+          <a:bodyPr wrap="square" lIns="0" tIns="0" rIns="0" bIns="0" rtlCol="0" anchor="ctr"/>
+          <a:lstStyle/>
+          <a:p>
+            <a:pPr algn="ctr" indent="0" marL="0">
+              <a:buNone/>
+            </a:pPr>
+            <a:r>
+              <a:rPr lang="en-US" sz="900" b="1" dirty="0">
+                <a:solidFill>
+                  <a:srgbClr val="9D174D"/>
                 </a:solidFill>
                 <a:latin typeface="Trebuchet MS" pitchFamily="34" charset="0"/>
                 <a:ea typeface="Trebuchet MS" pitchFamily="34" charset="-122"/>
                 <a:cs typeface="Trebuchet MS" pitchFamily="34" charset="-120"/>
               </a:rPr>
-              <a:t>tive</a:t>
-            </a:r>
-            <a:endParaRPr lang="en-US" sz="1400" dirty="0"/>
-          </a:p>
-        </p:txBody>
-      </p:sp>
-      <p:sp>
-        <p:nvSpPr>
-          <p:cNvPr id="36" name="Shape 34"/>
-          <p:cNvSpPr/>
-          <p:nvPr/>
-        </p:nvSpPr>
-        <p:spPr>
-          <a:xfrm>
-            <a:off x="365760" y="4096512"/>
-            <a:ext cx="1371600" cy="804672"/>
+              <a:t>u</a:t>
+            </a:r>
+            <a:endParaRPr lang="en-US" sz="900" dirty="0"/>
+          </a:p>
+        </p:txBody>
+      </p:sp>
+      <p:sp>
+        <p:nvSpPr>
+          <p:cNvPr id="41" name="Shape 39"/>
+          <p:cNvSpPr/>
+          <p:nvPr/>
+        </p:nvSpPr>
+        <p:spPr>
+          <a:xfrm>
+            <a:off x="2831592" y="4169664"/>
+            <a:ext cx="685800" cy="475488"/>
           </a:xfrm>
           <a:prstGeom prst="rect">
             <a:avLst>
-              <a:gd name="adj" fmla="val 6818"/>
+              <a:gd name="adj" fmla="val 7692"/>
             </a:avLst>
           </a:prstGeom>
           <a:solidFill>
-            <a:srgbClr val="E2E8F0"/>
-          </a:solidFill>
-          <a:ln w="12700">
-            <a:solidFill>
-              <a:srgbClr val="E2E8F0"/>
-            </a:solidFill>
-            <a:prstDash val="solid"/>
-          </a:ln>
-        </p:spPr>
-      </p:sp>
-      <p:sp>
-        <p:nvSpPr>
-          <p:cNvPr id="37" name="Text 35"/>
-          <p:cNvSpPr/>
-          <p:nvPr/>
-        </p:nvSpPr>
-        <p:spPr>
-          <a:xfrm>
-            <a:off x="365760" y="4096512"/>
-            <a:ext cx="1371600" cy="804672"/>
-          </a:xfrm>
-          <a:prstGeom prst="rect">
-            <a:avLst/>
-          </a:prstGeom>
-          <a:noFill/>
-          <a:ln/>
-        </p:spPr>
-        <p:txBody>
-          <a:bodyPr wrap="square" lIns="0" tIns="0" rIns="0" bIns="0" rtlCol="0" anchor="ctr"/>
-          <a:lstStyle/>
-          <a:p>
-            <a:pPr algn="ctr" indent="0" marL="0">
-              <a:buNone/>
-            </a:pPr>
-            <a:r>
-              <a:rPr lang="en-US" sz="1100" b="1" dirty="0">
-                <a:solidFill>
-                  <a:srgbClr val="475569"/>
+            <a:srgbClr val="FFFFFF"/>
+          </a:solidFill>
+          <a:ln w="12700">
+            <a:solidFill>
+              <a:srgbClr val="DB2777"/>
+            </a:solidFill>
+            <a:prstDash val="solid"/>
+          </a:ln>
+        </p:spPr>
+      </p:sp>
+      <p:sp>
+        <p:nvSpPr>
+          <p:cNvPr id="42" name="Text 40"/>
+          <p:cNvSpPr/>
+          <p:nvPr/>
+        </p:nvSpPr>
+        <p:spPr>
+          <a:xfrm>
+            <a:off x="2831592" y="4169664"/>
+            <a:ext cx="685800" cy="475488"/>
+          </a:xfrm>
+          <a:prstGeom prst="rect">
+            <a:avLst/>
+          </a:prstGeom>
+          <a:noFill/>
+          <a:ln/>
+        </p:spPr>
+        <p:txBody>
+          <a:bodyPr wrap="square" lIns="0" tIns="0" rIns="0" bIns="0" rtlCol="0" anchor="ctr"/>
+          <a:lstStyle/>
+          <a:p>
+            <a:pPr algn="ctr" indent="0" marL="0">
+              <a:buNone/>
+            </a:pPr>
+            <a:r>
+              <a:rPr lang="en-US" sz="900" b="1" dirty="0">
+                <a:solidFill>
+                  <a:srgbClr val="9D174D"/>
                 </a:solidFill>
                 <a:latin typeface="Trebuchet MS" pitchFamily="34" charset="0"/>
                 <a:ea typeface="Trebuchet MS" pitchFamily="34" charset="-122"/>
                 <a:cs typeface="Trebuchet MS" pitchFamily="34" charset="-120"/>
               </a:rPr>
-              <a:t>Phonemes</a:t>
-            </a:r>
-            <a:endParaRPr lang="en-US" sz="1100" dirty="0"/>
-          </a:p>
-        </p:txBody>
-      </p:sp>
-      <p:sp>
-        <p:nvSpPr>
-          <p:cNvPr id="38" name="Shape 36"/>
-          <p:cNvSpPr/>
-          <p:nvPr/>
-        </p:nvSpPr>
-        <p:spPr>
-          <a:xfrm>
-            <a:off x="1874520" y="4096512"/>
-            <a:ext cx="6903720" cy="658368"/>
-          </a:xfrm>
-          <a:prstGeom prst="rect">
-            <a:avLst>
-              <a:gd name="adj" fmla="val 8333"/>
-            </a:avLst>
-          </a:prstGeom>
-          <a:solidFill>
-            <a:srgbClr val="FCE7F3"/>
-          </a:solidFill>
-          <a:ln w="12700">
-            <a:solidFill>
-              <a:srgbClr val="DB2777"/>
-            </a:solidFill>
-            <a:prstDash val="solid"/>
-          </a:ln>
-        </p:spPr>
-      </p:sp>
-      <p:sp>
-        <p:nvSpPr>
-          <p:cNvPr id="39" name="Shape 37"/>
-          <p:cNvSpPr/>
-          <p:nvPr/>
-        </p:nvSpPr>
-        <p:spPr>
-          <a:xfrm>
-            <a:off x="1951330" y="4169664"/>
-            <a:ext cx="676656" cy="475488"/>
+              <a:t>n</a:t>
+            </a:r>
+            <a:endParaRPr lang="en-US" sz="900" dirty="0"/>
+          </a:p>
+        </p:txBody>
+      </p:sp>
+      <p:sp>
+        <p:nvSpPr>
+          <p:cNvPr id="43" name="Shape 41"/>
+          <p:cNvSpPr/>
+          <p:nvPr/>
+        </p:nvSpPr>
+        <p:spPr>
+          <a:xfrm>
+            <a:off x="3639312" y="4169664"/>
+            <a:ext cx="685800" cy="475488"/>
           </a:xfrm>
           <a:prstGeom prst="rect">
             <a:avLst>
@@ -15152,14 +16496,14 @@
       </p:sp>
       <p:sp>
         <p:nvSpPr>
-          <p:cNvPr id="40" name="Text 38"/>
-          <p:cNvSpPr/>
-          <p:nvPr/>
-        </p:nvSpPr>
-        <p:spPr>
-          <a:xfrm>
-            <a:off x="1951330" y="4169664"/>
-            <a:ext cx="676656" cy="475488"/>
+          <p:cNvPr id="44" name="Text 42"/>
+          <p:cNvSpPr/>
+          <p:nvPr/>
+        </p:nvSpPr>
+        <p:spPr>
+          <a:xfrm>
+            <a:off x="3639312" y="4169664"/>
+            <a:ext cx="685800" cy="475488"/>
           </a:xfrm>
           <a:prstGeom prst="rect">
             <a:avLst/>
@@ -15191,14 +16535,14 @@
       </p:sp>
       <p:sp>
         <p:nvSpPr>
-          <p:cNvPr id="41" name="Shape 39"/>
-          <p:cNvSpPr/>
-          <p:nvPr/>
-        </p:nvSpPr>
-        <p:spPr>
-          <a:xfrm>
-            <a:off x="2677363" y="4169664"/>
-            <a:ext cx="676656" cy="475488"/>
+          <p:cNvPr id="45" name="Shape 43"/>
+          <p:cNvSpPr/>
+          <p:nvPr/>
+        </p:nvSpPr>
+        <p:spPr>
+          <a:xfrm>
+            <a:off x="4447032" y="4169664"/>
+            <a:ext cx="685800" cy="475488"/>
           </a:xfrm>
           <a:prstGeom prst="rect">
             <a:avLst>
@@ -15218,14 +16562,14 @@
       </p:sp>
       <p:sp>
         <p:nvSpPr>
-          <p:cNvPr id="42" name="Text 40"/>
-          <p:cNvSpPr/>
-          <p:nvPr/>
-        </p:nvSpPr>
-        <p:spPr>
-          <a:xfrm>
-            <a:off x="2677363" y="4169664"/>
-            <a:ext cx="676656" cy="475488"/>
+          <p:cNvPr id="46" name="Text 44"/>
+          <p:cNvSpPr/>
+          <p:nvPr/>
+        </p:nvSpPr>
+        <p:spPr>
+          <a:xfrm>
+            <a:off x="4447032" y="4169664"/>
+            <a:ext cx="685800" cy="475488"/>
           </a:xfrm>
           <a:prstGeom prst="rect">
             <a:avLst/>
@@ -15257,14 +16601,14 @@
       </p:sp>
       <p:sp>
         <p:nvSpPr>
-          <p:cNvPr id="43" name="Shape 41"/>
-          <p:cNvSpPr/>
-          <p:nvPr/>
-        </p:nvSpPr>
-        <p:spPr>
-          <a:xfrm>
-            <a:off x="3403397" y="4169664"/>
-            <a:ext cx="676656" cy="475488"/>
+          <p:cNvPr id="47" name="Shape 45"/>
+          <p:cNvSpPr/>
+          <p:nvPr/>
+        </p:nvSpPr>
+        <p:spPr>
+          <a:xfrm>
+            <a:off x="5254752" y="4169664"/>
+            <a:ext cx="685800" cy="475488"/>
           </a:xfrm>
           <a:prstGeom prst="rect">
             <a:avLst>
@@ -15284,14 +16628,14 @@
       </p:sp>
       <p:sp>
         <p:nvSpPr>
-          <p:cNvPr id="44" name="Text 42"/>
-          <p:cNvSpPr/>
-          <p:nvPr/>
-        </p:nvSpPr>
-        <p:spPr>
-          <a:xfrm>
-            <a:off x="3403397" y="4169664"/>
-            <a:ext cx="676656" cy="475488"/>
+          <p:cNvPr id="48" name="Text 46"/>
+          <p:cNvSpPr/>
+          <p:nvPr/>
+        </p:nvSpPr>
+        <p:spPr>
+          <a:xfrm>
+            <a:off x="5254752" y="4169664"/>
+            <a:ext cx="685800" cy="475488"/>
           </a:xfrm>
           <a:prstGeom prst="rect">
             <a:avLst/>
@@ -15323,14 +16667,14 @@
       </p:sp>
       <p:sp>
         <p:nvSpPr>
-          <p:cNvPr id="45" name="Shape 43"/>
-          <p:cNvSpPr/>
-          <p:nvPr/>
-        </p:nvSpPr>
-        <p:spPr>
-          <a:xfrm>
-            <a:off x="4129430" y="4169664"/>
-            <a:ext cx="676656" cy="475488"/>
+          <p:cNvPr id="49" name="Shape 47"/>
+          <p:cNvSpPr/>
+          <p:nvPr/>
+        </p:nvSpPr>
+        <p:spPr>
+          <a:xfrm>
+            <a:off x="6062472" y="4169664"/>
+            <a:ext cx="685800" cy="475488"/>
           </a:xfrm>
           <a:prstGeom prst="rect">
             <a:avLst>
@@ -15350,14 +16694,14 @@
       </p:sp>
       <p:sp>
         <p:nvSpPr>
-          <p:cNvPr id="46" name="Text 44"/>
-          <p:cNvSpPr/>
-          <p:nvPr/>
-        </p:nvSpPr>
-        <p:spPr>
-          <a:xfrm>
-            <a:off x="4129430" y="4169664"/>
-            <a:ext cx="676656" cy="475488"/>
+          <p:cNvPr id="50" name="Text 48"/>
+          <p:cNvSpPr/>
+          <p:nvPr/>
+        </p:nvSpPr>
+        <p:spPr>
+          <a:xfrm>
+            <a:off x="6062472" y="4169664"/>
+            <a:ext cx="685800" cy="475488"/>
           </a:xfrm>
           <a:prstGeom prst="rect">
             <a:avLst/>
@@ -15389,14 +16733,14 @@
       </p:sp>
       <p:sp>
         <p:nvSpPr>
-          <p:cNvPr id="47" name="Shape 45"/>
-          <p:cNvSpPr/>
-          <p:nvPr/>
-        </p:nvSpPr>
-        <p:spPr>
-          <a:xfrm>
-            <a:off x="4855464" y="4169664"/>
-            <a:ext cx="676656" cy="475488"/>
+          <p:cNvPr id="51" name="Shape 49"/>
+          <p:cNvSpPr/>
+          <p:nvPr/>
+        </p:nvSpPr>
+        <p:spPr>
+          <a:xfrm>
+            <a:off x="6870192" y="4169664"/>
+            <a:ext cx="685800" cy="475488"/>
           </a:xfrm>
           <a:prstGeom prst="rect">
             <a:avLst>
@@ -15416,14 +16760,14 @@
       </p:sp>
       <p:sp>
         <p:nvSpPr>
-          <p:cNvPr id="48" name="Text 46"/>
-          <p:cNvSpPr/>
-          <p:nvPr/>
-        </p:nvSpPr>
-        <p:spPr>
-          <a:xfrm>
-            <a:off x="4855464" y="4169664"/>
-            <a:ext cx="676656" cy="475488"/>
+          <p:cNvPr id="52" name="Text 50"/>
+          <p:cNvSpPr/>
+          <p:nvPr/>
+        </p:nvSpPr>
+        <p:spPr>
+          <a:xfrm>
+            <a:off x="6870192" y="4169664"/>
+            <a:ext cx="685800" cy="475488"/>
           </a:xfrm>
           <a:prstGeom prst="rect">
             <a:avLst/>
@@ -15455,14 +16799,14 @@
       </p:sp>
       <p:sp>
         <p:nvSpPr>
-          <p:cNvPr id="49" name="Shape 47"/>
-          <p:cNvSpPr/>
-          <p:nvPr/>
-        </p:nvSpPr>
-        <p:spPr>
-          <a:xfrm>
-            <a:off x="5581498" y="4169664"/>
-            <a:ext cx="676656" cy="475488"/>
+          <p:cNvPr id="53" name="Shape 51"/>
+          <p:cNvSpPr/>
+          <p:nvPr/>
+        </p:nvSpPr>
+        <p:spPr>
+          <a:xfrm>
+            <a:off x="7677912" y="4169664"/>
+            <a:ext cx="685800" cy="475488"/>
           </a:xfrm>
           <a:prstGeom prst="rect">
             <a:avLst>
@@ -15482,14 +16826,14 @@
       </p:sp>
       <p:sp>
         <p:nvSpPr>
-          <p:cNvPr id="50" name="Text 48"/>
-          <p:cNvSpPr/>
-          <p:nvPr/>
-        </p:nvSpPr>
-        <p:spPr>
-          <a:xfrm>
-            <a:off x="5581498" y="4169664"/>
-            <a:ext cx="676656" cy="475488"/>
+          <p:cNvPr id="54" name="Text 52"/>
+          <p:cNvSpPr/>
+          <p:nvPr/>
+        </p:nvSpPr>
+        <p:spPr>
+          <a:xfrm>
+            <a:off x="7677912" y="4169664"/>
+            <a:ext cx="685800" cy="475488"/>
           </a:xfrm>
           <a:prstGeom prst="rect">
             <a:avLst/>
@@ -15513,205 +16857,7 @@
                 <a:ea typeface="Trebuchet MS" pitchFamily="34" charset="-122"/>
                 <a:cs typeface="Trebuchet MS" pitchFamily="34" charset="-120"/>
               </a:rPr>
-              <a:t>a</a:t>
-            </a:r>
-            <a:endParaRPr lang="en-US" sz="900" dirty="0"/>
-          </a:p>
-        </p:txBody>
-      </p:sp>
-      <p:sp>
-        <p:nvSpPr>
-          <p:cNvPr id="51" name="Shape 49"/>
-          <p:cNvSpPr/>
-          <p:nvPr/>
-        </p:nvSpPr>
-        <p:spPr>
-          <a:xfrm>
-            <a:off x="6307531" y="4169664"/>
-            <a:ext cx="676656" cy="475488"/>
-          </a:xfrm>
-          <a:prstGeom prst="rect">
-            <a:avLst>
-              <a:gd name="adj" fmla="val 7692"/>
-            </a:avLst>
-          </a:prstGeom>
-          <a:solidFill>
-            <a:srgbClr val="FFFFFF"/>
-          </a:solidFill>
-          <a:ln w="12700">
-            <a:solidFill>
-              <a:srgbClr val="DB2777"/>
-            </a:solidFill>
-            <a:prstDash val="solid"/>
-          </a:ln>
-        </p:spPr>
-      </p:sp>
-      <p:sp>
-        <p:nvSpPr>
-          <p:cNvPr id="52" name="Text 50"/>
-          <p:cNvSpPr/>
-          <p:nvPr/>
-        </p:nvSpPr>
-        <p:spPr>
-          <a:xfrm>
-            <a:off x="6307531" y="4169664"/>
-            <a:ext cx="676656" cy="475488"/>
-          </a:xfrm>
-          <a:prstGeom prst="rect">
-            <a:avLst/>
-          </a:prstGeom>
-          <a:noFill/>
-          <a:ln/>
-        </p:spPr>
-        <p:txBody>
-          <a:bodyPr wrap="square" lIns="0" tIns="0" rIns="0" bIns="0" rtlCol="0" anchor="ctr"/>
-          <a:lstStyle/>
-          <a:p>
-            <a:pPr algn="ctr" indent="0" marL="0">
-              <a:buNone/>
-            </a:pPr>
-            <a:r>
-              <a:rPr lang="en-US" sz="900" b="1" dirty="0">
-                <a:solidFill>
-                  <a:srgbClr val="9D174D"/>
-                </a:solidFill>
-                <a:latin typeface="Trebuchet MS" pitchFamily="34" charset="0"/>
-                <a:ea typeface="Trebuchet MS" pitchFamily="34" charset="-122"/>
-                <a:cs typeface="Trebuchet MS" pitchFamily="34" charset="-120"/>
-              </a:rPr>
-              <a:t>t</a:t>
-            </a:r>
-            <a:endParaRPr lang="en-US" sz="900" dirty="0"/>
-          </a:p>
-        </p:txBody>
-      </p:sp>
-      <p:sp>
-        <p:nvSpPr>
-          <p:cNvPr id="53" name="Shape 51"/>
-          <p:cNvSpPr/>
-          <p:nvPr/>
-        </p:nvSpPr>
-        <p:spPr>
-          <a:xfrm>
-            <a:off x="7033565" y="4169664"/>
-            <a:ext cx="676656" cy="475488"/>
-          </a:xfrm>
-          <a:prstGeom prst="rect">
-            <a:avLst>
-              <a:gd name="adj" fmla="val 7692"/>
-            </a:avLst>
-          </a:prstGeom>
-          <a:solidFill>
-            <a:srgbClr val="FFFFFF"/>
-          </a:solidFill>
-          <a:ln w="12700">
-            <a:solidFill>
-              <a:srgbClr val="DB2777"/>
-            </a:solidFill>
-            <a:prstDash val="solid"/>
-          </a:ln>
-        </p:spPr>
-      </p:sp>
-      <p:sp>
-        <p:nvSpPr>
-          <p:cNvPr id="54" name="Text 52"/>
-          <p:cNvSpPr/>
-          <p:nvPr/>
-        </p:nvSpPr>
-        <p:spPr>
-          <a:xfrm>
-            <a:off x="7033565" y="4169664"/>
-            <a:ext cx="676656" cy="475488"/>
-          </a:xfrm>
-          <a:prstGeom prst="rect">
-            <a:avLst/>
-          </a:prstGeom>
-          <a:noFill/>
-          <a:ln/>
-        </p:spPr>
-        <p:txBody>
-          <a:bodyPr wrap="square" lIns="0" tIns="0" rIns="0" bIns="0" rtlCol="0" anchor="ctr"/>
-          <a:lstStyle/>
-          <a:p>
-            <a:pPr algn="ctr" indent="0" marL="0">
-              <a:buNone/>
-            </a:pPr>
-            <a:r>
-              <a:rPr lang="en-US" sz="900" b="1" dirty="0">
-                <a:solidFill>
-                  <a:srgbClr val="9D174D"/>
-                </a:solidFill>
-                <a:latin typeface="Trebuchet MS" pitchFamily="34" charset="0"/>
-                <a:ea typeface="Trebuchet MS" pitchFamily="34" charset="-122"/>
-                <a:cs typeface="Trebuchet MS" pitchFamily="34" charset="-120"/>
-              </a:rPr>
-              <a:t>i</a:t>
-            </a:r>
-            <a:endParaRPr lang="en-US" sz="900" dirty="0"/>
-          </a:p>
-        </p:txBody>
-      </p:sp>
-      <p:sp>
-        <p:nvSpPr>
-          <p:cNvPr id="55" name="Shape 53"/>
-          <p:cNvSpPr/>
-          <p:nvPr/>
-        </p:nvSpPr>
-        <p:spPr>
-          <a:xfrm>
-            <a:off x="7759598" y="4169664"/>
-            <a:ext cx="676656" cy="475488"/>
-          </a:xfrm>
-          <a:prstGeom prst="rect">
-            <a:avLst>
-              <a:gd name="adj" fmla="val 7692"/>
-            </a:avLst>
-          </a:prstGeom>
-          <a:solidFill>
-            <a:srgbClr val="FFFFFF"/>
-          </a:solidFill>
-          <a:ln w="12700">
-            <a:solidFill>
-              <a:srgbClr val="DB2777"/>
-            </a:solidFill>
-            <a:prstDash val="solid"/>
-          </a:ln>
-        </p:spPr>
-      </p:sp>
-      <p:sp>
-        <p:nvSpPr>
-          <p:cNvPr id="56" name="Text 54"/>
-          <p:cNvSpPr/>
-          <p:nvPr/>
-        </p:nvSpPr>
-        <p:spPr>
-          <a:xfrm>
-            <a:off x="7759598" y="4169664"/>
-            <a:ext cx="676656" cy="475488"/>
-          </a:xfrm>
-          <a:prstGeom prst="rect">
-            <a:avLst/>
-          </a:prstGeom>
-          <a:noFill/>
-          <a:ln/>
-        </p:spPr>
-        <p:txBody>
-          <a:bodyPr wrap="square" lIns="0" tIns="0" rIns="0" bIns="0" rtlCol="0" anchor="ctr"/>
-          <a:lstStyle/>
-          <a:p>
-            <a:pPr algn="ctr" indent="0" marL="0">
-              <a:buNone/>
-            </a:pPr>
-            <a:r>
-              <a:rPr lang="en-US" sz="900" b="1" dirty="0">
-                <a:solidFill>
-                  <a:srgbClr val="9D174D"/>
-                </a:solidFill>
-                <a:latin typeface="Trebuchet MS" pitchFamily="34" charset="0"/>
-                <a:ea typeface="Trebuchet MS" pitchFamily="34" charset="-122"/>
-                <a:cs typeface="Trebuchet MS" pitchFamily="34" charset="-120"/>
-              </a:rPr>
-              <a:t>ve</a:t>
+              <a:t>d</a:t>
             </a:r>
             <a:endParaRPr lang="en-US" sz="900" dirty="0"/>
           </a:p>
@@ -16285,7 +17431,7 @@
                 <a:ea typeface="Calibri" pitchFamily="34" charset="-122"/>
                 <a:cs typeface="Calibri" pitchFamily="34" charset="-120"/>
               </a:rPr>
-              <a:t>Word Labs  •  wordlabs.app  •  Root: 'inform' = to give shape or knowledge</a:t>
+              <a:t>Word Labs  •  wordlabs.app  •  Root: 'inform' = to give knowledge or shape</a:t>
             </a:r>
             <a:endParaRPr lang="en-US" sz="800" dirty="0"/>
           </a:p>
@@ -16925,7 +18071,7 @@
                 <a:ea typeface="Calibri" pitchFamily="34" charset="-122"/>
                 <a:cs typeface="Calibri" pitchFamily="34" charset="-120"/>
               </a:rPr>
-              <a:t>Word Labs  •  wordlabs.app  •  Root: 'inform' = to give shape or knowledge</a:t>
+              <a:t>Word Labs  •  wordlabs.app  •  Root: 'inform' = to give knowledge or shape</a:t>
             </a:r>
             <a:endParaRPr lang="en-US" sz="800" dirty="0"/>
           </a:p>
@@ -17037,7 +18183,7 @@
                 <a:ea typeface="Calibri" pitchFamily="34" charset="-122"/>
                 <a:cs typeface="Calibri" pitchFamily="34" charset="-120"/>
               </a:rPr>
-              <a:t>The well-</a:t>
+              <a:t>The </a:t>
             </a:r>
             <a:pPr algn="l" indent="0" marL="0">
               <a:buNone/>
@@ -17054,7 +18200,7 @@
                 <a:ea typeface="Calibri" pitchFamily="34" charset="-122"/>
                 <a:cs typeface="Calibri" pitchFamily="34" charset="-120"/>
               </a:rPr>
-              <a:t>informed</a:t>
+              <a:t>informant</a:t>
             </a:r>
             <a:pPr algn="l" indent="0" marL="0">
               <a:buNone/>
@@ -17068,7 +18214,7 @@
                 <a:ea typeface="Calibri" pitchFamily="34" charset="-122"/>
                 <a:cs typeface="Calibri" pitchFamily="34" charset="-120"/>
               </a:rPr>
-              <a:t> scientist will </a:t>
+              <a:t> shared </a:t>
             </a:r>
             <a:pPr algn="l" indent="0" marL="0">
               <a:buNone/>
@@ -17085,7 +18231,7 @@
                 <a:ea typeface="Calibri" pitchFamily="34" charset="-122"/>
                 <a:cs typeface="Calibri" pitchFamily="34" charset="-120"/>
               </a:rPr>
-              <a:t>inform</a:t>
+              <a:t>information</a:t>
             </a:r>
             <a:pPr algn="l" indent="0" marL="0">
               <a:buNone/>
@@ -17099,7 +18245,7 @@
                 <a:ea typeface="Calibri" pitchFamily="34" charset="-122"/>
                 <a:cs typeface="Calibri" pitchFamily="34" charset="-120"/>
               </a:rPr>
-              <a:t> the audience, sharing </a:t>
+              <a:t> carefully; however, </a:t>
             </a:r>
             <a:pPr algn="l" indent="0" marL="0">
               <a:buNone/>
@@ -17116,7 +18262,7 @@
                 <a:ea typeface="Calibri" pitchFamily="34" charset="-122"/>
                 <a:cs typeface="Calibri" pitchFamily="34" charset="-120"/>
               </a:rPr>
-              <a:t>information</a:t>
+              <a:t>misinforming</a:t>
             </a:r>
             <a:pPr algn="l" indent="0" marL="0">
               <a:buNone/>
@@ -17130,7 +18276,7 @@
                 <a:ea typeface="Calibri" pitchFamily="34" charset="-122"/>
                 <a:cs typeface="Calibri" pitchFamily="34" charset="-120"/>
               </a:rPr>
-              <a:t> about her latest discovery.</a:t>
+              <a:t> the public would have been dangerous.</a:t>
             </a:r>
             <a:endParaRPr lang="en-US" sz="1800" dirty="0"/>
           </a:p>
@@ -17285,7 +18431,7 @@
                 <a:ea typeface="Trebuchet MS" pitchFamily="34" charset="-122"/>
                 <a:cs typeface="Trebuchet MS" pitchFamily="34" charset="-120"/>
               </a:rPr>
-              <a:t>informed</a:t>
+              <a:t>informant</a:t>
             </a:r>
             <a:endParaRPr lang="en-US" sz="1400" dirty="0"/>
           </a:p>
@@ -17413,7 +18559,7 @@
                 <a:ea typeface="Trebuchet MS" pitchFamily="34" charset="-122"/>
                 <a:cs typeface="Trebuchet MS" pitchFamily="34" charset="-120"/>
               </a:rPr>
-              <a:t>inform</a:t>
+              <a:t>information</a:t>
             </a:r>
             <a:endParaRPr lang="en-US" sz="1400" dirty="0"/>
           </a:p>
@@ -17541,7 +18687,7 @@
                 <a:ea typeface="Trebuchet MS" pitchFamily="34" charset="-122"/>
                 <a:cs typeface="Trebuchet MS" pitchFamily="34" charset="-120"/>
               </a:rPr>
-              <a:t>information</a:t>
+              <a:t>misinforming</a:t>
             </a:r>
             <a:endParaRPr lang="en-US" sz="1400" dirty="0"/>
           </a:p>
@@ -17872,7 +19018,7 @@
                 <a:ea typeface="Calibri" pitchFamily="34" charset="-122"/>
                 <a:cs typeface="Calibri" pitchFamily="34" charset="-120"/>
               </a:rPr>
-              <a:t>Word Labs  •  wordlabs.app  •  Root: 'inform' = to give shape or knowledge</a:t>
+              <a:t>Word Labs  •  wordlabs.app  •  Root: 'inform' = to give knowledge or shape</a:t>
             </a:r>
             <a:endParaRPr lang="en-US" sz="800" dirty="0"/>
           </a:p>
@@ -18011,7 +19157,7 @@
                 <a:ea typeface="Trebuchet MS" pitchFamily="34" charset="-122"/>
                 <a:cs typeface="Trebuchet MS" pitchFamily="34" charset="-120"/>
               </a:rPr>
-              <a:t>informed</a:t>
+              <a:t>informant</a:t>
             </a:r>
             <a:endParaRPr lang="en-US" sz="2800" dirty="0"/>
           </a:p>
@@ -18699,7 +19845,7 @@
                 <a:ea typeface="Calibri" pitchFamily="34" charset="-122"/>
                 <a:cs typeface="Calibri" pitchFamily="34" charset="-120"/>
               </a:rPr>
-              <a:t>Word Labs  •  wordlabs.app  •  Root: 'inform' = to give shape or knowledge</a:t>
+              <a:t>Word Labs  •  wordlabs.app  •  Root: 'inform' = to give knowledge or shape</a:t>
             </a:r>
             <a:endParaRPr lang="en-US" sz="800" dirty="0"/>
           </a:p>
@@ -18838,7 +19984,7 @@
                 <a:ea typeface="Trebuchet MS" pitchFamily="34" charset="-122"/>
                 <a:cs typeface="Trebuchet MS" pitchFamily="34" charset="-120"/>
               </a:rPr>
-              <a:t>informed</a:t>
+              <a:t>informant</a:t>
             </a:r>
             <a:endParaRPr lang="en-US" sz="2800" dirty="0"/>
           </a:p>
@@ -19016,7 +20162,7 @@
                 <a:ea typeface="Calibri" pitchFamily="34" charset="-122"/>
                 <a:cs typeface="Calibri" pitchFamily="34" charset="-120"/>
               </a:rPr>
-              <a:t>to give knowledge or shape</a:t>
+              <a:t>to give knowledge</a:t>
             </a:r>
             <a:endParaRPr lang="en-US" sz="850" dirty="0"/>
           </a:p>
@@ -19089,7 +20235,7 @@
                 <a:ea typeface="Trebuchet MS" pitchFamily="34" charset="-122"/>
                 <a:cs typeface="Trebuchet MS" pitchFamily="34" charset="-120"/>
               </a:rPr>
-              <a:t>ed</a:t>
+              <a:t>ant</a:t>
             </a:r>
             <a:endParaRPr lang="en-US" sz="1300" dirty="0"/>
           </a:p>
@@ -19128,7 +20274,7 @@
                 <a:ea typeface="Calibri" pitchFamily="34" charset="-122"/>
                 <a:cs typeface="Calibri" pitchFamily="34" charset="-120"/>
               </a:rPr>
-              <a:t>in the past; having been</a:t>
+              <a:t>a person who does something</a:t>
             </a:r>
             <a:endParaRPr lang="en-US" sz="850" dirty="0"/>
           </a:p>
@@ -19684,7 +20830,7 @@
                 <a:ea typeface="Calibri" pitchFamily="34" charset="-122"/>
                 <a:cs typeface="Calibri" pitchFamily="34" charset="-120"/>
               </a:rPr>
-              <a:t>Word Labs  •  wordlabs.app  •  Root: 'inform' = to give shape or knowledge</a:t>
+              <a:t>Word Labs  •  wordlabs.app  •  Root: 'inform' = to give knowledge or shape</a:t>
             </a:r>
             <a:endParaRPr lang="en-US" sz="800" dirty="0"/>
           </a:p>
@@ -19823,7 +20969,7 @@
                 <a:ea typeface="Trebuchet MS" pitchFamily="34" charset="-122"/>
                 <a:cs typeface="Trebuchet MS" pitchFamily="34" charset="-120"/>
               </a:rPr>
-              <a:t>informed</a:t>
+              <a:t>informant</a:t>
             </a:r>
             <a:endParaRPr lang="en-US" sz="2800" dirty="0"/>
           </a:p>
@@ -20001,7 +21147,7 @@
                 <a:ea typeface="Calibri" pitchFamily="34" charset="-122"/>
                 <a:cs typeface="Calibri" pitchFamily="34" charset="-120"/>
               </a:rPr>
-              <a:t>to give knowledge or shape</a:t>
+              <a:t>to give knowledge</a:t>
             </a:r>
             <a:endParaRPr lang="en-US" sz="850" dirty="0"/>
           </a:p>
@@ -20074,7 +21220,7 @@
                 <a:ea typeface="Trebuchet MS" pitchFamily="34" charset="-122"/>
                 <a:cs typeface="Trebuchet MS" pitchFamily="34" charset="-120"/>
               </a:rPr>
-              <a:t>ed</a:t>
+              <a:t>ant</a:t>
             </a:r>
             <a:endParaRPr lang="en-US" sz="1300" dirty="0"/>
           </a:p>
@@ -20113,7 +21259,7 @@
                 <a:ea typeface="Calibri" pitchFamily="34" charset="-122"/>
                 <a:cs typeface="Calibri" pitchFamily="34" charset="-120"/>
               </a:rPr>
-              <a:t>in the past; having been</a:t>
+              <a:t>a person who does something</a:t>
             </a:r>
             <a:endParaRPr lang="en-US" sz="850" dirty="0"/>
           </a:p>
@@ -20220,7 +21366,7 @@
         </p:nvSpPr>
         <p:spPr>
           <a:xfrm>
-            <a:off x="2999232" y="3364992"/>
+            <a:off x="2313432" y="3364992"/>
             <a:ext cx="1645920" cy="475488"/>
           </a:xfrm>
           <a:prstGeom prst="rect">
@@ -20247,7 +21393,7 @@
         </p:nvSpPr>
         <p:spPr>
           <a:xfrm>
-            <a:off x="2999232" y="3364992"/>
+            <a:off x="2313432" y="3364992"/>
             <a:ext cx="1645920" cy="475488"/>
           </a:xfrm>
           <a:prstGeom prst="rect">
@@ -20286,8 +21432,8 @@
         </p:nvSpPr>
         <p:spPr>
           <a:xfrm>
-            <a:off x="4645152" y="3364992"/>
-            <a:ext cx="1097280" cy="475488"/>
+            <a:off x="3959352" y="3364992"/>
+            <a:ext cx="411480" cy="475488"/>
           </a:xfrm>
           <a:prstGeom prst="rect">
             <a:avLst/>
@@ -20325,7 +21471,7 @@
         </p:nvSpPr>
         <p:spPr>
           <a:xfrm>
-            <a:off x="5742432" y="3364992"/>
+            <a:off x="4370832" y="3364992"/>
             <a:ext cx="1645920" cy="475488"/>
           </a:xfrm>
           <a:prstGeom prst="rect">
@@ -20352,7 +21498,7 @@
         </p:nvSpPr>
         <p:spPr>
           <a:xfrm>
-            <a:off x="5742432" y="3364992"/>
+            <a:off x="4370832" y="3364992"/>
             <a:ext cx="1645920" cy="475488"/>
           </a:xfrm>
           <a:prstGeom prst="rect">
@@ -20377,7 +21523,7 @@
                 <a:ea typeface="Trebuchet MS" pitchFamily="34" charset="-122"/>
                 <a:cs typeface="Trebuchet MS" pitchFamily="34" charset="-120"/>
               </a:rPr>
-              <a:t>formed</a:t>
+              <a:t>form</a:t>
             </a:r>
             <a:endParaRPr lang="en-US" sz="1400" dirty="0"/>
           </a:p>
@@ -20385,7 +21531,112 @@
       </p:sp>
       <p:sp>
         <p:nvSpPr>
-          <p:cNvPr id="30" name="Shape 28"/>
+          <p:cNvPr id="30" name="Text 28"/>
+          <p:cNvSpPr/>
+          <p:nvPr/>
+        </p:nvSpPr>
+        <p:spPr>
+          <a:xfrm>
+            <a:off x="6016752" y="3364992"/>
+            <a:ext cx="411480" cy="475488"/>
+          </a:xfrm>
+          <a:prstGeom prst="rect">
+            <a:avLst/>
+          </a:prstGeom>
+          <a:noFill/>
+          <a:ln/>
+        </p:spPr>
+        <p:txBody>
+          <a:bodyPr wrap="square" lIns="0" tIns="0" rIns="0" bIns="0" rtlCol="0" anchor="ctr"/>
+          <a:lstStyle/>
+          <a:p>
+            <a:pPr algn="ctr" indent="0" marL="0">
+              <a:buNone/>
+            </a:pPr>
+            <a:r>
+              <a:rPr lang="en-US" sz="1600" b="1" dirty="0">
+                <a:solidFill>
+                  <a:srgbClr val="0D9488"/>
+                </a:solidFill>
+                <a:latin typeface="Trebuchet MS" pitchFamily="34" charset="0"/>
+                <a:ea typeface="Trebuchet MS" pitchFamily="34" charset="-122"/>
+                <a:cs typeface="Trebuchet MS" pitchFamily="34" charset="-120"/>
+              </a:rPr>
+              <a:t>·</a:t>
+            </a:r>
+            <a:endParaRPr lang="en-US" sz="1600" dirty="0"/>
+          </a:p>
+        </p:txBody>
+      </p:sp>
+      <p:sp>
+        <p:nvSpPr>
+          <p:cNvPr id="31" name="Shape 29"/>
+          <p:cNvSpPr/>
+          <p:nvPr/>
+        </p:nvSpPr>
+        <p:spPr>
+          <a:xfrm>
+            <a:off x="6428232" y="3364992"/>
+            <a:ext cx="1645920" cy="475488"/>
+          </a:xfrm>
+          <a:prstGeom prst="rect">
+            <a:avLst>
+              <a:gd name="adj" fmla="val 9615"/>
+            </a:avLst>
+          </a:prstGeom>
+          <a:solidFill>
+            <a:srgbClr val="FFFFFF"/>
+          </a:solidFill>
+          <a:ln w="12700">
+            <a:solidFill>
+              <a:srgbClr val="0D9488"/>
+            </a:solidFill>
+            <a:prstDash val="solid"/>
+          </a:ln>
+        </p:spPr>
+      </p:sp>
+      <p:sp>
+        <p:nvSpPr>
+          <p:cNvPr id="32" name="Text 30"/>
+          <p:cNvSpPr/>
+          <p:nvPr/>
+        </p:nvSpPr>
+        <p:spPr>
+          <a:xfrm>
+            <a:off x="6428232" y="3364992"/>
+            <a:ext cx="1645920" cy="475488"/>
+          </a:xfrm>
+          <a:prstGeom prst="rect">
+            <a:avLst/>
+          </a:prstGeom>
+          <a:noFill/>
+          <a:ln/>
+        </p:spPr>
+        <p:txBody>
+          <a:bodyPr wrap="square" lIns="0" tIns="0" rIns="0" bIns="0" rtlCol="0" anchor="ctr"/>
+          <a:lstStyle/>
+          <a:p>
+            <a:pPr algn="ctr" indent="0" marL="0">
+              <a:buNone/>
+            </a:pPr>
+            <a:r>
+              <a:rPr lang="en-US" sz="1400" b="1" dirty="0">
+                <a:solidFill>
+                  <a:srgbClr val="0D9488"/>
+                </a:solidFill>
+                <a:latin typeface="Trebuchet MS" pitchFamily="34" charset="0"/>
+                <a:ea typeface="Trebuchet MS" pitchFamily="34" charset="-122"/>
+                <a:cs typeface="Trebuchet MS" pitchFamily="34" charset="-120"/>
+              </a:rPr>
+              <a:t>ant</a:t>
+            </a:r>
+            <a:endParaRPr lang="en-US" sz="1400" dirty="0"/>
+          </a:p>
+        </p:txBody>
+      </p:sp>
+      <p:sp>
+        <p:nvSpPr>
+          <p:cNvPr id="33" name="Shape 31"/>
           <p:cNvSpPr/>
           <p:nvPr/>
         </p:nvSpPr>
@@ -20412,7 +21663,7 @@
       </p:sp>
       <p:sp>
         <p:nvSpPr>
-          <p:cNvPr id="31" name="Text 29"/>
+          <p:cNvPr id="34" name="Text 32"/>
           <p:cNvSpPr/>
           <p:nvPr/>
         </p:nvSpPr>
@@ -20451,7 +21702,7 @@
       </p:sp>
       <p:sp>
         <p:nvSpPr>
-          <p:cNvPr id="32" name="Shape 30"/>
+          <p:cNvPr id="35" name="Shape 33"/>
           <p:cNvSpPr/>
           <p:nvPr/>
         </p:nvSpPr>
@@ -20478,7 +21729,7 @@
       </p:sp>
       <p:sp>
         <p:nvSpPr>
-          <p:cNvPr id="33" name="Text 31"/>
+          <p:cNvPr id="36" name="Text 34"/>
           <p:cNvSpPr/>
           <p:nvPr/>
         </p:nvSpPr>
@@ -20801,7 +22052,7 @@
                 <a:ea typeface="Calibri" pitchFamily="34" charset="-122"/>
                 <a:cs typeface="Calibri" pitchFamily="34" charset="-120"/>
               </a:rPr>
-              <a:t>Word Labs  •  wordlabs.app  •  Root: 'inform' = to give shape or knowledge</a:t>
+              <a:t>Word Labs  •  wordlabs.app  •  Root: 'inform' = to give knowledge or shape</a:t>
             </a:r>
             <a:endParaRPr lang="en-US" sz="800" dirty="0"/>
           </a:p>
@@ -20940,7 +22191,7 @@
                 <a:ea typeface="Trebuchet MS" pitchFamily="34" charset="-122"/>
                 <a:cs typeface="Trebuchet MS" pitchFamily="34" charset="-120"/>
               </a:rPr>
-              <a:t>informed</a:t>
+              <a:t>informant</a:t>
             </a:r>
             <a:endParaRPr lang="en-US" sz="2800" dirty="0"/>
           </a:p>
@@ -21118,7 +22369,7 @@
                 <a:ea typeface="Calibri" pitchFamily="34" charset="-122"/>
                 <a:cs typeface="Calibri" pitchFamily="34" charset="-120"/>
               </a:rPr>
-              <a:t>to give knowledge or shape</a:t>
+              <a:t>to give knowledge</a:t>
             </a:r>
             <a:endParaRPr lang="en-US" sz="850" dirty="0"/>
           </a:p>
@@ -21191,7 +22442,7 @@
                 <a:ea typeface="Trebuchet MS" pitchFamily="34" charset="-122"/>
                 <a:cs typeface="Trebuchet MS" pitchFamily="34" charset="-120"/>
               </a:rPr>
-              <a:t>ed</a:t>
+              <a:t>ant</a:t>
             </a:r>
             <a:endParaRPr lang="en-US" sz="1300" dirty="0"/>
           </a:p>
@@ -21230,7 +22481,7 @@
                 <a:ea typeface="Calibri" pitchFamily="34" charset="-122"/>
                 <a:cs typeface="Calibri" pitchFamily="34" charset="-120"/>
               </a:rPr>
-              <a:t>in the past; having been</a:t>
+              <a:t>a person who does something</a:t>
             </a:r>
             <a:endParaRPr lang="en-US" sz="850" dirty="0"/>
           </a:p>
@@ -21337,7 +22588,7 @@
         </p:nvSpPr>
         <p:spPr>
           <a:xfrm>
-            <a:off x="2999232" y="3364992"/>
+            <a:off x="2313432" y="3364992"/>
             <a:ext cx="1645920" cy="475488"/>
           </a:xfrm>
           <a:prstGeom prst="rect">
@@ -21364,7 +22615,7 @@
         </p:nvSpPr>
         <p:spPr>
           <a:xfrm>
-            <a:off x="2999232" y="3364992"/>
+            <a:off x="2313432" y="3364992"/>
             <a:ext cx="1645920" cy="475488"/>
           </a:xfrm>
           <a:prstGeom prst="rect">
@@ -21403,8 +22654,8 @@
         </p:nvSpPr>
         <p:spPr>
           <a:xfrm>
-            <a:off x="4645152" y="3364992"/>
-            <a:ext cx="1097280" cy="475488"/>
+            <a:off x="3959352" y="3364992"/>
+            <a:ext cx="411480" cy="475488"/>
           </a:xfrm>
           <a:prstGeom prst="rect">
             <a:avLst/>
@@ -21442,7 +22693,7 @@
         </p:nvSpPr>
         <p:spPr>
           <a:xfrm>
-            <a:off x="5742432" y="3364992"/>
+            <a:off x="4370832" y="3364992"/>
             <a:ext cx="1645920" cy="475488"/>
           </a:xfrm>
           <a:prstGeom prst="rect">
@@ -21469,7 +22720,7 @@
         </p:nvSpPr>
         <p:spPr>
           <a:xfrm>
-            <a:off x="5742432" y="3364992"/>
+            <a:off x="4370832" y="3364992"/>
             <a:ext cx="1645920" cy="475488"/>
           </a:xfrm>
           <a:prstGeom prst="rect">
@@ -21494,7 +22745,7 @@
                 <a:ea typeface="Trebuchet MS" pitchFamily="34" charset="-122"/>
                 <a:cs typeface="Trebuchet MS" pitchFamily="34" charset="-120"/>
               </a:rPr>
-              <a:t>formed</a:t>
+              <a:t>form</a:t>
             </a:r>
             <a:endParaRPr lang="en-US" sz="1400" dirty="0"/>
           </a:p>
@@ -21502,7 +22753,112 @@
       </p:sp>
       <p:sp>
         <p:nvSpPr>
-          <p:cNvPr id="30" name="Shape 28"/>
+          <p:cNvPr id="30" name="Text 28"/>
+          <p:cNvSpPr/>
+          <p:nvPr/>
+        </p:nvSpPr>
+        <p:spPr>
+          <a:xfrm>
+            <a:off x="6016752" y="3364992"/>
+            <a:ext cx="411480" cy="475488"/>
+          </a:xfrm>
+          <a:prstGeom prst="rect">
+            <a:avLst/>
+          </a:prstGeom>
+          <a:noFill/>
+          <a:ln/>
+        </p:spPr>
+        <p:txBody>
+          <a:bodyPr wrap="square" lIns="0" tIns="0" rIns="0" bIns="0" rtlCol="0" anchor="ctr"/>
+          <a:lstStyle/>
+          <a:p>
+            <a:pPr algn="ctr" indent="0" marL="0">
+              <a:buNone/>
+            </a:pPr>
+            <a:r>
+              <a:rPr lang="en-US" sz="1600" b="1" dirty="0">
+                <a:solidFill>
+                  <a:srgbClr val="0D9488"/>
+                </a:solidFill>
+                <a:latin typeface="Trebuchet MS" pitchFamily="34" charset="0"/>
+                <a:ea typeface="Trebuchet MS" pitchFamily="34" charset="-122"/>
+                <a:cs typeface="Trebuchet MS" pitchFamily="34" charset="-120"/>
+              </a:rPr>
+              <a:t>·</a:t>
+            </a:r>
+            <a:endParaRPr lang="en-US" sz="1600" dirty="0"/>
+          </a:p>
+        </p:txBody>
+      </p:sp>
+      <p:sp>
+        <p:nvSpPr>
+          <p:cNvPr id="31" name="Shape 29"/>
+          <p:cNvSpPr/>
+          <p:nvPr/>
+        </p:nvSpPr>
+        <p:spPr>
+          <a:xfrm>
+            <a:off x="6428232" y="3364992"/>
+            <a:ext cx="1645920" cy="475488"/>
+          </a:xfrm>
+          <a:prstGeom prst="rect">
+            <a:avLst>
+              <a:gd name="adj" fmla="val 9615"/>
+            </a:avLst>
+          </a:prstGeom>
+          <a:solidFill>
+            <a:srgbClr val="FFFFFF"/>
+          </a:solidFill>
+          <a:ln w="12700">
+            <a:solidFill>
+              <a:srgbClr val="0D9488"/>
+            </a:solidFill>
+            <a:prstDash val="solid"/>
+          </a:ln>
+        </p:spPr>
+      </p:sp>
+      <p:sp>
+        <p:nvSpPr>
+          <p:cNvPr id="32" name="Text 30"/>
+          <p:cNvSpPr/>
+          <p:nvPr/>
+        </p:nvSpPr>
+        <p:spPr>
+          <a:xfrm>
+            <a:off x="6428232" y="3364992"/>
+            <a:ext cx="1645920" cy="475488"/>
+          </a:xfrm>
+          <a:prstGeom prst="rect">
+            <a:avLst/>
+          </a:prstGeom>
+          <a:noFill/>
+          <a:ln/>
+        </p:spPr>
+        <p:txBody>
+          <a:bodyPr wrap="square" lIns="0" tIns="0" rIns="0" bIns="0" rtlCol="0" anchor="ctr"/>
+          <a:lstStyle/>
+          <a:p>
+            <a:pPr algn="ctr" indent="0" marL="0">
+              <a:buNone/>
+            </a:pPr>
+            <a:r>
+              <a:rPr lang="en-US" sz="1400" b="1" dirty="0">
+                <a:solidFill>
+                  <a:srgbClr val="0D9488"/>
+                </a:solidFill>
+                <a:latin typeface="Trebuchet MS" pitchFamily="34" charset="0"/>
+                <a:ea typeface="Trebuchet MS" pitchFamily="34" charset="-122"/>
+                <a:cs typeface="Trebuchet MS" pitchFamily="34" charset="-120"/>
+              </a:rPr>
+              <a:t>ant</a:t>
+            </a:r>
+            <a:endParaRPr lang="en-US" sz="1400" dirty="0"/>
+          </a:p>
+        </p:txBody>
+      </p:sp>
+      <p:sp>
+        <p:nvSpPr>
+          <p:cNvPr id="33" name="Shape 31"/>
           <p:cNvSpPr/>
           <p:nvPr/>
         </p:nvSpPr>
@@ -21529,7 +22885,7 @@
       </p:sp>
       <p:sp>
         <p:nvSpPr>
-          <p:cNvPr id="31" name="Text 29"/>
+          <p:cNvPr id="34" name="Text 32"/>
           <p:cNvSpPr/>
           <p:nvPr/>
         </p:nvSpPr>
@@ -21568,7 +22924,7 @@
       </p:sp>
       <p:sp>
         <p:nvSpPr>
-          <p:cNvPr id="32" name="Shape 30"/>
+          <p:cNvPr id="35" name="Shape 33"/>
           <p:cNvSpPr/>
           <p:nvPr/>
         </p:nvSpPr>
@@ -21595,13 +22951,13 @@
       </p:sp>
       <p:sp>
         <p:nvSpPr>
-          <p:cNvPr id="33" name="Shape 31"/>
-          <p:cNvSpPr/>
-          <p:nvPr/>
-        </p:nvSpPr>
-        <p:spPr>
-          <a:xfrm>
-            <a:off x="2254649" y="4169664"/>
+          <p:cNvPr id="36" name="Shape 34"/>
+          <p:cNvSpPr/>
+          <p:nvPr/>
+        </p:nvSpPr>
+        <p:spPr>
+          <a:xfrm>
+            <a:off x="2023872" y="4169664"/>
             <a:ext cx="685800" cy="475488"/>
           </a:xfrm>
           <a:prstGeom prst="rect">
@@ -21622,13 +22978,13 @@
       </p:sp>
       <p:sp>
         <p:nvSpPr>
-          <p:cNvPr id="34" name="Text 32"/>
-          <p:cNvSpPr/>
-          <p:nvPr/>
-        </p:nvSpPr>
-        <p:spPr>
-          <a:xfrm>
-            <a:off x="2254649" y="4169664"/>
+          <p:cNvPr id="37" name="Text 35"/>
+          <p:cNvSpPr/>
+          <p:nvPr/>
+        </p:nvSpPr>
+        <p:spPr>
+          <a:xfrm>
+            <a:off x="2023872" y="4169664"/>
             <a:ext cx="685800" cy="475488"/>
           </a:xfrm>
           <a:prstGeom prst="rect">
@@ -21661,13 +23017,13 @@
       </p:sp>
       <p:sp>
         <p:nvSpPr>
-          <p:cNvPr id="35" name="Shape 33"/>
-          <p:cNvSpPr/>
-          <p:nvPr/>
-        </p:nvSpPr>
-        <p:spPr>
-          <a:xfrm>
-            <a:off x="3293146" y="4169664"/>
+          <p:cNvPr id="38" name="Shape 36"/>
+          <p:cNvSpPr/>
+          <p:nvPr/>
+        </p:nvSpPr>
+        <p:spPr>
+          <a:xfrm>
+            <a:off x="2831592" y="4169664"/>
             <a:ext cx="685800" cy="475488"/>
           </a:xfrm>
           <a:prstGeom prst="rect">
@@ -21688,13 +23044,13 @@
       </p:sp>
       <p:sp>
         <p:nvSpPr>
-          <p:cNvPr id="36" name="Text 34"/>
-          <p:cNvSpPr/>
-          <p:nvPr/>
-        </p:nvSpPr>
-        <p:spPr>
-          <a:xfrm>
-            <a:off x="3293146" y="4169664"/>
+          <p:cNvPr id="39" name="Text 37"/>
+          <p:cNvSpPr/>
+          <p:nvPr/>
+        </p:nvSpPr>
+        <p:spPr>
+          <a:xfrm>
+            <a:off x="2831592" y="4169664"/>
             <a:ext cx="685800" cy="475488"/>
           </a:xfrm>
           <a:prstGeom prst="rect">
@@ -21727,13 +23083,13 @@
       </p:sp>
       <p:sp>
         <p:nvSpPr>
-          <p:cNvPr id="37" name="Shape 35"/>
-          <p:cNvSpPr/>
-          <p:nvPr/>
-        </p:nvSpPr>
-        <p:spPr>
-          <a:xfrm>
-            <a:off x="4331643" y="4169664"/>
+          <p:cNvPr id="40" name="Shape 38"/>
+          <p:cNvSpPr/>
+          <p:nvPr/>
+        </p:nvSpPr>
+        <p:spPr>
+          <a:xfrm>
+            <a:off x="3639312" y="4169664"/>
             <a:ext cx="685800" cy="475488"/>
           </a:xfrm>
           <a:prstGeom prst="rect">
@@ -21754,13 +23110,13 @@
       </p:sp>
       <p:sp>
         <p:nvSpPr>
-          <p:cNvPr id="38" name="Text 36"/>
-          <p:cNvSpPr/>
-          <p:nvPr/>
-        </p:nvSpPr>
-        <p:spPr>
-          <a:xfrm>
-            <a:off x="4331643" y="4169664"/>
+          <p:cNvPr id="41" name="Text 39"/>
+          <p:cNvSpPr/>
+          <p:nvPr/>
+        </p:nvSpPr>
+        <p:spPr>
+          <a:xfrm>
+            <a:off x="3639312" y="4169664"/>
             <a:ext cx="685800" cy="475488"/>
           </a:xfrm>
           <a:prstGeom prst="rect">
@@ -21793,13 +23149,13 @@
       </p:sp>
       <p:sp>
         <p:nvSpPr>
-          <p:cNvPr id="39" name="Shape 37"/>
-          <p:cNvSpPr/>
-          <p:nvPr/>
-        </p:nvSpPr>
-        <p:spPr>
-          <a:xfrm>
-            <a:off x="5370141" y="4169664"/>
+          <p:cNvPr id="42" name="Shape 40"/>
+          <p:cNvSpPr/>
+          <p:nvPr/>
+        </p:nvSpPr>
+        <p:spPr>
+          <a:xfrm>
+            <a:off x="4447032" y="4169664"/>
             <a:ext cx="685800" cy="475488"/>
           </a:xfrm>
           <a:prstGeom prst="rect">
@@ -21820,13 +23176,13 @@
       </p:sp>
       <p:sp>
         <p:nvSpPr>
-          <p:cNvPr id="40" name="Text 38"/>
-          <p:cNvSpPr/>
-          <p:nvPr/>
-        </p:nvSpPr>
-        <p:spPr>
-          <a:xfrm>
-            <a:off x="5370141" y="4169664"/>
+          <p:cNvPr id="43" name="Text 41"/>
+          <p:cNvSpPr/>
+          <p:nvPr/>
+        </p:nvSpPr>
+        <p:spPr>
+          <a:xfrm>
+            <a:off x="4447032" y="4169664"/>
             <a:ext cx="685800" cy="475488"/>
           </a:xfrm>
           <a:prstGeom prst="rect">
@@ -21859,13 +23215,13 @@
       </p:sp>
       <p:sp>
         <p:nvSpPr>
-          <p:cNvPr id="41" name="Shape 39"/>
-          <p:cNvSpPr/>
-          <p:nvPr/>
-        </p:nvSpPr>
-        <p:spPr>
-          <a:xfrm>
-            <a:off x="6408638" y="4169664"/>
+          <p:cNvPr id="44" name="Shape 42"/>
+          <p:cNvSpPr/>
+          <p:nvPr/>
+        </p:nvSpPr>
+        <p:spPr>
+          <a:xfrm>
+            <a:off x="5254752" y="4169664"/>
             <a:ext cx="685800" cy="475488"/>
           </a:xfrm>
           <a:prstGeom prst="rect">
@@ -21886,13 +23242,13 @@
       </p:sp>
       <p:sp>
         <p:nvSpPr>
-          <p:cNvPr id="42" name="Text 40"/>
-          <p:cNvSpPr/>
-          <p:nvPr/>
-        </p:nvSpPr>
-        <p:spPr>
-          <a:xfrm>
-            <a:off x="6408638" y="4169664"/>
+          <p:cNvPr id="45" name="Text 43"/>
+          <p:cNvSpPr/>
+          <p:nvPr/>
+        </p:nvSpPr>
+        <p:spPr>
+          <a:xfrm>
+            <a:off x="5254752" y="4169664"/>
             <a:ext cx="685800" cy="475488"/>
           </a:xfrm>
           <a:prstGeom prst="rect">
@@ -21925,13 +23281,13 @@
       </p:sp>
       <p:sp>
         <p:nvSpPr>
-          <p:cNvPr id="43" name="Shape 41"/>
-          <p:cNvSpPr/>
-          <p:nvPr/>
-        </p:nvSpPr>
-        <p:spPr>
-          <a:xfrm>
-            <a:off x="7447135" y="4169664"/>
+          <p:cNvPr id="46" name="Shape 44"/>
+          <p:cNvSpPr/>
+          <p:nvPr/>
+        </p:nvSpPr>
+        <p:spPr>
+          <a:xfrm>
+            <a:off x="6062472" y="4169664"/>
             <a:ext cx="685800" cy="475488"/>
           </a:xfrm>
           <a:prstGeom prst="rect">
@@ -21952,13 +23308,13 @@
       </p:sp>
       <p:sp>
         <p:nvSpPr>
-          <p:cNvPr id="44" name="Text 42"/>
-          <p:cNvSpPr/>
-          <p:nvPr/>
-        </p:nvSpPr>
-        <p:spPr>
-          <a:xfrm>
-            <a:off x="7447135" y="4169664"/>
+          <p:cNvPr id="47" name="Text 45"/>
+          <p:cNvSpPr/>
+          <p:nvPr/>
+        </p:nvSpPr>
+        <p:spPr>
+          <a:xfrm>
+            <a:off x="6062472" y="4169664"/>
             <a:ext cx="685800" cy="475488"/>
           </a:xfrm>
           <a:prstGeom prst="rect">
@@ -21983,7 +23339,139 @@
                 <a:ea typeface="Trebuchet MS" pitchFamily="34" charset="-122"/>
                 <a:cs typeface="Trebuchet MS" pitchFamily="34" charset="-120"/>
               </a:rPr>
-              <a:t>ed</a:t>
+              <a:t>a</a:t>
+            </a:r>
+            <a:endParaRPr lang="en-US" sz="900" dirty="0"/>
+          </a:p>
+        </p:txBody>
+      </p:sp>
+      <p:sp>
+        <p:nvSpPr>
+          <p:cNvPr id="48" name="Shape 46"/>
+          <p:cNvSpPr/>
+          <p:nvPr/>
+        </p:nvSpPr>
+        <p:spPr>
+          <a:xfrm>
+            <a:off x="6870192" y="4169664"/>
+            <a:ext cx="685800" cy="475488"/>
+          </a:xfrm>
+          <a:prstGeom prst="rect">
+            <a:avLst>
+              <a:gd name="adj" fmla="val 7692"/>
+            </a:avLst>
+          </a:prstGeom>
+          <a:solidFill>
+            <a:srgbClr val="FFFFFF"/>
+          </a:solidFill>
+          <a:ln w="12700">
+            <a:solidFill>
+              <a:srgbClr val="DB2777"/>
+            </a:solidFill>
+            <a:prstDash val="solid"/>
+          </a:ln>
+        </p:spPr>
+      </p:sp>
+      <p:sp>
+        <p:nvSpPr>
+          <p:cNvPr id="49" name="Text 47"/>
+          <p:cNvSpPr/>
+          <p:nvPr/>
+        </p:nvSpPr>
+        <p:spPr>
+          <a:xfrm>
+            <a:off x="6870192" y="4169664"/>
+            <a:ext cx="685800" cy="475488"/>
+          </a:xfrm>
+          <a:prstGeom prst="rect">
+            <a:avLst/>
+          </a:prstGeom>
+          <a:noFill/>
+          <a:ln/>
+        </p:spPr>
+        <p:txBody>
+          <a:bodyPr wrap="square" lIns="0" tIns="0" rIns="0" bIns="0" rtlCol="0" anchor="ctr"/>
+          <a:lstStyle/>
+          <a:p>
+            <a:pPr algn="ctr" indent="0" marL="0">
+              <a:buNone/>
+            </a:pPr>
+            <a:r>
+              <a:rPr lang="en-US" sz="900" b="1" dirty="0">
+                <a:solidFill>
+                  <a:srgbClr val="9D174D"/>
+                </a:solidFill>
+                <a:latin typeface="Trebuchet MS" pitchFamily="34" charset="0"/>
+                <a:ea typeface="Trebuchet MS" pitchFamily="34" charset="-122"/>
+                <a:cs typeface="Trebuchet MS" pitchFamily="34" charset="-120"/>
+              </a:rPr>
+              <a:t>n</a:t>
+            </a:r>
+            <a:endParaRPr lang="en-US" sz="900" dirty="0"/>
+          </a:p>
+        </p:txBody>
+      </p:sp>
+      <p:sp>
+        <p:nvSpPr>
+          <p:cNvPr id="50" name="Shape 48"/>
+          <p:cNvSpPr/>
+          <p:nvPr/>
+        </p:nvSpPr>
+        <p:spPr>
+          <a:xfrm>
+            <a:off x="7677912" y="4169664"/>
+            <a:ext cx="685800" cy="475488"/>
+          </a:xfrm>
+          <a:prstGeom prst="rect">
+            <a:avLst>
+              <a:gd name="adj" fmla="val 7692"/>
+            </a:avLst>
+          </a:prstGeom>
+          <a:solidFill>
+            <a:srgbClr val="FFFFFF"/>
+          </a:solidFill>
+          <a:ln w="12700">
+            <a:solidFill>
+              <a:srgbClr val="DB2777"/>
+            </a:solidFill>
+            <a:prstDash val="solid"/>
+          </a:ln>
+        </p:spPr>
+      </p:sp>
+      <p:sp>
+        <p:nvSpPr>
+          <p:cNvPr id="51" name="Text 49"/>
+          <p:cNvSpPr/>
+          <p:nvPr/>
+        </p:nvSpPr>
+        <p:spPr>
+          <a:xfrm>
+            <a:off x="7677912" y="4169664"/>
+            <a:ext cx="685800" cy="475488"/>
+          </a:xfrm>
+          <a:prstGeom prst="rect">
+            <a:avLst/>
+          </a:prstGeom>
+          <a:noFill/>
+          <a:ln/>
+        </p:spPr>
+        <p:txBody>
+          <a:bodyPr wrap="square" lIns="0" tIns="0" rIns="0" bIns="0" rtlCol="0" anchor="ctr"/>
+          <a:lstStyle/>
+          <a:p>
+            <a:pPr algn="ctr" indent="0" marL="0">
+              <a:buNone/>
+            </a:pPr>
+            <a:r>
+              <a:rPr lang="en-US" sz="900" b="1" dirty="0">
+                <a:solidFill>
+                  <a:srgbClr val="9D174D"/>
+                </a:solidFill>
+                <a:latin typeface="Trebuchet MS" pitchFamily="34" charset="0"/>
+                <a:ea typeface="Trebuchet MS" pitchFamily="34" charset="-122"/>
+                <a:cs typeface="Trebuchet MS" pitchFamily="34" charset="-120"/>
+              </a:rPr>
+              <a:t>t</a:t>
             </a:r>
             <a:endParaRPr lang="en-US" sz="900" dirty="0"/>
           </a:p>
@@ -22275,7 +23763,7 @@
                 <a:ea typeface="Calibri" pitchFamily="34" charset="-122"/>
                 <a:cs typeface="Calibri" pitchFamily="34" charset="-120"/>
               </a:rPr>
-              <a:t>Word Labs  •  wordlabs.app  •  Root: 'inform' = to give shape or knowledge</a:t>
+              <a:t>Word Labs  •  wordlabs.app  •  Root: 'inform' = to give knowledge or shape</a:t>
             </a:r>
             <a:endParaRPr lang="en-US" sz="800" dirty="0"/>
           </a:p>
@@ -22414,7 +23902,7 @@
                 <a:ea typeface="Trebuchet MS" pitchFamily="34" charset="-122"/>
                 <a:cs typeface="Trebuchet MS" pitchFamily="34" charset="-120"/>
               </a:rPr>
-              <a:t>inform</a:t>
+              <a:t>information</a:t>
             </a:r>
             <a:endParaRPr lang="en-US" sz="2800" dirty="0"/>
           </a:p>
@@ -23102,7 +24590,7 @@
                 <a:ea typeface="Calibri" pitchFamily="34" charset="-122"/>
                 <a:cs typeface="Calibri" pitchFamily="34" charset="-120"/>
               </a:rPr>
-              <a:t>Word Labs  •  wordlabs.app  •  Root: 'inform' = to give shape or knowledge</a:t>
+              <a:t>Word Labs  •  wordlabs.app  •  Root: 'inform' = to give knowledge or shape</a:t>
             </a:r>
             <a:endParaRPr lang="en-US" sz="800" dirty="0"/>
           </a:p>
@@ -23241,7 +24729,7 @@
                 <a:ea typeface="Trebuchet MS" pitchFamily="34" charset="-122"/>
                 <a:cs typeface="Trebuchet MS" pitchFamily="34" charset="-120"/>
               </a:rPr>
-              <a:t>inform</a:t>
+              <a:t>information</a:t>
             </a:r>
             <a:endParaRPr lang="en-US" sz="2800" dirty="0"/>
           </a:p>
@@ -23321,7 +24809,7 @@
         </p:nvSpPr>
         <p:spPr>
           <a:xfrm>
-            <a:off x="4370832" y="2258568"/>
+            <a:off x="2938272" y="2258568"/>
             <a:ext cx="1828800" cy="292608"/>
           </a:xfrm>
           <a:prstGeom prst="rect">
@@ -23355,7 +24843,7 @@
         </p:nvSpPr>
         <p:spPr>
           <a:xfrm>
-            <a:off x="4370832" y="2258568"/>
+            <a:off x="2938272" y="2258568"/>
             <a:ext cx="1828800" cy="292608"/>
           </a:xfrm>
           <a:prstGeom prst="rect">
@@ -23394,7 +24882,7 @@
         </p:nvSpPr>
         <p:spPr>
           <a:xfrm>
-            <a:off x="4370832" y="2569464"/>
+            <a:off x="2938272" y="2569464"/>
             <a:ext cx="1828800" cy="201168"/>
           </a:xfrm>
           <a:prstGeom prst="rect">
@@ -23419,7 +24907,7 @@
                 <a:ea typeface="Calibri" pitchFamily="34" charset="-122"/>
                 <a:cs typeface="Calibri" pitchFamily="34" charset="-120"/>
               </a:rPr>
-              <a:t>to give knowledge or shape</a:t>
+              <a:t>to give knowledge</a:t>
             </a:r>
             <a:endParaRPr lang="en-US" sz="850" dirty="0"/>
           </a:p>
@@ -23428,6 +24916,157 @@
       <p:sp>
         <p:nvSpPr>
           <p:cNvPr id="19" name="Shape 17"/>
+          <p:cNvSpPr/>
+          <p:nvPr/>
+        </p:nvSpPr>
+        <p:spPr>
+          <a:xfrm>
+            <a:off x="5803392" y="2258568"/>
+            <a:ext cx="1828800" cy="292608"/>
+          </a:xfrm>
+          <a:prstGeom prst="rect">
+            <a:avLst>
+              <a:gd name="adj" fmla="val 25000"/>
+            </a:avLst>
+          </a:prstGeom>
+          <a:solidFill>
+            <a:srgbClr val="FCE7F3"/>
+          </a:solidFill>
+          <a:ln w="19050">
+            <a:solidFill>
+              <a:srgbClr val="DB2777"/>
+            </a:solidFill>
+            <a:prstDash val="solid"/>
+          </a:ln>
+          <a:effectLst>
+            <a:outerShdw sx="100000" sy="100000" kx="0" ky="0" algn="bl" rotWithShape="0" blurRad="101600" dist="38100" dir="8100000">
+              <a:srgbClr val="000000">
+                <a:alpha val="12000"/>
+              </a:srgbClr>
+            </a:outerShdw>
+          </a:effectLst>
+        </p:spPr>
+      </p:sp>
+      <p:sp>
+        <p:nvSpPr>
+          <p:cNvPr id="20" name="Text 18"/>
+          <p:cNvSpPr/>
+          <p:nvPr/>
+        </p:nvSpPr>
+        <p:spPr>
+          <a:xfrm>
+            <a:off x="5803392" y="2258568"/>
+            <a:ext cx="1828800" cy="292608"/>
+          </a:xfrm>
+          <a:prstGeom prst="rect">
+            <a:avLst/>
+          </a:prstGeom>
+          <a:noFill/>
+          <a:ln/>
+        </p:spPr>
+        <p:txBody>
+          <a:bodyPr wrap="square" lIns="0" tIns="0" rIns="0" bIns="0" rtlCol="0" anchor="ctr"/>
+          <a:lstStyle/>
+          <a:p>
+            <a:pPr algn="ctr" indent="0" marL="0">
+              <a:buNone/>
+            </a:pPr>
+            <a:r>
+              <a:rPr lang="en-US" sz="1300" b="1" dirty="0">
+                <a:solidFill>
+                  <a:srgbClr val="9D174D"/>
+                </a:solidFill>
+                <a:latin typeface="Trebuchet MS" pitchFamily="34" charset="0"/>
+                <a:ea typeface="Trebuchet MS" pitchFamily="34" charset="-122"/>
+                <a:cs typeface="Trebuchet MS" pitchFamily="34" charset="-120"/>
+              </a:rPr>
+              <a:t>ation</a:t>
+            </a:r>
+            <a:endParaRPr lang="en-US" sz="1300" dirty="0"/>
+          </a:p>
+        </p:txBody>
+      </p:sp>
+      <p:sp>
+        <p:nvSpPr>
+          <p:cNvPr id="21" name="Text 19"/>
+          <p:cNvSpPr/>
+          <p:nvPr/>
+        </p:nvSpPr>
+        <p:spPr>
+          <a:xfrm>
+            <a:off x="5803392" y="2569464"/>
+            <a:ext cx="1828800" cy="201168"/>
+          </a:xfrm>
+          <a:prstGeom prst="rect">
+            <a:avLst/>
+          </a:prstGeom>
+          <a:noFill/>
+          <a:ln/>
+        </p:spPr>
+        <p:txBody>
+          <a:bodyPr wrap="square" lIns="0" tIns="0" rIns="0" bIns="0" rtlCol="0" anchor="t"/>
+          <a:lstStyle/>
+          <a:p>
+            <a:pPr algn="ctr" indent="0" marL="0">
+              <a:buNone/>
+            </a:pPr>
+            <a:r>
+              <a:rPr lang="en-US" sz="850" dirty="0">
+                <a:solidFill>
+                  <a:srgbClr val="475569"/>
+                </a:solidFill>
+                <a:latin typeface="Calibri" pitchFamily="34" charset="0"/>
+                <a:ea typeface="Calibri" pitchFamily="34" charset="-122"/>
+                <a:cs typeface="Calibri" pitchFamily="34" charset="-120"/>
+              </a:rPr>
+              <a:t>the result or process of</a:t>
+            </a:r>
+            <a:endParaRPr lang="en-US" sz="850" dirty="0"/>
+          </a:p>
+        </p:txBody>
+      </p:sp>
+      <p:sp>
+        <p:nvSpPr>
+          <p:cNvPr id="22" name="Text 20"/>
+          <p:cNvSpPr/>
+          <p:nvPr/>
+        </p:nvSpPr>
+        <p:spPr>
+          <a:xfrm>
+            <a:off x="5803392" y="2752344"/>
+            <a:ext cx="1828800" cy="182880"/>
+          </a:xfrm>
+          <a:prstGeom prst="rect">
+            <a:avLst/>
+          </a:prstGeom>
+          <a:noFill/>
+          <a:ln/>
+        </p:spPr>
+        <p:txBody>
+          <a:bodyPr wrap="square" lIns="0" tIns="0" rIns="0" bIns="0" rtlCol="0" anchor="t"/>
+          <a:lstStyle/>
+          <a:p>
+            <a:pPr algn="ctr" indent="0" marL="0">
+              <a:buNone/>
+            </a:pPr>
+            <a:r>
+              <a:rPr lang="en-US" sz="700" i="1" dirty="0">
+                <a:solidFill>
+                  <a:srgbClr val="94A3B8"/>
+                </a:solidFill>
+                <a:latin typeface="Calibri" pitchFamily="34" charset="0"/>
+                <a:ea typeface="Calibri" pitchFamily="34" charset="-122"/>
+                <a:cs typeface="Calibri" pitchFamily="34" charset="-120"/>
+              </a:rPr>
+              <a:t>'e' dropped before vowel suffix</a:t>
+            </a:r>
+            <a:endParaRPr lang="en-US" sz="700" dirty="0"/>
+          </a:p>
+        </p:txBody>
+      </p:sp>
+      <p:sp>
+        <p:nvSpPr>
+          <p:cNvPr id="23" name="Shape 21"/>
           <p:cNvSpPr/>
           <p:nvPr/>
         </p:nvSpPr>
@@ -23454,7 +25093,7 @@
       </p:sp>
       <p:sp>
         <p:nvSpPr>
-          <p:cNvPr id="20" name="Text 18"/>
+          <p:cNvPr id="24" name="Text 22"/>
           <p:cNvSpPr/>
           <p:nvPr/>
         </p:nvSpPr>
@@ -23493,7 +25132,7 @@
       </p:sp>
       <p:sp>
         <p:nvSpPr>
-          <p:cNvPr id="21" name="Shape 19"/>
+          <p:cNvPr id="25" name="Shape 23"/>
           <p:cNvSpPr/>
           <p:nvPr/>
         </p:nvSpPr>
@@ -23520,7 +25159,7 @@
       </p:sp>
       <p:sp>
         <p:nvSpPr>
-          <p:cNvPr id="22" name="Text 20"/>
+          <p:cNvPr id="26" name="Text 24"/>
           <p:cNvSpPr/>
           <p:nvPr/>
         </p:nvSpPr>
@@ -23559,7 +25198,7 @@
       </p:sp>
       <p:sp>
         <p:nvSpPr>
-          <p:cNvPr id="23" name="Shape 21"/>
+          <p:cNvPr id="27" name="Shape 25"/>
           <p:cNvSpPr/>
           <p:nvPr/>
         </p:nvSpPr>
@@ -23586,7 +25225,7 @@
       </p:sp>
       <p:sp>
         <p:nvSpPr>
-          <p:cNvPr id="24" name="Text 22"/>
+          <p:cNvPr id="28" name="Text 26"/>
           <p:cNvSpPr/>
           <p:nvPr/>
         </p:nvSpPr>
@@ -23625,7 +25264,7 @@
       </p:sp>
       <p:sp>
         <p:nvSpPr>
-          <p:cNvPr id="25" name="Shape 23"/>
+          <p:cNvPr id="29" name="Shape 27"/>
           <p:cNvSpPr/>
           <p:nvPr/>
         </p:nvSpPr>
@@ -23652,7 +25291,7 @@
       </p:sp>
       <p:sp>
         <p:nvSpPr>
-          <p:cNvPr id="26" name="Text 24"/>
+          <p:cNvPr id="30" name="Text 28"/>
           <p:cNvSpPr/>
           <p:nvPr/>
         </p:nvSpPr>
@@ -23975,7 +25614,7 @@
                 <a:ea typeface="Calibri" pitchFamily="34" charset="-122"/>
                 <a:cs typeface="Calibri" pitchFamily="34" charset="-120"/>
               </a:rPr>
-              <a:t>Word Labs  •  wordlabs.app  •  Root: 'inform' = to give shape or knowledge</a:t>
+              <a:t>Word Labs  •  wordlabs.app  •  Root: 'inform' = to give knowledge or shape</a:t>
             </a:r>
             <a:endParaRPr lang="en-US" sz="800" dirty="0"/>
           </a:p>
@@ -24048,7 +25687,7 @@
                 <a:ea typeface="Trebuchet MS" pitchFamily="34" charset="-122"/>
                 <a:cs typeface="Trebuchet MS" pitchFamily="34" charset="-120"/>
               </a:rPr>
-              <a:t>We are learning that the root 'inform' means 'to give shape or knowledge'.</a:t>
+              <a:t>We are learning that the root 'inform' means 'to give knowledge or shape'.</a:t>
             </a:r>
             <a:endParaRPr lang="en-US" sz="2000" dirty="0"/>
           </a:p>
@@ -24694,7 +26333,7 @@
                 <a:ea typeface="Calibri" pitchFamily="34" charset="-122"/>
                 <a:cs typeface="Calibri" pitchFamily="34" charset="-120"/>
               </a:rPr>
-              <a:t>Word Labs  •  wordlabs.app  •  Root: 'inform' = to give shape or knowledge</a:t>
+              <a:t>Word Labs  •  wordlabs.app  •  Root: 'inform' = to give knowledge or shape</a:t>
             </a:r>
             <a:endParaRPr lang="en-US" sz="800" dirty="0"/>
           </a:p>
@@ -24833,7 +26472,7 @@
                 <a:ea typeface="Trebuchet MS" pitchFamily="34" charset="-122"/>
                 <a:cs typeface="Trebuchet MS" pitchFamily="34" charset="-120"/>
               </a:rPr>
-              <a:t>inform</a:t>
+              <a:t>information</a:t>
             </a:r>
             <a:endParaRPr lang="en-US" sz="2800" dirty="0"/>
           </a:p>
@@ -24913,7 +26552,7 @@
         </p:nvSpPr>
         <p:spPr>
           <a:xfrm>
-            <a:off x="4370832" y="2258568"/>
+            <a:off x="2938272" y="2258568"/>
             <a:ext cx="1828800" cy="292608"/>
           </a:xfrm>
           <a:prstGeom prst="rect">
@@ -24947,7 +26586,7 @@
         </p:nvSpPr>
         <p:spPr>
           <a:xfrm>
-            <a:off x="4370832" y="2258568"/>
+            <a:off x="2938272" y="2258568"/>
             <a:ext cx="1828800" cy="292608"/>
           </a:xfrm>
           <a:prstGeom prst="rect">
@@ -24986,7 +26625,7 @@
         </p:nvSpPr>
         <p:spPr>
           <a:xfrm>
-            <a:off x="4370832" y="2569464"/>
+            <a:off x="2938272" y="2569464"/>
             <a:ext cx="1828800" cy="201168"/>
           </a:xfrm>
           <a:prstGeom prst="rect">
@@ -25011,7 +26650,7 @@
                 <a:ea typeface="Calibri" pitchFamily="34" charset="-122"/>
                 <a:cs typeface="Calibri" pitchFamily="34" charset="-120"/>
               </a:rPr>
-              <a:t>to give knowledge or shape</a:t>
+              <a:t>to give knowledge</a:t>
             </a:r>
             <a:endParaRPr lang="en-US" sz="850" dirty="0"/>
           </a:p>
@@ -25020,6 +26659,157 @@
       <p:sp>
         <p:nvSpPr>
           <p:cNvPr id="19" name="Shape 17"/>
+          <p:cNvSpPr/>
+          <p:nvPr/>
+        </p:nvSpPr>
+        <p:spPr>
+          <a:xfrm>
+            <a:off x="5803392" y="2258568"/>
+            <a:ext cx="1828800" cy="292608"/>
+          </a:xfrm>
+          <a:prstGeom prst="rect">
+            <a:avLst>
+              <a:gd name="adj" fmla="val 25000"/>
+            </a:avLst>
+          </a:prstGeom>
+          <a:solidFill>
+            <a:srgbClr val="FCE7F3"/>
+          </a:solidFill>
+          <a:ln w="19050">
+            <a:solidFill>
+              <a:srgbClr val="DB2777"/>
+            </a:solidFill>
+            <a:prstDash val="solid"/>
+          </a:ln>
+          <a:effectLst>
+            <a:outerShdw sx="100000" sy="100000" kx="0" ky="0" algn="bl" rotWithShape="0" blurRad="101600" dist="38100" dir="8100000">
+              <a:srgbClr val="000000">
+                <a:alpha val="12000"/>
+              </a:srgbClr>
+            </a:outerShdw>
+          </a:effectLst>
+        </p:spPr>
+      </p:sp>
+      <p:sp>
+        <p:nvSpPr>
+          <p:cNvPr id="20" name="Text 18"/>
+          <p:cNvSpPr/>
+          <p:nvPr/>
+        </p:nvSpPr>
+        <p:spPr>
+          <a:xfrm>
+            <a:off x="5803392" y="2258568"/>
+            <a:ext cx="1828800" cy="292608"/>
+          </a:xfrm>
+          <a:prstGeom prst="rect">
+            <a:avLst/>
+          </a:prstGeom>
+          <a:noFill/>
+          <a:ln/>
+        </p:spPr>
+        <p:txBody>
+          <a:bodyPr wrap="square" lIns="0" tIns="0" rIns="0" bIns="0" rtlCol="0" anchor="ctr"/>
+          <a:lstStyle/>
+          <a:p>
+            <a:pPr algn="ctr" indent="0" marL="0">
+              <a:buNone/>
+            </a:pPr>
+            <a:r>
+              <a:rPr lang="en-US" sz="1300" b="1" dirty="0">
+                <a:solidFill>
+                  <a:srgbClr val="9D174D"/>
+                </a:solidFill>
+                <a:latin typeface="Trebuchet MS" pitchFamily="34" charset="0"/>
+                <a:ea typeface="Trebuchet MS" pitchFamily="34" charset="-122"/>
+                <a:cs typeface="Trebuchet MS" pitchFamily="34" charset="-120"/>
+              </a:rPr>
+              <a:t>ation</a:t>
+            </a:r>
+            <a:endParaRPr lang="en-US" sz="1300" dirty="0"/>
+          </a:p>
+        </p:txBody>
+      </p:sp>
+      <p:sp>
+        <p:nvSpPr>
+          <p:cNvPr id="21" name="Text 19"/>
+          <p:cNvSpPr/>
+          <p:nvPr/>
+        </p:nvSpPr>
+        <p:spPr>
+          <a:xfrm>
+            <a:off x="5803392" y="2569464"/>
+            <a:ext cx="1828800" cy="201168"/>
+          </a:xfrm>
+          <a:prstGeom prst="rect">
+            <a:avLst/>
+          </a:prstGeom>
+          <a:noFill/>
+          <a:ln/>
+        </p:spPr>
+        <p:txBody>
+          <a:bodyPr wrap="square" lIns="0" tIns="0" rIns="0" bIns="0" rtlCol="0" anchor="t"/>
+          <a:lstStyle/>
+          <a:p>
+            <a:pPr algn="ctr" indent="0" marL="0">
+              <a:buNone/>
+            </a:pPr>
+            <a:r>
+              <a:rPr lang="en-US" sz="850" dirty="0">
+                <a:solidFill>
+                  <a:srgbClr val="475569"/>
+                </a:solidFill>
+                <a:latin typeface="Calibri" pitchFamily="34" charset="0"/>
+                <a:ea typeface="Calibri" pitchFamily="34" charset="-122"/>
+                <a:cs typeface="Calibri" pitchFamily="34" charset="-120"/>
+              </a:rPr>
+              <a:t>the result or process of</a:t>
+            </a:r>
+            <a:endParaRPr lang="en-US" sz="850" dirty="0"/>
+          </a:p>
+        </p:txBody>
+      </p:sp>
+      <p:sp>
+        <p:nvSpPr>
+          <p:cNvPr id="22" name="Text 20"/>
+          <p:cNvSpPr/>
+          <p:nvPr/>
+        </p:nvSpPr>
+        <p:spPr>
+          <a:xfrm>
+            <a:off x="5803392" y="2752344"/>
+            <a:ext cx="1828800" cy="182880"/>
+          </a:xfrm>
+          <a:prstGeom prst="rect">
+            <a:avLst/>
+          </a:prstGeom>
+          <a:noFill/>
+          <a:ln/>
+        </p:spPr>
+        <p:txBody>
+          <a:bodyPr wrap="square" lIns="0" tIns="0" rIns="0" bIns="0" rtlCol="0" anchor="t"/>
+          <a:lstStyle/>
+          <a:p>
+            <a:pPr algn="ctr" indent="0" marL="0">
+              <a:buNone/>
+            </a:pPr>
+            <a:r>
+              <a:rPr lang="en-US" sz="700" i="1" dirty="0">
+                <a:solidFill>
+                  <a:srgbClr val="94A3B8"/>
+                </a:solidFill>
+                <a:latin typeface="Calibri" pitchFamily="34" charset="0"/>
+                <a:ea typeface="Calibri" pitchFamily="34" charset="-122"/>
+                <a:cs typeface="Calibri" pitchFamily="34" charset="-120"/>
+              </a:rPr>
+              <a:t>'e' dropped before vowel suffix</a:t>
+            </a:r>
+            <a:endParaRPr lang="en-US" sz="700" dirty="0"/>
+          </a:p>
+        </p:txBody>
+      </p:sp>
+      <p:sp>
+        <p:nvSpPr>
+          <p:cNvPr id="23" name="Shape 21"/>
           <p:cNvSpPr/>
           <p:nvPr/>
         </p:nvSpPr>
@@ -25046,7 +26836,7 @@
       </p:sp>
       <p:sp>
         <p:nvSpPr>
-          <p:cNvPr id="20" name="Text 18"/>
+          <p:cNvPr id="24" name="Text 22"/>
           <p:cNvSpPr/>
           <p:nvPr/>
         </p:nvSpPr>
@@ -25085,7 +26875,7 @@
       </p:sp>
       <p:sp>
         <p:nvSpPr>
-          <p:cNvPr id="21" name="Shape 19"/>
+          <p:cNvPr id="25" name="Shape 23"/>
           <p:cNvSpPr/>
           <p:nvPr/>
         </p:nvSpPr>
@@ -25112,14 +26902,14 @@
       </p:sp>
       <p:sp>
         <p:nvSpPr>
-          <p:cNvPr id="22" name="Shape 20"/>
-          <p:cNvSpPr/>
-          <p:nvPr/>
-        </p:nvSpPr>
-        <p:spPr>
-          <a:xfrm>
-            <a:off x="2999232" y="3364992"/>
-            <a:ext cx="1645920" cy="475488"/>
+          <p:cNvPr id="26" name="Shape 24"/>
+          <p:cNvSpPr/>
+          <p:nvPr/>
+        </p:nvSpPr>
+        <p:spPr>
+          <a:xfrm>
+            <a:off x="1975104" y="3364992"/>
+            <a:ext cx="1554480" cy="475488"/>
           </a:xfrm>
           <a:prstGeom prst="rect">
             <a:avLst>
@@ -25139,14 +26929,14 @@
       </p:sp>
       <p:sp>
         <p:nvSpPr>
-          <p:cNvPr id="23" name="Text 21"/>
-          <p:cNvSpPr/>
-          <p:nvPr/>
-        </p:nvSpPr>
-        <p:spPr>
-          <a:xfrm>
-            <a:off x="2999232" y="3364992"/>
-            <a:ext cx="1645920" cy="475488"/>
+          <p:cNvPr id="27" name="Text 25"/>
+          <p:cNvSpPr/>
+          <p:nvPr/>
+        </p:nvSpPr>
+        <p:spPr>
+          <a:xfrm>
+            <a:off x="1975104" y="3364992"/>
+            <a:ext cx="1554480" cy="475488"/>
           </a:xfrm>
           <a:prstGeom prst="rect">
             <a:avLst/>
@@ -25178,14 +26968,14 @@
       </p:sp>
       <p:sp>
         <p:nvSpPr>
-          <p:cNvPr id="24" name="Text 22"/>
-          <p:cNvSpPr/>
-          <p:nvPr/>
-        </p:nvSpPr>
-        <p:spPr>
-          <a:xfrm>
-            <a:off x="4645152" y="3364992"/>
-            <a:ext cx="1097280" cy="475488"/>
+          <p:cNvPr id="28" name="Text 26"/>
+          <p:cNvSpPr/>
+          <p:nvPr/>
+        </p:nvSpPr>
+        <p:spPr>
+          <a:xfrm>
+            <a:off x="3529584" y="3364992"/>
+            <a:ext cx="73152" cy="475488"/>
           </a:xfrm>
           <a:prstGeom prst="rect">
             <a:avLst/>
@@ -25217,14 +27007,14 @@
       </p:sp>
       <p:sp>
         <p:nvSpPr>
-          <p:cNvPr id="25" name="Shape 23"/>
-          <p:cNvSpPr/>
-          <p:nvPr/>
-        </p:nvSpPr>
-        <p:spPr>
-          <a:xfrm>
-            <a:off x="5742432" y="3364992"/>
-            <a:ext cx="1645920" cy="475488"/>
+          <p:cNvPr id="29" name="Shape 27"/>
+          <p:cNvSpPr/>
+          <p:nvPr/>
+        </p:nvSpPr>
+        <p:spPr>
+          <a:xfrm>
+            <a:off x="3602736" y="3364992"/>
+            <a:ext cx="1554480" cy="475488"/>
           </a:xfrm>
           <a:prstGeom prst="rect">
             <a:avLst>
@@ -25244,14 +27034,14 @@
       </p:sp>
       <p:sp>
         <p:nvSpPr>
-          <p:cNvPr id="26" name="Text 24"/>
-          <p:cNvSpPr/>
-          <p:nvPr/>
-        </p:nvSpPr>
-        <p:spPr>
-          <a:xfrm>
-            <a:off x="5742432" y="3364992"/>
-            <a:ext cx="1645920" cy="475488"/>
+          <p:cNvPr id="30" name="Text 28"/>
+          <p:cNvSpPr/>
+          <p:nvPr/>
+        </p:nvSpPr>
+        <p:spPr>
+          <a:xfrm>
+            <a:off x="3602736" y="3364992"/>
+            <a:ext cx="1554480" cy="475488"/>
           </a:xfrm>
           <a:prstGeom prst="rect">
             <a:avLst/>
@@ -25275,7 +27065,7 @@
                 <a:ea typeface="Trebuchet MS" pitchFamily="34" charset="-122"/>
                 <a:cs typeface="Trebuchet MS" pitchFamily="34" charset="-120"/>
               </a:rPr>
-              <a:t>form</a:t>
+              <a:t>for</a:t>
             </a:r>
             <a:endParaRPr lang="en-US" sz="1400" dirty="0"/>
           </a:p>
@@ -25283,7 +27073,217 @@
       </p:sp>
       <p:sp>
         <p:nvSpPr>
-          <p:cNvPr id="27" name="Shape 25"/>
+          <p:cNvPr id="31" name="Text 29"/>
+          <p:cNvSpPr/>
+          <p:nvPr/>
+        </p:nvSpPr>
+        <p:spPr>
+          <a:xfrm>
+            <a:off x="5157216" y="3364992"/>
+            <a:ext cx="73152" cy="475488"/>
+          </a:xfrm>
+          <a:prstGeom prst="rect">
+            <a:avLst/>
+          </a:prstGeom>
+          <a:noFill/>
+          <a:ln/>
+        </p:spPr>
+        <p:txBody>
+          <a:bodyPr wrap="square" lIns="0" tIns="0" rIns="0" bIns="0" rtlCol="0" anchor="ctr"/>
+          <a:lstStyle/>
+          <a:p>
+            <a:pPr algn="ctr" indent="0" marL="0">
+              <a:buNone/>
+            </a:pPr>
+            <a:r>
+              <a:rPr lang="en-US" sz="1600" b="1" dirty="0">
+                <a:solidFill>
+                  <a:srgbClr val="0D9488"/>
+                </a:solidFill>
+                <a:latin typeface="Trebuchet MS" pitchFamily="34" charset="0"/>
+                <a:ea typeface="Trebuchet MS" pitchFamily="34" charset="-122"/>
+                <a:cs typeface="Trebuchet MS" pitchFamily="34" charset="-120"/>
+              </a:rPr>
+              <a:t>·</a:t>
+            </a:r>
+            <a:endParaRPr lang="en-US" sz="1600" dirty="0"/>
+          </a:p>
+        </p:txBody>
+      </p:sp>
+      <p:sp>
+        <p:nvSpPr>
+          <p:cNvPr id="32" name="Shape 30"/>
+          <p:cNvSpPr/>
+          <p:nvPr/>
+        </p:nvSpPr>
+        <p:spPr>
+          <a:xfrm>
+            <a:off x="5230368" y="3364992"/>
+            <a:ext cx="1554480" cy="475488"/>
+          </a:xfrm>
+          <a:prstGeom prst="rect">
+            <a:avLst>
+              <a:gd name="adj" fmla="val 9615"/>
+            </a:avLst>
+          </a:prstGeom>
+          <a:solidFill>
+            <a:srgbClr val="FFFFFF"/>
+          </a:solidFill>
+          <a:ln w="12700">
+            <a:solidFill>
+              <a:srgbClr val="0D9488"/>
+            </a:solidFill>
+            <a:prstDash val="solid"/>
+          </a:ln>
+        </p:spPr>
+      </p:sp>
+      <p:sp>
+        <p:nvSpPr>
+          <p:cNvPr id="33" name="Text 31"/>
+          <p:cNvSpPr/>
+          <p:nvPr/>
+        </p:nvSpPr>
+        <p:spPr>
+          <a:xfrm>
+            <a:off x="5230368" y="3364992"/>
+            <a:ext cx="1554480" cy="475488"/>
+          </a:xfrm>
+          <a:prstGeom prst="rect">
+            <a:avLst/>
+          </a:prstGeom>
+          <a:noFill/>
+          <a:ln/>
+        </p:spPr>
+        <p:txBody>
+          <a:bodyPr wrap="square" lIns="0" tIns="0" rIns="0" bIns="0" rtlCol="0" anchor="ctr"/>
+          <a:lstStyle/>
+          <a:p>
+            <a:pPr algn="ctr" indent="0" marL="0">
+              <a:buNone/>
+            </a:pPr>
+            <a:r>
+              <a:rPr lang="en-US" sz="1400" b="1" dirty="0">
+                <a:solidFill>
+                  <a:srgbClr val="0D9488"/>
+                </a:solidFill>
+                <a:latin typeface="Trebuchet MS" pitchFamily="34" charset="0"/>
+                <a:ea typeface="Trebuchet MS" pitchFamily="34" charset="-122"/>
+                <a:cs typeface="Trebuchet MS" pitchFamily="34" charset="-120"/>
+              </a:rPr>
+              <a:t>ma</a:t>
+            </a:r>
+            <a:endParaRPr lang="en-US" sz="1400" dirty="0"/>
+          </a:p>
+        </p:txBody>
+      </p:sp>
+      <p:sp>
+        <p:nvSpPr>
+          <p:cNvPr id="34" name="Text 32"/>
+          <p:cNvSpPr/>
+          <p:nvPr/>
+        </p:nvSpPr>
+        <p:spPr>
+          <a:xfrm>
+            <a:off x="6784848" y="3364992"/>
+            <a:ext cx="73152" cy="475488"/>
+          </a:xfrm>
+          <a:prstGeom prst="rect">
+            <a:avLst/>
+          </a:prstGeom>
+          <a:noFill/>
+          <a:ln/>
+        </p:spPr>
+        <p:txBody>
+          <a:bodyPr wrap="square" lIns="0" tIns="0" rIns="0" bIns="0" rtlCol="0" anchor="ctr"/>
+          <a:lstStyle/>
+          <a:p>
+            <a:pPr algn="ctr" indent="0" marL="0">
+              <a:buNone/>
+            </a:pPr>
+            <a:r>
+              <a:rPr lang="en-US" sz="1600" b="1" dirty="0">
+                <a:solidFill>
+                  <a:srgbClr val="0D9488"/>
+                </a:solidFill>
+                <a:latin typeface="Trebuchet MS" pitchFamily="34" charset="0"/>
+                <a:ea typeface="Trebuchet MS" pitchFamily="34" charset="-122"/>
+                <a:cs typeface="Trebuchet MS" pitchFamily="34" charset="-120"/>
+              </a:rPr>
+              <a:t>·</a:t>
+            </a:r>
+            <a:endParaRPr lang="en-US" sz="1600" dirty="0"/>
+          </a:p>
+        </p:txBody>
+      </p:sp>
+      <p:sp>
+        <p:nvSpPr>
+          <p:cNvPr id="35" name="Shape 33"/>
+          <p:cNvSpPr/>
+          <p:nvPr/>
+        </p:nvSpPr>
+        <p:spPr>
+          <a:xfrm>
+            <a:off x="6858000" y="3364992"/>
+            <a:ext cx="1554480" cy="475488"/>
+          </a:xfrm>
+          <a:prstGeom prst="rect">
+            <a:avLst>
+              <a:gd name="adj" fmla="val 9615"/>
+            </a:avLst>
+          </a:prstGeom>
+          <a:solidFill>
+            <a:srgbClr val="FFFFFF"/>
+          </a:solidFill>
+          <a:ln w="12700">
+            <a:solidFill>
+              <a:srgbClr val="0D9488"/>
+            </a:solidFill>
+            <a:prstDash val="solid"/>
+          </a:ln>
+        </p:spPr>
+      </p:sp>
+      <p:sp>
+        <p:nvSpPr>
+          <p:cNvPr id="36" name="Text 34"/>
+          <p:cNvSpPr/>
+          <p:nvPr/>
+        </p:nvSpPr>
+        <p:spPr>
+          <a:xfrm>
+            <a:off x="6858000" y="3364992"/>
+            <a:ext cx="1554480" cy="475488"/>
+          </a:xfrm>
+          <a:prstGeom prst="rect">
+            <a:avLst/>
+          </a:prstGeom>
+          <a:noFill/>
+          <a:ln/>
+        </p:spPr>
+        <p:txBody>
+          <a:bodyPr wrap="square" lIns="0" tIns="0" rIns="0" bIns="0" rtlCol="0" anchor="ctr"/>
+          <a:lstStyle/>
+          <a:p>
+            <a:pPr algn="ctr" indent="0" marL="0">
+              <a:buNone/>
+            </a:pPr>
+            <a:r>
+              <a:rPr lang="en-US" sz="1400" b="1" dirty="0">
+                <a:solidFill>
+                  <a:srgbClr val="0D9488"/>
+                </a:solidFill>
+                <a:latin typeface="Trebuchet MS" pitchFamily="34" charset="0"/>
+                <a:ea typeface="Trebuchet MS" pitchFamily="34" charset="-122"/>
+                <a:cs typeface="Trebuchet MS" pitchFamily="34" charset="-120"/>
+              </a:rPr>
+              <a:t>tion</a:t>
+            </a:r>
+            <a:endParaRPr lang="en-US" sz="1400" dirty="0"/>
+          </a:p>
+        </p:txBody>
+      </p:sp>
+      <p:sp>
+        <p:nvSpPr>
+          <p:cNvPr id="37" name="Shape 35"/>
           <p:cNvSpPr/>
           <p:nvPr/>
         </p:nvSpPr>
@@ -25310,7 +27310,7 @@
       </p:sp>
       <p:sp>
         <p:nvSpPr>
-          <p:cNvPr id="28" name="Text 26"/>
+          <p:cNvPr id="38" name="Text 36"/>
           <p:cNvSpPr/>
           <p:nvPr/>
         </p:nvSpPr>
@@ -25349,7 +27349,7 @@
       </p:sp>
       <p:sp>
         <p:nvSpPr>
-          <p:cNvPr id="29" name="Shape 27"/>
+          <p:cNvPr id="39" name="Shape 37"/>
           <p:cNvSpPr/>
           <p:nvPr/>
         </p:nvSpPr>
@@ -25376,7 +27376,7 @@
       </p:sp>
       <p:sp>
         <p:nvSpPr>
-          <p:cNvPr id="30" name="Text 28"/>
+          <p:cNvPr id="40" name="Text 38"/>
           <p:cNvSpPr/>
           <p:nvPr/>
         </p:nvSpPr>
@@ -25699,7 +27699,7 @@
                 <a:ea typeface="Calibri" pitchFamily="34" charset="-122"/>
                 <a:cs typeface="Calibri" pitchFamily="34" charset="-120"/>
               </a:rPr>
-              <a:t>Word Labs  •  wordlabs.app  •  Root: 'inform' = to give shape or knowledge</a:t>
+              <a:t>Word Labs  •  wordlabs.app  •  Root: 'inform' = to give knowledge or shape</a:t>
             </a:r>
             <a:endParaRPr lang="en-US" sz="800" dirty="0"/>
           </a:p>
@@ -25838,7 +27838,7 @@
                 <a:ea typeface="Trebuchet MS" pitchFamily="34" charset="-122"/>
                 <a:cs typeface="Trebuchet MS" pitchFamily="34" charset="-120"/>
               </a:rPr>
-              <a:t>inform</a:t>
+              <a:t>information</a:t>
             </a:r>
             <a:endParaRPr lang="en-US" sz="2800" dirty="0"/>
           </a:p>
@@ -25918,7 +27918,7 @@
         </p:nvSpPr>
         <p:spPr>
           <a:xfrm>
-            <a:off x="4370832" y="2258568"/>
+            <a:off x="2938272" y="2258568"/>
             <a:ext cx="1828800" cy="292608"/>
           </a:xfrm>
           <a:prstGeom prst="rect">
@@ -25952,7 +27952,7 @@
         </p:nvSpPr>
         <p:spPr>
           <a:xfrm>
-            <a:off x="4370832" y="2258568"/>
+            <a:off x="2938272" y="2258568"/>
             <a:ext cx="1828800" cy="292608"/>
           </a:xfrm>
           <a:prstGeom prst="rect">
@@ -25991,7 +27991,7 @@
         </p:nvSpPr>
         <p:spPr>
           <a:xfrm>
-            <a:off x="4370832" y="2569464"/>
+            <a:off x="2938272" y="2569464"/>
             <a:ext cx="1828800" cy="201168"/>
           </a:xfrm>
           <a:prstGeom prst="rect">
@@ -26016,7 +28016,7 @@
                 <a:ea typeface="Calibri" pitchFamily="34" charset="-122"/>
                 <a:cs typeface="Calibri" pitchFamily="34" charset="-120"/>
               </a:rPr>
-              <a:t>to give knowledge or shape</a:t>
+              <a:t>to give knowledge</a:t>
             </a:r>
             <a:endParaRPr lang="en-US" sz="850" dirty="0"/>
           </a:p>
@@ -26025,6 +28025,157 @@
       <p:sp>
         <p:nvSpPr>
           <p:cNvPr id="19" name="Shape 17"/>
+          <p:cNvSpPr/>
+          <p:nvPr/>
+        </p:nvSpPr>
+        <p:spPr>
+          <a:xfrm>
+            <a:off x="5803392" y="2258568"/>
+            <a:ext cx="1828800" cy="292608"/>
+          </a:xfrm>
+          <a:prstGeom prst="rect">
+            <a:avLst>
+              <a:gd name="adj" fmla="val 25000"/>
+            </a:avLst>
+          </a:prstGeom>
+          <a:solidFill>
+            <a:srgbClr val="FCE7F3"/>
+          </a:solidFill>
+          <a:ln w="19050">
+            <a:solidFill>
+              <a:srgbClr val="DB2777"/>
+            </a:solidFill>
+            <a:prstDash val="solid"/>
+          </a:ln>
+          <a:effectLst>
+            <a:outerShdw sx="100000" sy="100000" kx="0" ky="0" algn="bl" rotWithShape="0" blurRad="101600" dist="38100" dir="8100000">
+              <a:srgbClr val="000000">
+                <a:alpha val="12000"/>
+              </a:srgbClr>
+            </a:outerShdw>
+          </a:effectLst>
+        </p:spPr>
+      </p:sp>
+      <p:sp>
+        <p:nvSpPr>
+          <p:cNvPr id="20" name="Text 18"/>
+          <p:cNvSpPr/>
+          <p:nvPr/>
+        </p:nvSpPr>
+        <p:spPr>
+          <a:xfrm>
+            <a:off x="5803392" y="2258568"/>
+            <a:ext cx="1828800" cy="292608"/>
+          </a:xfrm>
+          <a:prstGeom prst="rect">
+            <a:avLst/>
+          </a:prstGeom>
+          <a:noFill/>
+          <a:ln/>
+        </p:spPr>
+        <p:txBody>
+          <a:bodyPr wrap="square" lIns="0" tIns="0" rIns="0" bIns="0" rtlCol="0" anchor="ctr"/>
+          <a:lstStyle/>
+          <a:p>
+            <a:pPr algn="ctr" indent="0" marL="0">
+              <a:buNone/>
+            </a:pPr>
+            <a:r>
+              <a:rPr lang="en-US" sz="1300" b="1" dirty="0">
+                <a:solidFill>
+                  <a:srgbClr val="9D174D"/>
+                </a:solidFill>
+                <a:latin typeface="Trebuchet MS" pitchFamily="34" charset="0"/>
+                <a:ea typeface="Trebuchet MS" pitchFamily="34" charset="-122"/>
+                <a:cs typeface="Trebuchet MS" pitchFamily="34" charset="-120"/>
+              </a:rPr>
+              <a:t>ation</a:t>
+            </a:r>
+            <a:endParaRPr lang="en-US" sz="1300" dirty="0"/>
+          </a:p>
+        </p:txBody>
+      </p:sp>
+      <p:sp>
+        <p:nvSpPr>
+          <p:cNvPr id="21" name="Text 19"/>
+          <p:cNvSpPr/>
+          <p:nvPr/>
+        </p:nvSpPr>
+        <p:spPr>
+          <a:xfrm>
+            <a:off x="5803392" y="2569464"/>
+            <a:ext cx="1828800" cy="201168"/>
+          </a:xfrm>
+          <a:prstGeom prst="rect">
+            <a:avLst/>
+          </a:prstGeom>
+          <a:noFill/>
+          <a:ln/>
+        </p:spPr>
+        <p:txBody>
+          <a:bodyPr wrap="square" lIns="0" tIns="0" rIns="0" bIns="0" rtlCol="0" anchor="t"/>
+          <a:lstStyle/>
+          <a:p>
+            <a:pPr algn="ctr" indent="0" marL="0">
+              <a:buNone/>
+            </a:pPr>
+            <a:r>
+              <a:rPr lang="en-US" sz="850" dirty="0">
+                <a:solidFill>
+                  <a:srgbClr val="475569"/>
+                </a:solidFill>
+                <a:latin typeface="Calibri" pitchFamily="34" charset="0"/>
+                <a:ea typeface="Calibri" pitchFamily="34" charset="-122"/>
+                <a:cs typeface="Calibri" pitchFamily="34" charset="-120"/>
+              </a:rPr>
+              <a:t>the result or process of</a:t>
+            </a:r>
+            <a:endParaRPr lang="en-US" sz="850" dirty="0"/>
+          </a:p>
+        </p:txBody>
+      </p:sp>
+      <p:sp>
+        <p:nvSpPr>
+          <p:cNvPr id="22" name="Text 20"/>
+          <p:cNvSpPr/>
+          <p:nvPr/>
+        </p:nvSpPr>
+        <p:spPr>
+          <a:xfrm>
+            <a:off x="5803392" y="2752344"/>
+            <a:ext cx="1828800" cy="182880"/>
+          </a:xfrm>
+          <a:prstGeom prst="rect">
+            <a:avLst/>
+          </a:prstGeom>
+          <a:noFill/>
+          <a:ln/>
+        </p:spPr>
+        <p:txBody>
+          <a:bodyPr wrap="square" lIns="0" tIns="0" rIns="0" bIns="0" rtlCol="0" anchor="t"/>
+          <a:lstStyle/>
+          <a:p>
+            <a:pPr algn="ctr" indent="0" marL="0">
+              <a:buNone/>
+            </a:pPr>
+            <a:r>
+              <a:rPr lang="en-US" sz="700" i="1" dirty="0">
+                <a:solidFill>
+                  <a:srgbClr val="94A3B8"/>
+                </a:solidFill>
+                <a:latin typeface="Calibri" pitchFamily="34" charset="0"/>
+                <a:ea typeface="Calibri" pitchFamily="34" charset="-122"/>
+                <a:cs typeface="Calibri" pitchFamily="34" charset="-120"/>
+              </a:rPr>
+              <a:t>'e' dropped before vowel suffix</a:t>
+            </a:r>
+            <a:endParaRPr lang="en-US" sz="700" dirty="0"/>
+          </a:p>
+        </p:txBody>
+      </p:sp>
+      <p:sp>
+        <p:nvSpPr>
+          <p:cNvPr id="23" name="Shape 21"/>
           <p:cNvSpPr/>
           <p:nvPr/>
         </p:nvSpPr>
@@ -26051,7 +28202,7 @@
       </p:sp>
       <p:sp>
         <p:nvSpPr>
-          <p:cNvPr id="20" name="Text 18"/>
+          <p:cNvPr id="24" name="Text 22"/>
           <p:cNvSpPr/>
           <p:nvPr/>
         </p:nvSpPr>
@@ -26090,7 +28241,7 @@
       </p:sp>
       <p:sp>
         <p:nvSpPr>
-          <p:cNvPr id="21" name="Shape 19"/>
+          <p:cNvPr id="25" name="Shape 23"/>
           <p:cNvSpPr/>
           <p:nvPr/>
         </p:nvSpPr>
@@ -26117,14 +28268,14 @@
       </p:sp>
       <p:sp>
         <p:nvSpPr>
-          <p:cNvPr id="22" name="Shape 20"/>
-          <p:cNvSpPr/>
-          <p:nvPr/>
-        </p:nvSpPr>
-        <p:spPr>
-          <a:xfrm>
-            <a:off x="2999232" y="3364992"/>
-            <a:ext cx="1645920" cy="475488"/>
+          <p:cNvPr id="26" name="Shape 24"/>
+          <p:cNvSpPr/>
+          <p:nvPr/>
+        </p:nvSpPr>
+        <p:spPr>
+          <a:xfrm>
+            <a:off x="1975104" y="3364992"/>
+            <a:ext cx="1554480" cy="475488"/>
           </a:xfrm>
           <a:prstGeom prst="rect">
             <a:avLst>
@@ -26144,14 +28295,14 @@
       </p:sp>
       <p:sp>
         <p:nvSpPr>
-          <p:cNvPr id="23" name="Text 21"/>
-          <p:cNvSpPr/>
-          <p:nvPr/>
-        </p:nvSpPr>
-        <p:spPr>
-          <a:xfrm>
-            <a:off x="2999232" y="3364992"/>
-            <a:ext cx="1645920" cy="475488"/>
+          <p:cNvPr id="27" name="Text 25"/>
+          <p:cNvSpPr/>
+          <p:nvPr/>
+        </p:nvSpPr>
+        <p:spPr>
+          <a:xfrm>
+            <a:off x="1975104" y="3364992"/>
+            <a:ext cx="1554480" cy="475488"/>
           </a:xfrm>
           <a:prstGeom prst="rect">
             <a:avLst/>
@@ -26183,14 +28334,14 @@
       </p:sp>
       <p:sp>
         <p:nvSpPr>
-          <p:cNvPr id="24" name="Text 22"/>
-          <p:cNvSpPr/>
-          <p:nvPr/>
-        </p:nvSpPr>
-        <p:spPr>
-          <a:xfrm>
-            <a:off x="4645152" y="3364992"/>
-            <a:ext cx="1097280" cy="475488"/>
+          <p:cNvPr id="28" name="Text 26"/>
+          <p:cNvSpPr/>
+          <p:nvPr/>
+        </p:nvSpPr>
+        <p:spPr>
+          <a:xfrm>
+            <a:off x="3529584" y="3364992"/>
+            <a:ext cx="73152" cy="475488"/>
           </a:xfrm>
           <a:prstGeom prst="rect">
             <a:avLst/>
@@ -26222,14 +28373,14 @@
       </p:sp>
       <p:sp>
         <p:nvSpPr>
-          <p:cNvPr id="25" name="Shape 23"/>
-          <p:cNvSpPr/>
-          <p:nvPr/>
-        </p:nvSpPr>
-        <p:spPr>
-          <a:xfrm>
-            <a:off x="5742432" y="3364992"/>
-            <a:ext cx="1645920" cy="475488"/>
+          <p:cNvPr id="29" name="Shape 27"/>
+          <p:cNvSpPr/>
+          <p:nvPr/>
+        </p:nvSpPr>
+        <p:spPr>
+          <a:xfrm>
+            <a:off x="3602736" y="3364992"/>
+            <a:ext cx="1554480" cy="475488"/>
           </a:xfrm>
           <a:prstGeom prst="rect">
             <a:avLst>
@@ -26249,14 +28400,14 @@
       </p:sp>
       <p:sp>
         <p:nvSpPr>
-          <p:cNvPr id="26" name="Text 24"/>
-          <p:cNvSpPr/>
-          <p:nvPr/>
-        </p:nvSpPr>
-        <p:spPr>
-          <a:xfrm>
-            <a:off x="5742432" y="3364992"/>
-            <a:ext cx="1645920" cy="475488"/>
+          <p:cNvPr id="30" name="Text 28"/>
+          <p:cNvSpPr/>
+          <p:nvPr/>
+        </p:nvSpPr>
+        <p:spPr>
+          <a:xfrm>
+            <a:off x="3602736" y="3364992"/>
+            <a:ext cx="1554480" cy="475488"/>
           </a:xfrm>
           <a:prstGeom prst="rect">
             <a:avLst/>
@@ -26280,7 +28431,7 @@
                 <a:ea typeface="Trebuchet MS" pitchFamily="34" charset="-122"/>
                 <a:cs typeface="Trebuchet MS" pitchFamily="34" charset="-120"/>
               </a:rPr>
-              <a:t>form</a:t>
+              <a:t>for</a:t>
             </a:r>
             <a:endParaRPr lang="en-US" sz="1400" dirty="0"/>
           </a:p>
@@ -26288,7 +28439,217 @@
       </p:sp>
       <p:sp>
         <p:nvSpPr>
-          <p:cNvPr id="27" name="Shape 25"/>
+          <p:cNvPr id="31" name="Text 29"/>
+          <p:cNvSpPr/>
+          <p:nvPr/>
+        </p:nvSpPr>
+        <p:spPr>
+          <a:xfrm>
+            <a:off x="5157216" y="3364992"/>
+            <a:ext cx="73152" cy="475488"/>
+          </a:xfrm>
+          <a:prstGeom prst="rect">
+            <a:avLst/>
+          </a:prstGeom>
+          <a:noFill/>
+          <a:ln/>
+        </p:spPr>
+        <p:txBody>
+          <a:bodyPr wrap="square" lIns="0" tIns="0" rIns="0" bIns="0" rtlCol="0" anchor="ctr"/>
+          <a:lstStyle/>
+          <a:p>
+            <a:pPr algn="ctr" indent="0" marL="0">
+              <a:buNone/>
+            </a:pPr>
+            <a:r>
+              <a:rPr lang="en-US" sz="1600" b="1" dirty="0">
+                <a:solidFill>
+                  <a:srgbClr val="0D9488"/>
+                </a:solidFill>
+                <a:latin typeface="Trebuchet MS" pitchFamily="34" charset="0"/>
+                <a:ea typeface="Trebuchet MS" pitchFamily="34" charset="-122"/>
+                <a:cs typeface="Trebuchet MS" pitchFamily="34" charset="-120"/>
+              </a:rPr>
+              <a:t>·</a:t>
+            </a:r>
+            <a:endParaRPr lang="en-US" sz="1600" dirty="0"/>
+          </a:p>
+        </p:txBody>
+      </p:sp>
+      <p:sp>
+        <p:nvSpPr>
+          <p:cNvPr id="32" name="Shape 30"/>
+          <p:cNvSpPr/>
+          <p:nvPr/>
+        </p:nvSpPr>
+        <p:spPr>
+          <a:xfrm>
+            <a:off x="5230368" y="3364992"/>
+            <a:ext cx="1554480" cy="475488"/>
+          </a:xfrm>
+          <a:prstGeom prst="rect">
+            <a:avLst>
+              <a:gd name="adj" fmla="val 9615"/>
+            </a:avLst>
+          </a:prstGeom>
+          <a:solidFill>
+            <a:srgbClr val="FFFFFF"/>
+          </a:solidFill>
+          <a:ln w="12700">
+            <a:solidFill>
+              <a:srgbClr val="0D9488"/>
+            </a:solidFill>
+            <a:prstDash val="solid"/>
+          </a:ln>
+        </p:spPr>
+      </p:sp>
+      <p:sp>
+        <p:nvSpPr>
+          <p:cNvPr id="33" name="Text 31"/>
+          <p:cNvSpPr/>
+          <p:nvPr/>
+        </p:nvSpPr>
+        <p:spPr>
+          <a:xfrm>
+            <a:off x="5230368" y="3364992"/>
+            <a:ext cx="1554480" cy="475488"/>
+          </a:xfrm>
+          <a:prstGeom prst="rect">
+            <a:avLst/>
+          </a:prstGeom>
+          <a:noFill/>
+          <a:ln/>
+        </p:spPr>
+        <p:txBody>
+          <a:bodyPr wrap="square" lIns="0" tIns="0" rIns="0" bIns="0" rtlCol="0" anchor="ctr"/>
+          <a:lstStyle/>
+          <a:p>
+            <a:pPr algn="ctr" indent="0" marL="0">
+              <a:buNone/>
+            </a:pPr>
+            <a:r>
+              <a:rPr lang="en-US" sz="1400" b="1" dirty="0">
+                <a:solidFill>
+                  <a:srgbClr val="0D9488"/>
+                </a:solidFill>
+                <a:latin typeface="Trebuchet MS" pitchFamily="34" charset="0"/>
+                <a:ea typeface="Trebuchet MS" pitchFamily="34" charset="-122"/>
+                <a:cs typeface="Trebuchet MS" pitchFamily="34" charset="-120"/>
+              </a:rPr>
+              <a:t>ma</a:t>
+            </a:r>
+            <a:endParaRPr lang="en-US" sz="1400" dirty="0"/>
+          </a:p>
+        </p:txBody>
+      </p:sp>
+      <p:sp>
+        <p:nvSpPr>
+          <p:cNvPr id="34" name="Text 32"/>
+          <p:cNvSpPr/>
+          <p:nvPr/>
+        </p:nvSpPr>
+        <p:spPr>
+          <a:xfrm>
+            <a:off x="6784848" y="3364992"/>
+            <a:ext cx="73152" cy="475488"/>
+          </a:xfrm>
+          <a:prstGeom prst="rect">
+            <a:avLst/>
+          </a:prstGeom>
+          <a:noFill/>
+          <a:ln/>
+        </p:spPr>
+        <p:txBody>
+          <a:bodyPr wrap="square" lIns="0" tIns="0" rIns="0" bIns="0" rtlCol="0" anchor="ctr"/>
+          <a:lstStyle/>
+          <a:p>
+            <a:pPr algn="ctr" indent="0" marL="0">
+              <a:buNone/>
+            </a:pPr>
+            <a:r>
+              <a:rPr lang="en-US" sz="1600" b="1" dirty="0">
+                <a:solidFill>
+                  <a:srgbClr val="0D9488"/>
+                </a:solidFill>
+                <a:latin typeface="Trebuchet MS" pitchFamily="34" charset="0"/>
+                <a:ea typeface="Trebuchet MS" pitchFamily="34" charset="-122"/>
+                <a:cs typeface="Trebuchet MS" pitchFamily="34" charset="-120"/>
+              </a:rPr>
+              <a:t>·</a:t>
+            </a:r>
+            <a:endParaRPr lang="en-US" sz="1600" dirty="0"/>
+          </a:p>
+        </p:txBody>
+      </p:sp>
+      <p:sp>
+        <p:nvSpPr>
+          <p:cNvPr id="35" name="Shape 33"/>
+          <p:cNvSpPr/>
+          <p:nvPr/>
+        </p:nvSpPr>
+        <p:spPr>
+          <a:xfrm>
+            <a:off x="6858000" y="3364992"/>
+            <a:ext cx="1554480" cy="475488"/>
+          </a:xfrm>
+          <a:prstGeom prst="rect">
+            <a:avLst>
+              <a:gd name="adj" fmla="val 9615"/>
+            </a:avLst>
+          </a:prstGeom>
+          <a:solidFill>
+            <a:srgbClr val="FFFFFF"/>
+          </a:solidFill>
+          <a:ln w="12700">
+            <a:solidFill>
+              <a:srgbClr val="0D9488"/>
+            </a:solidFill>
+            <a:prstDash val="solid"/>
+          </a:ln>
+        </p:spPr>
+      </p:sp>
+      <p:sp>
+        <p:nvSpPr>
+          <p:cNvPr id="36" name="Text 34"/>
+          <p:cNvSpPr/>
+          <p:nvPr/>
+        </p:nvSpPr>
+        <p:spPr>
+          <a:xfrm>
+            <a:off x="6858000" y="3364992"/>
+            <a:ext cx="1554480" cy="475488"/>
+          </a:xfrm>
+          <a:prstGeom prst="rect">
+            <a:avLst/>
+          </a:prstGeom>
+          <a:noFill/>
+          <a:ln/>
+        </p:spPr>
+        <p:txBody>
+          <a:bodyPr wrap="square" lIns="0" tIns="0" rIns="0" bIns="0" rtlCol="0" anchor="ctr"/>
+          <a:lstStyle/>
+          <a:p>
+            <a:pPr algn="ctr" indent="0" marL="0">
+              <a:buNone/>
+            </a:pPr>
+            <a:r>
+              <a:rPr lang="en-US" sz="1400" b="1" dirty="0">
+                <a:solidFill>
+                  <a:srgbClr val="0D9488"/>
+                </a:solidFill>
+                <a:latin typeface="Trebuchet MS" pitchFamily="34" charset="0"/>
+                <a:ea typeface="Trebuchet MS" pitchFamily="34" charset="-122"/>
+                <a:cs typeface="Trebuchet MS" pitchFamily="34" charset="-120"/>
+              </a:rPr>
+              <a:t>tion</a:t>
+            </a:r>
+            <a:endParaRPr lang="en-US" sz="1400" dirty="0"/>
+          </a:p>
+        </p:txBody>
+      </p:sp>
+      <p:sp>
+        <p:nvSpPr>
+          <p:cNvPr id="37" name="Shape 35"/>
           <p:cNvSpPr/>
           <p:nvPr/>
         </p:nvSpPr>
@@ -26315,7 +28676,7 @@
       </p:sp>
       <p:sp>
         <p:nvSpPr>
-          <p:cNvPr id="28" name="Text 26"/>
+          <p:cNvPr id="38" name="Text 36"/>
           <p:cNvSpPr/>
           <p:nvPr/>
         </p:nvSpPr>
@@ -26354,18 +28715,18 @@
       </p:sp>
       <p:sp>
         <p:nvSpPr>
-          <p:cNvPr id="29" name="Shape 27"/>
+          <p:cNvPr id="39" name="Shape 37"/>
           <p:cNvSpPr/>
           <p:nvPr/>
         </p:nvSpPr>
         <p:spPr>
           <a:xfrm>
             <a:off x="1874520" y="4096512"/>
-            <a:ext cx="6903720" cy="658368"/>
+            <a:ext cx="6903720" cy="804672"/>
           </a:xfrm>
           <a:prstGeom prst="rect">
             <a:avLst>
-              <a:gd name="adj" fmla="val 8333"/>
+              <a:gd name="adj" fmla="val 6818"/>
             </a:avLst>
           </a:prstGeom>
           <a:solidFill>
@@ -26381,18 +28742,18 @@
       </p:sp>
       <p:sp>
         <p:nvSpPr>
-          <p:cNvPr id="30" name="Shape 28"/>
-          <p:cNvSpPr/>
-          <p:nvPr/>
-        </p:nvSpPr>
-        <p:spPr>
-          <a:xfrm>
-            <a:off x="2427732" y="4169664"/>
-            <a:ext cx="685800" cy="475488"/>
+          <p:cNvPr id="40" name="Shape 38"/>
+          <p:cNvSpPr/>
+          <p:nvPr/>
+        </p:nvSpPr>
+        <p:spPr>
+          <a:xfrm>
+            <a:off x="2023872" y="4169664"/>
+            <a:ext cx="685800" cy="384048"/>
           </a:xfrm>
           <a:prstGeom prst="rect">
             <a:avLst>
-              <a:gd name="adj" fmla="val 7692"/>
+              <a:gd name="adj" fmla="val 9524"/>
             </a:avLst>
           </a:prstGeom>
           <a:solidFill>
@@ -26408,14 +28769,14 @@
       </p:sp>
       <p:sp>
         <p:nvSpPr>
-          <p:cNvPr id="31" name="Text 29"/>
-          <p:cNvSpPr/>
-          <p:nvPr/>
-        </p:nvSpPr>
-        <p:spPr>
-          <a:xfrm>
-            <a:off x="2427732" y="4169664"/>
-            <a:ext cx="685800" cy="475488"/>
+          <p:cNvPr id="41" name="Text 39"/>
+          <p:cNvSpPr/>
+          <p:nvPr/>
+        </p:nvSpPr>
+        <p:spPr>
+          <a:xfrm>
+            <a:off x="2023872" y="4169664"/>
+            <a:ext cx="685800" cy="384048"/>
           </a:xfrm>
           <a:prstGeom prst="rect">
             <a:avLst/>
@@ -26447,18 +28808,18 @@
       </p:sp>
       <p:sp>
         <p:nvSpPr>
-          <p:cNvPr id="32" name="Shape 30"/>
-          <p:cNvSpPr/>
-          <p:nvPr/>
-        </p:nvSpPr>
-        <p:spPr>
-          <a:xfrm>
-            <a:off x="3639312" y="4169664"/>
-            <a:ext cx="685800" cy="475488"/>
+          <p:cNvPr id="42" name="Shape 40"/>
+          <p:cNvSpPr/>
+          <p:nvPr/>
+        </p:nvSpPr>
+        <p:spPr>
+          <a:xfrm>
+            <a:off x="2831592" y="4169664"/>
+            <a:ext cx="685800" cy="384048"/>
           </a:xfrm>
           <a:prstGeom prst="rect">
             <a:avLst>
-              <a:gd name="adj" fmla="val 7692"/>
+              <a:gd name="adj" fmla="val 9524"/>
             </a:avLst>
           </a:prstGeom>
           <a:solidFill>
@@ -26474,14 +28835,14 @@
       </p:sp>
       <p:sp>
         <p:nvSpPr>
-          <p:cNvPr id="33" name="Text 31"/>
-          <p:cNvSpPr/>
-          <p:nvPr/>
-        </p:nvSpPr>
-        <p:spPr>
-          <a:xfrm>
-            <a:off x="3639312" y="4169664"/>
-            <a:ext cx="685800" cy="475488"/>
+          <p:cNvPr id="43" name="Text 41"/>
+          <p:cNvSpPr/>
+          <p:nvPr/>
+        </p:nvSpPr>
+        <p:spPr>
+          <a:xfrm>
+            <a:off x="2831592" y="4169664"/>
+            <a:ext cx="685800" cy="384048"/>
           </a:xfrm>
           <a:prstGeom prst="rect">
             <a:avLst/>
@@ -26513,18 +28874,18 @@
       </p:sp>
       <p:sp>
         <p:nvSpPr>
-          <p:cNvPr id="34" name="Shape 32"/>
-          <p:cNvSpPr/>
-          <p:nvPr/>
-        </p:nvSpPr>
-        <p:spPr>
-          <a:xfrm>
-            <a:off x="4850892" y="4169664"/>
-            <a:ext cx="685800" cy="475488"/>
+          <p:cNvPr id="44" name="Shape 42"/>
+          <p:cNvSpPr/>
+          <p:nvPr/>
+        </p:nvSpPr>
+        <p:spPr>
+          <a:xfrm>
+            <a:off x="3639312" y="4169664"/>
+            <a:ext cx="685800" cy="384048"/>
           </a:xfrm>
           <a:prstGeom prst="rect">
             <a:avLst>
-              <a:gd name="adj" fmla="val 7692"/>
+              <a:gd name="adj" fmla="val 9524"/>
             </a:avLst>
           </a:prstGeom>
           <a:solidFill>
@@ -26540,14 +28901,14 @@
       </p:sp>
       <p:sp>
         <p:nvSpPr>
-          <p:cNvPr id="35" name="Text 33"/>
-          <p:cNvSpPr/>
-          <p:nvPr/>
-        </p:nvSpPr>
-        <p:spPr>
-          <a:xfrm>
-            <a:off x="4850892" y="4169664"/>
-            <a:ext cx="685800" cy="475488"/>
+          <p:cNvPr id="45" name="Text 43"/>
+          <p:cNvSpPr/>
+          <p:nvPr/>
+        </p:nvSpPr>
+        <p:spPr>
+          <a:xfrm>
+            <a:off x="3639312" y="4169664"/>
+            <a:ext cx="685800" cy="384048"/>
           </a:xfrm>
           <a:prstGeom prst="rect">
             <a:avLst/>
@@ -26579,18 +28940,18 @@
       </p:sp>
       <p:sp>
         <p:nvSpPr>
-          <p:cNvPr id="36" name="Shape 34"/>
-          <p:cNvSpPr/>
-          <p:nvPr/>
-        </p:nvSpPr>
-        <p:spPr>
-          <a:xfrm>
-            <a:off x="6062472" y="4169664"/>
-            <a:ext cx="685800" cy="475488"/>
+          <p:cNvPr id="46" name="Shape 44"/>
+          <p:cNvSpPr/>
+          <p:nvPr/>
+        </p:nvSpPr>
+        <p:spPr>
+          <a:xfrm>
+            <a:off x="4447032" y="4169664"/>
+            <a:ext cx="685800" cy="384048"/>
           </a:xfrm>
           <a:prstGeom prst="rect">
             <a:avLst>
-              <a:gd name="adj" fmla="val 7692"/>
+              <a:gd name="adj" fmla="val 9524"/>
             </a:avLst>
           </a:prstGeom>
           <a:solidFill>
@@ -26606,14 +28967,14 @@
       </p:sp>
       <p:sp>
         <p:nvSpPr>
-          <p:cNvPr id="37" name="Text 35"/>
-          <p:cNvSpPr/>
-          <p:nvPr/>
-        </p:nvSpPr>
-        <p:spPr>
-          <a:xfrm>
-            <a:off x="6062472" y="4169664"/>
-            <a:ext cx="685800" cy="475488"/>
+          <p:cNvPr id="47" name="Text 45"/>
+          <p:cNvSpPr/>
+          <p:nvPr/>
+        </p:nvSpPr>
+        <p:spPr>
+          <a:xfrm>
+            <a:off x="4447032" y="4169664"/>
+            <a:ext cx="685800" cy="384048"/>
           </a:xfrm>
           <a:prstGeom prst="rect">
             <a:avLst/>
@@ -26645,18 +29006,18 @@
       </p:sp>
       <p:sp>
         <p:nvSpPr>
-          <p:cNvPr id="38" name="Shape 36"/>
-          <p:cNvSpPr/>
-          <p:nvPr/>
-        </p:nvSpPr>
-        <p:spPr>
-          <a:xfrm>
-            <a:off x="7274052" y="4169664"/>
-            <a:ext cx="685800" cy="475488"/>
+          <p:cNvPr id="48" name="Shape 46"/>
+          <p:cNvSpPr/>
+          <p:nvPr/>
+        </p:nvSpPr>
+        <p:spPr>
+          <a:xfrm>
+            <a:off x="5254752" y="4169664"/>
+            <a:ext cx="685800" cy="384048"/>
           </a:xfrm>
           <a:prstGeom prst="rect">
             <a:avLst>
-              <a:gd name="adj" fmla="val 7692"/>
+              <a:gd name="adj" fmla="val 9524"/>
             </a:avLst>
           </a:prstGeom>
           <a:solidFill>
@@ -26672,14 +29033,14 @@
       </p:sp>
       <p:sp>
         <p:nvSpPr>
-          <p:cNvPr id="39" name="Text 37"/>
-          <p:cNvSpPr/>
-          <p:nvPr/>
-        </p:nvSpPr>
-        <p:spPr>
-          <a:xfrm>
-            <a:off x="7274052" y="4169664"/>
-            <a:ext cx="685800" cy="475488"/>
+          <p:cNvPr id="49" name="Text 47"/>
+          <p:cNvSpPr/>
+          <p:nvPr/>
+        </p:nvSpPr>
+        <p:spPr>
+          <a:xfrm>
+            <a:off x="5254752" y="4169664"/>
+            <a:ext cx="685800" cy="384048"/>
           </a:xfrm>
           <a:prstGeom prst="rect">
             <a:avLst/>
@@ -26704,6 +29065,243 @@
                 <a:cs typeface="Trebuchet MS" pitchFamily="34" charset="-120"/>
               </a:rPr>
               <a:t>m</a:t>
+            </a:r>
+            <a:endParaRPr lang="en-US" sz="900" dirty="0"/>
+          </a:p>
+        </p:txBody>
+      </p:sp>
+      <p:sp>
+        <p:nvSpPr>
+          <p:cNvPr id="50" name="Shape 48"/>
+          <p:cNvSpPr/>
+          <p:nvPr/>
+        </p:nvSpPr>
+        <p:spPr>
+          <a:xfrm>
+            <a:off x="6062472" y="4169664"/>
+            <a:ext cx="685800" cy="384048"/>
+          </a:xfrm>
+          <a:prstGeom prst="rect">
+            <a:avLst>
+              <a:gd name="adj" fmla="val 9524"/>
+            </a:avLst>
+          </a:prstGeom>
+          <a:solidFill>
+            <a:srgbClr val="FFFFFF"/>
+          </a:solidFill>
+          <a:ln w="12700">
+            <a:solidFill>
+              <a:srgbClr val="DB2777"/>
+            </a:solidFill>
+            <a:prstDash val="solid"/>
+          </a:ln>
+        </p:spPr>
+      </p:sp>
+      <p:sp>
+        <p:nvSpPr>
+          <p:cNvPr id="51" name="Text 49"/>
+          <p:cNvSpPr/>
+          <p:nvPr/>
+        </p:nvSpPr>
+        <p:spPr>
+          <a:xfrm>
+            <a:off x="6062472" y="4169664"/>
+            <a:ext cx="685800" cy="384048"/>
+          </a:xfrm>
+          <a:prstGeom prst="rect">
+            <a:avLst/>
+          </a:prstGeom>
+          <a:noFill/>
+          <a:ln/>
+        </p:spPr>
+        <p:txBody>
+          <a:bodyPr wrap="square" lIns="0" tIns="0" rIns="0" bIns="0" rtlCol="0" anchor="ctr"/>
+          <a:lstStyle/>
+          <a:p>
+            <a:pPr algn="ctr" indent="0" marL="0">
+              <a:buNone/>
+            </a:pPr>
+            <a:r>
+              <a:rPr lang="en-US" sz="900" b="1" dirty="0">
+                <a:solidFill>
+                  <a:srgbClr val="9D174D"/>
+                </a:solidFill>
+                <a:latin typeface="Trebuchet MS" pitchFamily="34" charset="0"/>
+                <a:ea typeface="Trebuchet MS" pitchFamily="34" charset="-122"/>
+                <a:cs typeface="Trebuchet MS" pitchFamily="34" charset="-120"/>
+              </a:rPr>
+              <a:t>a</a:t>
+            </a:r>
+            <a:endParaRPr lang="en-US" sz="900" dirty="0"/>
+          </a:p>
+        </p:txBody>
+      </p:sp>
+      <p:sp>
+        <p:nvSpPr>
+          <p:cNvPr id="52" name="Shape 50"/>
+          <p:cNvSpPr/>
+          <p:nvPr/>
+        </p:nvSpPr>
+        <p:spPr>
+          <a:xfrm>
+            <a:off x="6870192" y="4169664"/>
+            <a:ext cx="685800" cy="384048"/>
+          </a:xfrm>
+          <a:prstGeom prst="rect">
+            <a:avLst>
+              <a:gd name="adj" fmla="val 9524"/>
+            </a:avLst>
+          </a:prstGeom>
+          <a:solidFill>
+            <a:srgbClr val="FFFFFF"/>
+          </a:solidFill>
+          <a:ln w="12700">
+            <a:solidFill>
+              <a:srgbClr val="DB2777"/>
+            </a:solidFill>
+            <a:prstDash val="solid"/>
+          </a:ln>
+        </p:spPr>
+      </p:sp>
+      <p:sp>
+        <p:nvSpPr>
+          <p:cNvPr id="53" name="Text 51"/>
+          <p:cNvSpPr/>
+          <p:nvPr/>
+        </p:nvSpPr>
+        <p:spPr>
+          <a:xfrm>
+            <a:off x="6870192" y="4169664"/>
+            <a:ext cx="685800" cy="384048"/>
+          </a:xfrm>
+          <a:prstGeom prst="rect">
+            <a:avLst/>
+          </a:prstGeom>
+          <a:noFill/>
+          <a:ln/>
+        </p:spPr>
+        <p:txBody>
+          <a:bodyPr wrap="square" lIns="0" tIns="0" rIns="0" bIns="0" rtlCol="0" anchor="ctr"/>
+          <a:lstStyle/>
+          <a:p>
+            <a:pPr algn="ctr" indent="0" marL="0">
+              <a:buNone/>
+            </a:pPr>
+            <a:r>
+              <a:rPr lang="en-US" sz="900" b="1" dirty="0">
+                <a:solidFill>
+                  <a:srgbClr val="9D174D"/>
+                </a:solidFill>
+                <a:latin typeface="Trebuchet MS" pitchFamily="34" charset="0"/>
+                <a:ea typeface="Trebuchet MS" pitchFamily="34" charset="-122"/>
+                <a:cs typeface="Trebuchet MS" pitchFamily="34" charset="-120"/>
+              </a:rPr>
+              <a:t>ti</a:t>
+            </a:r>
+            <a:endParaRPr lang="en-US" sz="900" dirty="0"/>
+          </a:p>
+        </p:txBody>
+      </p:sp>
+      <p:sp>
+        <p:nvSpPr>
+          <p:cNvPr id="54" name="Text 52"/>
+          <p:cNvSpPr/>
+          <p:nvPr/>
+        </p:nvSpPr>
+        <p:spPr>
+          <a:xfrm>
+            <a:off x="6870192" y="4572000"/>
+            <a:ext cx="685800" cy="219456"/>
+          </a:xfrm>
+          <a:prstGeom prst="rect">
+            <a:avLst/>
+          </a:prstGeom>
+          <a:noFill/>
+          <a:ln/>
+        </p:spPr>
+        <p:txBody>
+          <a:bodyPr wrap="square" lIns="0" tIns="0" rIns="0" bIns="0" rtlCol="0" anchor="t"/>
+          <a:lstStyle/>
+          <a:p>
+            <a:pPr algn="ctr" indent="0" marL="0">
+              <a:buNone/>
+            </a:pPr>
+            <a:r>
+              <a:rPr lang="en-US" sz="750" i="1" dirty="0">
+                <a:solidFill>
+                  <a:srgbClr val="94A3B8"/>
+                </a:solidFill>
+                <a:latin typeface="Calibri" pitchFamily="34" charset="0"/>
+                <a:ea typeface="Calibri" pitchFamily="34" charset="-122"/>
+                <a:cs typeface="Calibri" pitchFamily="34" charset="-120"/>
+              </a:rPr>
+              <a:t>/sh/</a:t>
+            </a:r>
+            <a:endParaRPr lang="en-US" sz="750" dirty="0"/>
+          </a:p>
+        </p:txBody>
+      </p:sp>
+      <p:sp>
+        <p:nvSpPr>
+          <p:cNvPr id="55" name="Shape 53"/>
+          <p:cNvSpPr/>
+          <p:nvPr/>
+        </p:nvSpPr>
+        <p:spPr>
+          <a:xfrm>
+            <a:off x="7677912" y="4169664"/>
+            <a:ext cx="685800" cy="384048"/>
+          </a:xfrm>
+          <a:prstGeom prst="rect">
+            <a:avLst>
+              <a:gd name="adj" fmla="val 9524"/>
+            </a:avLst>
+          </a:prstGeom>
+          <a:solidFill>
+            <a:srgbClr val="FFFFFF"/>
+          </a:solidFill>
+          <a:ln w="12700">
+            <a:solidFill>
+              <a:srgbClr val="DB2777"/>
+            </a:solidFill>
+            <a:prstDash val="solid"/>
+          </a:ln>
+        </p:spPr>
+      </p:sp>
+      <p:sp>
+        <p:nvSpPr>
+          <p:cNvPr id="56" name="Text 54"/>
+          <p:cNvSpPr/>
+          <p:nvPr/>
+        </p:nvSpPr>
+        <p:spPr>
+          <a:xfrm>
+            <a:off x="7677912" y="4169664"/>
+            <a:ext cx="685800" cy="384048"/>
+          </a:xfrm>
+          <a:prstGeom prst="rect">
+            <a:avLst/>
+          </a:prstGeom>
+          <a:noFill/>
+          <a:ln/>
+        </p:spPr>
+        <p:txBody>
+          <a:bodyPr wrap="square" lIns="0" tIns="0" rIns="0" bIns="0" rtlCol="0" anchor="ctr"/>
+          <a:lstStyle/>
+          <a:p>
+            <a:pPr algn="ctr" indent="0" marL="0">
+              <a:buNone/>
+            </a:pPr>
+            <a:r>
+              <a:rPr lang="en-US" sz="900" b="1" dirty="0">
+                <a:solidFill>
+                  <a:srgbClr val="9D174D"/>
+                </a:solidFill>
+                <a:latin typeface="Trebuchet MS" pitchFamily="34" charset="0"/>
+                <a:ea typeface="Trebuchet MS" pitchFamily="34" charset="-122"/>
+                <a:cs typeface="Trebuchet MS" pitchFamily="34" charset="-120"/>
+              </a:rPr>
+              <a:t>on</a:t>
             </a:r>
             <a:endParaRPr lang="en-US" sz="900" dirty="0"/>
           </a:p>
@@ -26995,7 +29593,7 @@
                 <a:ea typeface="Calibri" pitchFamily="34" charset="-122"/>
                 <a:cs typeface="Calibri" pitchFamily="34" charset="-120"/>
               </a:rPr>
-              <a:t>Word Labs  •  wordlabs.app  •  Root: 'inform' = to give shape or knowledge</a:t>
+              <a:t>Word Labs  •  wordlabs.app  •  Root: 'inform' = to give knowledge or shape</a:t>
             </a:r>
             <a:endParaRPr lang="en-US" sz="800" dirty="0"/>
           </a:p>
@@ -27134,7 +29732,7 @@
                 <a:ea typeface="Trebuchet MS" pitchFamily="34" charset="-122"/>
                 <a:cs typeface="Trebuchet MS" pitchFamily="34" charset="-120"/>
               </a:rPr>
-              <a:t>information</a:t>
+              <a:t>misinforming</a:t>
             </a:r>
             <a:endParaRPr lang="en-US" sz="2800" dirty="0"/>
           </a:p>
@@ -27822,7 +30420,7 @@
                 <a:ea typeface="Calibri" pitchFamily="34" charset="-122"/>
                 <a:cs typeface="Calibri" pitchFamily="34" charset="-120"/>
               </a:rPr>
-              <a:t>Word Labs  •  wordlabs.app  •  Root: 'inform' = to give shape or knowledge</a:t>
+              <a:t>Word Labs  •  wordlabs.app  •  Root: 'inform' = to give knowledge or shape</a:t>
             </a:r>
             <a:endParaRPr lang="en-US" sz="800" dirty="0"/>
           </a:p>
@@ -27961,7 +30559,7 @@
                 <a:ea typeface="Trebuchet MS" pitchFamily="34" charset="-122"/>
                 <a:cs typeface="Trebuchet MS" pitchFamily="34" charset="-120"/>
               </a:rPr>
-              <a:t>information</a:t>
+              <a:t>misinforming</a:t>
             </a:r>
             <a:endParaRPr lang="en-US" sz="2800" dirty="0"/>
           </a:p>
@@ -28041,7 +30639,7 @@
         </p:nvSpPr>
         <p:spPr>
           <a:xfrm>
-            <a:off x="2938272" y="2258568"/>
+            <a:off x="2221992" y="2258568"/>
             <a:ext cx="1828800" cy="292608"/>
           </a:xfrm>
           <a:prstGeom prst="rect">
@@ -28050,11 +30648,11 @@
             </a:avLst>
           </a:prstGeom>
           <a:solidFill>
-            <a:srgbClr val="CCFBF1"/>
+            <a:srgbClr val="DDD6FE"/>
           </a:solidFill>
           <a:ln w="19050">
             <a:solidFill>
-              <a:srgbClr val="0D9488"/>
+              <a:srgbClr val="7C3AED"/>
             </a:solidFill>
             <a:prstDash val="solid"/>
           </a:ln>
@@ -28075,7 +30673,7 @@
         </p:nvSpPr>
         <p:spPr>
           <a:xfrm>
-            <a:off x="2938272" y="2258568"/>
+            <a:off x="2221992" y="2258568"/>
             <a:ext cx="1828800" cy="292608"/>
           </a:xfrm>
           <a:prstGeom prst="rect">
@@ -28094,13 +30692,13 @@
             <a:r>
               <a:rPr lang="en-US" sz="1300" b="1" dirty="0">
                 <a:solidFill>
-                  <a:srgbClr val="0F766E"/>
+                  <a:srgbClr val="4C1D95"/>
                 </a:solidFill>
                 <a:latin typeface="Trebuchet MS" pitchFamily="34" charset="0"/>
                 <a:ea typeface="Trebuchet MS" pitchFamily="34" charset="-122"/>
                 <a:cs typeface="Trebuchet MS" pitchFamily="34" charset="-120"/>
               </a:rPr>
-              <a:t>inform</a:t>
+              <a:t>mis</a:t>
             </a:r>
             <a:endParaRPr lang="en-US" sz="1300" dirty="0"/>
           </a:p>
@@ -28114,7 +30712,7 @@
         </p:nvSpPr>
         <p:spPr>
           <a:xfrm>
-            <a:off x="2938272" y="2569464"/>
+            <a:off x="2221992" y="2569464"/>
             <a:ext cx="1828800" cy="201168"/>
           </a:xfrm>
           <a:prstGeom prst="rect">
@@ -28139,7 +30737,7 @@
                 <a:ea typeface="Calibri" pitchFamily="34" charset="-122"/>
                 <a:cs typeface="Calibri" pitchFamily="34" charset="-120"/>
               </a:rPr>
-              <a:t>to give knowledge or shape</a:t>
+              <a:t>wrongly or badly</a:t>
             </a:r>
             <a:endParaRPr lang="en-US" sz="850" dirty="0"/>
           </a:p>
@@ -28153,7 +30751,7 @@
         </p:nvSpPr>
         <p:spPr>
           <a:xfrm>
-            <a:off x="5803392" y="2258568"/>
+            <a:off x="4370832" y="2258568"/>
             <a:ext cx="1828800" cy="292608"/>
           </a:xfrm>
           <a:prstGeom prst="rect">
@@ -28162,11 +30760,11 @@
             </a:avLst>
           </a:prstGeom>
           <a:solidFill>
-            <a:srgbClr val="FCE7F3"/>
+            <a:srgbClr val="CCFBF1"/>
           </a:solidFill>
           <a:ln w="19050">
             <a:solidFill>
-              <a:srgbClr val="DB2777"/>
+              <a:srgbClr val="0D9488"/>
             </a:solidFill>
             <a:prstDash val="solid"/>
           </a:ln>
@@ -28187,7 +30785,7 @@
         </p:nvSpPr>
         <p:spPr>
           <a:xfrm>
-            <a:off x="5803392" y="2258568"/>
+            <a:off x="4370832" y="2258568"/>
             <a:ext cx="1828800" cy="292608"/>
           </a:xfrm>
           <a:prstGeom prst="rect">
@@ -28206,13 +30804,13 @@
             <a:r>
               <a:rPr lang="en-US" sz="1300" b="1" dirty="0">
                 <a:solidFill>
-                  <a:srgbClr val="9D174D"/>
+                  <a:srgbClr val="0F766E"/>
                 </a:solidFill>
                 <a:latin typeface="Trebuchet MS" pitchFamily="34" charset="0"/>
                 <a:ea typeface="Trebuchet MS" pitchFamily="34" charset="-122"/>
                 <a:cs typeface="Trebuchet MS" pitchFamily="34" charset="-120"/>
               </a:rPr>
-              <a:t>ation</a:t>
+              <a:t>inform</a:t>
             </a:r>
             <a:endParaRPr lang="en-US" sz="1300" dirty="0"/>
           </a:p>
@@ -28226,7 +30824,7 @@
         </p:nvSpPr>
         <p:spPr>
           <a:xfrm>
-            <a:off x="5803392" y="2569464"/>
+            <a:off x="4370832" y="2569464"/>
             <a:ext cx="1828800" cy="201168"/>
           </a:xfrm>
           <a:prstGeom prst="rect">
@@ -28251,7 +30849,7 @@
                 <a:ea typeface="Calibri" pitchFamily="34" charset="-122"/>
                 <a:cs typeface="Calibri" pitchFamily="34" charset="-120"/>
               </a:rPr>
-              <a:t>the act or result of</a:t>
+              <a:t>to give knowledge</a:t>
             </a:r>
             <a:endParaRPr lang="en-US" sz="850" dirty="0"/>
           </a:p>
@@ -28260,6 +30858,118 @@
       <p:sp>
         <p:nvSpPr>
           <p:cNvPr id="22" name="Shape 20"/>
+          <p:cNvSpPr/>
+          <p:nvPr/>
+        </p:nvSpPr>
+        <p:spPr>
+          <a:xfrm>
+            <a:off x="6519672" y="2258568"/>
+            <a:ext cx="1828800" cy="292608"/>
+          </a:xfrm>
+          <a:prstGeom prst="rect">
+            <a:avLst>
+              <a:gd name="adj" fmla="val 25000"/>
+            </a:avLst>
+          </a:prstGeom>
+          <a:solidFill>
+            <a:srgbClr val="FCE7F3"/>
+          </a:solidFill>
+          <a:ln w="19050">
+            <a:solidFill>
+              <a:srgbClr val="DB2777"/>
+            </a:solidFill>
+            <a:prstDash val="solid"/>
+          </a:ln>
+          <a:effectLst>
+            <a:outerShdw sx="100000" sy="100000" kx="0" ky="0" algn="bl" rotWithShape="0" blurRad="101600" dist="38100" dir="8100000">
+              <a:srgbClr val="000000">
+                <a:alpha val="12000"/>
+              </a:srgbClr>
+            </a:outerShdw>
+          </a:effectLst>
+        </p:spPr>
+      </p:sp>
+      <p:sp>
+        <p:nvSpPr>
+          <p:cNvPr id="23" name="Text 21"/>
+          <p:cNvSpPr/>
+          <p:nvPr/>
+        </p:nvSpPr>
+        <p:spPr>
+          <a:xfrm>
+            <a:off x="6519672" y="2258568"/>
+            <a:ext cx="1828800" cy="292608"/>
+          </a:xfrm>
+          <a:prstGeom prst="rect">
+            <a:avLst/>
+          </a:prstGeom>
+          <a:noFill/>
+          <a:ln/>
+        </p:spPr>
+        <p:txBody>
+          <a:bodyPr wrap="square" lIns="0" tIns="0" rIns="0" bIns="0" rtlCol="0" anchor="ctr"/>
+          <a:lstStyle/>
+          <a:p>
+            <a:pPr algn="ctr" indent="0" marL="0">
+              <a:buNone/>
+            </a:pPr>
+            <a:r>
+              <a:rPr lang="en-US" sz="1300" b="1" dirty="0">
+                <a:solidFill>
+                  <a:srgbClr val="9D174D"/>
+                </a:solidFill>
+                <a:latin typeface="Trebuchet MS" pitchFamily="34" charset="0"/>
+                <a:ea typeface="Trebuchet MS" pitchFamily="34" charset="-122"/>
+                <a:cs typeface="Trebuchet MS" pitchFamily="34" charset="-120"/>
+              </a:rPr>
+              <a:t>ing</a:t>
+            </a:r>
+            <a:endParaRPr lang="en-US" sz="1300" dirty="0"/>
+          </a:p>
+        </p:txBody>
+      </p:sp>
+      <p:sp>
+        <p:nvSpPr>
+          <p:cNvPr id="24" name="Text 22"/>
+          <p:cNvSpPr/>
+          <p:nvPr/>
+        </p:nvSpPr>
+        <p:spPr>
+          <a:xfrm>
+            <a:off x="6519672" y="2569464"/>
+            <a:ext cx="1828800" cy="201168"/>
+          </a:xfrm>
+          <a:prstGeom prst="rect">
+            <a:avLst/>
+          </a:prstGeom>
+          <a:noFill/>
+          <a:ln/>
+        </p:spPr>
+        <p:txBody>
+          <a:bodyPr wrap="square" lIns="0" tIns="0" rIns="0" bIns="0" rtlCol="0" anchor="t"/>
+          <a:lstStyle/>
+          <a:p>
+            <a:pPr algn="ctr" indent="0" marL="0">
+              <a:buNone/>
+            </a:pPr>
+            <a:r>
+              <a:rPr lang="en-US" sz="850" dirty="0">
+                <a:solidFill>
+                  <a:srgbClr val="475569"/>
+                </a:solidFill>
+                <a:latin typeface="Calibri" pitchFamily="34" charset="0"/>
+                <a:ea typeface="Calibri" pitchFamily="34" charset="-122"/>
+                <a:cs typeface="Calibri" pitchFamily="34" charset="-120"/>
+              </a:rPr>
+              <a:t>happening right now</a:t>
+            </a:r>
+            <a:endParaRPr lang="en-US" sz="850" dirty="0"/>
+          </a:p>
+        </p:txBody>
+      </p:sp>
+      <p:sp>
+        <p:nvSpPr>
+          <p:cNvPr id="25" name="Shape 23"/>
           <p:cNvSpPr/>
           <p:nvPr/>
         </p:nvSpPr>
@@ -28286,7 +30996,7 @@
       </p:sp>
       <p:sp>
         <p:nvSpPr>
-          <p:cNvPr id="23" name="Text 21"/>
+          <p:cNvPr id="26" name="Text 24"/>
           <p:cNvSpPr/>
           <p:nvPr/>
         </p:nvSpPr>
@@ -28325,7 +31035,7 @@
       </p:sp>
       <p:sp>
         <p:nvSpPr>
-          <p:cNvPr id="24" name="Shape 22"/>
+          <p:cNvPr id="27" name="Shape 25"/>
           <p:cNvSpPr/>
           <p:nvPr/>
         </p:nvSpPr>
@@ -28352,7 +31062,7 @@
       </p:sp>
       <p:sp>
         <p:nvSpPr>
-          <p:cNvPr id="25" name="Text 23"/>
+          <p:cNvPr id="28" name="Text 26"/>
           <p:cNvSpPr/>
           <p:nvPr/>
         </p:nvSpPr>
@@ -28391,7 +31101,7 @@
       </p:sp>
       <p:sp>
         <p:nvSpPr>
-          <p:cNvPr id="26" name="Shape 24"/>
+          <p:cNvPr id="29" name="Shape 27"/>
           <p:cNvSpPr/>
           <p:nvPr/>
         </p:nvSpPr>
@@ -28418,7 +31128,7 @@
       </p:sp>
       <p:sp>
         <p:nvSpPr>
-          <p:cNvPr id="27" name="Text 25"/>
+          <p:cNvPr id="30" name="Text 28"/>
           <p:cNvSpPr/>
           <p:nvPr/>
         </p:nvSpPr>
@@ -28457,7 +31167,7 @@
       </p:sp>
       <p:sp>
         <p:nvSpPr>
-          <p:cNvPr id="28" name="Shape 26"/>
+          <p:cNvPr id="31" name="Shape 29"/>
           <p:cNvSpPr/>
           <p:nvPr/>
         </p:nvSpPr>
@@ -28484,7 +31194,7 @@
       </p:sp>
       <p:sp>
         <p:nvSpPr>
-          <p:cNvPr id="29" name="Text 27"/>
+          <p:cNvPr id="32" name="Text 30"/>
           <p:cNvSpPr/>
           <p:nvPr/>
         </p:nvSpPr>
@@ -28807,7 +31517,7 @@
                 <a:ea typeface="Calibri" pitchFamily="34" charset="-122"/>
                 <a:cs typeface="Calibri" pitchFamily="34" charset="-120"/>
               </a:rPr>
-              <a:t>Word Labs  •  wordlabs.app  •  Root: 'inform' = to give shape or knowledge</a:t>
+              <a:t>Word Labs  •  wordlabs.app  •  Root: 'inform' = to give knowledge or shape</a:t>
             </a:r>
             <a:endParaRPr lang="en-US" sz="800" dirty="0"/>
           </a:p>
@@ -28946,7 +31656,7 @@
                 <a:ea typeface="Trebuchet MS" pitchFamily="34" charset="-122"/>
                 <a:cs typeface="Trebuchet MS" pitchFamily="34" charset="-120"/>
               </a:rPr>
-              <a:t>information</a:t>
+              <a:t>misinforming</a:t>
             </a:r>
             <a:endParaRPr lang="en-US" sz="2800" dirty="0"/>
           </a:p>
@@ -29026,7 +31736,7 @@
         </p:nvSpPr>
         <p:spPr>
           <a:xfrm>
-            <a:off x="2938272" y="2258568"/>
+            <a:off x="2221992" y="2258568"/>
             <a:ext cx="1828800" cy="292608"/>
           </a:xfrm>
           <a:prstGeom prst="rect">
@@ -29035,11 +31745,11 @@
             </a:avLst>
           </a:prstGeom>
           <a:solidFill>
-            <a:srgbClr val="CCFBF1"/>
+            <a:srgbClr val="DDD6FE"/>
           </a:solidFill>
           <a:ln w="19050">
             <a:solidFill>
-              <a:srgbClr val="0D9488"/>
+              <a:srgbClr val="7C3AED"/>
             </a:solidFill>
             <a:prstDash val="solid"/>
           </a:ln>
@@ -29060,7 +31770,7 @@
         </p:nvSpPr>
         <p:spPr>
           <a:xfrm>
-            <a:off x="2938272" y="2258568"/>
+            <a:off x="2221992" y="2258568"/>
             <a:ext cx="1828800" cy="292608"/>
           </a:xfrm>
           <a:prstGeom prst="rect">
@@ -29079,13 +31789,13 @@
             <a:r>
               <a:rPr lang="en-US" sz="1300" b="1" dirty="0">
                 <a:solidFill>
-                  <a:srgbClr val="0F766E"/>
+                  <a:srgbClr val="4C1D95"/>
                 </a:solidFill>
                 <a:latin typeface="Trebuchet MS" pitchFamily="34" charset="0"/>
                 <a:ea typeface="Trebuchet MS" pitchFamily="34" charset="-122"/>
                 <a:cs typeface="Trebuchet MS" pitchFamily="34" charset="-120"/>
               </a:rPr>
-              <a:t>inform</a:t>
+              <a:t>mis</a:t>
             </a:r>
             <a:endParaRPr lang="en-US" sz="1300" dirty="0"/>
           </a:p>
@@ -29099,7 +31809,7 @@
         </p:nvSpPr>
         <p:spPr>
           <a:xfrm>
-            <a:off x="2938272" y="2569464"/>
+            <a:off x="2221992" y="2569464"/>
             <a:ext cx="1828800" cy="201168"/>
           </a:xfrm>
           <a:prstGeom prst="rect">
@@ -29124,7 +31834,7 @@
                 <a:ea typeface="Calibri" pitchFamily="34" charset="-122"/>
                 <a:cs typeface="Calibri" pitchFamily="34" charset="-120"/>
               </a:rPr>
-              <a:t>to give knowledge or shape</a:t>
+              <a:t>wrongly or badly</a:t>
             </a:r>
             <a:endParaRPr lang="en-US" sz="850" dirty="0"/>
           </a:p>
@@ -29138,7 +31848,7 @@
         </p:nvSpPr>
         <p:spPr>
           <a:xfrm>
-            <a:off x="5803392" y="2258568"/>
+            <a:off x="4370832" y="2258568"/>
             <a:ext cx="1828800" cy="292608"/>
           </a:xfrm>
           <a:prstGeom prst="rect">
@@ -29147,11 +31857,11 @@
             </a:avLst>
           </a:prstGeom>
           <a:solidFill>
-            <a:srgbClr val="FCE7F3"/>
+            <a:srgbClr val="CCFBF1"/>
           </a:solidFill>
           <a:ln w="19050">
             <a:solidFill>
-              <a:srgbClr val="DB2777"/>
+              <a:srgbClr val="0D9488"/>
             </a:solidFill>
             <a:prstDash val="solid"/>
           </a:ln>
@@ -29172,7 +31882,7 @@
         </p:nvSpPr>
         <p:spPr>
           <a:xfrm>
-            <a:off x="5803392" y="2258568"/>
+            <a:off x="4370832" y="2258568"/>
             <a:ext cx="1828800" cy="292608"/>
           </a:xfrm>
           <a:prstGeom prst="rect">
@@ -29191,13 +31901,13 @@
             <a:r>
               <a:rPr lang="en-US" sz="1300" b="1" dirty="0">
                 <a:solidFill>
-                  <a:srgbClr val="9D174D"/>
+                  <a:srgbClr val="0F766E"/>
                 </a:solidFill>
                 <a:latin typeface="Trebuchet MS" pitchFamily="34" charset="0"/>
                 <a:ea typeface="Trebuchet MS" pitchFamily="34" charset="-122"/>
                 <a:cs typeface="Trebuchet MS" pitchFamily="34" charset="-120"/>
               </a:rPr>
-              <a:t>ation</a:t>
+              <a:t>inform</a:t>
             </a:r>
             <a:endParaRPr lang="en-US" sz="1300" dirty="0"/>
           </a:p>
@@ -29211,7 +31921,7 @@
         </p:nvSpPr>
         <p:spPr>
           <a:xfrm>
-            <a:off x="5803392" y="2569464"/>
+            <a:off x="4370832" y="2569464"/>
             <a:ext cx="1828800" cy="201168"/>
           </a:xfrm>
           <a:prstGeom prst="rect">
@@ -29236,7 +31946,7 @@
                 <a:ea typeface="Calibri" pitchFamily="34" charset="-122"/>
                 <a:cs typeface="Calibri" pitchFamily="34" charset="-120"/>
               </a:rPr>
-              <a:t>the act or result of</a:t>
+              <a:t>to give knowledge</a:t>
             </a:r>
             <a:endParaRPr lang="en-US" sz="850" dirty="0"/>
           </a:p>
@@ -29245,6 +31955,118 @@
       <p:sp>
         <p:nvSpPr>
           <p:cNvPr id="22" name="Shape 20"/>
+          <p:cNvSpPr/>
+          <p:nvPr/>
+        </p:nvSpPr>
+        <p:spPr>
+          <a:xfrm>
+            <a:off x="6519672" y="2258568"/>
+            <a:ext cx="1828800" cy="292608"/>
+          </a:xfrm>
+          <a:prstGeom prst="rect">
+            <a:avLst>
+              <a:gd name="adj" fmla="val 25000"/>
+            </a:avLst>
+          </a:prstGeom>
+          <a:solidFill>
+            <a:srgbClr val="FCE7F3"/>
+          </a:solidFill>
+          <a:ln w="19050">
+            <a:solidFill>
+              <a:srgbClr val="DB2777"/>
+            </a:solidFill>
+            <a:prstDash val="solid"/>
+          </a:ln>
+          <a:effectLst>
+            <a:outerShdw sx="100000" sy="100000" kx="0" ky="0" algn="bl" rotWithShape="0" blurRad="101600" dist="38100" dir="8100000">
+              <a:srgbClr val="000000">
+                <a:alpha val="12000"/>
+              </a:srgbClr>
+            </a:outerShdw>
+          </a:effectLst>
+        </p:spPr>
+      </p:sp>
+      <p:sp>
+        <p:nvSpPr>
+          <p:cNvPr id="23" name="Text 21"/>
+          <p:cNvSpPr/>
+          <p:nvPr/>
+        </p:nvSpPr>
+        <p:spPr>
+          <a:xfrm>
+            <a:off x="6519672" y="2258568"/>
+            <a:ext cx="1828800" cy="292608"/>
+          </a:xfrm>
+          <a:prstGeom prst="rect">
+            <a:avLst/>
+          </a:prstGeom>
+          <a:noFill/>
+          <a:ln/>
+        </p:spPr>
+        <p:txBody>
+          <a:bodyPr wrap="square" lIns="0" tIns="0" rIns="0" bIns="0" rtlCol="0" anchor="ctr"/>
+          <a:lstStyle/>
+          <a:p>
+            <a:pPr algn="ctr" indent="0" marL="0">
+              <a:buNone/>
+            </a:pPr>
+            <a:r>
+              <a:rPr lang="en-US" sz="1300" b="1" dirty="0">
+                <a:solidFill>
+                  <a:srgbClr val="9D174D"/>
+                </a:solidFill>
+                <a:latin typeface="Trebuchet MS" pitchFamily="34" charset="0"/>
+                <a:ea typeface="Trebuchet MS" pitchFamily="34" charset="-122"/>
+                <a:cs typeface="Trebuchet MS" pitchFamily="34" charset="-120"/>
+              </a:rPr>
+              <a:t>ing</a:t>
+            </a:r>
+            <a:endParaRPr lang="en-US" sz="1300" dirty="0"/>
+          </a:p>
+        </p:txBody>
+      </p:sp>
+      <p:sp>
+        <p:nvSpPr>
+          <p:cNvPr id="24" name="Text 22"/>
+          <p:cNvSpPr/>
+          <p:nvPr/>
+        </p:nvSpPr>
+        <p:spPr>
+          <a:xfrm>
+            <a:off x="6519672" y="2569464"/>
+            <a:ext cx="1828800" cy="201168"/>
+          </a:xfrm>
+          <a:prstGeom prst="rect">
+            <a:avLst/>
+          </a:prstGeom>
+          <a:noFill/>
+          <a:ln/>
+        </p:spPr>
+        <p:txBody>
+          <a:bodyPr wrap="square" lIns="0" tIns="0" rIns="0" bIns="0" rtlCol="0" anchor="t"/>
+          <a:lstStyle/>
+          <a:p>
+            <a:pPr algn="ctr" indent="0" marL="0">
+              <a:buNone/>
+            </a:pPr>
+            <a:r>
+              <a:rPr lang="en-US" sz="850" dirty="0">
+                <a:solidFill>
+                  <a:srgbClr val="475569"/>
+                </a:solidFill>
+                <a:latin typeface="Calibri" pitchFamily="34" charset="0"/>
+                <a:ea typeface="Calibri" pitchFamily="34" charset="-122"/>
+                <a:cs typeface="Calibri" pitchFamily="34" charset="-120"/>
+              </a:rPr>
+              <a:t>happening right now</a:t>
+            </a:r>
+            <a:endParaRPr lang="en-US" sz="850" dirty="0"/>
+          </a:p>
+        </p:txBody>
+      </p:sp>
+      <p:sp>
+        <p:nvSpPr>
+          <p:cNvPr id="25" name="Shape 23"/>
           <p:cNvSpPr/>
           <p:nvPr/>
         </p:nvSpPr>
@@ -29271,7 +32093,7 @@
       </p:sp>
       <p:sp>
         <p:nvSpPr>
-          <p:cNvPr id="23" name="Text 21"/>
+          <p:cNvPr id="26" name="Text 24"/>
           <p:cNvSpPr/>
           <p:nvPr/>
         </p:nvSpPr>
@@ -29310,7 +32132,7 @@
       </p:sp>
       <p:sp>
         <p:nvSpPr>
-          <p:cNvPr id="24" name="Shape 22"/>
+          <p:cNvPr id="27" name="Shape 25"/>
           <p:cNvSpPr/>
           <p:nvPr/>
         </p:nvSpPr>
@@ -29337,7 +32159,7 @@
       </p:sp>
       <p:sp>
         <p:nvSpPr>
-          <p:cNvPr id="25" name="Shape 23"/>
+          <p:cNvPr id="28" name="Shape 26"/>
           <p:cNvSpPr/>
           <p:nvPr/>
         </p:nvSpPr>
@@ -29364,7 +32186,7 @@
       </p:sp>
       <p:sp>
         <p:nvSpPr>
-          <p:cNvPr id="26" name="Text 24"/>
+          <p:cNvPr id="29" name="Text 27"/>
           <p:cNvSpPr/>
           <p:nvPr/>
         </p:nvSpPr>
@@ -29395,7 +32217,7 @@
                 <a:ea typeface="Trebuchet MS" pitchFamily="34" charset="-122"/>
                 <a:cs typeface="Trebuchet MS" pitchFamily="34" charset="-120"/>
               </a:rPr>
-              <a:t>in</a:t>
+              <a:t>mis</a:t>
             </a:r>
             <a:endParaRPr lang="en-US" sz="1400" dirty="0"/>
           </a:p>
@@ -29403,7 +32225,7 @@
       </p:sp>
       <p:sp>
         <p:nvSpPr>
-          <p:cNvPr id="27" name="Text 25"/>
+          <p:cNvPr id="30" name="Text 28"/>
           <p:cNvSpPr/>
           <p:nvPr/>
         </p:nvSpPr>
@@ -29442,7 +32264,7 @@
       </p:sp>
       <p:sp>
         <p:nvSpPr>
-          <p:cNvPr id="28" name="Shape 26"/>
+          <p:cNvPr id="31" name="Shape 29"/>
           <p:cNvSpPr/>
           <p:nvPr/>
         </p:nvSpPr>
@@ -29469,7 +32291,7 @@
       </p:sp>
       <p:sp>
         <p:nvSpPr>
-          <p:cNvPr id="29" name="Text 27"/>
+          <p:cNvPr id="32" name="Text 30"/>
           <p:cNvSpPr/>
           <p:nvPr/>
         </p:nvSpPr>
@@ -29500,7 +32322,7 @@
                 <a:ea typeface="Trebuchet MS" pitchFamily="34" charset="-122"/>
                 <a:cs typeface="Trebuchet MS" pitchFamily="34" charset="-120"/>
               </a:rPr>
-              <a:t>for</a:t>
+              <a:t>in</a:t>
             </a:r>
             <a:endParaRPr lang="en-US" sz="1400" dirty="0"/>
           </a:p>
@@ -29508,7 +32330,7 @@
       </p:sp>
       <p:sp>
         <p:nvSpPr>
-          <p:cNvPr id="30" name="Text 28"/>
+          <p:cNvPr id="33" name="Text 31"/>
           <p:cNvSpPr/>
           <p:nvPr/>
         </p:nvSpPr>
@@ -29547,7 +32369,7 @@
       </p:sp>
       <p:sp>
         <p:nvSpPr>
-          <p:cNvPr id="31" name="Shape 29"/>
+          <p:cNvPr id="34" name="Shape 32"/>
           <p:cNvSpPr/>
           <p:nvPr/>
         </p:nvSpPr>
@@ -29574,7 +32396,7 @@
       </p:sp>
       <p:sp>
         <p:nvSpPr>
-          <p:cNvPr id="32" name="Text 30"/>
+          <p:cNvPr id="35" name="Text 33"/>
           <p:cNvSpPr/>
           <p:nvPr/>
         </p:nvSpPr>
@@ -29605,7 +32427,7 @@
                 <a:ea typeface="Trebuchet MS" pitchFamily="34" charset="-122"/>
                 <a:cs typeface="Trebuchet MS" pitchFamily="34" charset="-120"/>
               </a:rPr>
-              <a:t>ma</a:t>
+              <a:t>form</a:t>
             </a:r>
             <a:endParaRPr lang="en-US" sz="1400" dirty="0"/>
           </a:p>
@@ -29613,7 +32435,7 @@
       </p:sp>
       <p:sp>
         <p:nvSpPr>
-          <p:cNvPr id="33" name="Text 31"/>
+          <p:cNvPr id="36" name="Text 34"/>
           <p:cNvSpPr/>
           <p:nvPr/>
         </p:nvSpPr>
@@ -29652,7 +32474,7 @@
       </p:sp>
       <p:sp>
         <p:nvSpPr>
-          <p:cNvPr id="34" name="Shape 32"/>
+          <p:cNvPr id="37" name="Shape 35"/>
           <p:cNvSpPr/>
           <p:nvPr/>
         </p:nvSpPr>
@@ -29679,7 +32501,7 @@
       </p:sp>
       <p:sp>
         <p:nvSpPr>
-          <p:cNvPr id="35" name="Text 33"/>
+          <p:cNvPr id="38" name="Text 36"/>
           <p:cNvSpPr/>
           <p:nvPr/>
         </p:nvSpPr>
@@ -29710,7 +32532,7 @@
                 <a:ea typeface="Trebuchet MS" pitchFamily="34" charset="-122"/>
                 <a:cs typeface="Trebuchet MS" pitchFamily="34" charset="-120"/>
               </a:rPr>
-              <a:t>tion</a:t>
+              <a:t>ing</a:t>
             </a:r>
             <a:endParaRPr lang="en-US" sz="1400" dirty="0"/>
           </a:p>
@@ -29718,7 +32540,7 @@
       </p:sp>
       <p:sp>
         <p:nvSpPr>
-          <p:cNvPr id="36" name="Shape 34"/>
+          <p:cNvPr id="39" name="Shape 37"/>
           <p:cNvSpPr/>
           <p:nvPr/>
         </p:nvSpPr>
@@ -29745,7 +32567,7 @@
       </p:sp>
       <p:sp>
         <p:nvSpPr>
-          <p:cNvPr id="37" name="Text 35"/>
+          <p:cNvPr id="40" name="Text 38"/>
           <p:cNvSpPr/>
           <p:nvPr/>
         </p:nvSpPr>
@@ -29784,7 +32606,7 @@
       </p:sp>
       <p:sp>
         <p:nvSpPr>
-          <p:cNvPr id="38" name="Shape 36"/>
+          <p:cNvPr id="41" name="Shape 39"/>
           <p:cNvSpPr/>
           <p:nvPr/>
         </p:nvSpPr>
@@ -29811,7 +32633,7 @@
       </p:sp>
       <p:sp>
         <p:nvSpPr>
-          <p:cNvPr id="39" name="Text 37"/>
+          <p:cNvPr id="42" name="Text 40"/>
           <p:cNvSpPr/>
           <p:nvPr/>
         </p:nvSpPr>
@@ -30134,7 +32956,7 @@
                 <a:ea typeface="Calibri" pitchFamily="34" charset="-122"/>
                 <a:cs typeface="Calibri" pitchFamily="34" charset="-120"/>
               </a:rPr>
-              <a:t>Word Labs  •  wordlabs.app  •  Root: 'inform' = to give shape or knowledge</a:t>
+              <a:t>Word Labs  •  wordlabs.app  •  Root: 'inform' = to give knowledge or shape</a:t>
             </a:r>
             <a:endParaRPr lang="en-US" sz="800" dirty="0"/>
           </a:p>
@@ -30273,7 +33095,7 @@
                 <a:ea typeface="Trebuchet MS" pitchFamily="34" charset="-122"/>
                 <a:cs typeface="Trebuchet MS" pitchFamily="34" charset="-120"/>
               </a:rPr>
-              <a:t>information</a:t>
+              <a:t>misinforming</a:t>
             </a:r>
             <a:endParaRPr lang="en-US" sz="2800" dirty="0"/>
           </a:p>
@@ -30353,7 +33175,7 @@
         </p:nvSpPr>
         <p:spPr>
           <a:xfrm>
-            <a:off x="2938272" y="2258568"/>
+            <a:off x="2221992" y="2258568"/>
             <a:ext cx="1828800" cy="292608"/>
           </a:xfrm>
           <a:prstGeom prst="rect">
@@ -30362,11 +33184,11 @@
             </a:avLst>
           </a:prstGeom>
           <a:solidFill>
-            <a:srgbClr val="CCFBF1"/>
+            <a:srgbClr val="DDD6FE"/>
           </a:solidFill>
           <a:ln w="19050">
             <a:solidFill>
-              <a:srgbClr val="0D9488"/>
+              <a:srgbClr val="7C3AED"/>
             </a:solidFill>
             <a:prstDash val="solid"/>
           </a:ln>
@@ -30387,7 +33209,7 @@
         </p:nvSpPr>
         <p:spPr>
           <a:xfrm>
-            <a:off x="2938272" y="2258568"/>
+            <a:off x="2221992" y="2258568"/>
             <a:ext cx="1828800" cy="292608"/>
           </a:xfrm>
           <a:prstGeom prst="rect">
@@ -30406,13 +33228,13 @@
             <a:r>
               <a:rPr lang="en-US" sz="1300" b="1" dirty="0">
                 <a:solidFill>
-                  <a:srgbClr val="0F766E"/>
+                  <a:srgbClr val="4C1D95"/>
                 </a:solidFill>
                 <a:latin typeface="Trebuchet MS" pitchFamily="34" charset="0"/>
                 <a:ea typeface="Trebuchet MS" pitchFamily="34" charset="-122"/>
                 <a:cs typeface="Trebuchet MS" pitchFamily="34" charset="-120"/>
               </a:rPr>
-              <a:t>inform</a:t>
+              <a:t>mis</a:t>
             </a:r>
             <a:endParaRPr lang="en-US" sz="1300" dirty="0"/>
           </a:p>
@@ -30426,7 +33248,7 @@
         </p:nvSpPr>
         <p:spPr>
           <a:xfrm>
-            <a:off x="2938272" y="2569464"/>
+            <a:off x="2221992" y="2569464"/>
             <a:ext cx="1828800" cy="201168"/>
           </a:xfrm>
           <a:prstGeom prst="rect">
@@ -30451,7 +33273,7 @@
                 <a:ea typeface="Calibri" pitchFamily="34" charset="-122"/>
                 <a:cs typeface="Calibri" pitchFamily="34" charset="-120"/>
               </a:rPr>
-              <a:t>to give knowledge or shape</a:t>
+              <a:t>wrongly or badly</a:t>
             </a:r>
             <a:endParaRPr lang="en-US" sz="850" dirty="0"/>
           </a:p>
@@ -30465,7 +33287,7 @@
         </p:nvSpPr>
         <p:spPr>
           <a:xfrm>
-            <a:off x="5803392" y="2258568"/>
+            <a:off x="4370832" y="2258568"/>
             <a:ext cx="1828800" cy="292608"/>
           </a:xfrm>
           <a:prstGeom prst="rect">
@@ -30474,11 +33296,11 @@
             </a:avLst>
           </a:prstGeom>
           <a:solidFill>
-            <a:srgbClr val="FCE7F3"/>
+            <a:srgbClr val="CCFBF1"/>
           </a:solidFill>
           <a:ln w="19050">
             <a:solidFill>
-              <a:srgbClr val="DB2777"/>
+              <a:srgbClr val="0D9488"/>
             </a:solidFill>
             <a:prstDash val="solid"/>
           </a:ln>
@@ -30499,7 +33321,7 @@
         </p:nvSpPr>
         <p:spPr>
           <a:xfrm>
-            <a:off x="5803392" y="2258568"/>
+            <a:off x="4370832" y="2258568"/>
             <a:ext cx="1828800" cy="292608"/>
           </a:xfrm>
           <a:prstGeom prst="rect">
@@ -30518,13 +33340,13 @@
             <a:r>
               <a:rPr lang="en-US" sz="1300" b="1" dirty="0">
                 <a:solidFill>
-                  <a:srgbClr val="9D174D"/>
+                  <a:srgbClr val="0F766E"/>
                 </a:solidFill>
                 <a:latin typeface="Trebuchet MS" pitchFamily="34" charset="0"/>
                 <a:ea typeface="Trebuchet MS" pitchFamily="34" charset="-122"/>
                 <a:cs typeface="Trebuchet MS" pitchFamily="34" charset="-120"/>
               </a:rPr>
-              <a:t>ation</a:t>
+              <a:t>inform</a:t>
             </a:r>
             <a:endParaRPr lang="en-US" sz="1300" dirty="0"/>
           </a:p>
@@ -30538,7 +33360,7 @@
         </p:nvSpPr>
         <p:spPr>
           <a:xfrm>
-            <a:off x="5803392" y="2569464"/>
+            <a:off x="4370832" y="2569464"/>
             <a:ext cx="1828800" cy="201168"/>
           </a:xfrm>
           <a:prstGeom prst="rect">
@@ -30563,7 +33385,7 @@
                 <a:ea typeface="Calibri" pitchFamily="34" charset="-122"/>
                 <a:cs typeface="Calibri" pitchFamily="34" charset="-120"/>
               </a:rPr>
-              <a:t>the act or result of</a:t>
+              <a:t>to give knowledge</a:t>
             </a:r>
             <a:endParaRPr lang="en-US" sz="850" dirty="0"/>
           </a:p>
@@ -30572,6 +33394,118 @@
       <p:sp>
         <p:nvSpPr>
           <p:cNvPr id="22" name="Shape 20"/>
+          <p:cNvSpPr/>
+          <p:nvPr/>
+        </p:nvSpPr>
+        <p:spPr>
+          <a:xfrm>
+            <a:off x="6519672" y="2258568"/>
+            <a:ext cx="1828800" cy="292608"/>
+          </a:xfrm>
+          <a:prstGeom prst="rect">
+            <a:avLst>
+              <a:gd name="adj" fmla="val 25000"/>
+            </a:avLst>
+          </a:prstGeom>
+          <a:solidFill>
+            <a:srgbClr val="FCE7F3"/>
+          </a:solidFill>
+          <a:ln w="19050">
+            <a:solidFill>
+              <a:srgbClr val="DB2777"/>
+            </a:solidFill>
+            <a:prstDash val="solid"/>
+          </a:ln>
+          <a:effectLst>
+            <a:outerShdw sx="100000" sy="100000" kx="0" ky="0" algn="bl" rotWithShape="0" blurRad="101600" dist="38100" dir="8100000">
+              <a:srgbClr val="000000">
+                <a:alpha val="12000"/>
+              </a:srgbClr>
+            </a:outerShdw>
+          </a:effectLst>
+        </p:spPr>
+      </p:sp>
+      <p:sp>
+        <p:nvSpPr>
+          <p:cNvPr id="23" name="Text 21"/>
+          <p:cNvSpPr/>
+          <p:nvPr/>
+        </p:nvSpPr>
+        <p:spPr>
+          <a:xfrm>
+            <a:off x="6519672" y="2258568"/>
+            <a:ext cx="1828800" cy="292608"/>
+          </a:xfrm>
+          <a:prstGeom prst="rect">
+            <a:avLst/>
+          </a:prstGeom>
+          <a:noFill/>
+          <a:ln/>
+        </p:spPr>
+        <p:txBody>
+          <a:bodyPr wrap="square" lIns="0" tIns="0" rIns="0" bIns="0" rtlCol="0" anchor="ctr"/>
+          <a:lstStyle/>
+          <a:p>
+            <a:pPr algn="ctr" indent="0" marL="0">
+              <a:buNone/>
+            </a:pPr>
+            <a:r>
+              <a:rPr lang="en-US" sz="1300" b="1" dirty="0">
+                <a:solidFill>
+                  <a:srgbClr val="9D174D"/>
+                </a:solidFill>
+                <a:latin typeface="Trebuchet MS" pitchFamily="34" charset="0"/>
+                <a:ea typeface="Trebuchet MS" pitchFamily="34" charset="-122"/>
+                <a:cs typeface="Trebuchet MS" pitchFamily="34" charset="-120"/>
+              </a:rPr>
+              <a:t>ing</a:t>
+            </a:r>
+            <a:endParaRPr lang="en-US" sz="1300" dirty="0"/>
+          </a:p>
+        </p:txBody>
+      </p:sp>
+      <p:sp>
+        <p:nvSpPr>
+          <p:cNvPr id="24" name="Text 22"/>
+          <p:cNvSpPr/>
+          <p:nvPr/>
+        </p:nvSpPr>
+        <p:spPr>
+          <a:xfrm>
+            <a:off x="6519672" y="2569464"/>
+            <a:ext cx="1828800" cy="201168"/>
+          </a:xfrm>
+          <a:prstGeom prst="rect">
+            <a:avLst/>
+          </a:prstGeom>
+          <a:noFill/>
+          <a:ln/>
+        </p:spPr>
+        <p:txBody>
+          <a:bodyPr wrap="square" lIns="0" tIns="0" rIns="0" bIns="0" rtlCol="0" anchor="t"/>
+          <a:lstStyle/>
+          <a:p>
+            <a:pPr algn="ctr" indent="0" marL="0">
+              <a:buNone/>
+            </a:pPr>
+            <a:r>
+              <a:rPr lang="en-US" sz="850" dirty="0">
+                <a:solidFill>
+                  <a:srgbClr val="475569"/>
+                </a:solidFill>
+                <a:latin typeface="Calibri" pitchFamily="34" charset="0"/>
+                <a:ea typeface="Calibri" pitchFamily="34" charset="-122"/>
+                <a:cs typeface="Calibri" pitchFamily="34" charset="-120"/>
+              </a:rPr>
+              <a:t>happening right now</a:t>
+            </a:r>
+            <a:endParaRPr lang="en-US" sz="850" dirty="0"/>
+          </a:p>
+        </p:txBody>
+      </p:sp>
+      <p:sp>
+        <p:nvSpPr>
+          <p:cNvPr id="25" name="Shape 23"/>
           <p:cNvSpPr/>
           <p:nvPr/>
         </p:nvSpPr>
@@ -30598,7 +33532,7 @@
       </p:sp>
       <p:sp>
         <p:nvSpPr>
-          <p:cNvPr id="23" name="Text 21"/>
+          <p:cNvPr id="26" name="Text 24"/>
           <p:cNvSpPr/>
           <p:nvPr/>
         </p:nvSpPr>
@@ -30637,7 +33571,7 @@
       </p:sp>
       <p:sp>
         <p:nvSpPr>
-          <p:cNvPr id="24" name="Shape 22"/>
+          <p:cNvPr id="27" name="Shape 25"/>
           <p:cNvSpPr/>
           <p:nvPr/>
         </p:nvSpPr>
@@ -30664,7 +33598,7 @@
       </p:sp>
       <p:sp>
         <p:nvSpPr>
-          <p:cNvPr id="25" name="Shape 23"/>
+          <p:cNvPr id="28" name="Shape 26"/>
           <p:cNvSpPr/>
           <p:nvPr/>
         </p:nvSpPr>
@@ -30691,7 +33625,7 @@
       </p:sp>
       <p:sp>
         <p:nvSpPr>
-          <p:cNvPr id="26" name="Text 24"/>
+          <p:cNvPr id="29" name="Text 27"/>
           <p:cNvSpPr/>
           <p:nvPr/>
         </p:nvSpPr>
@@ -30722,7 +33656,7 @@
                 <a:ea typeface="Trebuchet MS" pitchFamily="34" charset="-122"/>
                 <a:cs typeface="Trebuchet MS" pitchFamily="34" charset="-120"/>
               </a:rPr>
-              <a:t>in</a:t>
+              <a:t>mis</a:t>
             </a:r>
             <a:endParaRPr lang="en-US" sz="1400" dirty="0"/>
           </a:p>
@@ -30730,7 +33664,7 @@
       </p:sp>
       <p:sp>
         <p:nvSpPr>
-          <p:cNvPr id="27" name="Text 25"/>
+          <p:cNvPr id="30" name="Text 28"/>
           <p:cNvSpPr/>
           <p:nvPr/>
         </p:nvSpPr>
@@ -30769,7 +33703,7 @@
       </p:sp>
       <p:sp>
         <p:nvSpPr>
-          <p:cNvPr id="28" name="Shape 26"/>
+          <p:cNvPr id="31" name="Shape 29"/>
           <p:cNvSpPr/>
           <p:nvPr/>
         </p:nvSpPr>
@@ -30796,7 +33730,7 @@
       </p:sp>
       <p:sp>
         <p:nvSpPr>
-          <p:cNvPr id="29" name="Text 27"/>
+          <p:cNvPr id="32" name="Text 30"/>
           <p:cNvSpPr/>
           <p:nvPr/>
         </p:nvSpPr>
@@ -30827,7 +33761,7 @@
                 <a:ea typeface="Trebuchet MS" pitchFamily="34" charset="-122"/>
                 <a:cs typeface="Trebuchet MS" pitchFamily="34" charset="-120"/>
               </a:rPr>
-              <a:t>for</a:t>
+              <a:t>in</a:t>
             </a:r>
             <a:endParaRPr lang="en-US" sz="1400" dirty="0"/>
           </a:p>
@@ -30835,7 +33769,7 @@
       </p:sp>
       <p:sp>
         <p:nvSpPr>
-          <p:cNvPr id="30" name="Text 28"/>
+          <p:cNvPr id="33" name="Text 31"/>
           <p:cNvSpPr/>
           <p:nvPr/>
         </p:nvSpPr>
@@ -30874,7 +33808,7 @@
       </p:sp>
       <p:sp>
         <p:nvSpPr>
-          <p:cNvPr id="31" name="Shape 29"/>
+          <p:cNvPr id="34" name="Shape 32"/>
           <p:cNvSpPr/>
           <p:nvPr/>
         </p:nvSpPr>
@@ -30901,7 +33835,7 @@
       </p:sp>
       <p:sp>
         <p:nvSpPr>
-          <p:cNvPr id="32" name="Text 30"/>
+          <p:cNvPr id="35" name="Text 33"/>
           <p:cNvSpPr/>
           <p:nvPr/>
         </p:nvSpPr>
@@ -30932,7 +33866,7 @@
                 <a:ea typeface="Trebuchet MS" pitchFamily="34" charset="-122"/>
                 <a:cs typeface="Trebuchet MS" pitchFamily="34" charset="-120"/>
               </a:rPr>
-              <a:t>ma</a:t>
+              <a:t>form</a:t>
             </a:r>
             <a:endParaRPr lang="en-US" sz="1400" dirty="0"/>
           </a:p>
@@ -30940,7 +33874,7 @@
       </p:sp>
       <p:sp>
         <p:nvSpPr>
-          <p:cNvPr id="33" name="Text 31"/>
+          <p:cNvPr id="36" name="Text 34"/>
           <p:cNvSpPr/>
           <p:nvPr/>
         </p:nvSpPr>
@@ -30979,7 +33913,7 @@
       </p:sp>
       <p:sp>
         <p:nvSpPr>
-          <p:cNvPr id="34" name="Shape 32"/>
+          <p:cNvPr id="37" name="Shape 35"/>
           <p:cNvSpPr/>
           <p:nvPr/>
         </p:nvSpPr>
@@ -31006,7 +33940,7 @@
       </p:sp>
       <p:sp>
         <p:nvSpPr>
-          <p:cNvPr id="35" name="Text 33"/>
+          <p:cNvPr id="38" name="Text 36"/>
           <p:cNvSpPr/>
           <p:nvPr/>
         </p:nvSpPr>
@@ -31037,7 +33971,7 @@
                 <a:ea typeface="Trebuchet MS" pitchFamily="34" charset="-122"/>
                 <a:cs typeface="Trebuchet MS" pitchFamily="34" charset="-120"/>
               </a:rPr>
-              <a:t>tion</a:t>
+              <a:t>ing</a:t>
             </a:r>
             <a:endParaRPr lang="en-US" sz="1400" dirty="0"/>
           </a:p>
@@ -31045,7 +33979,7 @@
       </p:sp>
       <p:sp>
         <p:nvSpPr>
-          <p:cNvPr id="36" name="Shape 34"/>
+          <p:cNvPr id="39" name="Shape 37"/>
           <p:cNvSpPr/>
           <p:nvPr/>
         </p:nvSpPr>
@@ -31072,7 +34006,7 @@
       </p:sp>
       <p:sp>
         <p:nvSpPr>
-          <p:cNvPr id="37" name="Text 35"/>
+          <p:cNvPr id="40" name="Text 38"/>
           <p:cNvSpPr/>
           <p:nvPr/>
         </p:nvSpPr>
@@ -31111,18 +34045,18 @@
       </p:sp>
       <p:sp>
         <p:nvSpPr>
-          <p:cNvPr id="38" name="Shape 36"/>
+          <p:cNvPr id="41" name="Shape 39"/>
           <p:cNvSpPr/>
           <p:nvPr/>
         </p:nvSpPr>
         <p:spPr>
           <a:xfrm>
             <a:off x="1874520" y="4096512"/>
-            <a:ext cx="6903720" cy="804672"/>
+            <a:ext cx="6903720" cy="658368"/>
           </a:xfrm>
           <a:prstGeom prst="rect">
             <a:avLst>
-              <a:gd name="adj" fmla="val 6818"/>
+              <a:gd name="adj" fmla="val 8333"/>
             </a:avLst>
           </a:prstGeom>
           <a:solidFill>
@@ -31138,18 +34072,18 @@
       </p:sp>
       <p:sp>
         <p:nvSpPr>
-          <p:cNvPr id="39" name="Shape 37"/>
-          <p:cNvSpPr/>
-          <p:nvPr/>
-        </p:nvSpPr>
-        <p:spPr>
-          <a:xfrm>
-            <a:off x="2023872" y="4169664"/>
-            <a:ext cx="685800" cy="384048"/>
+          <p:cNvPr id="42" name="Shape 40"/>
+          <p:cNvSpPr/>
+          <p:nvPr/>
+        </p:nvSpPr>
+        <p:spPr>
+          <a:xfrm>
+            <a:off x="1951828" y="4169664"/>
+            <a:ext cx="603504" cy="475488"/>
           </a:xfrm>
           <a:prstGeom prst="rect">
             <a:avLst>
-              <a:gd name="adj" fmla="val 9524"/>
+              <a:gd name="adj" fmla="val 7692"/>
             </a:avLst>
           </a:prstGeom>
           <a:solidFill>
@@ -31165,14 +34099,14 @@
       </p:sp>
       <p:sp>
         <p:nvSpPr>
-          <p:cNvPr id="40" name="Text 38"/>
-          <p:cNvSpPr/>
-          <p:nvPr/>
-        </p:nvSpPr>
-        <p:spPr>
-          <a:xfrm>
-            <a:off x="2023872" y="4169664"/>
-            <a:ext cx="685800" cy="384048"/>
+          <p:cNvPr id="43" name="Text 41"/>
+          <p:cNvSpPr/>
+          <p:nvPr/>
+        </p:nvSpPr>
+        <p:spPr>
+          <a:xfrm>
+            <a:off x="1951828" y="4169664"/>
+            <a:ext cx="603504" cy="475488"/>
           </a:xfrm>
           <a:prstGeom prst="rect">
             <a:avLst/>
@@ -31196,7 +34130,7 @@
                 <a:ea typeface="Trebuchet MS" pitchFamily="34" charset="-122"/>
                 <a:cs typeface="Trebuchet MS" pitchFamily="34" charset="-120"/>
               </a:rPr>
-              <a:t>i</a:t>
+              <a:t>m</a:t>
             </a:r>
             <a:endParaRPr lang="en-US" sz="900" dirty="0"/>
           </a:p>
@@ -31204,18 +34138,18 @@
       </p:sp>
       <p:sp>
         <p:nvSpPr>
-          <p:cNvPr id="41" name="Shape 39"/>
-          <p:cNvSpPr/>
-          <p:nvPr/>
-        </p:nvSpPr>
-        <p:spPr>
-          <a:xfrm>
-            <a:off x="2831592" y="4169664"/>
-            <a:ext cx="685800" cy="384048"/>
+          <p:cNvPr id="44" name="Shape 42"/>
+          <p:cNvSpPr/>
+          <p:nvPr/>
+        </p:nvSpPr>
+        <p:spPr>
+          <a:xfrm>
+            <a:off x="2605209" y="4169664"/>
+            <a:ext cx="603504" cy="475488"/>
           </a:xfrm>
           <a:prstGeom prst="rect">
             <a:avLst>
-              <a:gd name="adj" fmla="val 9524"/>
+              <a:gd name="adj" fmla="val 7692"/>
             </a:avLst>
           </a:prstGeom>
           <a:solidFill>
@@ -31231,14 +34165,14 @@
       </p:sp>
       <p:sp>
         <p:nvSpPr>
-          <p:cNvPr id="42" name="Text 40"/>
-          <p:cNvSpPr/>
-          <p:nvPr/>
-        </p:nvSpPr>
-        <p:spPr>
-          <a:xfrm>
-            <a:off x="2831592" y="4169664"/>
-            <a:ext cx="685800" cy="384048"/>
+          <p:cNvPr id="45" name="Text 43"/>
+          <p:cNvSpPr/>
+          <p:nvPr/>
+        </p:nvSpPr>
+        <p:spPr>
+          <a:xfrm>
+            <a:off x="2605209" y="4169664"/>
+            <a:ext cx="603504" cy="475488"/>
           </a:xfrm>
           <a:prstGeom prst="rect">
             <a:avLst/>
@@ -31262,7 +34196,7 @@
                 <a:ea typeface="Trebuchet MS" pitchFamily="34" charset="-122"/>
                 <a:cs typeface="Trebuchet MS" pitchFamily="34" charset="-120"/>
               </a:rPr>
-              <a:t>n</a:t>
+              <a:t>i</a:t>
             </a:r>
             <a:endParaRPr lang="en-US" sz="900" dirty="0"/>
           </a:p>
@@ -31270,18 +34204,18 @@
       </p:sp>
       <p:sp>
         <p:nvSpPr>
-          <p:cNvPr id="43" name="Shape 41"/>
-          <p:cNvSpPr/>
-          <p:nvPr/>
-        </p:nvSpPr>
-        <p:spPr>
-          <a:xfrm>
-            <a:off x="3639312" y="4169664"/>
-            <a:ext cx="685800" cy="384048"/>
+          <p:cNvPr id="46" name="Shape 44"/>
+          <p:cNvSpPr/>
+          <p:nvPr/>
+        </p:nvSpPr>
+        <p:spPr>
+          <a:xfrm>
+            <a:off x="3258589" y="4169664"/>
+            <a:ext cx="603504" cy="475488"/>
           </a:xfrm>
           <a:prstGeom prst="rect">
             <a:avLst>
-              <a:gd name="adj" fmla="val 9524"/>
+              <a:gd name="adj" fmla="val 7692"/>
             </a:avLst>
           </a:prstGeom>
           <a:solidFill>
@@ -31297,14 +34231,14 @@
       </p:sp>
       <p:sp>
         <p:nvSpPr>
-          <p:cNvPr id="44" name="Text 42"/>
-          <p:cNvSpPr/>
-          <p:nvPr/>
-        </p:nvSpPr>
-        <p:spPr>
-          <a:xfrm>
-            <a:off x="3639312" y="4169664"/>
-            <a:ext cx="685800" cy="384048"/>
+          <p:cNvPr id="47" name="Text 45"/>
+          <p:cNvSpPr/>
+          <p:nvPr/>
+        </p:nvSpPr>
+        <p:spPr>
+          <a:xfrm>
+            <a:off x="3258589" y="4169664"/>
+            <a:ext cx="603504" cy="475488"/>
           </a:xfrm>
           <a:prstGeom prst="rect">
             <a:avLst/>
@@ -31328,7 +34262,7 @@
                 <a:ea typeface="Trebuchet MS" pitchFamily="34" charset="-122"/>
                 <a:cs typeface="Trebuchet MS" pitchFamily="34" charset="-120"/>
               </a:rPr>
-              <a:t>f</a:t>
+              <a:t>s</a:t>
             </a:r>
             <a:endParaRPr lang="en-US" sz="900" dirty="0"/>
           </a:p>
@@ -31336,18 +34270,18 @@
       </p:sp>
       <p:sp>
         <p:nvSpPr>
-          <p:cNvPr id="45" name="Shape 43"/>
-          <p:cNvSpPr/>
-          <p:nvPr/>
-        </p:nvSpPr>
-        <p:spPr>
-          <a:xfrm>
-            <a:off x="4447032" y="4169664"/>
-            <a:ext cx="685800" cy="384048"/>
+          <p:cNvPr id="48" name="Shape 46"/>
+          <p:cNvSpPr/>
+          <p:nvPr/>
+        </p:nvSpPr>
+        <p:spPr>
+          <a:xfrm>
+            <a:off x="3911969" y="4169664"/>
+            <a:ext cx="603504" cy="475488"/>
           </a:xfrm>
           <a:prstGeom prst="rect">
             <a:avLst>
-              <a:gd name="adj" fmla="val 9524"/>
+              <a:gd name="adj" fmla="val 7692"/>
             </a:avLst>
           </a:prstGeom>
           <a:solidFill>
@@ -31363,14 +34297,14 @@
       </p:sp>
       <p:sp>
         <p:nvSpPr>
-          <p:cNvPr id="46" name="Text 44"/>
-          <p:cNvSpPr/>
-          <p:nvPr/>
-        </p:nvSpPr>
-        <p:spPr>
-          <a:xfrm>
-            <a:off x="4447032" y="4169664"/>
-            <a:ext cx="685800" cy="384048"/>
+          <p:cNvPr id="49" name="Text 47"/>
+          <p:cNvSpPr/>
+          <p:nvPr/>
+        </p:nvSpPr>
+        <p:spPr>
+          <a:xfrm>
+            <a:off x="3911969" y="4169664"/>
+            <a:ext cx="603504" cy="475488"/>
           </a:xfrm>
           <a:prstGeom prst="rect">
             <a:avLst/>
@@ -31394,7 +34328,7 @@
                 <a:ea typeface="Trebuchet MS" pitchFamily="34" charset="-122"/>
                 <a:cs typeface="Trebuchet MS" pitchFamily="34" charset="-120"/>
               </a:rPr>
-              <a:t>or</a:t>
+              <a:t>i</a:t>
             </a:r>
             <a:endParaRPr lang="en-US" sz="900" dirty="0"/>
           </a:p>
@@ -31402,18 +34336,18 @@
       </p:sp>
       <p:sp>
         <p:nvSpPr>
-          <p:cNvPr id="47" name="Shape 45"/>
-          <p:cNvSpPr/>
-          <p:nvPr/>
-        </p:nvSpPr>
-        <p:spPr>
-          <a:xfrm>
-            <a:off x="5254752" y="4169664"/>
-            <a:ext cx="685800" cy="384048"/>
+          <p:cNvPr id="50" name="Shape 48"/>
+          <p:cNvSpPr/>
+          <p:nvPr/>
+        </p:nvSpPr>
+        <p:spPr>
+          <a:xfrm>
+            <a:off x="4565350" y="4169664"/>
+            <a:ext cx="603504" cy="475488"/>
           </a:xfrm>
           <a:prstGeom prst="rect">
             <a:avLst>
-              <a:gd name="adj" fmla="val 9524"/>
+              <a:gd name="adj" fmla="val 7692"/>
             </a:avLst>
           </a:prstGeom>
           <a:solidFill>
@@ -31429,14 +34363,14 @@
       </p:sp>
       <p:sp>
         <p:nvSpPr>
-          <p:cNvPr id="48" name="Text 46"/>
-          <p:cNvSpPr/>
-          <p:nvPr/>
-        </p:nvSpPr>
-        <p:spPr>
-          <a:xfrm>
-            <a:off x="5254752" y="4169664"/>
-            <a:ext cx="685800" cy="384048"/>
+          <p:cNvPr id="51" name="Text 49"/>
+          <p:cNvSpPr/>
+          <p:nvPr/>
+        </p:nvSpPr>
+        <p:spPr>
+          <a:xfrm>
+            <a:off x="4565350" y="4169664"/>
+            <a:ext cx="603504" cy="475488"/>
           </a:xfrm>
           <a:prstGeom prst="rect">
             <a:avLst/>
@@ -31460,7 +34394,7 @@
                 <a:ea typeface="Trebuchet MS" pitchFamily="34" charset="-122"/>
                 <a:cs typeface="Trebuchet MS" pitchFamily="34" charset="-120"/>
               </a:rPr>
-              <a:t>m</a:t>
+              <a:t>n</a:t>
             </a:r>
             <a:endParaRPr lang="en-US" sz="900" dirty="0"/>
           </a:p>
@@ -31468,18 +34402,18 @@
       </p:sp>
       <p:sp>
         <p:nvSpPr>
-          <p:cNvPr id="49" name="Shape 47"/>
-          <p:cNvSpPr/>
-          <p:nvPr/>
-        </p:nvSpPr>
-        <p:spPr>
-          <a:xfrm>
-            <a:off x="6062472" y="4169664"/>
-            <a:ext cx="685800" cy="384048"/>
+          <p:cNvPr id="52" name="Shape 50"/>
+          <p:cNvSpPr/>
+          <p:nvPr/>
+        </p:nvSpPr>
+        <p:spPr>
+          <a:xfrm>
+            <a:off x="5218730" y="4169664"/>
+            <a:ext cx="603504" cy="475488"/>
           </a:xfrm>
           <a:prstGeom prst="rect">
             <a:avLst>
-              <a:gd name="adj" fmla="val 9524"/>
+              <a:gd name="adj" fmla="val 7692"/>
             </a:avLst>
           </a:prstGeom>
           <a:solidFill>
@@ -31495,14 +34429,14 @@
       </p:sp>
       <p:sp>
         <p:nvSpPr>
-          <p:cNvPr id="50" name="Text 48"/>
-          <p:cNvSpPr/>
-          <p:nvPr/>
-        </p:nvSpPr>
-        <p:spPr>
-          <a:xfrm>
-            <a:off x="6062472" y="4169664"/>
-            <a:ext cx="685800" cy="384048"/>
+          <p:cNvPr id="53" name="Text 51"/>
+          <p:cNvSpPr/>
+          <p:nvPr/>
+        </p:nvSpPr>
+        <p:spPr>
+          <a:xfrm>
+            <a:off x="5218730" y="4169664"/>
+            <a:ext cx="603504" cy="475488"/>
           </a:xfrm>
           <a:prstGeom prst="rect">
             <a:avLst/>
@@ -31526,7 +34460,7 @@
                 <a:ea typeface="Trebuchet MS" pitchFamily="34" charset="-122"/>
                 <a:cs typeface="Trebuchet MS" pitchFamily="34" charset="-120"/>
               </a:rPr>
-              <a:t>a</a:t>
+              <a:t>f</a:t>
             </a:r>
             <a:endParaRPr lang="en-US" sz="900" dirty="0"/>
           </a:p>
@@ -31534,18 +34468,18 @@
       </p:sp>
       <p:sp>
         <p:nvSpPr>
-          <p:cNvPr id="51" name="Shape 49"/>
-          <p:cNvSpPr/>
-          <p:nvPr/>
-        </p:nvSpPr>
-        <p:spPr>
-          <a:xfrm>
-            <a:off x="6870192" y="4169664"/>
-            <a:ext cx="685800" cy="384048"/>
+          <p:cNvPr id="54" name="Shape 52"/>
+          <p:cNvSpPr/>
+          <p:nvPr/>
+        </p:nvSpPr>
+        <p:spPr>
+          <a:xfrm>
+            <a:off x="5872111" y="4169664"/>
+            <a:ext cx="603504" cy="475488"/>
           </a:xfrm>
           <a:prstGeom prst="rect">
             <a:avLst>
-              <a:gd name="adj" fmla="val 9524"/>
+              <a:gd name="adj" fmla="val 7692"/>
             </a:avLst>
           </a:prstGeom>
           <a:solidFill>
@@ -31561,14 +34495,14 @@
       </p:sp>
       <p:sp>
         <p:nvSpPr>
-          <p:cNvPr id="52" name="Text 50"/>
-          <p:cNvSpPr/>
-          <p:nvPr/>
-        </p:nvSpPr>
-        <p:spPr>
-          <a:xfrm>
-            <a:off x="6870192" y="4169664"/>
-            <a:ext cx="685800" cy="384048"/>
+          <p:cNvPr id="55" name="Text 53"/>
+          <p:cNvSpPr/>
+          <p:nvPr/>
+        </p:nvSpPr>
+        <p:spPr>
+          <a:xfrm>
+            <a:off x="5872111" y="4169664"/>
+            <a:ext cx="603504" cy="475488"/>
           </a:xfrm>
           <a:prstGeom prst="rect">
             <a:avLst/>
@@ -31592,7 +34526,7 @@
                 <a:ea typeface="Trebuchet MS" pitchFamily="34" charset="-122"/>
                 <a:cs typeface="Trebuchet MS" pitchFamily="34" charset="-120"/>
               </a:rPr>
-              <a:t>ti</a:t>
+              <a:t>or</a:t>
             </a:r>
             <a:endParaRPr lang="en-US" sz="900" dirty="0"/>
           </a:p>
@@ -31600,57 +34534,18 @@
       </p:sp>
       <p:sp>
         <p:nvSpPr>
-          <p:cNvPr id="53" name="Text 51"/>
-          <p:cNvSpPr/>
-          <p:nvPr/>
-        </p:nvSpPr>
-        <p:spPr>
-          <a:xfrm>
-            <a:off x="6870192" y="4572000"/>
-            <a:ext cx="685800" cy="219456"/>
-          </a:xfrm>
-          <a:prstGeom prst="rect">
-            <a:avLst/>
-          </a:prstGeom>
-          <a:noFill/>
-          <a:ln/>
-        </p:spPr>
-        <p:txBody>
-          <a:bodyPr wrap="square" lIns="0" tIns="0" rIns="0" bIns="0" rtlCol="0" anchor="t"/>
-          <a:lstStyle/>
-          <a:p>
-            <a:pPr algn="ctr" indent="0" marL="0">
-              <a:buNone/>
-            </a:pPr>
-            <a:r>
-              <a:rPr lang="en-US" sz="750" i="1" dirty="0">
-                <a:solidFill>
-                  <a:srgbClr val="94A3B8"/>
-                </a:solidFill>
-                <a:latin typeface="Calibri" pitchFamily="34" charset="0"/>
-                <a:ea typeface="Calibri" pitchFamily="34" charset="-122"/>
-                <a:cs typeface="Calibri" pitchFamily="34" charset="-120"/>
-              </a:rPr>
-              <a:t>/sh/</a:t>
-            </a:r>
-            <a:endParaRPr lang="en-US" sz="750" dirty="0"/>
-          </a:p>
-        </p:txBody>
-      </p:sp>
-      <p:sp>
-        <p:nvSpPr>
-          <p:cNvPr id="54" name="Shape 52"/>
-          <p:cNvSpPr/>
-          <p:nvPr/>
-        </p:nvSpPr>
-        <p:spPr>
-          <a:xfrm>
-            <a:off x="7677912" y="4169664"/>
-            <a:ext cx="685800" cy="384048"/>
+          <p:cNvPr id="56" name="Shape 54"/>
+          <p:cNvSpPr/>
+          <p:nvPr/>
+        </p:nvSpPr>
+        <p:spPr>
+          <a:xfrm>
+            <a:off x="6525491" y="4169664"/>
+            <a:ext cx="603504" cy="475488"/>
           </a:xfrm>
           <a:prstGeom prst="rect">
             <a:avLst>
-              <a:gd name="adj" fmla="val 9524"/>
+              <a:gd name="adj" fmla="val 7692"/>
             </a:avLst>
           </a:prstGeom>
           <a:solidFill>
@@ -31666,14 +34561,14 @@
       </p:sp>
       <p:sp>
         <p:nvSpPr>
-          <p:cNvPr id="55" name="Text 53"/>
-          <p:cNvSpPr/>
-          <p:nvPr/>
-        </p:nvSpPr>
-        <p:spPr>
-          <a:xfrm>
-            <a:off x="7677912" y="4169664"/>
-            <a:ext cx="685800" cy="384048"/>
+          <p:cNvPr id="57" name="Text 55"/>
+          <p:cNvSpPr/>
+          <p:nvPr/>
+        </p:nvSpPr>
+        <p:spPr>
+          <a:xfrm>
+            <a:off x="6525491" y="4169664"/>
+            <a:ext cx="603504" cy="475488"/>
           </a:xfrm>
           <a:prstGeom prst="rect">
             <a:avLst/>
@@ -31697,7 +34592,139 @@
                 <a:ea typeface="Trebuchet MS" pitchFamily="34" charset="-122"/>
                 <a:cs typeface="Trebuchet MS" pitchFamily="34" charset="-120"/>
               </a:rPr>
-              <a:t>on</a:t>
+              <a:t>m</a:t>
+            </a:r>
+            <a:endParaRPr lang="en-US" sz="900" dirty="0"/>
+          </a:p>
+        </p:txBody>
+      </p:sp>
+      <p:sp>
+        <p:nvSpPr>
+          <p:cNvPr id="58" name="Shape 56"/>
+          <p:cNvSpPr/>
+          <p:nvPr/>
+        </p:nvSpPr>
+        <p:spPr>
+          <a:xfrm>
+            <a:off x="7178871" y="4169664"/>
+            <a:ext cx="603504" cy="475488"/>
+          </a:xfrm>
+          <a:prstGeom prst="rect">
+            <a:avLst>
+              <a:gd name="adj" fmla="val 7692"/>
+            </a:avLst>
+          </a:prstGeom>
+          <a:solidFill>
+            <a:srgbClr val="FFFFFF"/>
+          </a:solidFill>
+          <a:ln w="12700">
+            <a:solidFill>
+              <a:srgbClr val="DB2777"/>
+            </a:solidFill>
+            <a:prstDash val="solid"/>
+          </a:ln>
+        </p:spPr>
+      </p:sp>
+      <p:sp>
+        <p:nvSpPr>
+          <p:cNvPr id="59" name="Text 57"/>
+          <p:cNvSpPr/>
+          <p:nvPr/>
+        </p:nvSpPr>
+        <p:spPr>
+          <a:xfrm>
+            <a:off x="7178871" y="4169664"/>
+            <a:ext cx="603504" cy="475488"/>
+          </a:xfrm>
+          <a:prstGeom prst="rect">
+            <a:avLst/>
+          </a:prstGeom>
+          <a:noFill/>
+          <a:ln/>
+        </p:spPr>
+        <p:txBody>
+          <a:bodyPr wrap="square" lIns="0" tIns="0" rIns="0" bIns="0" rtlCol="0" anchor="ctr"/>
+          <a:lstStyle/>
+          <a:p>
+            <a:pPr algn="ctr" indent="0" marL="0">
+              <a:buNone/>
+            </a:pPr>
+            <a:r>
+              <a:rPr lang="en-US" sz="900" b="1" dirty="0">
+                <a:solidFill>
+                  <a:srgbClr val="9D174D"/>
+                </a:solidFill>
+                <a:latin typeface="Trebuchet MS" pitchFamily="34" charset="0"/>
+                <a:ea typeface="Trebuchet MS" pitchFamily="34" charset="-122"/>
+                <a:cs typeface="Trebuchet MS" pitchFamily="34" charset="-120"/>
+              </a:rPr>
+              <a:t>i</a:t>
+            </a:r>
+            <a:endParaRPr lang="en-US" sz="900" dirty="0"/>
+          </a:p>
+        </p:txBody>
+      </p:sp>
+      <p:sp>
+        <p:nvSpPr>
+          <p:cNvPr id="60" name="Shape 58"/>
+          <p:cNvSpPr/>
+          <p:nvPr/>
+        </p:nvSpPr>
+        <p:spPr>
+          <a:xfrm>
+            <a:off x="7832252" y="4169664"/>
+            <a:ext cx="603504" cy="475488"/>
+          </a:xfrm>
+          <a:prstGeom prst="rect">
+            <a:avLst>
+              <a:gd name="adj" fmla="val 7692"/>
+            </a:avLst>
+          </a:prstGeom>
+          <a:solidFill>
+            <a:srgbClr val="FFFFFF"/>
+          </a:solidFill>
+          <a:ln w="12700">
+            <a:solidFill>
+              <a:srgbClr val="DB2777"/>
+            </a:solidFill>
+            <a:prstDash val="solid"/>
+          </a:ln>
+        </p:spPr>
+      </p:sp>
+      <p:sp>
+        <p:nvSpPr>
+          <p:cNvPr id="61" name="Text 59"/>
+          <p:cNvSpPr/>
+          <p:nvPr/>
+        </p:nvSpPr>
+        <p:spPr>
+          <a:xfrm>
+            <a:off x="7832252" y="4169664"/>
+            <a:ext cx="603504" cy="475488"/>
+          </a:xfrm>
+          <a:prstGeom prst="rect">
+            <a:avLst/>
+          </a:prstGeom>
+          <a:noFill/>
+          <a:ln/>
+        </p:spPr>
+        <p:txBody>
+          <a:bodyPr wrap="square" lIns="0" tIns="0" rIns="0" bIns="0" rtlCol="0" anchor="ctr"/>
+          <a:lstStyle/>
+          <a:p>
+            <a:pPr algn="ctr" indent="0" marL="0">
+              <a:buNone/>
+            </a:pPr>
+            <a:r>
+              <a:rPr lang="en-US" sz="900" b="1" dirty="0">
+                <a:solidFill>
+                  <a:srgbClr val="9D174D"/>
+                </a:solidFill>
+                <a:latin typeface="Trebuchet MS" pitchFamily="34" charset="0"/>
+                <a:ea typeface="Trebuchet MS" pitchFamily="34" charset="-122"/>
+                <a:cs typeface="Trebuchet MS" pitchFamily="34" charset="-120"/>
+              </a:rPr>
+              <a:t>ng</a:t>
             </a:r>
             <a:endParaRPr lang="en-US" sz="900" dirty="0"/>
           </a:p>
@@ -31989,7 +35016,7 @@
                 <a:ea typeface="Calibri" pitchFamily="34" charset="-122"/>
                 <a:cs typeface="Calibri" pitchFamily="34" charset="-120"/>
               </a:rPr>
-              <a:t>Word Labs  •  wordlabs.app  •  Root: 'inform' = to give shape or knowledge</a:t>
+              <a:t>Word Labs  •  wordlabs.app  •  Root: 'inform' = to give knowledge or shape</a:t>
             </a:r>
             <a:endParaRPr lang="en-US" sz="800" dirty="0"/>
           </a:p>
@@ -33158,7 +36185,7 @@
                 <a:ea typeface="Calibri" pitchFamily="34" charset="-122"/>
                 <a:cs typeface="Calibri" pitchFamily="34" charset="-120"/>
               </a:rPr>
-              <a:t>Word Labs  •  wordlabs.app  •  Root: 'inform' = to give shape or knowledge</a:t>
+              <a:t>Word Labs  •  wordlabs.app  •  Root: 'inform' = to give knowledge or shape</a:t>
             </a:r>
             <a:endParaRPr lang="en-US" sz="800" dirty="0"/>
           </a:p>
@@ -33459,7 +36486,7 @@
                 <a:ea typeface="Trebuchet MS" pitchFamily="34" charset="-122"/>
                 <a:cs typeface="Trebuchet MS" pitchFamily="34" charset="-120"/>
               </a:rPr>
-              <a:t>un-</a:t>
+              <a:t>re-</a:t>
             </a:r>
             <a:endParaRPr lang="en-US" sz="1300" dirty="0"/>
           </a:p>
@@ -33587,7 +36614,7 @@
                 <a:ea typeface="Trebuchet MS" pitchFamily="34" charset="-122"/>
                 <a:cs typeface="Trebuchet MS" pitchFamily="34" charset="-120"/>
               </a:rPr>
-              <a:t>-ation</a:t>
+              <a:t>-ed</a:t>
             </a:r>
             <a:endParaRPr lang="en-US" sz="1300" dirty="0"/>
           </a:p>
@@ -33740,7 +36767,7 @@
                 <a:ea typeface="Trebuchet MS" pitchFamily="34" charset="-122"/>
                 <a:cs typeface="Trebuchet MS" pitchFamily="34" charset="-120"/>
               </a:rPr>
-              <a:t>-ed</a:t>
+              <a:t>-ing</a:t>
             </a:r>
             <a:endParaRPr lang="en-US" sz="1300" dirty="0"/>
           </a:p>
@@ -33893,7 +36920,7 @@
                 <a:ea typeface="Trebuchet MS" pitchFamily="34" charset="-122"/>
                 <a:cs typeface="Trebuchet MS" pitchFamily="34" charset="-120"/>
               </a:rPr>
-              <a:t>-ing</a:t>
+              <a:t>-ation</a:t>
             </a:r>
             <a:endParaRPr lang="en-US" sz="1300" dirty="0"/>
           </a:p>
@@ -33957,7 +36984,7 @@
                 <a:ea typeface="Trebuchet MS" pitchFamily="34" charset="-122"/>
                 <a:cs typeface="Trebuchet MS" pitchFamily="34" charset="-120"/>
               </a:rPr>
-              <a:t>re-</a:t>
+              <a:t>un-</a:t>
             </a:r>
             <a:endParaRPr lang="en-US" sz="1300" dirty="0"/>
           </a:p>
@@ -34046,7 +37073,7 @@
                 <a:ea typeface="Trebuchet MS" pitchFamily="34" charset="-122"/>
                 <a:cs typeface="Trebuchet MS" pitchFamily="34" charset="-120"/>
               </a:rPr>
-              <a:t>-er</a:t>
+              <a:t>-ative</a:t>
             </a:r>
             <a:endParaRPr lang="en-US" sz="1300" dirty="0"/>
           </a:p>
@@ -34110,7 +37137,7 @@
                 <a:ea typeface="Trebuchet MS" pitchFamily="34" charset="-122"/>
                 <a:cs typeface="Trebuchet MS" pitchFamily="34" charset="-120"/>
               </a:rPr>
-              <a:t>mal-</a:t>
+              <a:t>counter-</a:t>
             </a:r>
             <a:endParaRPr lang="en-US" sz="1300" dirty="0"/>
           </a:p>
@@ -34199,7 +37226,7 @@
                 <a:ea typeface="Trebuchet MS" pitchFamily="34" charset="-122"/>
                 <a:cs typeface="Trebuchet MS" pitchFamily="34" charset="-120"/>
               </a:rPr>
-              <a:t>-ative</a:t>
+              <a:t>-ant</a:t>
             </a:r>
             <a:endParaRPr lang="en-US" sz="1300" dirty="0"/>
           </a:p>
@@ -34370,7 +37397,7 @@
                 <a:ea typeface="Trebuchet MS" pitchFamily="34" charset="-122"/>
                 <a:cs typeface="Trebuchet MS" pitchFamily="34" charset="-120"/>
               </a:rPr>
-              <a:t>information</a:t>
+              <a:t>informed</a:t>
             </a:r>
             <a:endParaRPr lang="en-US" sz="1200" dirty="0"/>
           </a:p>
@@ -34436,7 +37463,7 @@
                 <a:ea typeface="Trebuchet MS" pitchFamily="34" charset="-122"/>
                 <a:cs typeface="Trebuchet MS" pitchFamily="34" charset="-120"/>
               </a:rPr>
-              <a:t>informed</a:t>
+              <a:t>informing</a:t>
             </a:r>
             <a:endParaRPr lang="en-US" sz="1200" dirty="0"/>
           </a:p>
@@ -34502,7 +37529,7 @@
                 <a:ea typeface="Trebuchet MS" pitchFamily="34" charset="-122"/>
                 <a:cs typeface="Trebuchet MS" pitchFamily="34" charset="-120"/>
               </a:rPr>
-              <a:t>informing</a:t>
+              <a:t>information</a:t>
             </a:r>
             <a:endParaRPr lang="en-US" sz="1200" dirty="0"/>
           </a:p>
@@ -34634,7 +37661,7 @@
                 <a:ea typeface="Trebuchet MS" pitchFamily="34" charset="-122"/>
                 <a:cs typeface="Trebuchet MS" pitchFamily="34" charset="-120"/>
               </a:rPr>
-              <a:t>informer</a:t>
+              <a:t>informant</a:t>
             </a:r>
             <a:endParaRPr lang="en-US" sz="1200" dirty="0"/>
           </a:p>
@@ -34700,7 +37727,7 @@
                 <a:ea typeface="Trebuchet MS" pitchFamily="34" charset="-122"/>
                 <a:cs typeface="Trebuchet MS" pitchFamily="34" charset="-120"/>
               </a:rPr>
-              <a:t>misinform</a:t>
+              <a:t>uninformed</a:t>
             </a:r>
             <a:endParaRPr lang="en-US" sz="1200" dirty="0"/>
           </a:p>
@@ -34766,7 +37793,7 @@
                 <a:ea typeface="Trebuchet MS" pitchFamily="34" charset="-122"/>
                 <a:cs typeface="Trebuchet MS" pitchFamily="34" charset="-120"/>
               </a:rPr>
-              <a:t>uninformed</a:t>
+              <a:t>misinformed</a:t>
             </a:r>
             <a:endParaRPr lang="en-US" sz="1200" dirty="0"/>
           </a:p>
@@ -35058,7 +38085,7 @@
                 <a:ea typeface="Calibri" pitchFamily="34" charset="-122"/>
                 <a:cs typeface="Calibri" pitchFamily="34" charset="-120"/>
               </a:rPr>
-              <a:t>Word Labs  •  wordlabs.app  •  Root: 'inform' = to give shape or knowledge</a:t>
+              <a:t>Word Labs  •  wordlabs.app  •  Root: 'inform' = to give knowledge or shape</a:t>
             </a:r>
             <a:endParaRPr lang="en-US" sz="800" dirty="0"/>
           </a:p>
@@ -35222,7 +38249,7 @@
                 <a:ea typeface="Calibri" pitchFamily="34" charset="-122"/>
                 <a:cs typeface="Calibri" pitchFamily="34" charset="-120"/>
               </a:rPr>
-              <a:t>The core part of a word carrying its basic meaning. For example, 'inform' means 'to give shape or knowledge'.</a:t>
+              <a:t>The core part of a word carrying its basic meaning. For example, 'inform' means 'to give knowledge or shape'.</a:t>
             </a:r>
             <a:endParaRPr lang="en-US" sz="1350" dirty="0"/>
           </a:p>
@@ -35842,7 +38869,7 @@
                 <a:ea typeface="Calibri" pitchFamily="34" charset="-122"/>
                 <a:cs typeface="Calibri" pitchFamily="34" charset="-120"/>
               </a:rPr>
-              <a:t>Word Labs  •  wordlabs.app  •  Root: 'inform' = to give shape or knowledge</a:t>
+              <a:t>Word Labs  •  wordlabs.app  •  Root: 'inform' = to give knowledge or shape</a:t>
             </a:r>
             <a:endParaRPr lang="en-US" sz="800" dirty="0"/>
           </a:p>
@@ -35954,7 +38981,7 @@
                 <a:ea typeface="Calibri" pitchFamily="34" charset="-122"/>
                 <a:cs typeface="Calibri" pitchFamily="34" charset="-120"/>
               </a:rPr>
-              <a:t>1.  The root 'inform' comes from Latin and relates to giving knowledge or shape.</a:t>
+              <a:t>1.  The root 'inform' comes from Latin and means to give knowledge or shape.</a:t>
             </a:r>
             <a:endParaRPr lang="en-US" sz="1300" dirty="0"/>
           </a:p>
@@ -36093,7 +39120,7 @@
                 <a:ea typeface="Calibri" pitchFamily="34" charset="-122"/>
                 <a:cs typeface="Calibri" pitchFamily="34" charset="-120"/>
               </a:rPr>
-              <a:t>2.  The word 'informative' means to give wrong or false information.</a:t>
+              <a:t>2.  The word 'uninformed' means a person does not have enough knowledge about something.</a:t>
             </a:r>
             <a:endParaRPr lang="en-US" sz="1300" dirty="0"/>
           </a:p>
@@ -36116,11 +39143,11 @@
             </a:avLst>
           </a:prstGeom>
           <a:solidFill>
-            <a:srgbClr val="FEE2E2"/>
-          </a:solidFill>
-          <a:ln w="12700">
-            <a:solidFill>
-              <a:srgbClr val="DC2626"/>
+            <a:srgbClr val="DCFCE7"/>
+          </a:solidFill>
+          <a:ln w="12700">
+            <a:solidFill>
+              <a:srgbClr val="16A34A"/>
             </a:solidFill>
             <a:prstDash val="solid"/>
           </a:ln>
@@ -36153,13 +39180,13 @@
             <a:r>
               <a:rPr lang="en-US" sz="1100" b="1" dirty="0">
                 <a:solidFill>
-                  <a:srgbClr val="DC2626"/>
+                  <a:srgbClr val="16A34A"/>
                 </a:solidFill>
                 <a:latin typeface="Trebuchet MS" pitchFamily="34" charset="0"/>
                 <a:ea typeface="Trebuchet MS" pitchFamily="34" charset="-122"/>
                 <a:cs typeface="Trebuchet MS" pitchFamily="34" charset="-120"/>
               </a:rPr>
-              <a:t>FALSE</a:t>
+              <a:t>TRUE</a:t>
             </a:r>
             <a:endParaRPr lang="en-US" sz="1100" dirty="0"/>
           </a:p>
@@ -36232,7 +39259,7 @@
                 <a:ea typeface="Calibri" pitchFamily="34" charset="-122"/>
                 <a:cs typeface="Calibri" pitchFamily="34" charset="-120"/>
               </a:rPr>
-              <a:t>3.  Adding the prefix 'mis-' to 'inform' creates a word meaning to give incorrect information.</a:t>
+              <a:t>3.  The suffix '-ation' in 'information' means to do something again.</a:t>
             </a:r>
             <a:endParaRPr lang="en-US" sz="1300" dirty="0"/>
           </a:p>
@@ -36255,11 +39282,11 @@
             </a:avLst>
           </a:prstGeom>
           <a:solidFill>
-            <a:srgbClr val="DCFCE7"/>
-          </a:solidFill>
-          <a:ln w="12700">
-            <a:solidFill>
-              <a:srgbClr val="16A34A"/>
+            <a:srgbClr val="FEE2E2"/>
+          </a:solidFill>
+          <a:ln w="12700">
+            <a:solidFill>
+              <a:srgbClr val="DC2626"/>
             </a:solidFill>
             <a:prstDash val="solid"/>
           </a:ln>
@@ -36292,13 +39319,13 @@
             <a:r>
               <a:rPr lang="en-US" sz="1100" b="1" dirty="0">
                 <a:solidFill>
-                  <a:srgbClr val="16A34A"/>
+                  <a:srgbClr val="DC2626"/>
                 </a:solidFill>
                 <a:latin typeface="Trebuchet MS" pitchFamily="34" charset="0"/>
                 <a:ea typeface="Trebuchet MS" pitchFamily="34" charset="-122"/>
                 <a:cs typeface="Trebuchet MS" pitchFamily="34" charset="-120"/>
               </a:rPr>
-              <a:t>TRUE</a:t>
+              <a:t>FALSE</a:t>
             </a:r>
             <a:endParaRPr lang="en-US" sz="1100" dirty="0"/>
           </a:p>
@@ -36371,7 +39398,7 @@
                 <a:ea typeface="Calibri" pitchFamily="34" charset="-122"/>
                 <a:cs typeface="Calibri" pitchFamily="34" charset="-120"/>
               </a:rPr>
-              <a:t>4.  An 'informer' is someone who shares information or facts with others.</a:t>
+              <a:t>4.  Adding the prefix 'mis-' to 'inform' makes a word meaning to give wrong information.</a:t>
             </a:r>
             <a:endParaRPr lang="en-US" sz="1300" dirty="0"/>
           </a:p>
@@ -36510,7 +39537,7 @@
                 <a:ea typeface="Calibri" pitchFamily="34" charset="-122"/>
                 <a:cs typeface="Calibri" pitchFamily="34" charset="-120"/>
               </a:rPr>
-              <a:t>5.  The suffix '-ation' changes 'inform' into a verb.</a:t>
+              <a:t>5.  The word 'informative' means to keep something secret and hidden.</a:t>
             </a:r>
             <a:endParaRPr lang="en-US" sz="1300" dirty="0"/>
           </a:p>
@@ -36868,7 +39895,7 @@
                 <a:ea typeface="Calibri" pitchFamily="34" charset="-122"/>
                 <a:cs typeface="Calibri" pitchFamily="34" charset="-120"/>
               </a:rPr>
-              <a:t>Word Labs  •  wordlabs.app  •  Root: 'inform' = to give shape or knowledge</a:t>
+              <a:t>Word Labs  •  wordlabs.app  •  Root: 'inform' = to give knowledge or shape</a:t>
             </a:r>
             <a:endParaRPr lang="en-US" sz="800" dirty="0"/>
           </a:p>
@@ -37005,7 +40032,7 @@
                 <a:ea typeface="Trebuchet MS" pitchFamily="34" charset="-122"/>
                 <a:cs typeface="Trebuchet MS" pitchFamily="34" charset="-120"/>
               </a:rPr>
-              <a:t>to give shape or knowledge</a:t>
+              <a:t>to give knowledge or shape</a:t>
             </a:r>
             <a:endParaRPr lang="en-US" sz="2000" dirty="0"/>
           </a:p>
@@ -37215,7 +40242,7 @@
                 <a:ea typeface="Trebuchet MS" pitchFamily="34" charset="-122"/>
                 <a:cs typeface="Trebuchet MS" pitchFamily="34" charset="-120"/>
               </a:rPr>
-              <a:t>information</a:t>
+              <a:t>informed</a:t>
             </a:r>
             <a:endParaRPr lang="en-US" sz="1300" dirty="0"/>
           </a:p>
@@ -37281,7 +40308,7 @@
                 <a:ea typeface="Trebuchet MS" pitchFamily="34" charset="-122"/>
                 <a:cs typeface="Trebuchet MS" pitchFamily="34" charset="-120"/>
               </a:rPr>
-              <a:t>informed</a:t>
+              <a:t>informing</a:t>
             </a:r>
             <a:endParaRPr lang="en-US" sz="1300" dirty="0"/>
           </a:p>
@@ -37347,7 +40374,7 @@
                 <a:ea typeface="Trebuchet MS" pitchFamily="34" charset="-122"/>
                 <a:cs typeface="Trebuchet MS" pitchFamily="34" charset="-120"/>
               </a:rPr>
-              <a:t>informing</a:t>
+              <a:t>information</a:t>
             </a:r>
             <a:endParaRPr lang="en-US" sz="1300" dirty="0"/>
           </a:p>
@@ -37479,7 +40506,7 @@
                 <a:ea typeface="Trebuchet MS" pitchFamily="34" charset="-122"/>
                 <a:cs typeface="Trebuchet MS" pitchFamily="34" charset="-120"/>
               </a:rPr>
-              <a:t>informer</a:t>
+              <a:t>informant</a:t>
             </a:r>
             <a:endParaRPr lang="en-US" sz="1300" dirty="0"/>
           </a:p>
@@ -37545,7 +40572,7 @@
                 <a:ea typeface="Trebuchet MS" pitchFamily="34" charset="-122"/>
                 <a:cs typeface="Trebuchet MS" pitchFamily="34" charset="-120"/>
               </a:rPr>
-              <a:t>misinform</a:t>
+              <a:t>uninformed</a:t>
             </a:r>
             <a:endParaRPr lang="en-US" sz="1300" dirty="0"/>
           </a:p>
@@ -37837,7 +40864,7 @@
                 <a:ea typeface="Calibri" pitchFamily="34" charset="-122"/>
                 <a:cs typeface="Calibri" pitchFamily="34" charset="-120"/>
               </a:rPr>
-              <a:t>Word Labs  •  wordlabs.app  •  Root: 'inform' = to give shape or knowledge</a:t>
+              <a:t>Word Labs  •  wordlabs.app  •  Root: 'inform' = to give knowledge or shape</a:t>
             </a:r>
             <a:endParaRPr lang="en-US" sz="800" dirty="0"/>
           </a:p>
@@ -38138,7 +41165,7 @@
                 <a:ea typeface="Trebuchet MS" pitchFamily="34" charset="-122"/>
                 <a:cs typeface="Trebuchet MS" pitchFamily="34" charset="-120"/>
               </a:rPr>
-              <a:t>un-</a:t>
+              <a:t>re-</a:t>
             </a:r>
             <a:endParaRPr lang="en-US" sz="1300" dirty="0"/>
           </a:p>
@@ -38266,7 +41293,7 @@
                 <a:ea typeface="Trebuchet MS" pitchFamily="34" charset="-122"/>
                 <a:cs typeface="Trebuchet MS" pitchFamily="34" charset="-120"/>
               </a:rPr>
-              <a:t>-ation</a:t>
+              <a:t>-ed</a:t>
             </a:r>
             <a:endParaRPr lang="en-US" sz="1300" dirty="0"/>
           </a:p>
@@ -38419,7 +41446,7 @@
                 <a:ea typeface="Trebuchet MS" pitchFamily="34" charset="-122"/>
                 <a:cs typeface="Trebuchet MS" pitchFamily="34" charset="-120"/>
               </a:rPr>
-              <a:t>-ed</a:t>
+              <a:t>-ing</a:t>
             </a:r>
             <a:endParaRPr lang="en-US" sz="1300" dirty="0"/>
           </a:p>
@@ -38572,7 +41599,7 @@
                 <a:ea typeface="Trebuchet MS" pitchFamily="34" charset="-122"/>
                 <a:cs typeface="Trebuchet MS" pitchFamily="34" charset="-120"/>
               </a:rPr>
-              <a:t>-ing</a:t>
+              <a:t>-ation</a:t>
             </a:r>
             <a:endParaRPr lang="en-US" sz="1300" dirty="0"/>
           </a:p>
@@ -38636,7 +41663,7 @@
                 <a:ea typeface="Trebuchet MS" pitchFamily="34" charset="-122"/>
                 <a:cs typeface="Trebuchet MS" pitchFamily="34" charset="-120"/>
               </a:rPr>
-              <a:t>re-</a:t>
+              <a:t>un-</a:t>
             </a:r>
             <a:endParaRPr lang="en-US" sz="1300" dirty="0"/>
           </a:p>
@@ -38725,7 +41752,7 @@
                 <a:ea typeface="Trebuchet MS" pitchFamily="34" charset="-122"/>
                 <a:cs typeface="Trebuchet MS" pitchFamily="34" charset="-120"/>
               </a:rPr>
-              <a:t>-er</a:t>
+              <a:t>-ative</a:t>
             </a:r>
             <a:endParaRPr lang="en-US" sz="1300" dirty="0"/>
           </a:p>
@@ -38789,7 +41816,7 @@
                 <a:ea typeface="Trebuchet MS" pitchFamily="34" charset="-122"/>
                 <a:cs typeface="Trebuchet MS" pitchFamily="34" charset="-120"/>
               </a:rPr>
-              <a:t>mal-</a:t>
+              <a:t>counter-</a:t>
             </a:r>
             <a:endParaRPr lang="en-US" sz="1300" dirty="0"/>
           </a:p>
@@ -38878,7 +41905,7 @@
                 <a:ea typeface="Trebuchet MS" pitchFamily="34" charset="-122"/>
                 <a:cs typeface="Trebuchet MS" pitchFamily="34" charset="-120"/>
               </a:rPr>
-              <a:t>-ative</a:t>
+              <a:t>-ant</a:t>
             </a:r>
             <a:endParaRPr lang="en-US" sz="1300" dirty="0"/>
           </a:p>
@@ -38990,7 +42017,7 @@
                 <a:ea typeface="Trebuchet MS" pitchFamily="34" charset="-122"/>
                 <a:cs typeface="Trebuchet MS" pitchFamily="34" charset="-120"/>
               </a:rPr>
-              <a:t>un-</a:t>
+              <a:t>re-</a:t>
             </a:r>
             <a:endParaRPr lang="en-US" sz="1300" dirty="0"/>
           </a:p>
@@ -39156,7 +42183,7 @@
         <p:spPr>
           <a:xfrm>
             <a:off x="4617720" y="4178808"/>
-            <a:ext cx="1243584" cy="420624"/>
+            <a:ext cx="822960" cy="420624"/>
           </a:xfrm>
           <a:prstGeom prst="rect">
             <a:avLst>
@@ -39190,7 +42217,7 @@
         <p:spPr>
           <a:xfrm>
             <a:off x="4617720" y="4178808"/>
-            <a:ext cx="1243584" cy="420624"/>
+            <a:ext cx="822960" cy="420624"/>
           </a:xfrm>
           <a:prstGeom prst="rect">
             <a:avLst/>
@@ -39214,7 +42241,7 @@
                 <a:ea typeface="Trebuchet MS" pitchFamily="34" charset="-122"/>
                 <a:cs typeface="Trebuchet MS" pitchFamily="34" charset="-120"/>
               </a:rPr>
-              <a:t>-ation</a:t>
+              <a:t>-ed</a:t>
             </a:r>
             <a:endParaRPr lang="en-US" sz="1300" dirty="0"/>
           </a:p>
@@ -39228,7 +42255,7 @@
         </p:nvSpPr>
         <p:spPr>
           <a:xfrm>
-            <a:off x="5934456" y="4178808"/>
+            <a:off x="5513832" y="4178808"/>
             <a:ext cx="365760" cy="420624"/>
           </a:xfrm>
           <a:prstGeom prst="rect">
@@ -39267,7 +42294,7 @@
         </p:nvSpPr>
         <p:spPr>
           <a:xfrm>
-            <a:off x="6345936" y="4178808"/>
+            <a:off x="5925312" y="4178808"/>
             <a:ext cx="2194560" cy="420624"/>
           </a:xfrm>
           <a:prstGeom prst="rect">
@@ -39294,7 +42321,7 @@
         </p:nvSpPr>
         <p:spPr>
           <a:xfrm>
-            <a:off x="6345936" y="4178808"/>
+            <a:off x="5925312" y="4178808"/>
             <a:ext cx="2194560" cy="420624"/>
           </a:xfrm>
           <a:prstGeom prst="rect">
@@ -39611,7 +42638,7 @@
                 <a:ea typeface="Calibri" pitchFamily="34" charset="-122"/>
                 <a:cs typeface="Calibri" pitchFamily="34" charset="-120"/>
               </a:rPr>
-              <a:t>Word Labs  •  wordlabs.app  •  Root: 'inform' = to give shape or knowledge</a:t>
+              <a:t>Word Labs  •  wordlabs.app  •  Root: 'inform' = to give knowledge or shape</a:t>
             </a:r>
             <a:endParaRPr lang="en-US" sz="800" dirty="0"/>
           </a:p>
@@ -39789,7 +42816,7 @@
                 <a:ea typeface="Calibri" pitchFamily="34" charset="-122"/>
                 <a:cs typeface="Calibri" pitchFamily="34" charset="-120"/>
               </a:rPr>
-              <a:t>To give someone wrong or incorrect information by mistake or on purpose.</a:t>
+              <a:t>Not knowing enough facts about something; not well informed.</a:t>
             </a:r>
             <a:endParaRPr lang="en-US" sz="1200" dirty="0"/>
           </a:p>
@@ -39862,7 +42889,7 @@
                 <a:ea typeface="Trebuchet MS" pitchFamily="34" charset="-122"/>
                 <a:cs typeface="Trebuchet MS" pitchFamily="34" charset="-120"/>
               </a:rPr>
-              <a:t>information</a:t>
+              <a:t>informed</a:t>
             </a:r>
             <a:endParaRPr lang="en-US" sz="1200" dirty="0"/>
           </a:p>
@@ -39928,7 +42955,7 @@
                 <a:ea typeface="Calibri" pitchFamily="34" charset="-122"/>
                 <a:cs typeface="Calibri" pitchFamily="34" charset="-120"/>
               </a:rPr>
-              <a:t>To tell someone about something or give them facts.</a:t>
+              <a:t>To tell someone about something so they know about it.</a:t>
             </a:r>
             <a:endParaRPr lang="en-US" sz="1200" dirty="0"/>
           </a:p>
@@ -40001,7 +43028,7 @@
                 <a:ea typeface="Trebuchet MS" pitchFamily="34" charset="-122"/>
                 <a:cs typeface="Trebuchet MS" pitchFamily="34" charset="-120"/>
               </a:rPr>
-              <a:t>informed</a:t>
+              <a:t>informing</a:t>
             </a:r>
             <a:endParaRPr lang="en-US" sz="1200" dirty="0"/>
           </a:p>
@@ -40067,7 +43094,7 @@
                 <a:ea typeface="Calibri" pitchFamily="34" charset="-122"/>
                 <a:cs typeface="Calibri" pitchFamily="34" charset="-120"/>
               </a:rPr>
-              <a:t>The act of telling someone about something right now.</a:t>
+              <a:t>Facts or knowledge that you learn or are told about a topic.</a:t>
             </a:r>
             <a:endParaRPr lang="en-US" sz="1200" dirty="0"/>
           </a:p>
@@ -40140,7 +43167,7 @@
                 <a:ea typeface="Trebuchet MS" pitchFamily="34" charset="-122"/>
                 <a:cs typeface="Trebuchet MS" pitchFamily="34" charset="-120"/>
               </a:rPr>
-              <a:t>informing</a:t>
+              <a:t>information</a:t>
             </a:r>
             <a:endParaRPr lang="en-US" sz="1200" dirty="0"/>
           </a:p>
@@ -40206,7 +43233,7 @@
                 <a:ea typeface="Calibri" pitchFamily="34" charset="-122"/>
                 <a:cs typeface="Calibri" pitchFamily="34" charset="-120"/>
               </a:rPr>
-              <a:t>Something that gives you lots of useful facts or knowledge.</a:t>
+              <a:t>Something that gives you lots of useful facts, like a good book or talk.</a:t>
             </a:r>
             <a:endParaRPr lang="en-US" sz="1200" dirty="0"/>
           </a:p>
@@ -40345,7 +43372,7 @@
                 <a:ea typeface="Calibri" pitchFamily="34" charset="-122"/>
                 <a:cs typeface="Calibri" pitchFamily="34" charset="-120"/>
               </a:rPr>
-              <a:t>A person who tells others about something, often secretly to someone in charge.</a:t>
+              <a:t>A person who gives information, often secretly, to help others.</a:t>
             </a:r>
             <a:endParaRPr lang="en-US" sz="1200" dirty="0"/>
           </a:p>
@@ -40418,7 +43445,7 @@
                 <a:ea typeface="Trebuchet MS" pitchFamily="34" charset="-122"/>
                 <a:cs typeface="Trebuchet MS" pitchFamily="34" charset="-120"/>
               </a:rPr>
-              <a:t>informer</a:t>
+              <a:t>informant</a:t>
             </a:r>
             <a:endParaRPr lang="en-US" sz="1200" dirty="0"/>
           </a:p>
@@ -40484,7 +43511,7 @@
                 <a:ea typeface="Calibri" pitchFamily="34" charset="-122"/>
                 <a:cs typeface="Calibri" pitchFamily="34" charset="-120"/>
               </a:rPr>
-              <a:t>Knowing the facts about something; having been told about it.</a:t>
+              <a:t>The act of telling someone about something right now.</a:t>
             </a:r>
             <a:endParaRPr lang="en-US" sz="1200" dirty="0"/>
           </a:p>
@@ -40557,7 +43584,7 @@
                 <a:ea typeface="Trebuchet MS" pitchFamily="34" charset="-122"/>
                 <a:cs typeface="Trebuchet MS" pitchFamily="34" charset="-120"/>
               </a:rPr>
-              <a:t>misinform</a:t>
+              <a:t>uninformed</a:t>
             </a:r>
             <a:endParaRPr lang="en-US" sz="1200" dirty="0"/>
           </a:p>
@@ -40623,7 +43650,7 @@
                 <a:ea typeface="Calibri" pitchFamily="34" charset="-122"/>
                 <a:cs typeface="Calibri" pitchFamily="34" charset="-120"/>
               </a:rPr>
-              <a:t>Facts or knowledge that you learn or share with others.</a:t>
+              <a:t>Having been told important facts or details about something.</a:t>
             </a:r>
             <a:endParaRPr lang="en-US" sz="1200" dirty="0"/>
           </a:p>
@@ -40915,7 +43942,7 @@
                 <a:ea typeface="Calibri" pitchFamily="34" charset="-122"/>
                 <a:cs typeface="Calibri" pitchFamily="34" charset="-120"/>
               </a:rPr>
-              <a:t>Word Labs  •  wordlabs.app  •  Root: 'inform' = to give shape or knowledge</a:t>
+              <a:t>Word Labs  •  wordlabs.app  •  Root: 'inform' = to give knowledge or shape</a:t>
             </a:r>
             <a:endParaRPr lang="en-US" sz="800" dirty="0"/>
           </a:p>
@@ -41118,7 +44145,7 @@
                 <a:ea typeface="Calibri" pitchFamily="34" charset="-122"/>
                 <a:cs typeface="Calibri" pitchFamily="34" charset="-120"/>
               </a:rPr>
-              <a:t>The teacher asked students to use reliable sources so they could write an informative report about endangered animals.</a:t>
+              <a:t>The teacher asked the students to inform her if they needed help with the activity.</a:t>
             </a:r>
             <a:endParaRPr lang="en-US" sz="1500" dirty="0"/>
           </a:p>
@@ -41282,7 +44309,7 @@
                 <a:ea typeface="Calibri" pitchFamily="34" charset="-122"/>
                 <a:cs typeface="Calibri" pitchFamily="34" charset="-120"/>
               </a:rPr>
-              <a:t>The council will inform all residents about the new recycling rules before they start.</a:t>
+              <a:t>The information on the poster helped us understand how to stay safe online.</a:t>
             </a:r>
             <a:endParaRPr lang="en-US" sz="1500" dirty="0"/>
           </a:p>
@@ -41446,7 +44473,7 @@
                 <a:ea typeface="Calibri" pitchFamily="34" charset="-122"/>
                 <a:cs typeface="Calibri" pitchFamily="34" charset="-120"/>
               </a:rPr>
-              <a:t>It is important not to misinform your classmates when you share facts during a presentation.</a:t>
+              <a:t>Reading the newspaper every day can help you become a well-informed citizen.</a:t>
             </a:r>
             <a:endParaRPr lang="en-US" sz="1500" dirty="0"/>
           </a:p>

--- a/output/wordlabs-inform-3day.pptx
+++ b/output/wordlabs-inform-3day.pptx
@@ -16343,8 +16343,8 @@
         </p:nvSpPr>
         <p:spPr>
           <a:xfrm>
-            <a:off x="2023872" y="4169664"/>
-            <a:ext cx="685800" cy="475488"/>
+            <a:off x="1951330" y="4169664"/>
+            <a:ext cx="676656" cy="475488"/>
           </a:xfrm>
           <a:prstGeom prst="rect">
             <a:avLst>
@@ -16370,8 +16370,8 @@
         </p:nvSpPr>
         <p:spPr>
           <a:xfrm>
-            <a:off x="2023872" y="4169664"/>
-            <a:ext cx="685800" cy="475488"/>
+            <a:off x="1951330" y="4169664"/>
+            <a:ext cx="676656" cy="475488"/>
           </a:xfrm>
           <a:prstGeom prst="rect">
             <a:avLst/>
@@ -16409,8 +16409,8 @@
         </p:nvSpPr>
         <p:spPr>
           <a:xfrm>
-            <a:off x="2831592" y="4169664"/>
-            <a:ext cx="685800" cy="475488"/>
+            <a:off x="2677363" y="4169664"/>
+            <a:ext cx="676656" cy="475488"/>
           </a:xfrm>
           <a:prstGeom prst="rect">
             <a:avLst>
@@ -16436,8 +16436,8 @@
         </p:nvSpPr>
         <p:spPr>
           <a:xfrm>
-            <a:off x="2831592" y="4169664"/>
-            <a:ext cx="685800" cy="475488"/>
+            <a:off x="2677363" y="4169664"/>
+            <a:ext cx="676656" cy="475488"/>
           </a:xfrm>
           <a:prstGeom prst="rect">
             <a:avLst/>
@@ -16475,8 +16475,8 @@
         </p:nvSpPr>
         <p:spPr>
           <a:xfrm>
-            <a:off x="3639312" y="4169664"/>
-            <a:ext cx="685800" cy="475488"/>
+            <a:off x="3403397" y="4169664"/>
+            <a:ext cx="676656" cy="475488"/>
           </a:xfrm>
           <a:prstGeom prst="rect">
             <a:avLst>
@@ -16502,8 +16502,8 @@
         </p:nvSpPr>
         <p:spPr>
           <a:xfrm>
-            <a:off x="3639312" y="4169664"/>
-            <a:ext cx="685800" cy="475488"/>
+            <a:off x="3403397" y="4169664"/>
+            <a:ext cx="676656" cy="475488"/>
           </a:xfrm>
           <a:prstGeom prst="rect">
             <a:avLst/>
@@ -16541,8 +16541,8 @@
         </p:nvSpPr>
         <p:spPr>
           <a:xfrm>
-            <a:off x="4447032" y="4169664"/>
-            <a:ext cx="685800" cy="475488"/>
+            <a:off x="4129430" y="4169664"/>
+            <a:ext cx="676656" cy="475488"/>
           </a:xfrm>
           <a:prstGeom prst="rect">
             <a:avLst>
@@ -16568,8 +16568,8 @@
         </p:nvSpPr>
         <p:spPr>
           <a:xfrm>
-            <a:off x="4447032" y="4169664"/>
-            <a:ext cx="685800" cy="475488"/>
+            <a:off x="4129430" y="4169664"/>
+            <a:ext cx="676656" cy="475488"/>
           </a:xfrm>
           <a:prstGeom prst="rect">
             <a:avLst/>
@@ -16607,8 +16607,8 @@
         </p:nvSpPr>
         <p:spPr>
           <a:xfrm>
-            <a:off x="5254752" y="4169664"/>
-            <a:ext cx="685800" cy="475488"/>
+            <a:off x="4855464" y="4169664"/>
+            <a:ext cx="676656" cy="475488"/>
           </a:xfrm>
           <a:prstGeom prst="rect">
             <a:avLst>
@@ -16634,8 +16634,8 @@
         </p:nvSpPr>
         <p:spPr>
           <a:xfrm>
-            <a:off x="5254752" y="4169664"/>
-            <a:ext cx="685800" cy="475488"/>
+            <a:off x="4855464" y="4169664"/>
+            <a:ext cx="676656" cy="475488"/>
           </a:xfrm>
           <a:prstGeom prst="rect">
             <a:avLst/>
@@ -16673,8 +16673,8 @@
         </p:nvSpPr>
         <p:spPr>
           <a:xfrm>
-            <a:off x="6062472" y="4169664"/>
-            <a:ext cx="685800" cy="475488"/>
+            <a:off x="5581498" y="4169664"/>
+            <a:ext cx="676656" cy="475488"/>
           </a:xfrm>
           <a:prstGeom prst="rect">
             <a:avLst>
@@ -16700,8 +16700,8 @@
         </p:nvSpPr>
         <p:spPr>
           <a:xfrm>
-            <a:off x="6062472" y="4169664"/>
-            <a:ext cx="685800" cy="475488"/>
+            <a:off x="5581498" y="4169664"/>
+            <a:ext cx="676656" cy="475488"/>
           </a:xfrm>
           <a:prstGeom prst="rect">
             <a:avLst/>
@@ -16739,8 +16739,8 @@
         </p:nvSpPr>
         <p:spPr>
           <a:xfrm>
-            <a:off x="6870192" y="4169664"/>
-            <a:ext cx="685800" cy="475488"/>
+            <a:off x="6307531" y="4169664"/>
+            <a:ext cx="676656" cy="475488"/>
           </a:xfrm>
           <a:prstGeom prst="rect">
             <a:avLst>
@@ -16766,8 +16766,8 @@
         </p:nvSpPr>
         <p:spPr>
           <a:xfrm>
-            <a:off x="6870192" y="4169664"/>
-            <a:ext cx="685800" cy="475488"/>
+            <a:off x="6307531" y="4169664"/>
+            <a:ext cx="676656" cy="475488"/>
           </a:xfrm>
           <a:prstGeom prst="rect">
             <a:avLst/>
@@ -16805,8 +16805,8 @@
         </p:nvSpPr>
         <p:spPr>
           <a:xfrm>
-            <a:off x="7677912" y="4169664"/>
-            <a:ext cx="685800" cy="475488"/>
+            <a:off x="7033565" y="4169664"/>
+            <a:ext cx="676656" cy="475488"/>
           </a:xfrm>
           <a:prstGeom prst="rect">
             <a:avLst>
@@ -16832,8 +16832,74 @@
         </p:nvSpPr>
         <p:spPr>
           <a:xfrm>
-            <a:off x="7677912" y="4169664"/>
-            <a:ext cx="685800" cy="475488"/>
+            <a:off x="7033565" y="4169664"/>
+            <a:ext cx="676656" cy="475488"/>
+          </a:xfrm>
+          <a:prstGeom prst="rect">
+            <a:avLst/>
+          </a:prstGeom>
+          <a:noFill/>
+          <a:ln/>
+        </p:spPr>
+        <p:txBody>
+          <a:bodyPr wrap="square" lIns="0" tIns="0" rIns="0" bIns="0" rtlCol="0" anchor="ctr"/>
+          <a:lstStyle/>
+          <a:p>
+            <a:pPr algn="ctr" indent="0" marL="0">
+              <a:buNone/>
+            </a:pPr>
+            <a:r>
+              <a:rPr lang="en-US" sz="900" b="1" dirty="0">
+                <a:solidFill>
+                  <a:srgbClr val="9D174D"/>
+                </a:solidFill>
+                <a:latin typeface="Trebuchet MS" pitchFamily="34" charset="0"/>
+                <a:ea typeface="Trebuchet MS" pitchFamily="34" charset="-122"/>
+                <a:cs typeface="Trebuchet MS" pitchFamily="34" charset="-120"/>
+              </a:rPr>
+              <a:t>e</a:t>
+            </a:r>
+            <a:endParaRPr lang="en-US" sz="900" dirty="0"/>
+          </a:p>
+        </p:txBody>
+      </p:sp>
+      <p:sp>
+        <p:nvSpPr>
+          <p:cNvPr id="55" name="Shape 53"/>
+          <p:cNvSpPr/>
+          <p:nvPr/>
+        </p:nvSpPr>
+        <p:spPr>
+          <a:xfrm>
+            <a:off x="7759598" y="4169664"/>
+            <a:ext cx="676656" cy="475488"/>
+          </a:xfrm>
+          <a:prstGeom prst="rect">
+            <a:avLst>
+              <a:gd name="adj" fmla="val 7692"/>
+            </a:avLst>
+          </a:prstGeom>
+          <a:solidFill>
+            <a:srgbClr val="FFFFFF"/>
+          </a:solidFill>
+          <a:ln w="12700">
+            <a:solidFill>
+              <a:srgbClr val="DB2777"/>
+            </a:solidFill>
+            <a:prstDash val="solid"/>
+          </a:ln>
+        </p:spPr>
+      </p:sp>
+      <p:sp>
+        <p:nvSpPr>
+          <p:cNvPr id="56" name="Text 54"/>
+          <p:cNvSpPr/>
+          <p:nvPr/>
+        </p:nvSpPr>
+        <p:spPr>
+          <a:xfrm>
+            <a:off x="7759598" y="4169664"/>
+            <a:ext cx="676656" cy="475488"/>
           </a:xfrm>
           <a:prstGeom prst="rect">
             <a:avLst/>
@@ -39120,7 +39186,7 @@
                 <a:ea typeface="Calibri" pitchFamily="34" charset="-122"/>
                 <a:cs typeface="Calibri" pitchFamily="34" charset="-120"/>
               </a:rPr>
-              <a:t>2.  The word 'uninformed' means a person does not have enough knowledge about something.</a:t>
+              <a:t>2.  Adding the prefix 'mis-' to 'inform' makes a word meaning to give wrong information.</a:t>
             </a:r>
             <a:endParaRPr lang="en-US" sz="1300" dirty="0"/>
           </a:p>
@@ -39398,7 +39464,7 @@
                 <a:ea typeface="Calibri" pitchFamily="34" charset="-122"/>
                 <a:cs typeface="Calibri" pitchFamily="34" charset="-120"/>
               </a:rPr>
-              <a:t>4.  Adding the prefix 'mis-' to 'inform' makes a word meaning to give wrong information.</a:t>
+              <a:t>4.  The word 'informative' means to keep something secret and hidden.</a:t>
             </a:r>
             <a:endParaRPr lang="en-US" sz="1300" dirty="0"/>
           </a:p>
@@ -39421,11 +39487,11 @@
             </a:avLst>
           </a:prstGeom>
           <a:solidFill>
-            <a:srgbClr val="DCFCE7"/>
-          </a:solidFill>
-          <a:ln w="12700">
-            <a:solidFill>
-              <a:srgbClr val="16A34A"/>
+            <a:srgbClr val="FEE2E2"/>
+          </a:solidFill>
+          <a:ln w="12700">
+            <a:solidFill>
+              <a:srgbClr val="DC2626"/>
             </a:solidFill>
             <a:prstDash val="solid"/>
           </a:ln>
@@ -39458,13 +39524,13 @@
             <a:r>
               <a:rPr lang="en-US" sz="1100" b="1" dirty="0">
                 <a:solidFill>
-                  <a:srgbClr val="16A34A"/>
+                  <a:srgbClr val="DC2626"/>
                 </a:solidFill>
                 <a:latin typeface="Trebuchet MS" pitchFamily="34" charset="0"/>
                 <a:ea typeface="Trebuchet MS" pitchFamily="34" charset="-122"/>
                 <a:cs typeface="Trebuchet MS" pitchFamily="34" charset="-120"/>
               </a:rPr>
-              <a:t>TRUE</a:t>
+              <a:t>FALSE</a:t>
             </a:r>
             <a:endParaRPr lang="en-US" sz="1100" dirty="0"/>
           </a:p>
@@ -39537,7 +39603,7 @@
                 <a:ea typeface="Calibri" pitchFamily="34" charset="-122"/>
                 <a:cs typeface="Calibri" pitchFamily="34" charset="-120"/>
               </a:rPr>
-              <a:t>5.  The word 'informative' means to keep something secret and hidden.</a:t>
+              <a:t>5.  The word 'uninformed' means a person does not have enough knowledge about something.</a:t>
             </a:r>
             <a:endParaRPr lang="en-US" sz="1300" dirty="0"/>
           </a:p>
@@ -39560,11 +39626,11 @@
             </a:avLst>
           </a:prstGeom>
           <a:solidFill>
-            <a:srgbClr val="FEE2E2"/>
-          </a:solidFill>
-          <a:ln w="12700">
-            <a:solidFill>
-              <a:srgbClr val="DC2626"/>
+            <a:srgbClr val="DCFCE7"/>
+          </a:solidFill>
+          <a:ln w="12700">
+            <a:solidFill>
+              <a:srgbClr val="16A34A"/>
             </a:solidFill>
             <a:prstDash val="solid"/>
           </a:ln>
@@ -39597,13 +39663,13 @@
             <a:r>
               <a:rPr lang="en-US" sz="1100" b="1" dirty="0">
                 <a:solidFill>
-                  <a:srgbClr val="DC2626"/>
+                  <a:srgbClr val="16A34A"/>
                 </a:solidFill>
                 <a:latin typeface="Trebuchet MS" pitchFamily="34" charset="0"/>
                 <a:ea typeface="Trebuchet MS" pitchFamily="34" charset="-122"/>
                 <a:cs typeface="Trebuchet MS" pitchFamily="34" charset="-120"/>
               </a:rPr>
-              <a:t>FALSE</a:t>
+              <a:t>TRUE</a:t>
             </a:r>
             <a:endParaRPr lang="en-US" sz="1100" dirty="0"/>
           </a:p>
